--- a/Task_4/Presentation_Task4.pptx
+++ b/Task_4/Presentation_Task4.pptx
@@ -275,7 +275,7 @@
           <a:p>
             <a:fld id="{75AB4CA9-CCE6-4DE5-84AD-E1F7B6CB5CBB}" type="datetimeFigureOut">
               <a:rPr lang="de-DE" smtClean="0"/>
-              <a:t>19.07.2026</a:t>
+              <a:t>21.07.2026</a:t>
             </a:fld>
             <a:endParaRPr lang="de-DE"/>
           </a:p>
@@ -452,7 +452,7 @@
           <a:p>
             <a:fld id="{52D5829F-2F94-0B44-A96D-AE852A87AC61}" type="datetimeFigureOut">
               <a:rPr lang="de-DE" smtClean="0"/>
-              <a:t>19.07.2026</a:t>
+              <a:t>21.07.2026</a:t>
             </a:fld>
             <a:endParaRPr lang="de-DE"/>
           </a:p>
@@ -2679,6 +2679,59 @@
               <a:t>Victor</a:t>
             </a:r>
           </a:p>
+          <a:p>
+            <a:r>
+              <a:rPr lang="de-DE" sz="1200" b="0" kern="1200" dirty="0">
+                <a:solidFill>
+                  <a:schemeClr val="tx1"/>
+                </a:solidFill>
+                <a:effectLst/>
+                <a:latin typeface="+mn-lt"/>
+                <a:ea typeface="+mn-ea"/>
+                <a:cs typeface="+mn-cs"/>
+              </a:rPr>
+              <a:t>Zuerst stellen wir Daten und Versuchsaufbau vor. Danach erklären wir Modell und</a:t>
+            </a:r>
+          </a:p>
+          <a:p>
+            <a:r>
+              <a:rPr lang="de-DE" sz="1200" b="0" kern="1200" dirty="0">
+                <a:solidFill>
+                  <a:schemeClr val="tx1"/>
+                </a:solidFill>
+                <a:effectLst/>
+                <a:latin typeface="+mn-lt"/>
+                <a:ea typeface="+mn-ea"/>
+                <a:cs typeface="+mn-cs"/>
+              </a:rPr>
+              <a:t>Metriken, vergleichen beide Vorverarbeitungen und schließen mit der fachlichen</a:t>
+            </a:r>
+          </a:p>
+          <a:p>
+            <a:r>
+              <a:rPr lang="de-DE" sz="1200" b="0" kern="1200" dirty="0">
+                <a:solidFill>
+                  <a:schemeClr val="tx1"/>
+                </a:solidFill>
+                <a:effectLst/>
+                <a:latin typeface="+mn-lt"/>
+                <a:ea typeface="+mn-ea"/>
+                <a:cs typeface="+mn-cs"/>
+              </a:rPr>
+              <a:t>Einordnung. Der Vortrag ist auf etwa neun Minuten und zehn Sekunden ausgelegt.</a:t>
+            </a:r>
+          </a:p>
+          <a:p>
+            <a:endParaRPr lang="de-DE" sz="1200" b="0" kern="1200" dirty="0">
+              <a:solidFill>
+                <a:schemeClr val="tx1"/>
+              </a:solidFill>
+              <a:effectLst/>
+              <a:latin typeface="+mn-lt"/>
+              <a:ea typeface="+mn-ea"/>
+              <a:cs typeface="+mn-cs"/>
+            </a:endParaRPr>
+          </a:p>
         </p:txBody>
       </p:sp>
       <p:sp>
@@ -2914,23 +2967,6 @@
             </a:r>
           </a:p>
           <a:p>
-            <a:pPr marL="0" marR="0" lvl="0" indent="0" algn="l" defTabSz="914400" rtl="0" eaLnBrk="1" fontAlgn="auto" latinLnBrk="0" hangingPunct="1">
-              <a:lnSpc>
-                <a:spcPct val="100000"/>
-              </a:lnSpc>
-              <a:spcBef>
-                <a:spcPts val="0"/>
-              </a:spcBef>
-              <a:spcAft>
-                <a:spcPts val="0"/>
-              </a:spcAft>
-              <a:buClrTx/>
-              <a:buSzTx/>
-              <a:buFontTx/>
-              <a:buNone/>
-              <a:tabLst/>
-              <a:defRPr/>
-            </a:pPr>
             <a:r>
               <a:rPr lang="de-DE" sz="1200" b="0" kern="1200" dirty="0">
                 <a:solidFill>
@@ -2941,7 +2977,7 @@
                 <a:ea typeface="+mn-ea"/>
                 <a:cs typeface="+mn-cs"/>
               </a:rPr>
-              <a:t>In Aufgabe 3 geht es darum, die Daten aus Aufgabe 2 nicht nur visuell zu untersuchen, sondern automatisch zu klassifizieren. Das Ziel ist eine binäre Entscheidung: Ist ein Signal einem guten oder einem beschädigten Zahnrad zuzuordnen? Dafür verwenden wir ein MLP und bewerten das Modell erst am Ende auf einem separaten Testsatz.</a:t>
+              <a:t>Die Feature-Extraktion wird immer vor der Mittelung ausgeführt. Dadurch mitteln wir Merkmalsvektoren und nicht Rohsignale. Die Mittelung verändert nur Z01 und Z04; die anderen Gruppen bleiben inhaltlich unverändert.</a:t>
             </a:r>
           </a:p>
           <a:p>
@@ -3268,20 +3304,10 @@
                 <a:ea typeface="+mn-ea"/>
                 <a:cs typeface="+mn-cs"/>
               </a:rPr>
-              <a:t>Ein direktes Training auf allen Dateien wäre problematisch. `Z01` und `Z04` besitzen mehr Wiederholungsmessungen als `Z02`, `Z03` und `Z05`. Wenn wir jede Datei als unabhängigen Datenpunkt verwenden, bekommen diese Proben mehr Gewicht. Deshalb extrahieren wir zuerst die Merkmale pro Datei und mitteln danach die Feature-werte über alle `</a:t>
-            </a:r>
-            <a:r>
-              <a:rPr lang="de-DE" sz="1200" b="0" kern="1200" dirty="0" err="1">
-                <a:solidFill>
-                  <a:schemeClr val="tx1"/>
-                </a:solidFill>
-                <a:effectLst/>
-                <a:latin typeface="+mn-lt"/>
-                <a:ea typeface="+mn-ea"/>
-                <a:cs typeface="+mn-cs"/>
-              </a:rPr>
-              <a:t>mID</a:t>
-            </a:r>
+              <a:t>Die äußeren Splits entsprechen exakt der Aufgabenstellung. </a:t>
+            </a:r>
+          </a:p>
+          <a:p>
             <a:r>
               <a:rPr lang="de-DE" sz="1200" b="0" kern="1200" dirty="0">
                 <a:solidFill>
@@ -3292,7 +3318,7 @@
                 <a:ea typeface="+mn-ea"/>
                 <a:cs typeface="+mn-cs"/>
               </a:rPr>
-              <a:t>` derselben Messsituation.</a:t>
+              <a:t>Jeder gesunde Zustand wird einmal als unbekannte gesunde Gruppe getestet. Z05 wird in jedem Fold erneut ausgewertet.</a:t>
             </a:r>
           </a:p>
         </p:txBody>
@@ -3435,7 +3461,49 @@
                 <a:ea typeface="+mn-ea"/>
                 <a:cs typeface="+mn-cs"/>
               </a:rPr>
-              <a:t>Wir verwenden bewusst die Merkmale aus Aufgabe 2 weiter, weil diese bereits zu guten visuellen Trennungen geführt haben. Die Merkmale beschreiben sowohl zeitliche Eigenschaften als auch spektrale Eigenschaften des Signals. Dadurch muss das MLP nicht direkt auf den Rohsignalen lernen, sondern bekommt kompakte Signalbeschreibungen.</a:t>
+              <a:t>Aus dem Zahnrad-Signal entstehen 62 Audiofeatures. Der Encoder komprimiert diese über 32 auf 8 Werte; </a:t>
+            </a:r>
+          </a:p>
+          <a:p>
+            <a:r>
+              <a:rPr lang="de-DE" sz="1200" b="0" kern="1200" dirty="0">
+                <a:solidFill>
+                  <a:schemeClr val="tx1"/>
+                </a:solidFill>
+                <a:effectLst/>
+                <a:latin typeface="+mn-lt"/>
+                <a:ea typeface="+mn-ea"/>
+                <a:cs typeface="+mn-cs"/>
+              </a:rPr>
+              <a:t>der Decoder rekonstruiert den Merkmalsvektor. </a:t>
+            </a:r>
+          </a:p>
+          <a:p>
+            <a:r>
+              <a:rPr lang="de-DE" sz="1200" b="0" kern="1200" dirty="0">
+                <a:solidFill>
+                  <a:schemeClr val="tx1"/>
+                </a:solidFill>
+                <a:effectLst/>
+                <a:latin typeface="+mn-lt"/>
+                <a:ea typeface="+mn-ea"/>
+                <a:cs typeface="+mn-cs"/>
+              </a:rPr>
+              <a:t>Ein großer MSE weist auf eine Anomalie hin. </a:t>
+            </a:r>
+          </a:p>
+          <a:p>
+            <a:r>
+              <a:rPr lang="de-DE" sz="1200" b="0" kern="1200" dirty="0">
+                <a:solidFill>
+                  <a:schemeClr val="tx1"/>
+                </a:solidFill>
+                <a:effectLst/>
+                <a:latin typeface="+mn-lt"/>
+                <a:ea typeface="+mn-ea"/>
+                <a:cs typeface="+mn-cs"/>
+              </a:rPr>
+              <a:t>Alle Hyperparameter bleiben zwischen den Pipelines gleich, und die Skalierung wird je Trainings-Fold neu gelernt. </a:t>
             </a:r>
           </a:p>
           <a:p>
@@ -3567,23 +3635,6 @@
             </a:r>
           </a:p>
           <a:p>
-            <a:pPr marL="0" marR="0" lvl="0" indent="0" algn="l" defTabSz="914400" rtl="0" eaLnBrk="1" fontAlgn="auto" latinLnBrk="0" hangingPunct="1">
-              <a:lnSpc>
-                <a:spcPct val="100000"/>
-              </a:lnSpc>
-              <a:spcBef>
-                <a:spcPts val="0"/>
-              </a:spcBef>
-              <a:spcAft>
-                <a:spcPts val="0"/>
-              </a:spcAft>
-              <a:buClrTx/>
-              <a:buSzTx/>
-              <a:buFontTx/>
-              <a:buNone/>
-              <a:tabLst/>
-              <a:defRPr/>
-            </a:pPr>
             <a:r>
               <a:rPr lang="de-DE" sz="1200" b="0" kern="1200" dirty="0">
                 <a:solidFill>
@@ -3594,20 +3645,10 @@
                 <a:ea typeface="+mn-ea"/>
                 <a:cs typeface="+mn-cs"/>
               </a:rPr>
-              <a:t>Wir extrahieren die Merkmale pro Roh-datei und mitteln danach die Feature-werte über alle `</a:t>
-            </a:r>
-            <a:r>
-              <a:rPr lang="de-DE" sz="1200" b="0" kern="1200" dirty="0" err="1">
-                <a:solidFill>
-                  <a:schemeClr val="tx1"/>
-                </a:solidFill>
-                <a:effectLst/>
-                <a:latin typeface="+mn-lt"/>
-                <a:ea typeface="+mn-ea"/>
-                <a:cs typeface="+mn-cs"/>
-              </a:rPr>
-              <a:t>mID</a:t>
-            </a:r>
+              <a:t>Ein gepoolter Vergleich allein wäre unfair: Ohne Mittelung hat Fold 4 wegen</a:t>
+            </a:r>
+          </a:p>
+          <a:p>
             <a:r>
               <a:rPr lang="de-DE" sz="1200" b="0" kern="1200" dirty="0">
                 <a:solidFill>
@@ -3618,7 +3659,21 @@
                 <a:ea typeface="+mn-ea"/>
                 <a:cs typeface="+mn-cs"/>
               </a:rPr>
-              <a:t>`. Dadurch werden Wiederholungsmessungen in der Merkmalsebene zusammengefasst. Der Split trennt die guten Zahnräder stärker nach Zahnrad-Identität: `Z04` ist nur im Entwicklungssatz, `Z03` nur im Testsatz. `Z05` muss als einziges beschädigtes Zahnrad weiterhin positionsbasiert auf Train, Dev und Test verteilt werden. `Ch1` und `Ch2` werden nicht als Feature codiert, sondern bekommen je ein eigenes Modell.</a:t>
+              <a:t>Z01 besonders viele Testzeilen. BAR gleicht Klassen aus; das Makromittel gibt</a:t>
+            </a:r>
+          </a:p>
+          <a:p>
+            <a:r>
+              <a:rPr lang="de-DE" sz="1200" b="0" kern="1200" dirty="0">
+                <a:solidFill>
+                  <a:schemeClr val="tx1"/>
+                </a:solidFill>
+                <a:effectLst/>
+                <a:latin typeface="+mn-lt"/>
+                <a:ea typeface="+mn-ea"/>
+                <a:cs typeface="+mn-cs"/>
+              </a:rPr>
+              <a:t>zusätzlich jedem der acht Modelle dasselbe Gewicht.</a:t>
             </a:r>
           </a:p>
           <a:p>
@@ -3754,7 +3809,21 @@
                 <a:ea typeface="+mn-ea"/>
                 <a:cs typeface="+mn-cs"/>
               </a:rPr>
-              <a:t>Das Verteilungsdiagramm macht sichtbar, warum wir vor dem Training mitteln. `Z01` und `Z04` hätten sonst deutlich mehr Einfluss als die anderen Zahnräder, weil dort mehr Wiederholungsmessungen vorhanden sind. Nach der Mittelung stehen für jedes gute Zahnrad pro Channel 20 Feature-Zeilen zur Verfügung. Danach werden die guten Zahnräder getrennt: `Z01` und `Z02` liegen im Training, `Z04` im Entwicklungssatz und `Z03` im Testsatz. Für die beschädigte Klasse ist eine solche Zahnrad-Trennung nicht möglich, weil nur `Z05` beschädigt ist. Deshalb wird `Z05` pro Channel positionsbasiert in 12 Training, 4 Entwicklung und 4 Test aufgeteilt. Daraus entstehen pro Channel 52 Trainings-, 24 Entwicklungs- und 24 Testbeispiele.</a:t>
+              <a:t>Alle Z05-Samples werden gefunden. Fold 1 bis 3 sind gut, Fold 4 scheitert an vielen gesunden Z01-Fehlalarmen. </a:t>
+            </a:r>
+          </a:p>
+          <a:p>
+            <a:r>
+              <a:rPr lang="de-DE" sz="1200" b="0" kern="1200" dirty="0">
+                <a:solidFill>
+                  <a:schemeClr val="tx1"/>
+                </a:solidFill>
+                <a:effectLst/>
+                <a:latin typeface="+mn-lt"/>
+                <a:ea typeface="+mn-ea"/>
+                <a:cs typeface="+mn-cs"/>
+              </a:rPr>
+              <a:t>Ohne Mittelung bleibt die Variation der fünf Z01-mIDs sichtbar.</a:t>
             </a:r>
           </a:p>
         </p:txBody>
@@ -4079,7 +4148,7 @@
           <a:p>
             <a:r>
               <a:rPr lang="de-DE"/>
-              <a:t>Materialdiagnostik: Task 3</a:t>
+              <a:t>Materialdiagnostik: Task 4</a:t>
             </a:r>
             <a:endParaRPr lang="de-DE" dirty="0"/>
           </a:p>
@@ -4108,7 +4177,7 @@
           <a:p>
             <a:r>
               <a:rPr lang="de-DE"/>
-              <a:t>16.07.2026</a:t>
+              <a:t>23.07.2026</a:t>
             </a:r>
           </a:p>
         </p:txBody>
@@ -4333,7 +4402,7 @@
           <a:p>
             <a:r>
               <a:rPr lang="de-DE"/>
-              <a:t>Materialdiagnostik: Task 3</a:t>
+              <a:t>Materialdiagnostik: Task 4</a:t>
             </a:r>
           </a:p>
         </p:txBody>
@@ -4361,7 +4430,7 @@
           <a:p>
             <a:r>
               <a:rPr lang="de-DE"/>
-              <a:t>16.07.2026</a:t>
+              <a:t>23.07.2026</a:t>
             </a:r>
           </a:p>
         </p:txBody>
@@ -4553,7 +4622,7 @@
           <a:p>
             <a:r>
               <a:rPr lang="de-DE"/>
-              <a:t>Materialdiagnostik: Task 3</a:t>
+              <a:t>Materialdiagnostik: Task 4</a:t>
             </a:r>
           </a:p>
         </p:txBody>
@@ -4581,7 +4650,7 @@
           <a:p>
             <a:r>
               <a:rPr lang="de-DE"/>
-              <a:t>16.07.2026</a:t>
+              <a:t>23.07.2026</a:t>
             </a:r>
           </a:p>
         </p:txBody>
@@ -4798,7 +4867,7 @@
           <a:p>
             <a:r>
               <a:rPr lang="de-DE"/>
-              <a:t>Materialdiagnostik: Task 3</a:t>
+              <a:t>Materialdiagnostik: Task 4</a:t>
             </a:r>
           </a:p>
         </p:txBody>
@@ -4826,7 +4895,7 @@
           <a:p>
             <a:r>
               <a:rPr lang="de-DE"/>
-              <a:t>16.07.2026</a:t>
+              <a:t>23.07.2026</a:t>
             </a:r>
           </a:p>
         </p:txBody>
@@ -5054,7 +5123,7 @@
           <a:p>
             <a:r>
               <a:rPr lang="de-DE"/>
-              <a:t>Materialdiagnostik: Task 3</a:t>
+              <a:t>Materialdiagnostik: Task 4</a:t>
             </a:r>
           </a:p>
         </p:txBody>
@@ -5082,7 +5151,7 @@
           <a:p>
             <a:r>
               <a:rPr lang="de-DE"/>
-              <a:t>16.07.2026</a:t>
+              <a:t>23.07.2026</a:t>
             </a:r>
           </a:p>
         </p:txBody>
@@ -5245,7 +5314,7 @@
           <a:p>
             <a:r>
               <a:rPr lang="de-DE"/>
-              <a:t>Materialdiagnostik: Task 3</a:t>
+              <a:t>Materialdiagnostik: Task 4</a:t>
             </a:r>
           </a:p>
         </p:txBody>
@@ -5273,7 +5342,7 @@
           <a:p>
             <a:r>
               <a:rPr lang="de-DE"/>
-              <a:t>16.07.2026</a:t>
+              <a:t>23.07.2026</a:t>
             </a:r>
           </a:p>
         </p:txBody>
@@ -5436,7 +5505,7 @@
           <a:p>
             <a:r>
               <a:rPr lang="de-DE"/>
-              <a:t>Materialdiagnostik: Task 3</a:t>
+              <a:t>Materialdiagnostik: Task 4</a:t>
             </a:r>
             <a:endParaRPr lang="de-DE" dirty="0"/>
           </a:p>
@@ -5465,7 +5534,7 @@
           <a:p>
             <a:r>
               <a:rPr lang="de-DE"/>
-              <a:t>16.07.2026</a:t>
+              <a:t>23.07.2026</a:t>
             </a:r>
           </a:p>
         </p:txBody>
@@ -5787,9 +5856,10 @@
           </a:lstStyle>
           <a:p>
             <a:r>
-              <a:rPr lang="de-DE" dirty="0"/>
-              <a:t>Materialdiagnostik: Task 3</a:t>
-            </a:r>
+              <a:rPr lang="de-DE"/>
+              <a:t>Materialdiagnostik: Task 4</a:t>
+            </a:r>
+            <a:endParaRPr lang="de-DE" dirty="0"/>
           </a:p>
         </p:txBody>
       </p:sp>
@@ -5834,7 +5904,7 @@
           <a:p>
             <a:r>
               <a:rPr lang="de-DE"/>
-              <a:t>16.07.2026</a:t>
+              <a:t>23.07.2026</a:t>
             </a:r>
           </a:p>
         </p:txBody>
@@ -6305,7 +6375,7 @@
           <a:p>
             <a:r>
               <a:rPr lang="de-DE" sz="4800" dirty="0"/>
-              <a:t>Seminaraufgabe 3</a:t>
+              <a:t>Seminaraufgabe 4</a:t>
             </a:r>
           </a:p>
         </p:txBody>
@@ -6535,7 +6605,7 @@
           <a:p>
             <a:r>
               <a:rPr lang="de-DE"/>
-              <a:t>Materialdiagnostik: Task 3</a:t>
+              <a:t>Materialdiagnostik: Task 4</a:t>
             </a:r>
             <a:endParaRPr lang="de-DE" dirty="0"/>
           </a:p>
@@ -6564,7 +6634,7 @@
           <a:p>
             <a:r>
               <a:rPr lang="de-DE"/>
-              <a:t>16.07.2026</a:t>
+              <a:t>23.07.2026</a:t>
             </a:r>
           </a:p>
         </p:txBody>
@@ -6770,7 +6840,7 @@
           <a:p>
             <a:r>
               <a:rPr lang="de-DE"/>
-              <a:t>16.07.2026</a:t>
+              <a:t>23.07.2026</a:t>
             </a:r>
           </a:p>
         </p:txBody>
@@ -6798,7 +6868,7 @@
           <a:p>
             <a:r>
               <a:rPr lang="de-DE"/>
-              <a:t>Materialdiagnostik: Task 3</a:t>
+              <a:t>Materialdiagnostik: Task 4</a:t>
             </a:r>
             <a:endParaRPr lang="de-DE" dirty="0"/>
           </a:p>
@@ -7159,7 +7229,7 @@
           <a:p>
             <a:r>
               <a:rPr lang="de-DE"/>
-              <a:t>Materialdiagnostik: Task 3</a:t>
+              <a:t>Materialdiagnostik: Task 4</a:t>
             </a:r>
             <a:endParaRPr lang="de-DE" dirty="0"/>
           </a:p>
@@ -7188,7 +7258,7 @@
           <a:p>
             <a:r>
               <a:rPr lang="de-DE"/>
-              <a:t>16.07.2026</a:t>
+              <a:t>23.07.2026</a:t>
             </a:r>
           </a:p>
         </p:txBody>
@@ -7836,7 +7906,7 @@
           <a:p>
             <a:r>
               <a:rPr lang="de-DE"/>
-              <a:t>Materialdiagnostik: Task 3</a:t>
+              <a:t>Materialdiagnostik: Task 4</a:t>
             </a:r>
             <a:endParaRPr lang="de-DE" dirty="0"/>
           </a:p>
@@ -7865,7 +7935,7 @@
           <a:p>
             <a:r>
               <a:rPr lang="de-DE"/>
-              <a:t>16.07.2026</a:t>
+              <a:t>23.07.2026</a:t>
             </a:r>
           </a:p>
         </p:txBody>
@@ -8336,7 +8406,7 @@
           <a:p>
             <a:r>
               <a:rPr lang="de-DE"/>
-              <a:t>Materialdiagnostik: Task 3</a:t>
+              <a:t>Materialdiagnostik: Task 4</a:t>
             </a:r>
             <a:endParaRPr lang="de-DE" dirty="0"/>
           </a:p>
@@ -8365,7 +8435,7 @@
           <a:p>
             <a:r>
               <a:rPr lang="de-DE"/>
-              <a:t>16.07.2026</a:t>
+              <a:t>23.07.2026</a:t>
             </a:r>
           </a:p>
         </p:txBody>
@@ -8589,7 +8659,7 @@
           <a:p>
             <a:r>
               <a:rPr lang="de-DE"/>
-              <a:t>Materialdiagnostik: Task 3</a:t>
+              <a:t>Materialdiagnostik: Task 4</a:t>
             </a:r>
             <a:endParaRPr lang="de-DE" dirty="0"/>
           </a:p>
@@ -8618,7 +8688,7 @@
           <a:p>
             <a:r>
               <a:rPr lang="de-DE"/>
-              <a:t>16.07.2026</a:t>
+              <a:t>23.07.2026</a:t>
             </a:r>
           </a:p>
         </p:txBody>
@@ -8940,7 +9010,7 @@
           <a:p>
             <a:r>
               <a:rPr lang="de-DE"/>
-              <a:t>Materialdiagnostik: Task 3</a:t>
+              <a:t>Materialdiagnostik: Task 4</a:t>
             </a:r>
             <a:endParaRPr lang="de-DE" dirty="0"/>
           </a:p>
@@ -8969,7 +9039,7 @@
           <a:p>
             <a:r>
               <a:rPr lang="de-DE"/>
-              <a:t>16.07.2026</a:t>
+              <a:t>23.07.2026</a:t>
             </a:r>
           </a:p>
         </p:txBody>
@@ -9495,7 +9565,7 @@
           <a:p>
             <a:r>
               <a:rPr lang="de-DE"/>
-              <a:t>Materialdiagnostik: Task 3</a:t>
+              <a:t>Materialdiagnostik: Task 4</a:t>
             </a:r>
             <a:endParaRPr lang="de-DE" dirty="0"/>
           </a:p>
@@ -9524,7 +9594,7 @@
           <a:p>
             <a:r>
               <a:rPr lang="de-DE"/>
-              <a:t>16.07.2026</a:t>
+              <a:t>23.07.2026</a:t>
             </a:r>
           </a:p>
         </p:txBody>
@@ -9710,9 +9780,10 @@
           <a:lstStyle/>
           <a:p>
             <a:r>
-              <a:rPr lang="de-DE" dirty="0"/>
-              <a:t>Materialdiagnostik: Task 3</a:t>
-            </a:r>
+              <a:rPr lang="de-DE"/>
+              <a:t>Materialdiagnostik: Task 4</a:t>
+            </a:r>
+            <a:endParaRPr lang="de-DE" dirty="0"/>
           </a:p>
         </p:txBody>
       </p:sp>
@@ -9739,7 +9810,7 @@
           <a:p>
             <a:r>
               <a:rPr lang="de-DE"/>
-              <a:t>16.07.2026</a:t>
+              <a:t>23.07.2026</a:t>
             </a:r>
           </a:p>
         </p:txBody>
@@ -10035,7 +10106,7 @@
           <a:p>
             <a:r>
               <a:rPr lang="de-DE"/>
-              <a:t>16.07.2026</a:t>
+              <a:t>23.07.2026</a:t>
             </a:r>
           </a:p>
         </p:txBody>
@@ -10063,7 +10134,7 @@
           <a:p>
             <a:r>
               <a:rPr lang="de-DE"/>
-              <a:t>Materialdiagnostik: Task 3</a:t>
+              <a:t>Materialdiagnostik: Task 4</a:t>
             </a:r>
             <a:endParaRPr lang="de-DE" dirty="0"/>
           </a:p>
@@ -10165,62 +10236,6 @@
       </p:sp>
       <p:sp>
         <p:nvSpPr>
-          <p:cNvPr id="6" name="Datumsplatzhalter 5">
-            <a:extLst>
-              <a:ext uri="{FF2B5EF4-FFF2-40B4-BE49-F238E27FC236}">
-                <a16:creationId xmlns:a16="http://schemas.microsoft.com/office/drawing/2014/main" id="{2ADE982B-BFE5-5848-F763-33D2FC31C6DC}"/>
-              </a:ext>
-            </a:extLst>
-          </p:cNvPr>
-          <p:cNvSpPr>
-            <a:spLocks noGrp="1"/>
-          </p:cNvSpPr>
-          <p:nvPr>
-            <p:ph type="dt" sz="half" idx="12"/>
-          </p:nvPr>
-        </p:nvSpPr>
-        <p:spPr/>
-        <p:txBody>
-          <a:bodyPr/>
-          <a:lstStyle/>
-          <a:p>
-            <a:r>
-              <a:rPr lang="de-DE"/>
-              <a:t>16.07.2026</a:t>
-            </a:r>
-          </a:p>
-        </p:txBody>
-      </p:sp>
-      <p:sp>
-        <p:nvSpPr>
-          <p:cNvPr id="7" name="Fußzeilenplatzhalter 6">
-            <a:extLst>
-              <a:ext uri="{FF2B5EF4-FFF2-40B4-BE49-F238E27FC236}">
-                <a16:creationId xmlns:a16="http://schemas.microsoft.com/office/drawing/2014/main" id="{9D942951-2681-5B98-DB4E-AACA25F87A2D}"/>
-              </a:ext>
-            </a:extLst>
-          </p:cNvPr>
-          <p:cNvSpPr>
-            <a:spLocks noGrp="1"/>
-          </p:cNvSpPr>
-          <p:nvPr>
-            <p:ph type="ftr" sz="quarter" idx="11"/>
-          </p:nvPr>
-        </p:nvSpPr>
-        <p:spPr/>
-        <p:txBody>
-          <a:bodyPr/>
-          <a:lstStyle/>
-          <a:p>
-            <a:r>
-              <a:rPr lang="de-DE"/>
-              <a:t>Materialdiagnostik: Task 3</a:t>
-            </a:r>
-          </a:p>
-        </p:txBody>
-      </p:sp>
-      <p:sp>
-        <p:nvSpPr>
           <p:cNvPr id="2" name="Foliennummernplatzhalter 1">
             <a:extLst>
               <a:ext uri="{FF2B5EF4-FFF2-40B4-BE49-F238E27FC236}">
@@ -10248,36 +10263,144 @@
           </a:p>
         </p:txBody>
       </p:sp>
-      <p:pic>
-        <p:nvPicPr>
-          <p:cNvPr id="5" name="Grafik 4">
-            <a:extLst>
-              <a:ext uri="{FF2B5EF4-FFF2-40B4-BE49-F238E27FC236}">
-                <a16:creationId xmlns:a16="http://schemas.microsoft.com/office/drawing/2014/main" id="{3CD1AE25-2D20-AE6D-214C-FA96F52C5243}"/>
-              </a:ext>
-            </a:extLst>
-          </p:cNvPr>
-          <p:cNvPicPr>
-            <a:picLocks noChangeAspect="1"/>
-          </p:cNvPicPr>
-          <p:nvPr/>
-        </p:nvPicPr>
-        <p:blipFill>
-          <a:blip r:embed="rId3"/>
-          <a:stretch>
-            <a:fillRect/>
-          </a:stretch>
-        </p:blipFill>
-        <p:spPr>
-          <a:xfrm>
-            <a:off x="4838289" y="1627906"/>
-            <a:ext cx="4365653" cy="4350753"/>
-          </a:xfrm>
-          <a:prstGeom prst="rect">
-            <a:avLst/>
-          </a:prstGeom>
-        </p:spPr>
-      </p:pic>
+      <p:sp>
+        <p:nvSpPr>
+          <p:cNvPr id="7" name="Fußzeilenplatzhalter 6">
+            <a:extLst>
+              <a:ext uri="{FF2B5EF4-FFF2-40B4-BE49-F238E27FC236}">
+                <a16:creationId xmlns:a16="http://schemas.microsoft.com/office/drawing/2014/main" id="{9D942951-2681-5B98-DB4E-AACA25F87A2D}"/>
+              </a:ext>
+            </a:extLst>
+          </p:cNvPr>
+          <p:cNvSpPr>
+            <a:spLocks noGrp="1"/>
+          </p:cNvSpPr>
+          <p:nvPr>
+            <p:ph type="ftr" sz="quarter" idx="11"/>
+          </p:nvPr>
+        </p:nvSpPr>
+        <p:spPr/>
+        <p:txBody>
+          <a:bodyPr/>
+          <a:lstStyle/>
+          <a:p>
+            <a:r>
+              <a:rPr lang="de-DE"/>
+              <a:t>Materialdiagnostik: Task 4</a:t>
+            </a:r>
+          </a:p>
+        </p:txBody>
+      </p:sp>
+      <p:sp>
+        <p:nvSpPr>
+          <p:cNvPr id="6" name="Datumsplatzhalter 5">
+            <a:extLst>
+              <a:ext uri="{FF2B5EF4-FFF2-40B4-BE49-F238E27FC236}">
+                <a16:creationId xmlns:a16="http://schemas.microsoft.com/office/drawing/2014/main" id="{2ADE982B-BFE5-5848-F763-33D2FC31C6DC}"/>
+              </a:ext>
+            </a:extLst>
+          </p:cNvPr>
+          <p:cNvSpPr>
+            <a:spLocks noGrp="1"/>
+          </p:cNvSpPr>
+          <p:nvPr>
+            <p:ph type="dt" sz="half" idx="12"/>
+          </p:nvPr>
+        </p:nvSpPr>
+        <p:spPr/>
+        <p:txBody>
+          <a:bodyPr/>
+          <a:lstStyle/>
+          <a:p>
+            <a:r>
+              <a:rPr lang="de-DE"/>
+              <a:t>23.07.2026</a:t>
+            </a:r>
+          </a:p>
+        </p:txBody>
+      </p:sp>
+      <p:sp>
+        <p:nvSpPr>
+          <p:cNvPr id="4" name="Textplatzhalter 3">
+            <a:extLst>
+              <a:ext uri="{FF2B5EF4-FFF2-40B4-BE49-F238E27FC236}">
+                <a16:creationId xmlns:a16="http://schemas.microsoft.com/office/drawing/2014/main" id="{1356FFF4-95A7-CF81-6FBE-506C8F181C81}"/>
+              </a:ext>
+            </a:extLst>
+          </p:cNvPr>
+          <p:cNvSpPr>
+            <a:spLocks noGrp="1"/>
+          </p:cNvSpPr>
+          <p:nvPr>
+            <p:ph type="body" sz="quarter" idx="13"/>
+          </p:nvPr>
+        </p:nvSpPr>
+        <p:spPr/>
+        <p:txBody>
+          <a:bodyPr/>
+          <a:lstStyle/>
+          <a:p>
+            <a:pPr>
+              <a:buFont typeface="Arial" panose="020B0604020202020204" pitchFamily="34" charset="0"/>
+              <a:buChar char="•"/>
+            </a:pPr>
+            <a:endParaRPr lang="de-DE" dirty="0"/>
+          </a:p>
+          <a:p>
+            <a:pPr>
+              <a:buFont typeface="Arial" panose="020B0604020202020204" pitchFamily="34" charset="0"/>
+              <a:buChar char="•"/>
+            </a:pPr>
+            <a:r>
+              <a:rPr lang="de-DE" dirty="0"/>
+              <a:t>Daten und zwei Vorverarbeitungen</a:t>
+            </a:r>
+          </a:p>
+          <a:p>
+            <a:pPr>
+              <a:buFont typeface="Arial" panose="020B0604020202020204" pitchFamily="34" charset="0"/>
+              <a:buChar char="•"/>
+            </a:pPr>
+            <a:r>
+              <a:rPr lang="de-DE" dirty="0"/>
+              <a:t>Kreuzvalidierung und Autoencoder</a:t>
+            </a:r>
+          </a:p>
+          <a:p>
+            <a:pPr>
+              <a:buFont typeface="Arial" panose="020B0604020202020204" pitchFamily="34" charset="0"/>
+              <a:buChar char="•"/>
+            </a:pPr>
+            <a:r>
+              <a:rPr lang="de-DE" dirty="0"/>
+              <a:t>Entscheidung und Metriken</a:t>
+            </a:r>
+          </a:p>
+          <a:p>
+            <a:pPr>
+              <a:buFont typeface="Arial" panose="020B0604020202020204" pitchFamily="34" charset="0"/>
+              <a:buChar char="•"/>
+            </a:pPr>
+            <a:r>
+              <a:rPr lang="de-DE" dirty="0"/>
+              <a:t>Ergebnisse und Pipelinevergleich</a:t>
+            </a:r>
+          </a:p>
+          <a:p>
+            <a:pPr>
+              <a:buFont typeface="Arial" panose="020B0604020202020204" pitchFamily="34" charset="0"/>
+              <a:buChar char="•"/>
+            </a:pPr>
+            <a:r>
+              <a:rPr lang="de-DE" dirty="0"/>
+              <a:t>Diskussion und Fazit</a:t>
+            </a:r>
+          </a:p>
+          <a:p>
+            <a:endParaRPr lang="de-DE" dirty="0"/>
+          </a:p>
+        </p:txBody>
+      </p:sp>
     </p:spTree>
     <p:extLst>
       <p:ext uri="{BB962C8B-B14F-4D97-AF65-F5344CB8AC3E}">
@@ -10368,6 +10491,123 @@
       </p:grpSpPr>
       <p:sp>
         <p:nvSpPr>
+          <p:cNvPr id="2" name="Titel 1">
+            <a:extLst>
+              <a:ext uri="{FF2B5EF4-FFF2-40B4-BE49-F238E27FC236}">
+                <a16:creationId xmlns:a16="http://schemas.microsoft.com/office/drawing/2014/main" id="{EEDBBAAD-698E-2BBD-EFF1-ADB56162D5C1}"/>
+              </a:ext>
+            </a:extLst>
+          </p:cNvPr>
+          <p:cNvSpPr>
+            <a:spLocks noGrp="1"/>
+          </p:cNvSpPr>
+          <p:nvPr>
+            <p:ph type="title"/>
+          </p:nvPr>
+        </p:nvSpPr>
+        <p:spPr/>
+        <p:txBody>
+          <a:bodyPr/>
+          <a:lstStyle/>
+          <a:p>
+            <a:r>
+              <a:rPr lang="de-DE" sz="3200" dirty="0">
+                <a:latin typeface="Arial" panose="020B0604020202020204" pitchFamily="34" charset="0"/>
+                <a:cs typeface="Arial" panose="020B0604020202020204" pitchFamily="34" charset="0"/>
+              </a:rPr>
+              <a:t>Daten &amp; Pipelines</a:t>
+            </a:r>
+          </a:p>
+        </p:txBody>
+      </p:sp>
+      <p:sp>
+        <p:nvSpPr>
+          <p:cNvPr id="5" name="Foliennummernplatzhalter 4">
+            <a:extLst>
+              <a:ext uri="{FF2B5EF4-FFF2-40B4-BE49-F238E27FC236}">
+                <a16:creationId xmlns:a16="http://schemas.microsoft.com/office/drawing/2014/main" id="{F8958667-57AC-BE1E-6BEA-1C93A1AE3BF9}"/>
+              </a:ext>
+            </a:extLst>
+          </p:cNvPr>
+          <p:cNvSpPr>
+            <a:spLocks noGrp="1"/>
+          </p:cNvSpPr>
+          <p:nvPr>
+            <p:ph type="sldNum" sz="quarter" idx="10"/>
+          </p:nvPr>
+        </p:nvSpPr>
+        <p:spPr/>
+        <p:txBody>
+          <a:bodyPr/>
+          <a:lstStyle/>
+          <a:p>
+            <a:fld id="{80B4FCE6-DC73-4135-BC56-1F242D45A84C}" type="slidenum">
+              <a:rPr lang="de-DE" smtClean="0"/>
+              <a:t>3</a:t>
+            </a:fld>
+            <a:endParaRPr lang="de-DE"/>
+          </a:p>
+        </p:txBody>
+      </p:sp>
+      <p:sp>
+        <p:nvSpPr>
+          <p:cNvPr id="9" name="Fußzeilenplatzhalter 8">
+            <a:extLst>
+              <a:ext uri="{FF2B5EF4-FFF2-40B4-BE49-F238E27FC236}">
+                <a16:creationId xmlns:a16="http://schemas.microsoft.com/office/drawing/2014/main" id="{F03726B5-E16A-44C4-B810-6AFDF6B91428}"/>
+              </a:ext>
+            </a:extLst>
+          </p:cNvPr>
+          <p:cNvSpPr>
+            <a:spLocks noGrp="1"/>
+          </p:cNvSpPr>
+          <p:nvPr>
+            <p:ph type="ftr" sz="quarter" idx="11"/>
+          </p:nvPr>
+        </p:nvSpPr>
+        <p:spPr/>
+        <p:txBody>
+          <a:bodyPr/>
+          <a:lstStyle/>
+          <a:p>
+            <a:r>
+              <a:rPr lang="de-DE"/>
+              <a:t>Materialdiagnostik: Task 4</a:t>
+            </a:r>
+            <a:endParaRPr lang="de-DE" dirty="0"/>
+          </a:p>
+        </p:txBody>
+      </p:sp>
+      <p:sp>
+        <p:nvSpPr>
+          <p:cNvPr id="8" name="Datumsplatzhalter 7">
+            <a:extLst>
+              <a:ext uri="{FF2B5EF4-FFF2-40B4-BE49-F238E27FC236}">
+                <a16:creationId xmlns:a16="http://schemas.microsoft.com/office/drawing/2014/main" id="{EC3D51E1-5F7F-CC79-B190-7E596C240B7F}"/>
+              </a:ext>
+            </a:extLst>
+          </p:cNvPr>
+          <p:cNvSpPr>
+            <a:spLocks noGrp="1"/>
+          </p:cNvSpPr>
+          <p:nvPr>
+            <p:ph type="dt" sz="half" idx="12"/>
+          </p:nvPr>
+        </p:nvSpPr>
+        <p:spPr/>
+        <p:txBody>
+          <a:bodyPr/>
+          <a:lstStyle/>
+          <a:p>
+            <a:r>
+              <a:rPr lang="de-DE"/>
+              <a:t>23.07.2026</a:t>
+            </a:r>
+          </a:p>
+        </p:txBody>
+      </p:sp>
+      <p:sp>
+        <p:nvSpPr>
           <p:cNvPr id="3" name="Inhaltsplatzhalter 2">
             <a:extLst>
               <a:ext uri="{FF2B5EF4-FFF2-40B4-BE49-F238E27FC236}">
@@ -10395,6 +10635,29 @@
               <a:buFont typeface="Arial" panose="020B0604020202020204" pitchFamily="34" charset="0"/>
               <a:buChar char="•"/>
             </a:pPr>
+            <a:r>
+              <a:rPr lang="de-DE" dirty="0"/>
+              <a:t>Z01-Z04: </a:t>
+            </a:r>
+            <a:r>
+              <a:rPr lang="de-DE" b="1" dirty="0"/>
+              <a:t>gesund (Label 1)</a:t>
+            </a:r>
+            <a:r>
+              <a:rPr lang="de-DE" dirty="0"/>
+              <a:t>; </a:t>
+            </a:r>
+            <a:br>
+              <a:rPr lang="de-DE" dirty="0"/>
+            </a:br>
+            <a:r>
+              <a:rPr lang="de-DE" dirty="0"/>
+              <a:t>Z05: </a:t>
+            </a:r>
+            <a:r>
+              <a:rPr lang="de-DE" b="1" dirty="0"/>
+              <a:t>anomal (Label 0)</a:t>
+            </a:r>
             <a:endParaRPr lang="de-DE" dirty="0"/>
           </a:p>
           <a:p>
@@ -10404,7 +10667,14 @@
             </a:pPr>
             <a:r>
               <a:rPr lang="de-DE" dirty="0"/>
-              <a:t>Binäre Klassifikation von Zahnrad-Audiosignalen</a:t>
+              <a:t>440 WAV-Dateien, </a:t>
+            </a:r>
+            <a:br>
+              <a:rPr lang="de-DE" dirty="0"/>
+            </a:br>
+            <a:r>
+              <a:rPr lang="de-DE" dirty="0"/>
+              <a:t>62 Audiofeatures je Datei</a:t>
             </a:r>
           </a:p>
           <a:p>
@@ -10414,23 +10684,7 @@
             </a:pPr>
             <a:r>
               <a:rPr lang="de-DE" dirty="0"/>
-              <a:t>Modell: </a:t>
-            </a:r>
-            <a:r>
-              <a:rPr lang="de-DE" dirty="0" err="1"/>
-              <a:t>Multilayer</a:t>
-            </a:r>
-            <a:r>
-              <a:rPr lang="de-DE" dirty="0"/>
-              <a:t> </a:t>
-            </a:r>
-            <a:r>
-              <a:rPr lang="de-DE" dirty="0" err="1"/>
-              <a:t>Perceptron</a:t>
-            </a:r>
-            <a:r>
-              <a:rPr lang="de-DE" dirty="0"/>
-              <a:t> (MLP)</a:t>
+              <a:t>Ch1 und Ch2 werden getrennt modelliert</a:t>
             </a:r>
           </a:p>
           <a:p>
@@ -10438,160 +10692,249 @@
               <a:buFont typeface="Arial" panose="020B0604020202020204" pitchFamily="34" charset="0"/>
               <a:buChar char="•"/>
             </a:pPr>
-            <a:r>
-              <a:rPr lang="de-DE" dirty="0"/>
-              <a:t>Klassen:</a:t>
-            </a:r>
-          </a:p>
-          <a:p>
-            <a:pPr lvl="1">
-              <a:buFont typeface="Arial" panose="020B0604020202020204" pitchFamily="34" charset="0"/>
-              <a:buChar char="•"/>
+            <a:endParaRPr lang="de-DE" dirty="0"/>
+          </a:p>
+          <a:p>
+            <a:pPr marL="0" indent="0">
+              <a:buNone/>
             </a:pPr>
             <a:r>
-              <a:rPr lang="de-DE" dirty="0"/>
-              <a:t>1 = gut</a:t>
-            </a:r>
-          </a:p>
-          <a:p>
-            <a:pPr lvl="1">
-              <a:buFont typeface="Arial" panose="020B0604020202020204" pitchFamily="34" charset="0"/>
-              <a:buChar char="•"/>
+              <a:rPr lang="de-DE" sz="2000" dirty="0"/>
+              <a:t>Nach Mittelung besitzt jede Z-Gruppe genau 20 Samples je Kanal.</a:t>
+            </a:r>
+          </a:p>
+          <a:p>
+            <a:pPr marL="0" indent="0">
+              <a:buNone/>
             </a:pPr>
-            <a:r>
-              <a:rPr lang="de-DE" dirty="0"/>
-              <a:t>0 = beschädigt</a:t>
-            </a:r>
-          </a:p>
-          <a:p>
-            <a:pPr>
-              <a:buFont typeface="Arial" panose="020B0604020202020204" pitchFamily="34" charset="0"/>
-              <a:buChar char="•"/>
-            </a:pPr>
-            <a:r>
-              <a:rPr lang="de-DE" dirty="0"/>
-              <a:t>Bewertung mit Testsatz, ROC und AUC</a:t>
-            </a:r>
-          </a:p>
-        </p:txBody>
-      </p:sp>
-      <p:sp>
-        <p:nvSpPr>
-          <p:cNvPr id="2" name="Titel 1">
-            <a:extLst>
-              <a:ext uri="{FF2B5EF4-FFF2-40B4-BE49-F238E27FC236}">
-                <a16:creationId xmlns:a16="http://schemas.microsoft.com/office/drawing/2014/main" id="{EEDBBAAD-698E-2BBD-EFF1-ADB56162D5C1}"/>
-              </a:ext>
-            </a:extLst>
-          </p:cNvPr>
-          <p:cNvSpPr>
-            <a:spLocks noGrp="1"/>
-          </p:cNvSpPr>
-          <p:nvPr>
-            <p:ph type="title"/>
-          </p:nvPr>
-        </p:nvSpPr>
-        <p:spPr/>
-        <p:txBody>
-          <a:bodyPr/>
-          <a:lstStyle/>
-          <a:p>
-            <a:r>
-              <a:rPr lang="de-DE" sz="3200" dirty="0">
-                <a:latin typeface="Arial" panose="020B0604020202020204" pitchFamily="34" charset="0"/>
-                <a:cs typeface="Arial" panose="020B0604020202020204" pitchFamily="34" charset="0"/>
-              </a:rPr>
-              <a:t>Ziel</a:t>
-            </a:r>
-          </a:p>
-        </p:txBody>
-      </p:sp>
-      <p:sp>
-        <p:nvSpPr>
-          <p:cNvPr id="8" name="Datumsplatzhalter 7">
-            <a:extLst>
-              <a:ext uri="{FF2B5EF4-FFF2-40B4-BE49-F238E27FC236}">
-                <a16:creationId xmlns:a16="http://schemas.microsoft.com/office/drawing/2014/main" id="{EC3D51E1-5F7F-CC79-B190-7E596C240B7F}"/>
-              </a:ext>
-            </a:extLst>
-          </p:cNvPr>
-          <p:cNvSpPr>
-            <a:spLocks noGrp="1"/>
-          </p:cNvSpPr>
-          <p:nvPr>
-            <p:ph type="dt" sz="half" idx="12"/>
-          </p:nvPr>
-        </p:nvSpPr>
-        <p:spPr/>
-        <p:txBody>
-          <a:bodyPr/>
-          <a:lstStyle/>
-          <a:p>
-            <a:r>
-              <a:rPr lang="de-DE"/>
-              <a:t>16.07.2026</a:t>
-            </a:r>
-          </a:p>
-        </p:txBody>
-      </p:sp>
-      <p:sp>
-        <p:nvSpPr>
-          <p:cNvPr id="9" name="Fußzeilenplatzhalter 8">
-            <a:extLst>
-              <a:ext uri="{FF2B5EF4-FFF2-40B4-BE49-F238E27FC236}">
-                <a16:creationId xmlns:a16="http://schemas.microsoft.com/office/drawing/2014/main" id="{F03726B5-E16A-44C4-B810-6AFDF6B91428}"/>
-              </a:ext>
-            </a:extLst>
-          </p:cNvPr>
-          <p:cNvSpPr>
-            <a:spLocks noGrp="1"/>
-          </p:cNvSpPr>
-          <p:nvPr>
-            <p:ph type="ftr" sz="quarter" idx="11"/>
-          </p:nvPr>
-        </p:nvSpPr>
-        <p:spPr/>
-        <p:txBody>
-          <a:bodyPr/>
-          <a:lstStyle/>
-          <a:p>
-            <a:r>
-              <a:rPr lang="de-DE"/>
-              <a:t>Materialdiagnostik: Task 3</a:t>
-            </a:r>
             <a:endParaRPr lang="de-DE" dirty="0"/>
           </a:p>
         </p:txBody>
       </p:sp>
-      <p:sp>
-        <p:nvSpPr>
-          <p:cNvPr id="5" name="Foliennummernplatzhalter 4">
-            <a:extLst>
-              <a:ext uri="{FF2B5EF4-FFF2-40B4-BE49-F238E27FC236}">
-                <a16:creationId xmlns:a16="http://schemas.microsoft.com/office/drawing/2014/main" id="{F8958667-57AC-BE1E-6BEA-1C93A1AE3BF9}"/>
-              </a:ext>
-            </a:extLst>
-          </p:cNvPr>
-          <p:cNvSpPr>
-            <a:spLocks noGrp="1"/>
-          </p:cNvSpPr>
-          <p:nvPr>
-            <p:ph type="sldNum" sz="quarter" idx="10"/>
-          </p:nvPr>
-        </p:nvSpPr>
-        <p:spPr/>
-        <p:txBody>
-          <a:bodyPr/>
-          <a:lstStyle/>
-          <a:p>
-            <a:fld id="{80B4FCE6-DC73-4135-BC56-1F242D45A84C}" type="slidenum">
-              <a:rPr lang="de-DE" smtClean="0"/>
-              <a:t>3</a:t>
-            </a:fld>
-            <a:endParaRPr lang="de-DE"/>
-          </a:p>
-        </p:txBody>
-      </p:sp>
+      <p:graphicFrame>
+        <p:nvGraphicFramePr>
+          <p:cNvPr id="6" name="Inhaltsplatzhalter 5">
+            <a:extLst>
+              <a:ext uri="{FF2B5EF4-FFF2-40B4-BE49-F238E27FC236}">
+                <a16:creationId xmlns:a16="http://schemas.microsoft.com/office/drawing/2014/main" id="{497B2769-3C0B-7C18-B2D9-CD0FDEF66794}"/>
+              </a:ext>
+            </a:extLst>
+          </p:cNvPr>
+          <p:cNvGraphicFramePr>
+            <a:graphicFrameLocks noGrp="1"/>
+          </p:cNvGraphicFramePr>
+          <p:nvPr>
+            <p:ph sz="quarter" idx="14"/>
+            <p:extLst>
+              <p:ext uri="{D42A27DB-BD31-4B8C-83A1-F6EECF244321}">
+                <p14:modId xmlns:p14="http://schemas.microsoft.com/office/powerpoint/2010/main" val="1964912950"/>
+              </p:ext>
+            </p:extLst>
+          </p:nvPr>
+        </p:nvGraphicFramePr>
+        <p:xfrm>
+          <a:off x="5732417" y="1815152"/>
+          <a:ext cx="6118271" cy="2429301"/>
+        </p:xfrm>
+        <a:graphic>
+          <a:graphicData uri="http://schemas.openxmlformats.org/drawingml/2006/table">
+            <a:tbl>
+              <a:tblPr firstRow="1" bandRow="1">
+                <a:tableStyleId>{5C22544A-7EE6-4342-B048-85BDC9FD1C3A}</a:tableStyleId>
+              </a:tblPr>
+              <a:tblGrid>
+                <a:gridCol w="1569135">
+                  <a:extLst>
+                    <a:ext uri="{9D8B030D-6E8A-4147-A177-3AD203B41FA5}">
+                      <a16:colId xmlns:a16="http://schemas.microsoft.com/office/drawing/2014/main" val="3971024240"/>
+                    </a:ext>
+                  </a:extLst>
+                </a:gridCol>
+                <a:gridCol w="3480179">
+                  <a:extLst>
+                    <a:ext uri="{9D8B030D-6E8A-4147-A177-3AD203B41FA5}">
+                      <a16:colId xmlns:a16="http://schemas.microsoft.com/office/drawing/2014/main" val="1741228516"/>
+                    </a:ext>
+                  </a:extLst>
+                </a:gridCol>
+                <a:gridCol w="1068957">
+                  <a:extLst>
+                    <a:ext uri="{9D8B030D-6E8A-4147-A177-3AD203B41FA5}">
+                      <a16:colId xmlns:a16="http://schemas.microsoft.com/office/drawing/2014/main" val="1235261121"/>
+                    </a:ext>
+                  </a:extLst>
+                </a:gridCol>
+              </a:tblGrid>
+              <a:tr h="809767">
+                <a:tc>
+                  <a:txBody>
+                    <a:bodyPr/>
+                    <a:lstStyle/>
+                    <a:p>
+                      <a:r>
+                        <a:rPr lang="de-DE" dirty="0"/>
+                        <a:t>Pipeline</a:t>
+                      </a:r>
+                    </a:p>
+                  </a:txBody>
+                  <a:tcPr/>
+                </a:tc>
+                <a:tc>
+                  <a:txBody>
+                    <a:bodyPr/>
+                    <a:lstStyle/>
+                    <a:p>
+                      <a:r>
+                        <a:rPr lang="de-DE" dirty="0"/>
+                        <a:t>Verarbeitung nach Feature-Extraktion</a:t>
+                      </a:r>
+                    </a:p>
+                  </a:txBody>
+                  <a:tcPr/>
+                </a:tc>
+                <a:tc>
+                  <a:txBody>
+                    <a:bodyPr/>
+                    <a:lstStyle/>
+                    <a:p>
+                      <a:r>
+                        <a:rPr lang="de-DE" dirty="0"/>
+                        <a:t>Samples</a:t>
+                      </a:r>
+                    </a:p>
+                  </a:txBody>
+                  <a:tcPr/>
+                </a:tc>
+                <a:extLst>
+                  <a:ext uri="{0D108BD9-81ED-4DB2-BD59-A6C34878D82A}">
+                    <a16:rowId xmlns:a16="http://schemas.microsoft.com/office/drawing/2014/main" val="3113023202"/>
+                  </a:ext>
+                </a:extLst>
+              </a:tr>
+              <a:tr h="809767">
+                <a:tc>
+                  <a:txBody>
+                    <a:bodyPr/>
+                    <a:lstStyle/>
+                    <a:p>
+                      <a:r>
+                        <a:rPr lang="de-DE" dirty="0"/>
+                        <a:t>Einzelmessung</a:t>
+                      </a:r>
+                    </a:p>
+                  </a:txBody>
+                  <a:tcPr/>
+                </a:tc>
+                <a:tc>
+                  <a:txBody>
+                    <a:bodyPr/>
+                    <a:lstStyle/>
+                    <a:p>
+                      <a:r>
+                        <a:rPr lang="de-DE" dirty="0"/>
+                        <a:t>Keine Mittelung</a:t>
+                      </a:r>
+                    </a:p>
+                  </a:txBody>
+                  <a:tcPr/>
+                </a:tc>
+                <a:tc>
+                  <a:txBody>
+                    <a:bodyPr/>
+                    <a:lstStyle/>
+                    <a:p>
+                      <a:r>
+                        <a:rPr lang="de-DE" dirty="0"/>
+                        <a:t>440</a:t>
+                      </a:r>
+                    </a:p>
+                  </a:txBody>
+                  <a:tcPr/>
+                </a:tc>
+                <a:extLst>
+                  <a:ext uri="{0D108BD9-81ED-4DB2-BD59-A6C34878D82A}">
+                    <a16:rowId xmlns:a16="http://schemas.microsoft.com/office/drawing/2014/main" val="283340712"/>
+                  </a:ext>
+                </a:extLst>
+              </a:tr>
+              <a:tr h="809767">
+                <a:tc>
+                  <a:txBody>
+                    <a:bodyPr/>
+                    <a:lstStyle/>
+                    <a:p>
+                      <a:r>
+                        <a:rPr lang="de-DE" dirty="0" err="1"/>
+                        <a:t>mID</a:t>
+                      </a:r>
+                      <a:r>
+                        <a:rPr lang="de-DE" dirty="0"/>
+                        <a:t>-gemittelt</a:t>
+                      </a:r>
+                    </a:p>
+                  </a:txBody>
+                  <a:tcPr/>
+                </a:tc>
+                <a:tc>
+                  <a:txBody>
+                    <a:bodyPr/>
+                    <a:lstStyle/>
+                    <a:p>
+                      <a:r>
+                        <a:rPr lang="de-DE" dirty="0"/>
+                        <a:t>Mittel je `</a:t>
+                      </a:r>
+                      <a:r>
+                        <a:rPr lang="de-DE" dirty="0" err="1"/>
+                        <a:t>spec</a:t>
+                      </a:r>
+                      <a:r>
+                        <a:rPr lang="de-DE" dirty="0"/>
+                        <a:t>`, `</a:t>
+                      </a:r>
+                      <a:r>
+                        <a:rPr lang="de-DE" dirty="0" err="1"/>
+                        <a:t>pos</a:t>
+                      </a:r>
+                      <a:r>
+                        <a:rPr lang="de-DE" dirty="0"/>
+                        <a:t>`, `</a:t>
+                      </a:r>
+                      <a:r>
+                        <a:rPr lang="de-DE" dirty="0" err="1"/>
+                        <a:t>rID</a:t>
+                      </a:r>
+                      <a:r>
+                        <a:rPr lang="de-DE" dirty="0"/>
+                        <a:t>`, Kanal</a:t>
+                      </a:r>
+                    </a:p>
+                  </a:txBody>
+                  <a:tcPr/>
+                </a:tc>
+                <a:tc>
+                  <a:txBody>
+                    <a:bodyPr/>
+                    <a:lstStyle/>
+                    <a:p>
+                      <a:r>
+                        <a:rPr lang="de-DE" dirty="0"/>
+                        <a:t>200</a:t>
+                      </a:r>
+                    </a:p>
+                  </a:txBody>
+                  <a:tcPr/>
+                </a:tc>
+                <a:extLst>
+                  <a:ext uri="{0D108BD9-81ED-4DB2-BD59-A6C34878D82A}">
+                    <a16:rowId xmlns:a16="http://schemas.microsoft.com/office/drawing/2014/main" val="1333412803"/>
+                  </a:ext>
+                </a:extLst>
+              </a:tr>
+            </a:tbl>
+          </a:graphicData>
+        </a:graphic>
+      </p:graphicFrame>
     </p:spTree>
     <p:extLst>
       <p:ext uri="{BB962C8B-B14F-4D97-AF65-F5344CB8AC3E}">
@@ -10763,7 +11106,7 @@
           <a:p>
             <a:r>
               <a:rPr lang="de-DE"/>
-              <a:t>16.07.2026</a:t>
+              <a:t>23.07.2026</a:t>
             </a:r>
           </a:p>
         </p:txBody>
@@ -10791,7 +11134,7 @@
           <a:p>
             <a:r>
               <a:rPr lang="de-DE"/>
-              <a:t>Materialdiagnostik: Task 3</a:t>
+              <a:t>Materialdiagnostik: Task 4</a:t>
             </a:r>
             <a:endParaRPr lang="de-DE" dirty="0"/>
           </a:p>
@@ -10894,6 +11237,451 @@
       </p:grpSpPr>
       <p:sp>
         <p:nvSpPr>
+          <p:cNvPr id="2" name="Foliennummernplatzhalter 1">
+            <a:extLst>
+              <a:ext uri="{FF2B5EF4-FFF2-40B4-BE49-F238E27FC236}">
+                <a16:creationId xmlns:a16="http://schemas.microsoft.com/office/drawing/2014/main" id="{A01E9335-BE43-12DC-80C0-D25BC6A0C1D7}"/>
+              </a:ext>
+            </a:extLst>
+          </p:cNvPr>
+          <p:cNvSpPr>
+            <a:spLocks noGrp="1"/>
+          </p:cNvSpPr>
+          <p:nvPr>
+            <p:ph type="sldNum" sz="quarter" idx="10"/>
+          </p:nvPr>
+        </p:nvSpPr>
+        <p:spPr/>
+        <p:txBody>
+          <a:bodyPr/>
+          <a:lstStyle/>
+          <a:p>
+            <a:fld id="{80B4FCE6-DC73-4135-BC56-1F242D45A84C}" type="slidenum">
+              <a:rPr lang="de-DE" smtClean="0"/>
+              <a:t>5</a:t>
+            </a:fld>
+            <a:endParaRPr lang="de-DE"/>
+          </a:p>
+        </p:txBody>
+      </p:sp>
+      <p:sp>
+        <p:nvSpPr>
+          <p:cNvPr id="6" name="Fußzeilenplatzhalter 5">
+            <a:extLst>
+              <a:ext uri="{FF2B5EF4-FFF2-40B4-BE49-F238E27FC236}">
+                <a16:creationId xmlns:a16="http://schemas.microsoft.com/office/drawing/2014/main" id="{43258A7A-FB46-C9EE-27DB-D5BFD61A3880}"/>
+              </a:ext>
+            </a:extLst>
+          </p:cNvPr>
+          <p:cNvSpPr>
+            <a:spLocks noGrp="1"/>
+          </p:cNvSpPr>
+          <p:nvPr>
+            <p:ph type="ftr" sz="quarter" idx="11"/>
+          </p:nvPr>
+        </p:nvSpPr>
+        <p:spPr/>
+        <p:txBody>
+          <a:bodyPr/>
+          <a:lstStyle/>
+          <a:p>
+            <a:r>
+              <a:rPr lang="de-DE"/>
+              <a:t>Materialdiagnostik: Task 4</a:t>
+            </a:r>
+          </a:p>
+        </p:txBody>
+      </p:sp>
+      <p:sp>
+        <p:nvSpPr>
+          <p:cNvPr id="3" name="Datumsplatzhalter 2">
+            <a:extLst>
+              <a:ext uri="{FF2B5EF4-FFF2-40B4-BE49-F238E27FC236}">
+                <a16:creationId xmlns:a16="http://schemas.microsoft.com/office/drawing/2014/main" id="{B976C4FB-8771-9C12-EC14-FF917FA91936}"/>
+              </a:ext>
+            </a:extLst>
+          </p:cNvPr>
+          <p:cNvSpPr>
+            <a:spLocks noGrp="1"/>
+          </p:cNvSpPr>
+          <p:nvPr>
+            <p:ph type="dt" sz="half" idx="12"/>
+          </p:nvPr>
+        </p:nvSpPr>
+        <p:spPr/>
+        <p:txBody>
+          <a:bodyPr/>
+          <a:lstStyle/>
+          <a:p>
+            <a:r>
+              <a:rPr lang="de-DE"/>
+              <a:t>23.07.2026</a:t>
+            </a:r>
+          </a:p>
+        </p:txBody>
+      </p:sp>
+      <p:graphicFrame>
+        <p:nvGraphicFramePr>
+          <p:cNvPr id="4" name="Inhaltsplatzhalter 3">
+            <a:extLst>
+              <a:ext uri="{FF2B5EF4-FFF2-40B4-BE49-F238E27FC236}">
+                <a16:creationId xmlns:a16="http://schemas.microsoft.com/office/drawing/2014/main" id="{B96CECF4-A07F-900E-453E-F6C3301C3D8D}"/>
+              </a:ext>
+            </a:extLst>
+          </p:cNvPr>
+          <p:cNvGraphicFramePr>
+            <a:graphicFrameLocks noGrp="1"/>
+          </p:cNvGraphicFramePr>
+          <p:nvPr>
+            <p:ph sz="quarter" idx="13"/>
+            <p:extLst>
+              <p:ext uri="{D42A27DB-BD31-4B8C-83A1-F6EECF244321}">
+                <p14:modId xmlns:p14="http://schemas.microsoft.com/office/powerpoint/2010/main" val="905040028"/>
+              </p:ext>
+            </p:extLst>
+          </p:nvPr>
+        </p:nvGraphicFramePr>
+        <p:xfrm>
+          <a:off x="341313" y="1619250"/>
+          <a:ext cx="11512548" cy="1854200"/>
+        </p:xfrm>
+        <a:graphic>
+          <a:graphicData uri="http://schemas.openxmlformats.org/drawingml/2006/table">
+            <a:tbl>
+              <a:tblPr firstRow="1" bandRow="1">
+                <a:tableStyleId>{5C22544A-7EE6-4342-B048-85BDC9FD1C3A}</a:tableStyleId>
+              </a:tblPr>
+              <a:tblGrid>
+                <a:gridCol w="2878137">
+                  <a:extLst>
+                    <a:ext uri="{9D8B030D-6E8A-4147-A177-3AD203B41FA5}">
+                      <a16:colId xmlns:a16="http://schemas.microsoft.com/office/drawing/2014/main" val="1615416613"/>
+                    </a:ext>
+                  </a:extLst>
+                </a:gridCol>
+                <a:gridCol w="2878137">
+                  <a:extLst>
+                    <a:ext uri="{9D8B030D-6E8A-4147-A177-3AD203B41FA5}">
+                      <a16:colId xmlns:a16="http://schemas.microsoft.com/office/drawing/2014/main" val="2145862400"/>
+                    </a:ext>
+                  </a:extLst>
+                </a:gridCol>
+                <a:gridCol w="2878137">
+                  <a:extLst>
+                    <a:ext uri="{9D8B030D-6E8A-4147-A177-3AD203B41FA5}">
+                      <a16:colId xmlns:a16="http://schemas.microsoft.com/office/drawing/2014/main" val="3897919594"/>
+                    </a:ext>
+                  </a:extLst>
+                </a:gridCol>
+                <a:gridCol w="2878137">
+                  <a:extLst>
+                    <a:ext uri="{9D8B030D-6E8A-4147-A177-3AD203B41FA5}">
+                      <a16:colId xmlns:a16="http://schemas.microsoft.com/office/drawing/2014/main" val="145885246"/>
+                    </a:ext>
+                  </a:extLst>
+                </a:gridCol>
+              </a:tblGrid>
+              <a:tr h="370840">
+                <a:tc>
+                  <a:txBody>
+                    <a:bodyPr/>
+                    <a:lstStyle/>
+                    <a:p>
+                      <a:r>
+                        <a:rPr lang="de-DE" dirty="0"/>
+                        <a:t>Fold</a:t>
+                      </a:r>
+                    </a:p>
+                  </a:txBody>
+                  <a:tcPr/>
+                </a:tc>
+                <a:tc>
+                  <a:txBody>
+                    <a:bodyPr/>
+                    <a:lstStyle/>
+                    <a:p>
+                      <a:r>
+                        <a:rPr lang="de-DE" dirty="0"/>
+                        <a:t>Gesundes Training</a:t>
+                      </a:r>
+                    </a:p>
+                  </a:txBody>
+                  <a:tcPr/>
+                </a:tc>
+                <a:tc>
+                  <a:txBody>
+                    <a:bodyPr/>
+                    <a:lstStyle/>
+                    <a:p>
+                      <a:r>
+                        <a:rPr lang="de-DE" dirty="0"/>
+                        <a:t>Test: gesund</a:t>
+                      </a:r>
+                    </a:p>
+                  </a:txBody>
+                  <a:tcPr/>
+                </a:tc>
+                <a:tc>
+                  <a:txBody>
+                    <a:bodyPr/>
+                    <a:lstStyle/>
+                    <a:p>
+                      <a:r>
+                        <a:rPr lang="de-DE" dirty="0"/>
+                        <a:t>Test: anomal</a:t>
+                      </a:r>
+                    </a:p>
+                  </a:txBody>
+                  <a:tcPr/>
+                </a:tc>
+                <a:extLst>
+                  <a:ext uri="{0D108BD9-81ED-4DB2-BD59-A6C34878D82A}">
+                    <a16:rowId xmlns:a16="http://schemas.microsoft.com/office/drawing/2014/main" val="3144091381"/>
+                  </a:ext>
+                </a:extLst>
+              </a:tr>
+              <a:tr h="370840">
+                <a:tc>
+                  <a:txBody>
+                    <a:bodyPr/>
+                    <a:lstStyle/>
+                    <a:p>
+                      <a:r>
+                        <a:rPr lang="de-DE" dirty="0"/>
+                        <a:t>1</a:t>
+                      </a:r>
+                    </a:p>
+                  </a:txBody>
+                  <a:tcPr/>
+                </a:tc>
+                <a:tc>
+                  <a:txBody>
+                    <a:bodyPr/>
+                    <a:lstStyle/>
+                    <a:p>
+                      <a:r>
+                        <a:rPr lang="de-DE" dirty="0"/>
+                        <a:t>Z01, Z02, Z03</a:t>
+                      </a:r>
+                    </a:p>
+                  </a:txBody>
+                  <a:tcPr/>
+                </a:tc>
+                <a:tc>
+                  <a:txBody>
+                    <a:bodyPr/>
+                    <a:lstStyle/>
+                    <a:p>
+                      <a:r>
+                        <a:rPr lang="de-DE" dirty="0"/>
+                        <a:t>Z04</a:t>
+                      </a:r>
+                    </a:p>
+                  </a:txBody>
+                  <a:tcPr/>
+                </a:tc>
+                <a:tc>
+                  <a:txBody>
+                    <a:bodyPr/>
+                    <a:lstStyle/>
+                    <a:p>
+                      <a:r>
+                        <a:rPr lang="de-DE" dirty="0"/>
+                        <a:t>Z05</a:t>
+                      </a:r>
+                    </a:p>
+                  </a:txBody>
+                  <a:tcPr/>
+                </a:tc>
+                <a:extLst>
+                  <a:ext uri="{0D108BD9-81ED-4DB2-BD59-A6C34878D82A}">
+                    <a16:rowId xmlns:a16="http://schemas.microsoft.com/office/drawing/2014/main" val="593744031"/>
+                  </a:ext>
+                </a:extLst>
+              </a:tr>
+              <a:tr h="370840">
+                <a:tc>
+                  <a:txBody>
+                    <a:bodyPr/>
+                    <a:lstStyle/>
+                    <a:p>
+                      <a:r>
+                        <a:rPr lang="de-DE" dirty="0"/>
+                        <a:t>2</a:t>
+                      </a:r>
+                    </a:p>
+                  </a:txBody>
+                  <a:tcPr/>
+                </a:tc>
+                <a:tc>
+                  <a:txBody>
+                    <a:bodyPr/>
+                    <a:lstStyle/>
+                    <a:p>
+                      <a:r>
+                        <a:rPr lang="de-DE" dirty="0"/>
+                        <a:t>Z01, Z02, Z04</a:t>
+                      </a:r>
+                    </a:p>
+                  </a:txBody>
+                  <a:tcPr/>
+                </a:tc>
+                <a:tc>
+                  <a:txBody>
+                    <a:bodyPr/>
+                    <a:lstStyle/>
+                    <a:p>
+                      <a:r>
+                        <a:rPr lang="de-DE" dirty="0"/>
+                        <a:t>Z03</a:t>
+                      </a:r>
+                    </a:p>
+                  </a:txBody>
+                  <a:tcPr/>
+                </a:tc>
+                <a:tc>
+                  <a:txBody>
+                    <a:bodyPr/>
+                    <a:lstStyle/>
+                    <a:p>
+                      <a:r>
+                        <a:rPr lang="de-DE" dirty="0"/>
+                        <a:t>Z05</a:t>
+                      </a:r>
+                    </a:p>
+                  </a:txBody>
+                  <a:tcPr/>
+                </a:tc>
+                <a:extLst>
+                  <a:ext uri="{0D108BD9-81ED-4DB2-BD59-A6C34878D82A}">
+                    <a16:rowId xmlns:a16="http://schemas.microsoft.com/office/drawing/2014/main" val="556200018"/>
+                  </a:ext>
+                </a:extLst>
+              </a:tr>
+              <a:tr h="370840">
+                <a:tc>
+                  <a:txBody>
+                    <a:bodyPr/>
+                    <a:lstStyle/>
+                    <a:p>
+                      <a:r>
+                        <a:rPr lang="de-DE" dirty="0"/>
+                        <a:t>3</a:t>
+                      </a:r>
+                    </a:p>
+                  </a:txBody>
+                  <a:tcPr/>
+                </a:tc>
+                <a:tc>
+                  <a:txBody>
+                    <a:bodyPr/>
+                    <a:lstStyle/>
+                    <a:p>
+                      <a:r>
+                        <a:rPr lang="de-DE" dirty="0"/>
+                        <a:t>Z01, Z03, Z04</a:t>
+                      </a:r>
+                    </a:p>
+                  </a:txBody>
+                  <a:tcPr/>
+                </a:tc>
+                <a:tc>
+                  <a:txBody>
+                    <a:bodyPr/>
+                    <a:lstStyle/>
+                    <a:p>
+                      <a:r>
+                        <a:rPr lang="de-DE" dirty="0"/>
+                        <a:t>Z02</a:t>
+                      </a:r>
+                    </a:p>
+                  </a:txBody>
+                  <a:tcPr/>
+                </a:tc>
+                <a:tc>
+                  <a:txBody>
+                    <a:bodyPr/>
+                    <a:lstStyle/>
+                    <a:p>
+                      <a:r>
+                        <a:rPr lang="de-DE" dirty="0"/>
+                        <a:t>Z05</a:t>
+                      </a:r>
+                    </a:p>
+                  </a:txBody>
+                  <a:tcPr/>
+                </a:tc>
+                <a:extLst>
+                  <a:ext uri="{0D108BD9-81ED-4DB2-BD59-A6C34878D82A}">
+                    <a16:rowId xmlns:a16="http://schemas.microsoft.com/office/drawing/2014/main" val="1390168549"/>
+                  </a:ext>
+                </a:extLst>
+              </a:tr>
+              <a:tr h="370840">
+                <a:tc>
+                  <a:txBody>
+                    <a:bodyPr/>
+                    <a:lstStyle/>
+                    <a:p>
+                      <a:r>
+                        <a:rPr lang="de-DE" dirty="0"/>
+                        <a:t>4</a:t>
+                      </a:r>
+                    </a:p>
+                  </a:txBody>
+                  <a:tcPr/>
+                </a:tc>
+                <a:tc>
+                  <a:txBody>
+                    <a:bodyPr/>
+                    <a:lstStyle/>
+                    <a:p>
+                      <a:r>
+                        <a:rPr lang="de-DE" dirty="0"/>
+                        <a:t>Z02, Z03, Z04</a:t>
+                      </a:r>
+                    </a:p>
+                  </a:txBody>
+                  <a:tcPr/>
+                </a:tc>
+                <a:tc>
+                  <a:txBody>
+                    <a:bodyPr/>
+                    <a:lstStyle/>
+                    <a:p>
+                      <a:r>
+                        <a:rPr lang="de-DE" dirty="0"/>
+                        <a:t>Z01</a:t>
+                      </a:r>
+                    </a:p>
+                  </a:txBody>
+                  <a:tcPr/>
+                </a:tc>
+                <a:tc>
+                  <a:txBody>
+                    <a:bodyPr/>
+                    <a:lstStyle/>
+                    <a:p>
+                      <a:r>
+                        <a:rPr lang="de-DE" dirty="0"/>
+                        <a:t>Z05</a:t>
+                      </a:r>
+                    </a:p>
+                  </a:txBody>
+                  <a:tcPr/>
+                </a:tc>
+                <a:extLst>
+                  <a:ext uri="{0D108BD9-81ED-4DB2-BD59-A6C34878D82A}">
+                    <a16:rowId xmlns:a16="http://schemas.microsoft.com/office/drawing/2014/main" val="2065931416"/>
+                  </a:ext>
+                </a:extLst>
+              </a:tr>
+            </a:tbl>
+          </a:graphicData>
+        </a:graphic>
+      </p:graphicFrame>
+      <p:sp>
+        <p:nvSpPr>
           <p:cNvPr id="5" name="Titel 4">
             <a:extLst>
               <a:ext uri="{FF2B5EF4-FFF2-40B4-BE49-F238E27FC236}">
@@ -10908,15 +11696,10 @@
             <p:ph type="title"/>
           </p:nvPr>
         </p:nvSpPr>
-        <p:spPr>
-          <a:xfrm>
-            <a:off x="341811" y="567600"/>
-            <a:ext cx="4934382" cy="706030"/>
-          </a:xfrm>
-        </p:spPr>
+        <p:spPr/>
         <p:txBody>
           <a:bodyPr anchor="ctr">
-            <a:normAutofit fontScale="90000"/>
+            <a:normAutofit/>
           </a:bodyPr>
           <a:lstStyle/>
           <a:p>
@@ -10927,7 +11710,7 @@
             </a:pPr>
             <a:r>
               <a:rPr lang="de-DE" sz="3200" dirty="0"/>
-              <a:t>Problem vor der Modellierung</a:t>
+              <a:t>Kreuzvalidierung</a:t>
             </a:r>
             <a:endParaRPr lang="de-DE" sz="2200" dirty="0"/>
           </a:p>
@@ -10935,178 +11718,59 @@
       </p:sp>
       <p:sp>
         <p:nvSpPr>
-          <p:cNvPr id="10" name="Inhaltsplatzhalter 9">
-            <a:extLst>
-              <a:ext uri="{FF2B5EF4-FFF2-40B4-BE49-F238E27FC236}">
-                <a16:creationId xmlns:a16="http://schemas.microsoft.com/office/drawing/2014/main" id="{854D615C-F8E5-5FC5-C401-2791DF60C45B}"/>
-              </a:ext>
-            </a:extLst>
-          </p:cNvPr>
-          <p:cNvSpPr>
-            <a:spLocks noGrp="1"/>
-          </p:cNvSpPr>
-          <p:nvPr>
-            <p:ph sz="quarter" idx="13"/>
-          </p:nvPr>
+          <p:cNvPr id="7" name="Textfeld 6">
+            <a:extLst>
+              <a:ext uri="{FF2B5EF4-FFF2-40B4-BE49-F238E27FC236}">
+                <a16:creationId xmlns:a16="http://schemas.microsoft.com/office/drawing/2014/main" id="{B94A0F76-0EC5-C91B-A10C-7CEABF725746}"/>
+              </a:ext>
+            </a:extLst>
+          </p:cNvPr>
+          <p:cNvSpPr txBox="1"/>
+          <p:nvPr/>
         </p:nvSpPr>
         <p:spPr>
           <a:xfrm>
-            <a:off x="341312" y="1620000"/>
-            <a:ext cx="7289197" cy="4316412"/>
+            <a:off x="341311" y="4175823"/>
+            <a:ext cx="11512549" cy="1446550"/>
           </a:xfrm>
+          <a:prstGeom prst="rect">
+            <a:avLst/>
+          </a:prstGeom>
+          <a:noFill/>
         </p:spPr>
         <p:txBody>
-          <a:bodyPr>
-            <a:normAutofit/>
+          <a:bodyPr wrap="square" rtlCol="0">
+            <a:spAutoFit/>
           </a:bodyPr>
           <a:lstStyle/>
           <a:p>
-            <a:pPr>
+            <a:pPr marL="342900" indent="-342900">
               <a:buFont typeface="Arial" panose="020B0604020202020204" pitchFamily="34" charset="0"/>
               <a:buChar char="•"/>
             </a:pPr>
-            <a:endParaRPr lang="de-DE" dirty="0"/>
-          </a:p>
-          <a:p>
-            <a:pPr>
+            <a:r>
+              <a:rPr lang="de-DE" dirty="0">
+                <a:latin typeface="+mn-lt"/>
+              </a:rPr>
+              <a:t>Pro Pipeline und Fold werden zwei Modelle trainiert: Ch1 und Ch2. </a:t>
+            </a:r>
+          </a:p>
+          <a:p>
+            <a:pPr marL="800100" lvl="1" indent="-342900">
               <a:buFont typeface="Arial" panose="020B0604020202020204" pitchFamily="34" charset="0"/>
               <a:buChar char="•"/>
             </a:pPr>
             <a:r>
-              <a:rPr lang="de-DE" dirty="0"/>
-              <a:t>Unterschiedlich viele </a:t>
-            </a:r>
-            <a:r>
-              <a:rPr lang="de-DE" dirty="0" err="1"/>
-              <a:t>mID</a:t>
-            </a:r>
-            <a:r>
-              <a:rPr lang="de-DE" dirty="0"/>
-              <a:t> pro Zahnrad</a:t>
-            </a:r>
-          </a:p>
-          <a:p>
-            <a:pPr>
-              <a:buFont typeface="Arial" panose="020B0604020202020204" pitchFamily="34" charset="0"/>
-              <a:buChar char="•"/>
-            </a:pPr>
-            <a:r>
-              <a:rPr lang="de-DE" dirty="0"/>
-              <a:t>Z01 und Z04 haben mehr Wiederholungsmessungen</a:t>
-            </a:r>
-          </a:p>
-          <a:p>
-            <a:pPr>
-              <a:buFont typeface="Arial" panose="020B0604020202020204" pitchFamily="34" charset="0"/>
-              <a:buChar char="•"/>
-            </a:pPr>
-            <a:r>
-              <a:rPr lang="de-DE" dirty="0"/>
-              <a:t>Gefahr: Modell gewichtet diese Proben stärker</a:t>
-            </a:r>
-          </a:p>
-          <a:p>
-            <a:pPr>
-              <a:buFont typeface="Arial" panose="020B0604020202020204" pitchFamily="34" charset="0"/>
-              <a:buChar char="•"/>
-            </a:pPr>
-            <a:r>
-              <a:rPr lang="de-DE" dirty="0"/>
-              <a:t>Lösung: Mittelung über </a:t>
-            </a:r>
-            <a:r>
-              <a:rPr lang="de-DE" dirty="0" err="1"/>
-              <a:t>mID</a:t>
-            </a:r>
-            <a:r>
-              <a:rPr lang="de-DE" dirty="0"/>
-              <a:t> nach Merkmalextraktion</a:t>
-            </a:r>
-          </a:p>
-        </p:txBody>
-      </p:sp>
-      <p:sp>
-        <p:nvSpPr>
-          <p:cNvPr id="3" name="Datumsplatzhalter 2">
-            <a:extLst>
-              <a:ext uri="{FF2B5EF4-FFF2-40B4-BE49-F238E27FC236}">
-                <a16:creationId xmlns:a16="http://schemas.microsoft.com/office/drawing/2014/main" id="{B976C4FB-8771-9C12-EC14-FF917FA91936}"/>
-              </a:ext>
-            </a:extLst>
-          </p:cNvPr>
-          <p:cNvSpPr>
-            <a:spLocks noGrp="1"/>
-          </p:cNvSpPr>
-          <p:nvPr>
-            <p:ph type="dt" sz="half" idx="12"/>
-          </p:nvPr>
-        </p:nvSpPr>
-        <p:spPr/>
-        <p:txBody>
-          <a:bodyPr/>
-          <a:lstStyle/>
-          <a:p>
-            <a:r>
-              <a:rPr lang="de-DE"/>
-              <a:t>16.07.2026</a:t>
-            </a:r>
-          </a:p>
-        </p:txBody>
-      </p:sp>
-      <p:sp>
-        <p:nvSpPr>
-          <p:cNvPr id="6" name="Fußzeilenplatzhalter 5">
-            <a:extLst>
-              <a:ext uri="{FF2B5EF4-FFF2-40B4-BE49-F238E27FC236}">
-                <a16:creationId xmlns:a16="http://schemas.microsoft.com/office/drawing/2014/main" id="{43258A7A-FB46-C9EE-27DB-D5BFD61A3880}"/>
-              </a:ext>
-            </a:extLst>
-          </p:cNvPr>
-          <p:cNvSpPr>
-            <a:spLocks noGrp="1"/>
-          </p:cNvSpPr>
-          <p:nvPr>
-            <p:ph type="ftr" sz="quarter" idx="11"/>
-          </p:nvPr>
-        </p:nvSpPr>
-        <p:spPr/>
-        <p:txBody>
-          <a:bodyPr/>
-          <a:lstStyle/>
-          <a:p>
-            <a:r>
-              <a:rPr lang="de-DE"/>
-              <a:t>Materialdiagnostik: Task 3</a:t>
-            </a:r>
-          </a:p>
-        </p:txBody>
-      </p:sp>
-      <p:sp>
-        <p:nvSpPr>
-          <p:cNvPr id="2" name="Foliennummernplatzhalter 1">
-            <a:extLst>
-              <a:ext uri="{FF2B5EF4-FFF2-40B4-BE49-F238E27FC236}">
-                <a16:creationId xmlns:a16="http://schemas.microsoft.com/office/drawing/2014/main" id="{A01E9335-BE43-12DC-80C0-D25BC6A0C1D7}"/>
-              </a:ext>
-            </a:extLst>
-          </p:cNvPr>
-          <p:cNvSpPr>
-            <a:spLocks noGrp="1"/>
-          </p:cNvSpPr>
-          <p:nvPr>
-            <p:ph type="sldNum" sz="quarter" idx="10"/>
-          </p:nvPr>
-        </p:nvSpPr>
-        <p:spPr/>
-        <p:txBody>
-          <a:bodyPr/>
-          <a:lstStyle/>
-          <a:p>
-            <a:fld id="{80B4FCE6-DC73-4135-BC56-1F242D45A84C}" type="slidenum">
-              <a:rPr lang="de-DE" smtClean="0"/>
-              <a:t>5</a:t>
-            </a:fld>
-            <a:endParaRPr lang="de-DE"/>
+              <a:rPr lang="de-DE" sz="2000" dirty="0">
+                <a:latin typeface="+mn-lt"/>
+              </a:rPr>
+              <a:t>Z05 und die jeweils ausgelassene gesunde Gruppe beeinflussen weder Skalierung noch Training oder Schwellenwert.</a:t>
+            </a:r>
+          </a:p>
+          <a:p>
+            <a:endParaRPr lang="de-DE" dirty="0">
+              <a:latin typeface="+mn-lt"/>
+            </a:endParaRPr>
           </a:p>
         </p:txBody>
       </p:sp>
@@ -11148,95 +11812,6 @@
       </p:grpSpPr>
       <p:sp>
         <p:nvSpPr>
-          <p:cNvPr id="10" name="Inhaltsplatzhalter 9">
-            <a:extLst>
-              <a:ext uri="{FF2B5EF4-FFF2-40B4-BE49-F238E27FC236}">
-                <a16:creationId xmlns:a16="http://schemas.microsoft.com/office/drawing/2014/main" id="{3CFC55D7-9A46-28B7-DCDC-9006970AADA8}"/>
-              </a:ext>
-            </a:extLst>
-          </p:cNvPr>
-          <p:cNvSpPr>
-            <a:spLocks noGrp="1"/>
-          </p:cNvSpPr>
-          <p:nvPr>
-            <p:ph sz="quarter" idx="13"/>
-          </p:nvPr>
-        </p:nvSpPr>
-        <p:spPr/>
-        <p:txBody>
-          <a:bodyPr/>
-          <a:lstStyle/>
-          <a:p>
-            <a:pPr>
-              <a:buFont typeface="Arial" panose="020B0604020202020204" pitchFamily="34" charset="0"/>
-              <a:buChar char="•"/>
-            </a:pPr>
-            <a:endParaRPr lang="de-DE" dirty="0"/>
-          </a:p>
-          <a:p>
-            <a:pPr>
-              <a:buFont typeface="Arial" panose="020B0604020202020204" pitchFamily="34" charset="0"/>
-              <a:buChar char="•"/>
-            </a:pPr>
-            <a:r>
-              <a:rPr lang="de-DE" dirty="0"/>
-              <a:t>Gleiche Merkmalsfamilien wie in Aufgabe 2</a:t>
-            </a:r>
-          </a:p>
-          <a:p>
-            <a:pPr lvl="1">
-              <a:buFont typeface="Arial" panose="020B0604020202020204" pitchFamily="34" charset="0"/>
-              <a:buChar char="•"/>
-            </a:pPr>
-            <a:r>
-              <a:rPr lang="de-DE" dirty="0"/>
-              <a:t>MFCC und Delta-MFCC</a:t>
-            </a:r>
-          </a:p>
-          <a:p>
-            <a:pPr lvl="1">
-              <a:buFont typeface="Arial" panose="020B0604020202020204" pitchFamily="34" charset="0"/>
-              <a:buChar char="•"/>
-            </a:pPr>
-            <a:r>
-              <a:rPr lang="de-DE" dirty="0"/>
-              <a:t>Spektralzentrum, Bandbreite, Roll-off</a:t>
-            </a:r>
-          </a:p>
-          <a:p>
-            <a:pPr lvl="1">
-              <a:buFont typeface="Arial" panose="020B0604020202020204" pitchFamily="34" charset="0"/>
-              <a:buChar char="•"/>
-            </a:pPr>
-            <a:r>
-              <a:rPr lang="de-DE" dirty="0"/>
-              <a:t>Spektralkontrast</a:t>
-            </a:r>
-          </a:p>
-          <a:p>
-            <a:pPr lvl="1">
-              <a:buFont typeface="Arial" panose="020B0604020202020204" pitchFamily="34" charset="0"/>
-              <a:buChar char="•"/>
-            </a:pPr>
-            <a:r>
-              <a:rPr lang="de-DE" dirty="0"/>
-              <a:t>Chroma-STFT und Chroma-CENS</a:t>
-            </a:r>
-          </a:p>
-          <a:p>
-            <a:pPr lvl="1">
-              <a:buFont typeface="Arial" panose="020B0604020202020204" pitchFamily="34" charset="0"/>
-              <a:buChar char="•"/>
-            </a:pPr>
-            <a:r>
-              <a:rPr lang="de-DE" dirty="0"/>
-              <a:t>Zero-Crossing-Rate und RMS-Energie</a:t>
-            </a:r>
-          </a:p>
-        </p:txBody>
-      </p:sp>
-      <p:sp>
-        <p:nvSpPr>
           <p:cNvPr id="5" name="Titel 4">
             <a:extLst>
               <a:ext uri="{FF2B5EF4-FFF2-40B4-BE49-F238E27FC236}">
@@ -11269,64 +11844,7 @@
                 <a:uFillTx/>
                 <a:ea typeface="ヒラギノ角ゴ Pro W3"/>
               </a:rPr>
-              <a:t>Merkmalsextraktion</a:t>
-            </a:r>
-            <a:endParaRPr lang="de-DE" dirty="0"/>
-          </a:p>
-        </p:txBody>
-      </p:sp>
-      <p:sp>
-        <p:nvSpPr>
-          <p:cNvPr id="6" name="Datumsplatzhalter 5">
-            <a:extLst>
-              <a:ext uri="{FF2B5EF4-FFF2-40B4-BE49-F238E27FC236}">
-                <a16:creationId xmlns:a16="http://schemas.microsoft.com/office/drawing/2014/main" id="{38EAA6FE-52E8-2872-6AAC-AF23B87F158D}"/>
-              </a:ext>
-            </a:extLst>
-          </p:cNvPr>
-          <p:cNvSpPr>
-            <a:spLocks noGrp="1"/>
-          </p:cNvSpPr>
-          <p:nvPr>
-            <p:ph type="dt" sz="half" idx="12"/>
-          </p:nvPr>
-        </p:nvSpPr>
-        <p:spPr/>
-        <p:txBody>
-          <a:bodyPr/>
-          <a:lstStyle/>
-          <a:p>
-            <a:r>
-              <a:rPr lang="de-DE"/>
-              <a:t>16.07.2026</a:t>
-            </a:r>
-          </a:p>
-        </p:txBody>
-      </p:sp>
-      <p:sp>
-        <p:nvSpPr>
-          <p:cNvPr id="7" name="Fußzeilenplatzhalter 6">
-            <a:extLst>
-              <a:ext uri="{FF2B5EF4-FFF2-40B4-BE49-F238E27FC236}">
-                <a16:creationId xmlns:a16="http://schemas.microsoft.com/office/drawing/2014/main" id="{F0CF3568-ABC8-8799-4537-678150D7687D}"/>
-              </a:ext>
-            </a:extLst>
-          </p:cNvPr>
-          <p:cNvSpPr>
-            <a:spLocks noGrp="1"/>
-          </p:cNvSpPr>
-          <p:nvPr>
-            <p:ph type="ftr" sz="quarter" idx="11"/>
-          </p:nvPr>
-        </p:nvSpPr>
-        <p:spPr/>
-        <p:txBody>
-          <a:bodyPr/>
-          <a:lstStyle/>
-          <a:p>
-            <a:r>
-              <a:rPr lang="de-DE"/>
-              <a:t>Materialdiagnostik: Task 3</a:t>
+              <a:t>Autoencoder</a:t>
             </a:r>
             <a:endParaRPr lang="de-DE" dirty="0"/>
           </a:p>
@@ -11361,6 +11879,191 @@
           </a:p>
         </p:txBody>
       </p:sp>
+      <p:sp>
+        <p:nvSpPr>
+          <p:cNvPr id="7" name="Fußzeilenplatzhalter 6">
+            <a:extLst>
+              <a:ext uri="{FF2B5EF4-FFF2-40B4-BE49-F238E27FC236}">
+                <a16:creationId xmlns:a16="http://schemas.microsoft.com/office/drawing/2014/main" id="{F0CF3568-ABC8-8799-4537-678150D7687D}"/>
+              </a:ext>
+            </a:extLst>
+          </p:cNvPr>
+          <p:cNvSpPr>
+            <a:spLocks noGrp="1"/>
+          </p:cNvSpPr>
+          <p:nvPr>
+            <p:ph type="ftr" sz="quarter" idx="11"/>
+          </p:nvPr>
+        </p:nvSpPr>
+        <p:spPr/>
+        <p:txBody>
+          <a:bodyPr/>
+          <a:lstStyle/>
+          <a:p>
+            <a:r>
+              <a:rPr lang="de-DE"/>
+              <a:t>Materialdiagnostik: Task 4</a:t>
+            </a:r>
+            <a:endParaRPr lang="de-DE" dirty="0"/>
+          </a:p>
+        </p:txBody>
+      </p:sp>
+      <p:sp>
+        <p:nvSpPr>
+          <p:cNvPr id="6" name="Datumsplatzhalter 5">
+            <a:extLst>
+              <a:ext uri="{FF2B5EF4-FFF2-40B4-BE49-F238E27FC236}">
+                <a16:creationId xmlns:a16="http://schemas.microsoft.com/office/drawing/2014/main" id="{38EAA6FE-52E8-2872-6AAC-AF23B87F158D}"/>
+              </a:ext>
+            </a:extLst>
+          </p:cNvPr>
+          <p:cNvSpPr>
+            <a:spLocks noGrp="1"/>
+          </p:cNvSpPr>
+          <p:nvPr>
+            <p:ph type="dt" sz="half" idx="12"/>
+          </p:nvPr>
+        </p:nvSpPr>
+        <p:spPr/>
+        <p:txBody>
+          <a:bodyPr/>
+          <a:lstStyle/>
+          <a:p>
+            <a:r>
+              <a:rPr lang="de-DE"/>
+              <a:t>23.07.2026</a:t>
+            </a:r>
+          </a:p>
+        </p:txBody>
+      </p:sp>
+      <p:sp>
+        <p:nvSpPr>
+          <p:cNvPr id="10" name="Inhaltsplatzhalter 9">
+            <a:extLst>
+              <a:ext uri="{FF2B5EF4-FFF2-40B4-BE49-F238E27FC236}">
+                <a16:creationId xmlns:a16="http://schemas.microsoft.com/office/drawing/2014/main" id="{3CFC55D7-9A46-28B7-DCDC-9006970AADA8}"/>
+              </a:ext>
+            </a:extLst>
+          </p:cNvPr>
+          <p:cNvSpPr>
+            <a:spLocks noGrp="1"/>
+          </p:cNvSpPr>
+          <p:nvPr>
+            <p:ph sz="quarter" idx="13"/>
+          </p:nvPr>
+        </p:nvSpPr>
+        <p:spPr/>
+        <p:txBody>
+          <a:bodyPr/>
+          <a:lstStyle/>
+          <a:p>
+            <a:pPr>
+              <a:buFont typeface="Arial" panose="020B0604020202020204" pitchFamily="34" charset="0"/>
+              <a:buChar char="•"/>
+            </a:pPr>
+            <a:r>
+              <a:rPr lang="de-DE" dirty="0"/>
+              <a:t>dichter Autoencoder (`</a:t>
+            </a:r>
+            <a:r>
+              <a:rPr lang="de-DE" dirty="0" err="1"/>
+              <a:t>MLPRegressor</a:t>
+            </a:r>
+            <a:r>
+              <a:rPr lang="de-DE" dirty="0"/>
+              <a:t>`), </a:t>
+            </a:r>
+            <a:r>
+              <a:rPr lang="de-DE" dirty="0" err="1"/>
+              <a:t>ReLU</a:t>
+            </a:r>
+            <a:r>
+              <a:rPr lang="de-DE" dirty="0"/>
+              <a:t> und Adam</a:t>
+            </a:r>
+          </a:p>
+          <a:p>
+            <a:pPr>
+              <a:buFont typeface="Arial" panose="020B0604020202020204" pitchFamily="34" charset="0"/>
+              <a:buChar char="•"/>
+            </a:pPr>
+            <a:r>
+              <a:rPr lang="de-DE" dirty="0"/>
+              <a:t>Lernrate 0,001; L2-Regularisierung 0,0001</a:t>
+            </a:r>
+          </a:p>
+          <a:p>
+            <a:pPr>
+              <a:buFont typeface="Arial" panose="020B0604020202020204" pitchFamily="34" charset="0"/>
+              <a:buChar char="•"/>
+            </a:pPr>
+            <a:r>
+              <a:rPr lang="de-DE" dirty="0"/>
+              <a:t>maximal 2.000 Epochen, Early </a:t>
+            </a:r>
+            <a:r>
+              <a:rPr lang="de-DE" dirty="0" err="1"/>
+              <a:t>Stopping</a:t>
+            </a:r>
+            <a:r>
+              <a:rPr lang="de-DE" dirty="0"/>
+              <a:t> mit 15 %</a:t>
+            </a:r>
+          </a:p>
+          <a:p>
+            <a:pPr>
+              <a:buFont typeface="Arial" panose="020B0604020202020204" pitchFamily="34" charset="0"/>
+              <a:buChar char="•"/>
+            </a:pPr>
+            <a:r>
+              <a:rPr lang="de-DE" dirty="0"/>
+              <a:t>feste Architektur und Seed 42</a:t>
+            </a:r>
+          </a:p>
+          <a:p>
+            <a:pPr>
+              <a:buFont typeface="Arial" panose="020B0604020202020204" pitchFamily="34" charset="0"/>
+              <a:buChar char="•"/>
+            </a:pPr>
+            <a:r>
+              <a:rPr lang="de-DE" dirty="0"/>
+              <a:t>Training ausschließlich mit Label 1</a:t>
+            </a:r>
+          </a:p>
+        </p:txBody>
+      </p:sp>
+      <p:pic>
+        <p:nvPicPr>
+          <p:cNvPr id="8" name="Inhaltsplatzhalter 7">
+            <a:extLst>
+              <a:ext uri="{FF2B5EF4-FFF2-40B4-BE49-F238E27FC236}">
+                <a16:creationId xmlns:a16="http://schemas.microsoft.com/office/drawing/2014/main" id="{2EA8FBC2-B3AE-5857-0E7C-EB1455065677}"/>
+              </a:ext>
+            </a:extLst>
+          </p:cNvPr>
+          <p:cNvPicPr>
+            <a:picLocks noGrp="1" noChangeAspect="1"/>
+          </p:cNvPicPr>
+          <p:nvPr>
+            <p:ph sz="quarter" idx="14"/>
+          </p:nvPr>
+        </p:nvPicPr>
+        <p:blipFill>
+          <a:blip r:embed="rId3"/>
+          <a:stretch>
+            <a:fillRect/>
+          </a:stretch>
+        </p:blipFill>
+        <p:spPr>
+          <a:xfrm>
+            <a:off x="6096000" y="1745182"/>
+            <a:ext cx="5754688" cy="3606136"/>
+          </a:xfrm>
+          <a:prstGeom prst="rect">
+            <a:avLst/>
+          </a:prstGeom>
+        </p:spPr>
+      </p:pic>
     </p:spTree>
     <p:extLst>
       <p:ext uri="{BB962C8B-B14F-4D97-AF65-F5344CB8AC3E}">
@@ -11425,7 +12128,7 @@
           <a:p>
             <a:r>
               <a:rPr lang="de-DE" sz="3200" dirty="0"/>
-              <a:t>Split und Channel-Behandlung</a:t>
+              <a:t>Metriken &amp; Schwelle</a:t>
             </a:r>
           </a:p>
         </p:txBody>
@@ -11453,7 +12156,7 @@
           <a:p>
             <a:r>
               <a:rPr lang="de-DE"/>
-              <a:t>Materialdiagnostik: Task 3</a:t>
+              <a:t>Materialdiagnostik: Task 4</a:t>
             </a:r>
             <a:endParaRPr lang="de-DE" dirty="0"/>
           </a:p>
@@ -11482,7 +12185,7 @@
           <a:p>
             <a:r>
               <a:rPr lang="de-DE"/>
-              <a:t>16.07.2026</a:t>
+              <a:t>23.07.2026</a:t>
             </a:r>
           </a:p>
         </p:txBody>
@@ -11506,7 +12209,7 @@
         <p:spPr>
           <a:xfrm>
             <a:off x="341312" y="1620000"/>
-            <a:ext cx="7467874" cy="4316412"/>
+            <a:ext cx="9748619" cy="4316412"/>
           </a:xfrm>
         </p:spPr>
         <p:txBody>
@@ -11517,7 +12220,28 @@
               <a:buFont typeface="Arial" panose="020B0604020202020204" pitchFamily="34" charset="0"/>
               <a:buChar char="•"/>
             </a:pPr>
-            <a:endParaRPr lang="de-DE" dirty="0"/>
+            <a:r>
+              <a:rPr lang="de-DE" b="1" dirty="0" err="1"/>
+              <a:t>Anomaliescore</a:t>
+            </a:r>
+            <a:r>
+              <a:rPr lang="de-DE" b="1" dirty="0"/>
+              <a:t>:</a:t>
+            </a:r>
+            <a:r>
+              <a:rPr lang="de-DE" dirty="0"/>
+              <a:t> </a:t>
+            </a:r>
+          </a:p>
+          <a:p>
+            <a:pPr lvl="1">
+              <a:buFont typeface="Arial" panose="020B0604020202020204" pitchFamily="34" charset="0"/>
+              <a:buChar char="•"/>
+            </a:pPr>
+            <a:r>
+              <a:rPr lang="de-DE" dirty="0"/>
+              <a:t>mittlerer quadratischer Rekonstruktionsfehler im standardisierten Merkmalsraum</a:t>
+            </a:r>
           </a:p>
           <a:p>
             <a:pPr>
@@ -11525,8 +12249,82 @@
               <a:buChar char="•"/>
             </a:pPr>
             <a:r>
+              <a:rPr lang="de-DE" b="1" dirty="0"/>
+              <a:t>Schwelle:</a:t>
+            </a:r>
+            <a:r>
               <a:rPr lang="de-DE" dirty="0"/>
-              <a:t>Merkmalsextraktion pro Datei vor der Mittelung</a:t>
+              <a:t> </a:t>
+            </a:r>
+          </a:p>
+          <a:p>
+            <a:pPr lvl="1">
+              <a:buFont typeface="Arial" panose="020B0604020202020204" pitchFamily="34" charset="0"/>
+              <a:buChar char="•"/>
+            </a:pPr>
+            <a:r>
+              <a:rPr lang="de-DE" dirty="0"/>
+              <a:t>95%-Quantil der Fehler im gesunden Training</a:t>
+            </a:r>
+          </a:p>
+          <a:p>
+            <a:pPr lvl="1">
+              <a:buFont typeface="Arial" panose="020B0604020202020204" pitchFamily="34" charset="0"/>
+              <a:buChar char="•"/>
+            </a:pPr>
+            <a:r>
+              <a:rPr lang="de-DE" dirty="0"/>
+              <a:t>oberhalb der Schwelle: anomal (Label 0)</a:t>
+            </a:r>
+          </a:p>
+          <a:p>
+            <a:pPr lvl="1">
+              <a:buFont typeface="Arial" panose="020B0604020202020204" pitchFamily="34" charset="0"/>
+              <a:buChar char="•"/>
+            </a:pPr>
+            <a:r>
+              <a:rPr lang="de-DE" dirty="0"/>
+              <a:t>keine Verwendung von Z05 zur Schwellenoptimierung</a:t>
+            </a:r>
+          </a:p>
+          <a:p>
+            <a:pPr lvl="1">
+              <a:buFont typeface="Arial" panose="020B0604020202020204" pitchFamily="34" charset="0"/>
+              <a:buChar char="•"/>
+            </a:pPr>
+            <a:r>
+              <a:rPr lang="de-DE" dirty="0"/>
+              <a:t>Sensitivität für Z05 und Spezifität für gesunde Testgruppen</a:t>
+            </a:r>
+          </a:p>
+          <a:p>
+            <a:pPr lvl="1">
+              <a:buFont typeface="Arial" panose="020B0604020202020204" pitchFamily="34" charset="0"/>
+              <a:buChar char="•"/>
+            </a:pPr>
+            <a:r>
+              <a:rPr lang="de-DE" dirty="0" err="1"/>
+              <a:t>Accuracy</a:t>
+            </a:r>
+            <a:r>
+              <a:rPr lang="de-DE" dirty="0"/>
+              <a:t>, </a:t>
+            </a:r>
+            <a:r>
+              <a:rPr lang="de-DE" dirty="0" err="1"/>
+              <a:t>Balanced</a:t>
+            </a:r>
+            <a:r>
+              <a:rPr lang="de-DE" dirty="0"/>
+              <a:t> </a:t>
+            </a:r>
+            <a:r>
+              <a:rPr lang="de-DE" dirty="0" err="1"/>
+              <a:t>Accuracy</a:t>
+            </a:r>
+            <a:r>
+              <a:rPr lang="de-DE" dirty="0"/>
+              <a:t> (BAR), F1 und ROC-AUC</a:t>
             </a:r>
           </a:p>
           <a:p>
@@ -11535,26 +12333,12 @@
               <a:buChar char="•"/>
             </a:pPr>
             <a:r>
+              <a:rPr lang="de-DE" b="1" dirty="0"/>
+              <a:t>Primärer Vergleich:</a:t>
+            </a:r>
+            <a:r>
               <a:rPr lang="de-DE" dirty="0"/>
-              <a:t>Feature-Mittelung über `</a:t>
-            </a:r>
-            <a:r>
-              <a:rPr lang="de-DE" dirty="0" err="1"/>
-              <a:t>mID</a:t>
-            </a:r>
-            <a:r>
-              <a:rPr lang="de-DE" dirty="0"/>
-              <a:t>`</a:t>
-            </a:r>
-          </a:p>
-          <a:p>
-            <a:pPr>
-              <a:buFont typeface="Arial" panose="020B0604020202020204" pitchFamily="34" charset="0"/>
-              <a:buChar char="•"/>
-            </a:pPr>
-            <a:r>
-              <a:rPr lang="de-DE" dirty="0"/>
-              <a:t>Zwei Modelle:</a:t>
+              <a:t> </a:t>
             </a:r>
           </a:p>
           <a:p>
@@ -11564,47 +12348,8 @@
             </a:pPr>
             <a:r>
               <a:rPr lang="de-DE" dirty="0"/>
-              <a:t>Ch1</a:t>
-            </a:r>
-          </a:p>
-          <a:p>
-            <a:pPr lvl="1">
-              <a:buFont typeface="Arial" panose="020B0604020202020204" pitchFamily="34" charset="0"/>
-              <a:buChar char="•"/>
-            </a:pPr>
-            <a:r>
-              <a:rPr lang="de-DE" dirty="0"/>
-              <a:t>Ch2</a:t>
-            </a:r>
-          </a:p>
-          <a:p>
-            <a:pPr>
-              <a:buFont typeface="Arial" panose="020B0604020202020204" pitchFamily="34" charset="0"/>
-              <a:buChar char="•"/>
-            </a:pPr>
-            <a:r>
-              <a:rPr lang="de-DE" dirty="0"/>
-              <a:t>Aufteilung in </a:t>
-            </a:r>
-            <a:r>
-              <a:rPr lang="de-DE" dirty="0" err="1"/>
-              <a:t>train</a:t>
-            </a:r>
-            <a:r>
-              <a:rPr lang="de-DE" dirty="0"/>
-              <a:t>-set, </a:t>
-            </a:r>
-            <a:r>
-              <a:rPr lang="de-DE" dirty="0" err="1"/>
-              <a:t>dev</a:t>
-            </a:r>
-            <a:r>
-              <a:rPr lang="de-DE" dirty="0"/>
-              <a:t>-set und test-set</a:t>
-            </a:r>
-          </a:p>
-          <a:p>
-            <a:endParaRPr lang="de-DE" dirty="0"/>
+              <a:t>Makromittel der BAR über alle acht Modelle, weil die ungefilterte Pipeline ungleiche Testgruppengrößen besitzt.</a:t>
+            </a:r>
           </a:p>
         </p:txBody>
       </p:sp>
@@ -11696,7 +12441,7 @@
           <a:p>
             <a:r>
               <a:rPr lang="de-DE" sz="3200" dirty="0"/>
-              <a:t>Train-, Dev- und Testsplit</a:t>
+              <a:t>Einzelmessungen</a:t>
             </a:r>
             <a:endParaRPr lang="de-DE" dirty="0"/>
           </a:p>
@@ -11704,6 +12449,35 @@
       </p:sp>
       <p:sp>
         <p:nvSpPr>
+          <p:cNvPr id="11" name="Foliennummernplatzhalter 10">
+            <a:extLst>
+              <a:ext uri="{FF2B5EF4-FFF2-40B4-BE49-F238E27FC236}">
+                <a16:creationId xmlns:a16="http://schemas.microsoft.com/office/drawing/2014/main" id="{156E314E-BF1C-F73F-2354-4146EF630ABE}"/>
+              </a:ext>
+            </a:extLst>
+          </p:cNvPr>
+          <p:cNvSpPr>
+            <a:spLocks noGrp="1"/>
+          </p:cNvSpPr>
+          <p:nvPr>
+            <p:ph type="sldNum" sz="quarter" idx="10"/>
+          </p:nvPr>
+        </p:nvSpPr>
+        <p:spPr/>
+        <p:txBody>
+          <a:bodyPr/>
+          <a:lstStyle/>
+          <a:p>
+            <a:fld id="{80B4FCE6-DC73-4135-BC56-1F242D45A84C}" type="slidenum">
+              <a:rPr lang="de-DE" smtClean="0"/>
+              <a:t>8</a:t>
+            </a:fld>
+            <a:endParaRPr lang="de-DE"/>
+          </a:p>
+        </p:txBody>
+      </p:sp>
+      <p:sp>
+        <p:nvSpPr>
           <p:cNvPr id="7" name="Fußzeilenplatzhalter 6">
             <a:extLst>
               <a:ext uri="{FF2B5EF4-FFF2-40B4-BE49-F238E27FC236}">
@@ -11725,7 +12499,7 @@
           <a:p>
             <a:r>
               <a:rPr lang="de-DE"/>
-              <a:t>Materialdiagnostik: Task 3</a:t>
+              <a:t>Materialdiagnostik: Task 4</a:t>
             </a:r>
             <a:endParaRPr lang="de-DE" dirty="0"/>
           </a:p>
@@ -11754,17 +12528,17 @@
           <a:p>
             <a:r>
               <a:rPr lang="de-DE"/>
-              <a:t>16.07.2026</a:t>
+              <a:t>23.07.2026</a:t>
             </a:r>
           </a:p>
         </p:txBody>
       </p:sp>
       <p:pic>
         <p:nvPicPr>
-          <p:cNvPr id="9" name="Inhaltsplatzhalter 8">
-            <a:extLst>
-              <a:ext uri="{FF2B5EF4-FFF2-40B4-BE49-F238E27FC236}">
-                <a16:creationId xmlns:a16="http://schemas.microsoft.com/office/drawing/2014/main" id="{5AD18B85-441C-A6ED-1F44-169EB76A5913}"/>
+          <p:cNvPr id="13" name="Inhaltsplatzhalter 12">
+            <a:extLst>
+              <a:ext uri="{FF2B5EF4-FFF2-40B4-BE49-F238E27FC236}">
+                <a16:creationId xmlns:a16="http://schemas.microsoft.com/office/drawing/2014/main" id="{2782142D-C61F-00CC-FA4D-ADBFDFA20C07}"/>
               </a:ext>
             </a:extLst>
           </p:cNvPr>
@@ -11783,142 +12557,607 @@
         </p:blipFill>
         <p:spPr>
           <a:xfrm>
-            <a:off x="341312" y="1942409"/>
-            <a:ext cx="6028951" cy="2973181"/>
+            <a:off x="113212" y="1935586"/>
+            <a:ext cx="5754686" cy="3382649"/>
           </a:xfrm>
           <a:prstGeom prst="rect">
             <a:avLst/>
           </a:prstGeom>
         </p:spPr>
       </p:pic>
-      <p:sp>
-        <p:nvSpPr>
-          <p:cNvPr id="10" name="Inhaltsplatzhalter 9">
-            <a:extLst>
-              <a:ext uri="{FF2B5EF4-FFF2-40B4-BE49-F238E27FC236}">
-                <a16:creationId xmlns:a16="http://schemas.microsoft.com/office/drawing/2014/main" id="{F6F33955-C302-D8CD-0F72-37CDC29CBBA0}"/>
-              </a:ext>
-            </a:extLst>
-          </p:cNvPr>
-          <p:cNvSpPr>
-            <a:spLocks noGrp="1"/>
-          </p:cNvSpPr>
+      <p:graphicFrame>
+        <p:nvGraphicFramePr>
+          <p:cNvPr id="8" name="Inhaltsplatzhalter 7">
+            <a:extLst>
+              <a:ext uri="{FF2B5EF4-FFF2-40B4-BE49-F238E27FC236}">
+                <a16:creationId xmlns:a16="http://schemas.microsoft.com/office/drawing/2014/main" id="{E865B96F-7D07-5129-864C-8AE5D6202899}"/>
+              </a:ext>
+            </a:extLst>
+          </p:cNvPr>
+          <p:cNvGraphicFramePr>
+            <a:graphicFrameLocks noGrp="1"/>
+          </p:cNvGraphicFramePr>
           <p:nvPr>
             <p:ph sz="quarter" idx="14"/>
-          </p:nvPr>
-        </p:nvSpPr>
-        <p:spPr/>
-        <p:txBody>
-          <a:bodyPr/>
-          <a:lstStyle/>
-          <a:p>
-            <a:pPr marL="400050">
-              <a:buFont typeface="Arial" panose="020B0604020202020204" pitchFamily="34" charset="0"/>
-              <a:buChar char="•"/>
-            </a:pPr>
-            <a:r>
-              <a:rPr lang="de-DE" dirty="0"/>
-              <a:t>Train: </a:t>
-            </a:r>
-          </a:p>
-          <a:p>
-            <a:pPr lvl="1">
-              <a:buFont typeface="Arial" panose="020B0604020202020204" pitchFamily="34" charset="0"/>
-              <a:buChar char="•"/>
-            </a:pPr>
-            <a:r>
-              <a:rPr lang="de-DE" dirty="0"/>
-              <a:t>Z01, Z02 + </a:t>
-            </a:r>
-            <a:br>
-              <a:rPr lang="de-DE" dirty="0"/>
-            </a:br>
-            <a:r>
-              <a:rPr lang="de-DE" dirty="0"/>
-              <a:t>Z05-Positionen </a:t>
-            </a:r>
-            <a:br>
-              <a:rPr lang="de-DE" dirty="0"/>
-            </a:br>
-            <a:r>
-              <a:rPr lang="de-DE" dirty="0"/>
-              <a:t>Pos00, Pos01, Pos02, Pos04, Pos06, Pos08</a:t>
-            </a:r>
-          </a:p>
-          <a:p>
-            <a:pPr>
-              <a:buFont typeface="Arial" panose="020B0604020202020204" pitchFamily="34" charset="0"/>
-              <a:buChar char="•"/>
-            </a:pPr>
-            <a:r>
-              <a:rPr lang="de-DE" dirty="0"/>
-              <a:t>Dev:  </a:t>
-            </a:r>
-          </a:p>
-          <a:p>
-            <a:pPr lvl="1">
-              <a:buFont typeface="Arial" panose="020B0604020202020204" pitchFamily="34" charset="0"/>
-              <a:buChar char="•"/>
-            </a:pPr>
-            <a:r>
-              <a:rPr lang="de-DE" dirty="0"/>
-              <a:t>Z04      + Z05-Positionen Pos03, Pos05</a:t>
-            </a:r>
-          </a:p>
-          <a:p>
-            <a:pPr>
-              <a:buFont typeface="Arial" panose="020B0604020202020204" pitchFamily="34" charset="0"/>
-              <a:buChar char="•"/>
-            </a:pPr>
-            <a:r>
-              <a:rPr lang="de-DE" dirty="0"/>
-              <a:t>Test:  </a:t>
-            </a:r>
-          </a:p>
-          <a:p>
-            <a:pPr lvl="1">
-              <a:buFont typeface="Arial" panose="020B0604020202020204" pitchFamily="34" charset="0"/>
-              <a:buChar char="•"/>
-            </a:pPr>
-            <a:r>
-              <a:rPr lang="de-DE" dirty="0"/>
-              <a:t>Z03      + Z05-Positionen Pos07, Pos09</a:t>
-            </a:r>
-          </a:p>
-          <a:p>
-            <a:endParaRPr lang="de-DE" dirty="0"/>
-          </a:p>
-        </p:txBody>
-      </p:sp>
-      <p:sp>
-        <p:nvSpPr>
-          <p:cNvPr id="11" name="Foliennummernplatzhalter 10">
-            <a:extLst>
-              <a:ext uri="{FF2B5EF4-FFF2-40B4-BE49-F238E27FC236}">
-                <a16:creationId xmlns:a16="http://schemas.microsoft.com/office/drawing/2014/main" id="{156E314E-BF1C-F73F-2354-4146EF630ABE}"/>
-              </a:ext>
-            </a:extLst>
-          </p:cNvPr>
-          <p:cNvSpPr>
-            <a:spLocks noGrp="1"/>
-          </p:cNvSpPr>
-          <p:nvPr>
-            <p:ph type="sldNum" sz="quarter" idx="10"/>
-          </p:nvPr>
-        </p:nvSpPr>
-        <p:spPr/>
-        <p:txBody>
-          <a:bodyPr/>
-          <a:lstStyle/>
-          <a:p>
-            <a:fld id="{80B4FCE6-DC73-4135-BC56-1F242D45A84C}" type="slidenum">
-              <a:rPr lang="de-DE" smtClean="0"/>
-              <a:t>8</a:t>
-            </a:fld>
-            <a:endParaRPr lang="de-DE"/>
-          </a:p>
-        </p:txBody>
-      </p:sp>
+            <p:extLst>
+              <p:ext uri="{D42A27DB-BD31-4B8C-83A1-F6EECF244321}">
+                <p14:modId xmlns:p14="http://schemas.microsoft.com/office/powerpoint/2010/main" val="404537205"/>
+              </p:ext>
+            </p:extLst>
+          </p:nvPr>
+        </p:nvGraphicFramePr>
+        <p:xfrm>
+          <a:off x="6324102" y="1935584"/>
+          <a:ext cx="5754689" cy="3382650"/>
+        </p:xfrm>
+        <a:graphic>
+          <a:graphicData uri="http://schemas.openxmlformats.org/drawingml/2006/table">
+            <a:tbl>
+              <a:tblPr firstRow="1" bandRow="1">
+                <a:tableStyleId>{5C22544A-7EE6-4342-B048-85BDC9FD1C3A}</a:tableStyleId>
+              </a:tblPr>
+              <a:tblGrid>
+                <a:gridCol w="654766">
+                  <a:extLst>
+                    <a:ext uri="{9D8B030D-6E8A-4147-A177-3AD203B41FA5}">
+                      <a16:colId xmlns:a16="http://schemas.microsoft.com/office/drawing/2014/main" val="1298068458"/>
+                    </a:ext>
+                  </a:extLst>
+                </a:gridCol>
+                <a:gridCol w="1271753">
+                  <a:extLst>
+                    <a:ext uri="{9D8B030D-6E8A-4147-A177-3AD203B41FA5}">
+                      <a16:colId xmlns:a16="http://schemas.microsoft.com/office/drawing/2014/main" val="3738618844"/>
+                    </a:ext>
+                  </a:extLst>
+                </a:gridCol>
+                <a:gridCol w="924911">
+                  <a:extLst>
+                    <a:ext uri="{9D8B030D-6E8A-4147-A177-3AD203B41FA5}">
+                      <a16:colId xmlns:a16="http://schemas.microsoft.com/office/drawing/2014/main" val="3642665571"/>
+                    </a:ext>
+                  </a:extLst>
+                </a:gridCol>
+                <a:gridCol w="924911">
+                  <a:extLst>
+                    <a:ext uri="{9D8B030D-6E8A-4147-A177-3AD203B41FA5}">
+                      <a16:colId xmlns:a16="http://schemas.microsoft.com/office/drawing/2014/main" val="3313767678"/>
+                    </a:ext>
+                  </a:extLst>
+                </a:gridCol>
+                <a:gridCol w="994429">
+                  <a:extLst>
+                    <a:ext uri="{9D8B030D-6E8A-4147-A177-3AD203B41FA5}">
+                      <a16:colId xmlns:a16="http://schemas.microsoft.com/office/drawing/2014/main" val="679683412"/>
+                    </a:ext>
+                  </a:extLst>
+                </a:gridCol>
+                <a:gridCol w="983919">
+                  <a:extLst>
+                    <a:ext uri="{9D8B030D-6E8A-4147-A177-3AD203B41FA5}">
+                      <a16:colId xmlns:a16="http://schemas.microsoft.com/office/drawing/2014/main" val="72820997"/>
+                    </a:ext>
+                  </a:extLst>
+                </a:gridCol>
+              </a:tblGrid>
+              <a:tr h="427161">
+                <a:tc rowSpan="2">
+                  <a:txBody>
+                    <a:bodyPr/>
+                    <a:lstStyle/>
+                    <a:p>
+                      <a:r>
+                        <a:rPr lang="de-DE" dirty="0"/>
+                        <a:t>Fold</a:t>
+                      </a:r>
+                    </a:p>
+                  </a:txBody>
+                  <a:tcPr/>
+                </a:tc>
+                <a:tc rowSpan="2">
+                  <a:txBody>
+                    <a:bodyPr/>
+                    <a:lstStyle/>
+                    <a:p>
+                      <a:r>
+                        <a:rPr lang="de-DE" dirty="0"/>
+                        <a:t>Sensitivität / TPR</a:t>
+                      </a:r>
+                    </a:p>
+                  </a:txBody>
+                  <a:tcPr/>
+                </a:tc>
+                <a:tc gridSpan="2">
+                  <a:txBody>
+                    <a:bodyPr/>
+                    <a:lstStyle/>
+                    <a:p>
+                      <a:r>
+                        <a:rPr lang="de-DE" dirty="0"/>
+                        <a:t>Spezifität / TNR</a:t>
+                      </a:r>
+                    </a:p>
+                  </a:txBody>
+                  <a:tcPr/>
+                </a:tc>
+                <a:tc hMerge="1">
+                  <a:txBody>
+                    <a:bodyPr/>
+                    <a:lstStyle/>
+                    <a:p>
+                      <a:endParaRPr lang="de-DE" dirty="0"/>
+                    </a:p>
+                  </a:txBody>
+                  <a:tcPr/>
+                </a:tc>
+                <a:tc gridSpan="2">
+                  <a:txBody>
+                    <a:bodyPr/>
+                    <a:lstStyle/>
+                    <a:p>
+                      <a:r>
+                        <a:rPr lang="de-DE" dirty="0"/>
+                        <a:t>BAR</a:t>
+                      </a:r>
+                    </a:p>
+                  </a:txBody>
+                  <a:tcPr/>
+                </a:tc>
+                <a:tc hMerge="1">
+                  <a:txBody>
+                    <a:bodyPr/>
+                    <a:lstStyle/>
+                    <a:p>
+                      <a:endParaRPr lang="de-DE" dirty="0"/>
+                    </a:p>
+                  </a:txBody>
+                  <a:tcPr/>
+                </a:tc>
+                <a:extLst>
+                  <a:ext uri="{0D108BD9-81ED-4DB2-BD59-A6C34878D82A}">
+                    <a16:rowId xmlns:a16="http://schemas.microsoft.com/office/drawing/2014/main" val="3315992242"/>
+                  </a:ext>
+                </a:extLst>
+              </a:tr>
+              <a:tr h="427161">
+                <a:tc vMerge="1">
+                  <a:txBody>
+                    <a:bodyPr/>
+                    <a:lstStyle/>
+                    <a:p>
+                      <a:endParaRPr lang="de-DE"/>
+                    </a:p>
+                  </a:txBody>
+                  <a:tcPr/>
+                </a:tc>
+                <a:tc vMerge="1">
+                  <a:txBody>
+                    <a:bodyPr/>
+                    <a:lstStyle/>
+                    <a:p>
+                      <a:endParaRPr lang="de-DE"/>
+                    </a:p>
+                  </a:txBody>
+                  <a:tcPr/>
+                </a:tc>
+                <a:tc>
+                  <a:txBody>
+                    <a:bodyPr/>
+                    <a:lstStyle/>
+                    <a:p>
+                      <a:r>
+                        <a:rPr lang="de-DE" dirty="0" err="1"/>
+                        <a:t>Ch</a:t>
+                      </a:r>
+                      <a:r>
+                        <a:rPr lang="de-DE" dirty="0"/>
+                        <a:t> 1</a:t>
+                      </a:r>
+                    </a:p>
+                  </a:txBody>
+                  <a:tcPr/>
+                </a:tc>
+                <a:tc>
+                  <a:txBody>
+                    <a:bodyPr/>
+                    <a:lstStyle/>
+                    <a:p>
+                      <a:r>
+                        <a:rPr lang="de-DE" dirty="0" err="1"/>
+                        <a:t>Ch</a:t>
+                      </a:r>
+                      <a:r>
+                        <a:rPr lang="de-DE" dirty="0"/>
+                        <a:t> 2</a:t>
+                      </a:r>
+                    </a:p>
+                  </a:txBody>
+                  <a:tcPr/>
+                </a:tc>
+                <a:tc>
+                  <a:txBody>
+                    <a:bodyPr/>
+                    <a:lstStyle/>
+                    <a:p>
+                      <a:r>
+                        <a:rPr lang="de-DE" dirty="0" err="1"/>
+                        <a:t>Ch</a:t>
+                      </a:r>
+                      <a:r>
+                        <a:rPr lang="de-DE" dirty="0"/>
+                        <a:t> 1</a:t>
+                      </a:r>
+                    </a:p>
+                  </a:txBody>
+                  <a:tcPr/>
+                </a:tc>
+                <a:tc>
+                  <a:txBody>
+                    <a:bodyPr/>
+                    <a:lstStyle/>
+                    <a:p>
+                      <a:r>
+                        <a:rPr lang="de-DE" dirty="0" err="1"/>
+                        <a:t>Ch</a:t>
+                      </a:r>
+                      <a:r>
+                        <a:rPr lang="de-DE" dirty="0"/>
+                        <a:t> 2</a:t>
+                      </a:r>
+                    </a:p>
+                  </a:txBody>
+                  <a:tcPr/>
+                </a:tc>
+                <a:extLst>
+                  <a:ext uri="{0D108BD9-81ED-4DB2-BD59-A6C34878D82A}">
+                    <a16:rowId xmlns:a16="http://schemas.microsoft.com/office/drawing/2014/main" val="1933422198"/>
+                  </a:ext>
+                </a:extLst>
+              </a:tr>
+              <a:tr h="632082">
+                <a:tc>
+                  <a:txBody>
+                    <a:bodyPr/>
+                    <a:lstStyle/>
+                    <a:p>
+                      <a:r>
+                        <a:rPr lang="de-DE" dirty="0"/>
+                        <a:t>1</a:t>
+                      </a:r>
+                    </a:p>
+                  </a:txBody>
+                  <a:tcPr/>
+                </a:tc>
+                <a:tc>
+                  <a:txBody>
+                    <a:bodyPr/>
+                    <a:lstStyle/>
+                    <a:p>
+                      <a:r>
+                        <a:rPr lang="de-DE" dirty="0"/>
+                        <a:t>1.00</a:t>
+                      </a:r>
+                    </a:p>
+                  </a:txBody>
+                  <a:tcPr/>
+                </a:tc>
+                <a:tc>
+                  <a:txBody>
+                    <a:bodyPr/>
+                    <a:lstStyle/>
+                    <a:p>
+                      <a:r>
+                        <a:rPr lang="de-DE" dirty="0"/>
+                        <a:t>0.717</a:t>
+                      </a:r>
+                    </a:p>
+                  </a:txBody>
+                  <a:tcPr/>
+                </a:tc>
+                <a:tc>
+                  <a:txBody>
+                    <a:bodyPr/>
+                    <a:lstStyle/>
+                    <a:p>
+                      <a:r>
+                        <a:rPr lang="de-DE" dirty="0"/>
+                        <a:t>0.733</a:t>
+                      </a:r>
+                    </a:p>
+                  </a:txBody>
+                  <a:tcPr/>
+                </a:tc>
+                <a:tc>
+                  <a:txBody>
+                    <a:bodyPr/>
+                    <a:lstStyle/>
+                    <a:p>
+                      <a:r>
+                        <a:rPr lang="de-DE" dirty="0"/>
+                        <a:t>0.858</a:t>
+                      </a:r>
+                    </a:p>
+                  </a:txBody>
+                  <a:tcPr/>
+                </a:tc>
+                <a:tc>
+                  <a:txBody>
+                    <a:bodyPr/>
+                    <a:lstStyle/>
+                    <a:p>
+                      <a:r>
+                        <a:rPr lang="de-DE" dirty="0"/>
+                        <a:t>0.867</a:t>
+                      </a:r>
+                    </a:p>
+                  </a:txBody>
+                  <a:tcPr/>
+                </a:tc>
+                <a:extLst>
+                  <a:ext uri="{0D108BD9-81ED-4DB2-BD59-A6C34878D82A}">
+                    <a16:rowId xmlns:a16="http://schemas.microsoft.com/office/drawing/2014/main" val="153320546"/>
+                  </a:ext>
+                </a:extLst>
+              </a:tr>
+              <a:tr h="632082">
+                <a:tc>
+                  <a:txBody>
+                    <a:bodyPr/>
+                    <a:lstStyle/>
+                    <a:p>
+                      <a:r>
+                        <a:rPr lang="de-DE" dirty="0"/>
+                        <a:t>2</a:t>
+                      </a:r>
+                    </a:p>
+                  </a:txBody>
+                  <a:tcPr/>
+                </a:tc>
+                <a:tc>
+                  <a:txBody>
+                    <a:bodyPr/>
+                    <a:lstStyle/>
+                    <a:p>
+                      <a:r>
+                        <a:rPr lang="de-DE" dirty="0"/>
+                        <a:t>1.00</a:t>
+                      </a:r>
+                    </a:p>
+                  </a:txBody>
+                  <a:tcPr/>
+                </a:tc>
+                <a:tc>
+                  <a:txBody>
+                    <a:bodyPr/>
+                    <a:lstStyle/>
+                    <a:p>
+                      <a:r>
+                        <a:rPr lang="de-DE" dirty="0"/>
+                        <a:t>0.750</a:t>
+                      </a:r>
+                    </a:p>
+                  </a:txBody>
+                  <a:tcPr/>
+                </a:tc>
+                <a:tc>
+                  <a:txBody>
+                    <a:bodyPr/>
+                    <a:lstStyle/>
+                    <a:p>
+                      <a:r>
+                        <a:rPr lang="de-DE" dirty="0"/>
+                        <a:t>0.750</a:t>
+                      </a:r>
+                    </a:p>
+                  </a:txBody>
+                  <a:tcPr/>
+                </a:tc>
+                <a:tc>
+                  <a:txBody>
+                    <a:bodyPr/>
+                    <a:lstStyle/>
+                    <a:p>
+                      <a:r>
+                        <a:rPr lang="de-DE" dirty="0"/>
+                        <a:t>0.875</a:t>
+                      </a:r>
+                    </a:p>
+                  </a:txBody>
+                  <a:tcPr/>
+                </a:tc>
+                <a:tc>
+                  <a:txBody>
+                    <a:bodyPr/>
+                    <a:lstStyle/>
+                    <a:p>
+                      <a:r>
+                        <a:rPr lang="de-DE" dirty="0"/>
+                        <a:t>0.875</a:t>
+                      </a:r>
+                    </a:p>
+                  </a:txBody>
+                  <a:tcPr/>
+                </a:tc>
+                <a:extLst>
+                  <a:ext uri="{0D108BD9-81ED-4DB2-BD59-A6C34878D82A}">
+                    <a16:rowId xmlns:a16="http://schemas.microsoft.com/office/drawing/2014/main" val="3984959788"/>
+                  </a:ext>
+                </a:extLst>
+              </a:tr>
+              <a:tr h="632082">
+                <a:tc>
+                  <a:txBody>
+                    <a:bodyPr/>
+                    <a:lstStyle/>
+                    <a:p>
+                      <a:r>
+                        <a:rPr lang="de-DE" dirty="0"/>
+                        <a:t>3</a:t>
+                      </a:r>
+                    </a:p>
+                  </a:txBody>
+                  <a:tcPr/>
+                </a:tc>
+                <a:tc>
+                  <a:txBody>
+                    <a:bodyPr/>
+                    <a:lstStyle/>
+                    <a:p>
+                      <a:r>
+                        <a:rPr lang="de-DE" dirty="0"/>
+                        <a:t>1.00</a:t>
+                      </a:r>
+                    </a:p>
+                  </a:txBody>
+                  <a:tcPr/>
+                </a:tc>
+                <a:tc>
+                  <a:txBody>
+                    <a:bodyPr/>
+                    <a:lstStyle/>
+                    <a:p>
+                      <a:r>
+                        <a:rPr lang="de-DE" dirty="0"/>
+                        <a:t>0.850</a:t>
+                      </a:r>
+                    </a:p>
+                  </a:txBody>
+                  <a:tcPr/>
+                </a:tc>
+                <a:tc>
+                  <a:txBody>
+                    <a:bodyPr/>
+                    <a:lstStyle/>
+                    <a:p>
+                      <a:r>
+                        <a:rPr lang="de-DE" dirty="0"/>
+                        <a:t>0.750</a:t>
+                      </a:r>
+                    </a:p>
+                  </a:txBody>
+                  <a:tcPr/>
+                </a:tc>
+                <a:tc>
+                  <a:txBody>
+                    <a:bodyPr/>
+                    <a:lstStyle/>
+                    <a:p>
+                      <a:r>
+                        <a:rPr lang="de-DE" dirty="0"/>
+                        <a:t>0.925</a:t>
+                      </a:r>
+                    </a:p>
+                  </a:txBody>
+                  <a:tcPr/>
+                </a:tc>
+                <a:tc>
+                  <a:txBody>
+                    <a:bodyPr/>
+                    <a:lstStyle/>
+                    <a:p>
+                      <a:r>
+                        <a:rPr lang="de-DE" dirty="0"/>
+                        <a:t>0.875</a:t>
+                      </a:r>
+                    </a:p>
+                  </a:txBody>
+                  <a:tcPr/>
+                </a:tc>
+                <a:extLst>
+                  <a:ext uri="{0D108BD9-81ED-4DB2-BD59-A6C34878D82A}">
+                    <a16:rowId xmlns:a16="http://schemas.microsoft.com/office/drawing/2014/main" val="2891050433"/>
+                  </a:ext>
+                </a:extLst>
+              </a:tr>
+              <a:tr h="632082">
+                <a:tc>
+                  <a:txBody>
+                    <a:bodyPr/>
+                    <a:lstStyle/>
+                    <a:p>
+                      <a:r>
+                        <a:rPr lang="de-DE" dirty="0"/>
+                        <a:t>4</a:t>
+                      </a:r>
+                    </a:p>
+                  </a:txBody>
+                  <a:tcPr/>
+                </a:tc>
+                <a:tc>
+                  <a:txBody>
+                    <a:bodyPr/>
+                    <a:lstStyle/>
+                    <a:p>
+                      <a:r>
+                        <a:rPr lang="de-DE" dirty="0"/>
+                        <a:t>1.00</a:t>
+                      </a:r>
+                    </a:p>
+                  </a:txBody>
+                  <a:tcPr/>
+                </a:tc>
+                <a:tc>
+                  <a:txBody>
+                    <a:bodyPr/>
+                    <a:lstStyle/>
+                    <a:p>
+                      <a:r>
+                        <a:rPr lang="de-DE" dirty="0"/>
+                        <a:t>0.190</a:t>
+                      </a:r>
+                    </a:p>
+                  </a:txBody>
+                  <a:tcPr/>
+                </a:tc>
+                <a:tc>
+                  <a:txBody>
+                    <a:bodyPr/>
+                    <a:lstStyle/>
+                    <a:p>
+                      <a:r>
+                        <a:rPr lang="de-DE" dirty="0"/>
+                        <a:t>0.280</a:t>
+                      </a:r>
+                    </a:p>
+                  </a:txBody>
+                  <a:tcPr/>
+                </a:tc>
+                <a:tc>
+                  <a:txBody>
+                    <a:bodyPr/>
+                    <a:lstStyle/>
+                    <a:p>
+                      <a:r>
+                        <a:rPr lang="de-DE" dirty="0"/>
+                        <a:t>0.595</a:t>
+                      </a:r>
+                    </a:p>
+                  </a:txBody>
+                  <a:tcPr/>
+                </a:tc>
+                <a:tc>
+                  <a:txBody>
+                    <a:bodyPr/>
+                    <a:lstStyle/>
+                    <a:p>
+                      <a:r>
+                        <a:rPr lang="de-DE" dirty="0"/>
+                        <a:t>0.640</a:t>
+                      </a:r>
+                    </a:p>
+                  </a:txBody>
+                  <a:tcPr/>
+                </a:tc>
+                <a:extLst>
+                  <a:ext uri="{0D108BD9-81ED-4DB2-BD59-A6C34878D82A}">
+                    <a16:rowId xmlns:a16="http://schemas.microsoft.com/office/drawing/2014/main" val="1307856940"/>
+                  </a:ext>
+                </a:extLst>
+              </a:tr>
+            </a:tbl>
+          </a:graphicData>
+        </a:graphic>
+      </p:graphicFrame>
     </p:spTree>
     <p:extLst>
       <p:ext uri="{BB962C8B-B14F-4D97-AF65-F5344CB8AC3E}">
@@ -12284,7 +13523,7 @@
           <a:p>
             <a:r>
               <a:rPr lang="de-DE"/>
-              <a:t>16.07.2026</a:t>
+              <a:t>23.07.2026</a:t>
             </a:r>
           </a:p>
         </p:txBody>
@@ -12312,7 +13551,7 @@
           <a:p>
             <a:r>
               <a:rPr lang="de-DE"/>
-              <a:t>Materialdiagnostik: Task 3</a:t>
+              <a:t>Materialdiagnostik: Task 4</a:t>
             </a:r>
             <a:endParaRPr lang="de-DE" dirty="0"/>
           </a:p>

--- a/Task_4/Presentation_Task4.pptx
+++ b/Task_4/Presentation_Task4.pptx
@@ -2979,6 +2979,29 @@
               </a:rPr>
               <a:t>Die Feature-Extraktion wird immer vor der Mittelung ausgeführt. Dadurch mitteln wir Merkmalsvektoren und nicht Rohsignale. Die Mittelung verändert nur Z01 und Z04; die anderen Gruppen bleiben inhaltlich unverändert.</a:t>
             </a:r>
+            <a:br>
+              <a:rPr lang="de-DE" sz="1200" b="0" kern="1200" dirty="0">
+                <a:solidFill>
+                  <a:schemeClr val="tx1"/>
+                </a:solidFill>
+                <a:effectLst/>
+                <a:latin typeface="+mn-lt"/>
+                <a:ea typeface="+mn-ea"/>
+                <a:cs typeface="+mn-cs"/>
+              </a:rPr>
+            </a:br>
+            <a:r>
+              <a:rPr lang="de-DE" sz="1200" b="0" kern="1200" dirty="0">
+                <a:solidFill>
+                  <a:schemeClr val="tx1"/>
+                </a:solidFill>
+                <a:effectLst/>
+                <a:latin typeface="+mn-lt"/>
+                <a:ea typeface="+mn-ea"/>
+                <a:cs typeface="+mn-cs"/>
+              </a:rPr>
+              <a:t>Label deshalb gedreht (zu Task 3), da wir True werden wenn unser Model ein anomales Zahnrad findet.</a:t>
+            </a:r>
           </a:p>
           <a:p>
             <a:endParaRPr lang="de-DE" dirty="0"/>
@@ -3809,10 +3832,20 @@
                 <a:ea typeface="+mn-ea"/>
                 <a:cs typeface="+mn-cs"/>
               </a:rPr>
-              <a:t>Alle Z05-Samples werden gefunden. Fold 1 bis 3 sind gut, Fold 4 scheitert an vielen gesunden Z01-Fehlalarmen. </a:t>
-            </a:r>
-          </a:p>
-          <a:p>
+              <a:t>Die Spezifität beträgt in allen Folds 1,000; es treten keine </a:t>
+            </a:r>
+            <a:r>
+              <a:rPr lang="de-DE" sz="1200" b="0" kern="1200" dirty="0" err="1">
+                <a:solidFill>
+                  <a:schemeClr val="tx1"/>
+                </a:solidFill>
+                <a:effectLst/>
+                <a:latin typeface="+mn-lt"/>
+                <a:ea typeface="+mn-ea"/>
+                <a:cs typeface="+mn-cs"/>
+              </a:rPr>
+              <a:t>False</a:t>
+            </a:r>
             <a:r>
               <a:rPr lang="de-DE" sz="1200" b="0" kern="1200" dirty="0">
                 <a:solidFill>
@@ -3823,7 +3856,73 @@
                 <a:ea typeface="+mn-ea"/>
                 <a:cs typeface="+mn-cs"/>
               </a:rPr>
-              <a:t>Ohne Mittelung bleibt die Variation der fünf Z01-mIDs sichtbar.</a:t>
+              <a:t> Positives auf.</a:t>
+            </a:r>
+          </a:p>
+          <a:p>
+            <a:r>
+              <a:rPr lang="de-DE" sz="1200" b="0" kern="1200" dirty="0">
+                <a:solidFill>
+                  <a:schemeClr val="tx1"/>
+                </a:solidFill>
+                <a:effectLst/>
+                <a:latin typeface="+mn-lt"/>
+                <a:ea typeface="+mn-ea"/>
+                <a:cs typeface="+mn-cs"/>
+              </a:rPr>
+              <a:t>Fold 1 bis 3 sind gut, Fold 4 weist dagegen viele </a:t>
+            </a:r>
+            <a:r>
+              <a:rPr lang="de-DE" sz="1200" b="0" kern="1200" dirty="0" err="1">
+                <a:solidFill>
+                  <a:schemeClr val="tx1"/>
+                </a:solidFill>
+                <a:effectLst/>
+                <a:latin typeface="+mn-lt"/>
+                <a:ea typeface="+mn-ea"/>
+                <a:cs typeface="+mn-cs"/>
+              </a:rPr>
+              <a:t>False</a:t>
+            </a:r>
+            <a:r>
+              <a:rPr lang="de-DE" sz="1200" b="0" kern="1200" dirty="0">
+                <a:solidFill>
+                  <a:schemeClr val="tx1"/>
+                </a:solidFill>
+                <a:effectLst/>
+                <a:latin typeface="+mn-lt"/>
+                <a:ea typeface="+mn-ea"/>
+                <a:cs typeface="+mn-cs"/>
+              </a:rPr>
+              <a:t> Negatives der gesunden</a:t>
+            </a:r>
+          </a:p>
+          <a:p>
+            <a:r>
+              <a:rPr lang="de-DE" sz="1200" b="0" kern="1200" dirty="0">
+                <a:solidFill>
+                  <a:schemeClr val="tx1"/>
+                </a:solidFill>
+                <a:effectLst/>
+                <a:latin typeface="+mn-lt"/>
+                <a:ea typeface="+mn-ea"/>
+                <a:cs typeface="+mn-cs"/>
+              </a:rPr>
+              <a:t>Z01-Testgruppe auf. Ohne Mittelung bleibt die Variation der fünf</a:t>
+            </a:r>
+          </a:p>
+          <a:p>
+            <a:r>
+              <a:rPr lang="de-DE" sz="1200" b="0" kern="1200" dirty="0">
+                <a:solidFill>
+                  <a:schemeClr val="tx1"/>
+                </a:solidFill>
+                <a:effectLst/>
+                <a:latin typeface="+mn-lt"/>
+                <a:ea typeface="+mn-ea"/>
+                <a:cs typeface="+mn-cs"/>
+              </a:rPr>
+              <a:t>Z01-mIDs sichtbar.</a:t>
             </a:r>
           </a:p>
         </p:txBody>
@@ -10641,7 +10740,7 @@
             </a:r>
             <a:r>
               <a:rPr lang="de-DE" b="1" dirty="0"/>
-              <a:t>gesund (Label 1)</a:t>
+              <a:t>gesund (Label 0)</a:t>
             </a:r>
             <a:r>
               <a:rPr lang="de-DE" dirty="0"/>
@@ -10656,7 +10755,7 @@
             </a:r>
             <a:r>
               <a:rPr lang="de-DE" b="1" dirty="0"/>
-              <a:t>anomal (Label 0)</a:t>
+              <a:t>anomal (Label 1)</a:t>
             </a:r>
             <a:endParaRPr lang="de-DE" dirty="0"/>
           </a:p>
@@ -12551,9 +12650,8 @@
         </p:nvPicPr>
         <p:blipFill>
           <a:blip r:embed="rId3"/>
-          <a:stretch>
-            <a:fillRect/>
-          </a:stretch>
+          <a:srcRect/>
+          <a:stretch/>
         </p:blipFill>
         <p:spPr>
           <a:xfrm>
@@ -12581,14 +12679,14 @@
             <p:ph sz="quarter" idx="14"/>
             <p:extLst>
               <p:ext uri="{D42A27DB-BD31-4B8C-83A1-F6EECF244321}">
-                <p14:modId xmlns:p14="http://schemas.microsoft.com/office/powerpoint/2010/main" val="404537205"/>
+                <p14:modId xmlns:p14="http://schemas.microsoft.com/office/powerpoint/2010/main" val="545412591"/>
               </p:ext>
             </p:extLst>
           </p:nvPr>
         </p:nvGraphicFramePr>
         <p:xfrm>
-          <a:off x="6324102" y="1935584"/>
-          <a:ext cx="5754689" cy="3382650"/>
+          <a:off x="6096000" y="1935584"/>
+          <a:ext cx="5982792" cy="3321249"/>
         </p:xfrm>
         <a:graphic>
           <a:graphicData uri="http://schemas.openxmlformats.org/drawingml/2006/table">
@@ -12597,42 +12695,49 @@
                 <a:tableStyleId>{5C22544A-7EE6-4342-B048-85BDC9FD1C3A}</a:tableStyleId>
               </a:tblPr>
               <a:tblGrid>
-                <a:gridCol w="654766">
+                <a:gridCol w="680719">
                   <a:extLst>
                     <a:ext uri="{9D8B030D-6E8A-4147-A177-3AD203B41FA5}">
                       <a16:colId xmlns:a16="http://schemas.microsoft.com/office/drawing/2014/main" val="1298068458"/>
                     </a:ext>
                   </a:extLst>
                 </a:gridCol>
-                <a:gridCol w="1271753">
+                <a:gridCol w="885084">
                   <a:extLst>
                     <a:ext uri="{9D8B030D-6E8A-4147-A177-3AD203B41FA5}">
                       <a16:colId xmlns:a16="http://schemas.microsoft.com/office/drawing/2014/main" val="3738618844"/>
                     </a:ext>
                   </a:extLst>
                 </a:gridCol>
-                <a:gridCol w="924911">
+                <a:gridCol w="956680">
+                  <a:extLst>
+                    <a:ext uri="{9D8B030D-6E8A-4147-A177-3AD203B41FA5}">
+                      <a16:colId xmlns:a16="http://schemas.microsoft.com/office/drawing/2014/main" val="3685483365"/>
+                    </a:ext>
+                  </a:extLst>
+                </a:gridCol>
+                <a:gridCol w="944610">
                   <a:extLst>
                     <a:ext uri="{9D8B030D-6E8A-4147-A177-3AD203B41FA5}">
                       <a16:colId xmlns:a16="http://schemas.microsoft.com/office/drawing/2014/main" val="3642665571"/>
                     </a:ext>
                   </a:extLst>
                 </a:gridCol>
-                <a:gridCol w="924911">
+                <a:gridCol w="917864">
                   <a:extLst>
                     <a:ext uri="{9D8B030D-6E8A-4147-A177-3AD203B41FA5}">
                       <a16:colId xmlns:a16="http://schemas.microsoft.com/office/drawing/2014/main" val="3313767678"/>
                     </a:ext>
                   </a:extLst>
                 </a:gridCol>
-                <a:gridCol w="994429">
+                <a:gridCol w="819521">
                   <a:extLst>
                     <a:ext uri="{9D8B030D-6E8A-4147-A177-3AD203B41FA5}">
                       <a16:colId xmlns:a16="http://schemas.microsoft.com/office/drawing/2014/main" val="679683412"/>
                     </a:ext>
                   </a:extLst>
                 </a:gridCol>
-                <a:gridCol w="983919">
+                <a:gridCol w="778314">
                   <a:extLst>
                     <a:ext uri="{9D8B030D-6E8A-4147-A177-3AD203B41FA5}">
                       <a16:colId xmlns:a16="http://schemas.microsoft.com/office/drawing/2014/main" val="72820997"/>
@@ -12646,22 +12751,10 @@
                     <a:bodyPr/>
                     <a:lstStyle/>
                     <a:p>
+                      <a:pPr algn="ctr"/>
                       <a:r>
                         <a:rPr lang="de-DE" dirty="0"/>
                         <a:t>Fold</a:t>
-                      </a:r>
-                    </a:p>
-                  </a:txBody>
-                  <a:tcPr/>
-                </a:tc>
-                <a:tc rowSpan="2">
-                  <a:txBody>
-                    <a:bodyPr/>
-                    <a:lstStyle/>
-                    <a:p>
-                      <a:r>
-                        <a:rPr lang="de-DE" dirty="0"/>
-                        <a:t>Sensitivität / TPR</a:t>
                       </a:r>
                     </a:p>
                   </a:txBody>
@@ -12672,9 +12765,10 @@
                     <a:bodyPr/>
                     <a:lstStyle/>
                     <a:p>
+                      <a:pPr algn="ctr"/>
                       <a:r>
                         <a:rPr lang="de-DE" dirty="0"/>
-                        <a:t>Spezifität / TNR</a:t>
+                        <a:t>Sensitivität / TPR</a:t>
                       </a:r>
                     </a:p>
                   </a:txBody>
@@ -12695,10 +12789,48 @@
                     <a:bodyPr/>
                     <a:lstStyle/>
                     <a:p>
+                      <a:pPr algn="ctr"/>
+                      <a:r>
+                        <a:rPr lang="de-DE" dirty="0" err="1"/>
+                        <a:t>Spezivität</a:t>
+                      </a:r>
                       <a:r>
                         <a:rPr lang="de-DE" dirty="0"/>
-                        <a:t>BAR</a:t>
+                        <a:t> / TNR</a:t>
                       </a:r>
+                    </a:p>
+                  </a:txBody>
+                  <a:tcPr/>
+                </a:tc>
+                <a:tc hMerge="1">
+                  <a:txBody>
+                    <a:bodyPr/>
+                    <a:lstStyle/>
+                    <a:p>
+                      <a:endParaRPr lang="de-DE" dirty="0"/>
+                    </a:p>
+                  </a:txBody>
+                  <a:tcPr/>
+                </a:tc>
+                <a:tc gridSpan="2">
+                  <a:txBody>
+                    <a:bodyPr/>
+                    <a:lstStyle/>
+                    <a:p>
+                      <a:pPr algn="ctr"/>
+                      <a:r>
+                        <a:rPr lang="de-DE" dirty="0" err="1"/>
+                        <a:t>Balanced</a:t>
+                      </a:r>
+                      <a:r>
+                        <a:rPr lang="de-DE" dirty="0"/>
+                        <a:t> </a:t>
+                      </a:r>
+                      <a:r>
+                        <a:rPr lang="de-DE" dirty="0" err="1"/>
+                        <a:t>Acc</a:t>
+                      </a:r>
+                      <a:endParaRPr lang="de-DE" dirty="0"/>
                     </a:p>
                   </a:txBody>
                   <a:tcPr/>
@@ -12719,17 +12851,7 @@
                   </a:ext>
                 </a:extLst>
               </a:tr>
-              <a:tr h="427161">
-                <a:tc vMerge="1">
-                  <a:txBody>
-                    <a:bodyPr/>
-                    <a:lstStyle/>
-                    <a:p>
-                      <a:endParaRPr lang="de-DE"/>
-                    </a:p>
-                  </a:txBody>
-                  <a:tcPr/>
-                </a:tc>
+              <a:tr h="0">
                 <a:tc vMerge="1">
                   <a:txBody>
                     <a:bodyPr/>
@@ -12745,6 +12867,39 @@
                     <a:bodyPr/>
                     <a:lstStyle/>
                     <a:p>
+                      <a:pPr algn="ctr"/>
+                      <a:r>
+                        <a:rPr lang="de-DE"/>
+                        <a:t>Ch 1</a:t>
+                      </a:r>
+                    </a:p>
+                  </a:txBody>
+                  <a:tcPr/>
+                </a:tc>
+                <a:tc>
+                  <a:txBody>
+                    <a:bodyPr/>
+                    <a:lstStyle/>
+                    <a:p>
+                      <a:pPr algn="ctr"/>
+                      <a:r>
+                        <a:rPr lang="de-DE" dirty="0" err="1"/>
+                        <a:t>Ch</a:t>
+                      </a:r>
+                      <a:r>
+                        <a:rPr lang="de-DE" dirty="0"/>
+                        <a:t> 2</a:t>
+                      </a:r>
+                    </a:p>
+                  </a:txBody>
+                  <a:tcPr/>
+                </a:tc>
+                <a:tc>
+                  <a:txBody>
+                    <a:bodyPr/>
+                    <a:lstStyle/>
+                    <a:p>
+                      <a:pPr algn="ctr"/>
                       <a:r>
                         <a:rPr lang="de-DE" dirty="0" err="1"/>
                         <a:t>Ch</a:t>
@@ -12762,6 +12917,7 @@
                     <a:bodyPr/>
                     <a:lstStyle/>
                     <a:p>
+                      <a:pPr algn="ctr"/>
                       <a:r>
                         <a:rPr lang="de-DE" dirty="0" err="1"/>
                         <a:t>Ch</a:t>
@@ -12779,6 +12935,7 @@
                     <a:bodyPr/>
                     <a:lstStyle/>
                     <a:p>
+                      <a:pPr algn="ctr"/>
                       <a:r>
                         <a:rPr lang="de-DE" dirty="0" err="1"/>
                         <a:t>Ch</a:t>
@@ -12796,6 +12953,7 @@
                     <a:bodyPr/>
                     <a:lstStyle/>
                     <a:p>
+                      <a:pPr algn="ctr"/>
                       <a:r>
                         <a:rPr lang="de-DE" dirty="0" err="1"/>
                         <a:t>Ch</a:t>
@@ -12820,6 +12978,7 @@
                     <a:bodyPr/>
                     <a:lstStyle/>
                     <a:p>
+                      <a:pPr algn="ctr"/>
                       <a:r>
                         <a:rPr lang="de-DE" dirty="0"/>
                         <a:t>1</a:t>
@@ -12833,6 +12992,7 @@
                     <a:bodyPr/>
                     <a:lstStyle/>
                     <a:p>
+                      <a:pPr algn="ctr"/>
                       <a:r>
                         <a:rPr lang="de-DE" dirty="0"/>
                         <a:t>1.00</a:t>
@@ -12846,6 +13006,21 @@
                     <a:bodyPr/>
                     <a:lstStyle/>
                     <a:p>
+                      <a:pPr algn="ctr"/>
+                      <a:r>
+                        <a:rPr lang="de-DE" dirty="0"/>
+                        <a:t>1.00</a:t>
+                      </a:r>
+                    </a:p>
+                  </a:txBody>
+                  <a:tcPr/>
+                </a:tc>
+                <a:tc>
+                  <a:txBody>
+                    <a:bodyPr/>
+                    <a:lstStyle/>
+                    <a:p>
+                      <a:pPr algn="ctr"/>
                       <a:r>
                         <a:rPr lang="de-DE" dirty="0"/>
                         <a:t>0.717</a:t>
@@ -12859,6 +13034,7 @@
                     <a:bodyPr/>
                     <a:lstStyle/>
                     <a:p>
+                      <a:pPr algn="ctr"/>
                       <a:r>
                         <a:rPr lang="de-DE" dirty="0"/>
                         <a:t>0.733</a:t>
@@ -12872,6 +13048,7 @@
                     <a:bodyPr/>
                     <a:lstStyle/>
                     <a:p>
+                      <a:pPr algn="ctr"/>
                       <a:r>
                         <a:rPr lang="de-DE" dirty="0"/>
                         <a:t>0.858</a:t>
@@ -12885,6 +13062,7 @@
                     <a:bodyPr/>
                     <a:lstStyle/>
                     <a:p>
+                      <a:pPr algn="ctr"/>
                       <a:r>
                         <a:rPr lang="de-DE" dirty="0"/>
                         <a:t>0.867</a:t>
@@ -12905,6 +13083,7 @@
                     <a:bodyPr/>
                     <a:lstStyle/>
                     <a:p>
+                      <a:pPr algn="ctr"/>
                       <a:r>
                         <a:rPr lang="de-DE" dirty="0"/>
                         <a:t>2</a:t>
@@ -12918,6 +13097,7 @@
                     <a:bodyPr/>
                     <a:lstStyle/>
                     <a:p>
+                      <a:pPr algn="ctr"/>
                       <a:r>
                         <a:rPr lang="de-DE" dirty="0"/>
                         <a:t>1.00</a:t>
@@ -12931,6 +13111,21 @@
                     <a:bodyPr/>
                     <a:lstStyle/>
                     <a:p>
+                      <a:pPr algn="ctr"/>
+                      <a:r>
+                        <a:rPr lang="de-DE" dirty="0"/>
+                        <a:t>1.00</a:t>
+                      </a:r>
+                    </a:p>
+                  </a:txBody>
+                  <a:tcPr/>
+                </a:tc>
+                <a:tc>
+                  <a:txBody>
+                    <a:bodyPr/>
+                    <a:lstStyle/>
+                    <a:p>
+                      <a:pPr algn="ctr"/>
                       <a:r>
                         <a:rPr lang="de-DE" dirty="0"/>
                         <a:t>0.750</a:t>
@@ -12944,6 +13139,7 @@
                     <a:bodyPr/>
                     <a:lstStyle/>
                     <a:p>
+                      <a:pPr algn="ctr"/>
                       <a:r>
                         <a:rPr lang="de-DE" dirty="0"/>
                         <a:t>0.750</a:t>
@@ -12957,6 +13153,7 @@
                     <a:bodyPr/>
                     <a:lstStyle/>
                     <a:p>
+                      <a:pPr algn="ctr"/>
                       <a:r>
                         <a:rPr lang="de-DE" dirty="0"/>
                         <a:t>0.875</a:t>
@@ -12970,6 +13167,7 @@
                     <a:bodyPr/>
                     <a:lstStyle/>
                     <a:p>
+                      <a:pPr algn="ctr"/>
                       <a:r>
                         <a:rPr lang="de-DE" dirty="0"/>
                         <a:t>0.875</a:t>
@@ -12990,6 +13188,7 @@
                     <a:bodyPr/>
                     <a:lstStyle/>
                     <a:p>
+                      <a:pPr algn="ctr"/>
                       <a:r>
                         <a:rPr lang="de-DE" dirty="0"/>
                         <a:t>3</a:t>
@@ -13003,6 +13202,7 @@
                     <a:bodyPr/>
                     <a:lstStyle/>
                     <a:p>
+                      <a:pPr algn="ctr"/>
                       <a:r>
                         <a:rPr lang="de-DE" dirty="0"/>
                         <a:t>1.00</a:t>
@@ -13016,6 +13216,21 @@
                     <a:bodyPr/>
                     <a:lstStyle/>
                     <a:p>
+                      <a:pPr algn="ctr"/>
+                      <a:r>
+                        <a:rPr lang="de-DE" dirty="0"/>
+                        <a:t>1.00</a:t>
+                      </a:r>
+                    </a:p>
+                  </a:txBody>
+                  <a:tcPr/>
+                </a:tc>
+                <a:tc>
+                  <a:txBody>
+                    <a:bodyPr/>
+                    <a:lstStyle/>
+                    <a:p>
+                      <a:pPr algn="ctr"/>
                       <a:r>
                         <a:rPr lang="de-DE" dirty="0"/>
                         <a:t>0.850</a:t>
@@ -13029,6 +13244,7 @@
                     <a:bodyPr/>
                     <a:lstStyle/>
                     <a:p>
+                      <a:pPr algn="ctr"/>
                       <a:r>
                         <a:rPr lang="de-DE" dirty="0"/>
                         <a:t>0.750</a:t>
@@ -13042,6 +13258,7 @@
                     <a:bodyPr/>
                     <a:lstStyle/>
                     <a:p>
+                      <a:pPr algn="ctr"/>
                       <a:r>
                         <a:rPr lang="de-DE" dirty="0"/>
                         <a:t>0.925</a:t>
@@ -13055,6 +13272,7 @@
                     <a:bodyPr/>
                     <a:lstStyle/>
                     <a:p>
+                      <a:pPr algn="ctr"/>
                       <a:r>
                         <a:rPr lang="de-DE" dirty="0"/>
                         <a:t>0.875</a:t>
@@ -13075,6 +13293,7 @@
                     <a:bodyPr/>
                     <a:lstStyle/>
                     <a:p>
+                      <a:pPr algn="ctr"/>
                       <a:r>
                         <a:rPr lang="de-DE" dirty="0"/>
                         <a:t>4</a:t>
@@ -13088,6 +13307,7 @@
                     <a:bodyPr/>
                     <a:lstStyle/>
                     <a:p>
+                      <a:pPr algn="ctr"/>
                       <a:r>
                         <a:rPr lang="de-DE" dirty="0"/>
                         <a:t>1.00</a:t>
@@ -13101,6 +13321,21 @@
                     <a:bodyPr/>
                     <a:lstStyle/>
                     <a:p>
+                      <a:pPr algn="ctr"/>
+                      <a:r>
+                        <a:rPr lang="de-DE" dirty="0"/>
+                        <a:t>1.00</a:t>
+                      </a:r>
+                    </a:p>
+                  </a:txBody>
+                  <a:tcPr/>
+                </a:tc>
+                <a:tc>
+                  <a:txBody>
+                    <a:bodyPr/>
+                    <a:lstStyle/>
+                    <a:p>
+                      <a:pPr algn="ctr"/>
                       <a:r>
                         <a:rPr lang="de-DE" dirty="0"/>
                         <a:t>0.190</a:t>
@@ -13114,6 +13349,7 @@
                     <a:bodyPr/>
                     <a:lstStyle/>
                     <a:p>
+                      <a:pPr algn="ctr"/>
                       <a:r>
                         <a:rPr lang="de-DE" dirty="0"/>
                         <a:t>0.280</a:t>
@@ -13127,6 +13363,7 @@
                     <a:bodyPr/>
                     <a:lstStyle/>
                     <a:p>
+                      <a:pPr algn="ctr"/>
                       <a:r>
                         <a:rPr lang="de-DE" dirty="0"/>
                         <a:t>0.595</a:t>
@@ -13140,6 +13377,7 @@
                     <a:bodyPr/>
                     <a:lstStyle/>
                     <a:p>
+                      <a:pPr algn="ctr"/>
                       <a:r>
                         <a:rPr lang="de-DE" dirty="0"/>
                         <a:t>0.640</a:t>

--- a/Task_4/Presentation_Task4.pptx
+++ b/Task_4/Presentation_Task4.pptx
@@ -5,32 +5,31 @@
     <p:sldMasterId id="2147483744" r:id="rId1"/>
   </p:sldMasterIdLst>
   <p:notesMasterIdLst>
-    <p:notesMasterId r:id="rId22"/>
+    <p:notesMasterId r:id="rId21"/>
   </p:notesMasterIdLst>
   <p:handoutMasterIdLst>
-    <p:handoutMasterId r:id="rId23"/>
+    <p:handoutMasterId r:id="rId22"/>
   </p:handoutMasterIdLst>
   <p:sldIdLst>
     <p:sldId id="256" r:id="rId2"/>
     <p:sldId id="257" r:id="rId3"/>
     <p:sldId id="266" r:id="rId4"/>
-    <p:sldId id="258" r:id="rId5"/>
-    <p:sldId id="263" r:id="rId6"/>
-    <p:sldId id="267" r:id="rId7"/>
-    <p:sldId id="264" r:id="rId8"/>
-    <p:sldId id="269" r:id="rId9"/>
-    <p:sldId id="268" r:id="rId10"/>
-    <p:sldId id="265" r:id="rId11"/>
-    <p:sldId id="270" r:id="rId12"/>
-    <p:sldId id="271" r:id="rId13"/>
-    <p:sldId id="278" r:id="rId14"/>
-    <p:sldId id="272" r:id="rId15"/>
-    <p:sldId id="279" r:id="rId16"/>
-    <p:sldId id="280" r:id="rId17"/>
-    <p:sldId id="273" r:id="rId18"/>
-    <p:sldId id="274" r:id="rId19"/>
-    <p:sldId id="275" r:id="rId20"/>
-    <p:sldId id="277" r:id="rId21"/>
+    <p:sldId id="263" r:id="rId5"/>
+    <p:sldId id="267" r:id="rId6"/>
+    <p:sldId id="264" r:id="rId7"/>
+    <p:sldId id="269" r:id="rId8"/>
+    <p:sldId id="268" r:id="rId9"/>
+    <p:sldId id="265" r:id="rId10"/>
+    <p:sldId id="281" r:id="rId11"/>
+    <p:sldId id="283" r:id="rId12"/>
+    <p:sldId id="282" r:id="rId13"/>
+    <p:sldId id="270" r:id="rId14"/>
+    <p:sldId id="284" r:id="rId15"/>
+    <p:sldId id="285" r:id="rId16"/>
+    <p:sldId id="286" r:id="rId17"/>
+    <p:sldId id="274" r:id="rId18"/>
+    <p:sldId id="275" r:id="rId19"/>
+    <p:sldId id="277" r:id="rId20"/>
   </p:sldIdLst>
   <p:sldSz cx="12192000" cy="6858000"/>
   <p:notesSz cx="9144000" cy="6858000"/>
@@ -830,7 +829,13 @@
   <p:cSld>
     <p:spTree>
       <p:nvGrpSpPr>
-        <p:cNvPr id="1" name=""/>
+        <p:cNvPr id="1" name="">
+          <a:extLst>
+            <a:ext uri="{FF2B5EF4-FFF2-40B4-BE49-F238E27FC236}">
+              <a16:creationId xmlns:a16="http://schemas.microsoft.com/office/drawing/2014/main" id="{404C249B-BF03-3FEA-42A6-ED12FCF80B11}"/>
+            </a:ext>
+          </a:extLst>
+        </p:cNvPr>
         <p:cNvGrpSpPr/>
         <p:nvPr/>
       </p:nvGrpSpPr>
@@ -844,7 +849,13 @@
       </p:grpSpPr>
       <p:sp>
         <p:nvSpPr>
-          <p:cNvPr id="2" name="Folienbildplatzhalter 1"/>
+          <p:cNvPr id="2" name="Folienbildplatzhalter 1">
+            <a:extLst>
+              <a:ext uri="{FF2B5EF4-FFF2-40B4-BE49-F238E27FC236}">
+                <a16:creationId xmlns:a16="http://schemas.microsoft.com/office/drawing/2014/main" id="{50EE3261-7752-DF09-0A7E-C800CE8B48B3}"/>
+              </a:ext>
+            </a:extLst>
+          </p:cNvPr>
           <p:cNvSpPr>
             <a:spLocks noGrp="1" noRot="1" noChangeAspect="1"/>
           </p:cNvSpPr>
@@ -863,7 +874,13 @@
       </p:sp>
       <p:sp>
         <p:nvSpPr>
-          <p:cNvPr id="3" name="Notizenplatzhalter 2"/>
+          <p:cNvPr id="3" name="Notizenplatzhalter 2">
+            <a:extLst>
+              <a:ext uri="{FF2B5EF4-FFF2-40B4-BE49-F238E27FC236}">
+                <a16:creationId xmlns:a16="http://schemas.microsoft.com/office/drawing/2014/main" id="{4624E5E6-45C1-C599-4773-1CB1CB8691C8}"/>
+              </a:ext>
+            </a:extLst>
+          </p:cNvPr>
           <p:cNvSpPr>
             <a:spLocks noGrp="1"/>
           </p:cNvSpPr>
@@ -886,10 +903,20 @@
                 <a:ea typeface="+mn-ea"/>
                 <a:cs typeface="+mn-cs"/>
               </a:rPr>
-              <a:t>David</a:t>
-            </a:r>
-          </a:p>
-          <a:p>
+              <a:t>20 Signale aus Z02 (beide </a:t>
+            </a:r>
+            <a:r>
+              <a:rPr lang="de-DE" sz="1200" b="0" kern="1200" dirty="0" err="1">
+                <a:solidFill>
+                  <a:schemeClr val="tx1"/>
+                </a:solidFill>
+                <a:effectLst/>
+                <a:latin typeface="+mn-lt"/>
+                <a:ea typeface="+mn-ea"/>
+                <a:cs typeface="+mn-cs"/>
+              </a:rPr>
+              <a:t>mID</a:t>
+            </a:r>
             <a:r>
               <a:rPr lang="de-DE" sz="1200" b="0" kern="1200" dirty="0">
                 <a:solidFill>
@@ -900,14 +927,44 @@
                 <a:ea typeface="+mn-ea"/>
                 <a:cs typeface="+mn-cs"/>
               </a:rPr>
-              <a:t>Die Hyperparameter werden nicht auf dem Testsatz ausgewählt. Für jede Kombination trainieren wir auf dem Trainingssatz und bewerten auf dem Entwicklungssatz. Das beste Modell wird anhand der Entwicklungs-Metriken ausgewählt. Danach wird das finale Modell mit Training plus Entwicklung neu trainiert und erst dann auf dem Testsatz bewertet.</a:t>
-            </a:r>
-          </a:p>
-        </p:txBody>
-      </p:sp>
-      <p:sp>
-        <p:nvSpPr>
-          <p:cNvPr id="4" name="Foliennummernplatzhalter 3"/>
+              <a:t> überschüssigen Zahnräder sind in </a:t>
+            </a:r>
+            <a:r>
+              <a:rPr lang="de-DE" sz="1200" b="0" kern="1200" dirty="0" err="1">
+                <a:solidFill>
+                  <a:schemeClr val="tx1"/>
+                </a:solidFill>
+                <a:effectLst/>
+                <a:latin typeface="+mn-lt"/>
+                <a:ea typeface="+mn-ea"/>
+                <a:cs typeface="+mn-cs"/>
+              </a:rPr>
+              <a:t>train</a:t>
+            </a:r>
+            <a:r>
+              <a:rPr lang="de-DE" sz="1200" b="0" kern="1200" dirty="0">
+                <a:solidFill>
+                  <a:schemeClr val="tx1"/>
+                </a:solidFill>
+                <a:effectLst/>
+                <a:latin typeface="+mn-lt"/>
+                <a:ea typeface="+mn-ea"/>
+                <a:cs typeface="+mn-cs"/>
+              </a:rPr>
+              <a:t>)</a:t>
+            </a:r>
+          </a:p>
+        </p:txBody>
+      </p:sp>
+      <p:sp>
+        <p:nvSpPr>
+          <p:cNvPr id="4" name="Foliennummernplatzhalter 3">
+            <a:extLst>
+              <a:ext uri="{FF2B5EF4-FFF2-40B4-BE49-F238E27FC236}">
+                <a16:creationId xmlns:a16="http://schemas.microsoft.com/office/drawing/2014/main" id="{2CD3B589-EC5C-40EE-889A-6A61DC2DCED6}"/>
+              </a:ext>
+            </a:extLst>
+          </p:cNvPr>
           <p:cNvSpPr>
             <a:spLocks noGrp="1"/>
           </p:cNvSpPr>
@@ -931,7 +988,7 @@
     </p:spTree>
     <p:extLst>
       <p:ext uri="{BB962C8B-B14F-4D97-AF65-F5344CB8AC3E}">
-        <p14:creationId xmlns:p14="http://schemas.microsoft.com/office/powerpoint/2010/main" val="4205122503"/>
+        <p14:creationId xmlns:p14="http://schemas.microsoft.com/office/powerpoint/2010/main" val="2504185075"/>
       </p:ext>
     </p:extLst>
   </p:cSld>
@@ -942,6 +999,300 @@
 </file>
 
 <file path=ppt/notesSlides/notesSlide11.xml><?xml version="1.0" encoding="utf-8"?>
+<p:notes xmlns:a="http://schemas.openxmlformats.org/drawingml/2006/main" xmlns:r="http://schemas.openxmlformats.org/officeDocument/2006/relationships" xmlns:p="http://schemas.openxmlformats.org/presentationml/2006/main">
+  <p:cSld>
+    <p:spTree>
+      <p:nvGrpSpPr>
+        <p:cNvPr id="1" name="">
+          <a:extLst>
+            <a:ext uri="{FF2B5EF4-FFF2-40B4-BE49-F238E27FC236}">
+              <a16:creationId xmlns:a16="http://schemas.microsoft.com/office/drawing/2014/main" id="{21B145DD-A245-1432-5F26-BAF67B573429}"/>
+            </a:ext>
+          </a:extLst>
+        </p:cNvPr>
+        <p:cNvGrpSpPr/>
+        <p:nvPr/>
+      </p:nvGrpSpPr>
+      <p:grpSpPr>
+        <a:xfrm>
+          <a:off x="0" y="0"/>
+          <a:ext cx="0" cy="0"/>
+          <a:chOff x="0" y="0"/>
+          <a:chExt cx="0" cy="0"/>
+        </a:xfrm>
+      </p:grpSpPr>
+      <p:sp>
+        <p:nvSpPr>
+          <p:cNvPr id="2" name="Folienbildplatzhalter 1">
+            <a:extLst>
+              <a:ext uri="{FF2B5EF4-FFF2-40B4-BE49-F238E27FC236}">
+                <a16:creationId xmlns:a16="http://schemas.microsoft.com/office/drawing/2014/main" id="{40F66CC1-C74C-CE8B-A74D-93BCBB743019}"/>
+              </a:ext>
+            </a:extLst>
+          </p:cNvPr>
+          <p:cNvSpPr>
+            <a:spLocks noGrp="1" noRot="1" noChangeAspect="1"/>
+          </p:cNvSpPr>
+          <p:nvPr>
+            <p:ph type="sldImg"/>
+          </p:nvPr>
+        </p:nvSpPr>
+        <p:spPr/>
+        <p:txBody>
+          <a:bodyPr/>
+          <a:lstStyle/>
+          <a:p>
+            <a:endParaRPr lang="de-DE"/>
+          </a:p>
+        </p:txBody>
+      </p:sp>
+      <p:sp>
+        <p:nvSpPr>
+          <p:cNvPr id="3" name="Notizenplatzhalter 2">
+            <a:extLst>
+              <a:ext uri="{FF2B5EF4-FFF2-40B4-BE49-F238E27FC236}">
+                <a16:creationId xmlns:a16="http://schemas.microsoft.com/office/drawing/2014/main" id="{76ED9703-69F9-AA3F-FF26-4D3473E7F31A}"/>
+              </a:ext>
+            </a:extLst>
+          </p:cNvPr>
+          <p:cNvSpPr>
+            <a:spLocks noGrp="1"/>
+          </p:cNvSpPr>
+          <p:nvPr>
+            <p:ph type="body" idx="1"/>
+          </p:nvPr>
+        </p:nvSpPr>
+        <p:spPr/>
+        <p:txBody>
+          <a:bodyPr/>
+          <a:lstStyle/>
+          <a:p>
+            <a:r>
+              <a:rPr lang="de-DE" sz="1200" b="0" kern="1200" dirty="0">
+                <a:solidFill>
+                  <a:schemeClr val="tx1"/>
+                </a:solidFill>
+                <a:effectLst/>
+                <a:latin typeface="+mn-lt"/>
+                <a:ea typeface="+mn-ea"/>
+                <a:cs typeface="+mn-cs"/>
+              </a:rPr>
+              <a:t>20 Signale aus Z03 in Test </a:t>
+            </a:r>
+            <a:r>
+              <a:rPr lang="de-DE" sz="1200" b="0" kern="1200" dirty="0" err="1">
+                <a:solidFill>
+                  <a:schemeClr val="tx1"/>
+                </a:solidFill>
+                <a:effectLst/>
+                <a:latin typeface="+mn-lt"/>
+                <a:ea typeface="+mn-ea"/>
+                <a:cs typeface="+mn-cs"/>
+              </a:rPr>
+              <a:t>set</a:t>
+            </a:r>
+            <a:endParaRPr lang="de-DE" sz="1200" b="0" kern="1200" dirty="0">
+              <a:solidFill>
+                <a:schemeClr val="tx1"/>
+              </a:solidFill>
+              <a:effectLst/>
+              <a:latin typeface="+mn-lt"/>
+              <a:ea typeface="+mn-ea"/>
+              <a:cs typeface="+mn-cs"/>
+            </a:endParaRPr>
+          </a:p>
+        </p:txBody>
+      </p:sp>
+      <p:sp>
+        <p:nvSpPr>
+          <p:cNvPr id="4" name="Foliennummernplatzhalter 3">
+            <a:extLst>
+              <a:ext uri="{FF2B5EF4-FFF2-40B4-BE49-F238E27FC236}">
+                <a16:creationId xmlns:a16="http://schemas.microsoft.com/office/drawing/2014/main" id="{30313553-ADFE-8DDF-E162-D6FF44166FB5}"/>
+              </a:ext>
+            </a:extLst>
+          </p:cNvPr>
+          <p:cNvSpPr>
+            <a:spLocks noGrp="1"/>
+          </p:cNvSpPr>
+          <p:nvPr>
+            <p:ph type="sldNum" sz="quarter" idx="5"/>
+          </p:nvPr>
+        </p:nvSpPr>
+        <p:spPr/>
+        <p:txBody>
+          <a:bodyPr/>
+          <a:lstStyle/>
+          <a:p>
+            <a:fld id="{0492B7F2-6741-7346-B13A-366117EE2BBB}" type="slidenum">
+              <a:rPr lang="de-DE" smtClean="0"/>
+              <a:t>11</a:t>
+            </a:fld>
+            <a:endParaRPr lang="de-DE"/>
+          </a:p>
+        </p:txBody>
+      </p:sp>
+    </p:spTree>
+    <p:extLst>
+      <p:ext uri="{BB962C8B-B14F-4D97-AF65-F5344CB8AC3E}">
+        <p14:creationId xmlns:p14="http://schemas.microsoft.com/office/powerpoint/2010/main" val="1042205482"/>
+      </p:ext>
+    </p:extLst>
+  </p:cSld>
+  <p:clrMapOvr>
+    <a:masterClrMapping/>
+  </p:clrMapOvr>
+</p:notes>
+</file>
+
+<file path=ppt/notesSlides/notesSlide12.xml><?xml version="1.0" encoding="utf-8"?>
+<p:notes xmlns:a="http://schemas.openxmlformats.org/drawingml/2006/main" xmlns:r="http://schemas.openxmlformats.org/officeDocument/2006/relationships" xmlns:p="http://schemas.openxmlformats.org/presentationml/2006/main">
+  <p:cSld>
+    <p:spTree>
+      <p:nvGrpSpPr>
+        <p:cNvPr id="1" name="">
+          <a:extLst>
+            <a:ext uri="{FF2B5EF4-FFF2-40B4-BE49-F238E27FC236}">
+              <a16:creationId xmlns:a16="http://schemas.microsoft.com/office/drawing/2014/main" id="{7B8D8CC5-1F04-F25E-FA74-E6B2B6B398D2}"/>
+            </a:ext>
+          </a:extLst>
+        </p:cNvPr>
+        <p:cNvGrpSpPr/>
+        <p:nvPr/>
+      </p:nvGrpSpPr>
+      <p:grpSpPr>
+        <a:xfrm>
+          <a:off x="0" y="0"/>
+          <a:ext cx="0" cy="0"/>
+          <a:chOff x="0" y="0"/>
+          <a:chExt cx="0" cy="0"/>
+        </a:xfrm>
+      </p:grpSpPr>
+      <p:sp>
+        <p:nvSpPr>
+          <p:cNvPr id="2" name="Folienbildplatzhalter 1">
+            <a:extLst>
+              <a:ext uri="{FF2B5EF4-FFF2-40B4-BE49-F238E27FC236}">
+                <a16:creationId xmlns:a16="http://schemas.microsoft.com/office/drawing/2014/main" id="{D45F7C57-2DE9-C50E-933F-5D517FA9B9EC}"/>
+              </a:ext>
+            </a:extLst>
+          </p:cNvPr>
+          <p:cNvSpPr>
+            <a:spLocks noGrp="1" noRot="1" noChangeAspect="1"/>
+          </p:cNvSpPr>
+          <p:nvPr>
+            <p:ph type="sldImg"/>
+          </p:nvPr>
+        </p:nvSpPr>
+        <p:spPr/>
+        <p:txBody>
+          <a:bodyPr/>
+          <a:lstStyle/>
+          <a:p>
+            <a:endParaRPr lang="de-DE"/>
+          </a:p>
+        </p:txBody>
+      </p:sp>
+      <p:sp>
+        <p:nvSpPr>
+          <p:cNvPr id="3" name="Notizenplatzhalter 2">
+            <a:extLst>
+              <a:ext uri="{FF2B5EF4-FFF2-40B4-BE49-F238E27FC236}">
+                <a16:creationId xmlns:a16="http://schemas.microsoft.com/office/drawing/2014/main" id="{A6E79513-5D2F-8C20-92D6-39292B8A9E52}"/>
+              </a:ext>
+            </a:extLst>
+          </p:cNvPr>
+          <p:cNvSpPr>
+            <a:spLocks noGrp="1"/>
+          </p:cNvSpPr>
+          <p:nvPr>
+            <p:ph type="body" idx="1"/>
+          </p:nvPr>
+        </p:nvSpPr>
+        <p:spPr/>
+        <p:txBody>
+          <a:bodyPr/>
+          <a:lstStyle/>
+          <a:p>
+            <a:r>
+              <a:rPr lang="de-DE" sz="1200" b="0" kern="1200" dirty="0">
+                <a:solidFill>
+                  <a:schemeClr val="tx1"/>
+                </a:solidFill>
+                <a:effectLst/>
+                <a:latin typeface="+mn-lt"/>
+                <a:ea typeface="+mn-ea"/>
+                <a:cs typeface="+mn-cs"/>
+              </a:rPr>
+              <a:t>Z01 mit 100 Signalen in Test </a:t>
+            </a:r>
+            <a:r>
+              <a:rPr lang="de-DE" sz="1200" b="0" kern="1200" dirty="0" err="1">
+                <a:solidFill>
+                  <a:schemeClr val="tx1"/>
+                </a:solidFill>
+                <a:effectLst/>
+                <a:latin typeface="+mn-lt"/>
+                <a:ea typeface="+mn-ea"/>
+                <a:cs typeface="+mn-cs"/>
+              </a:rPr>
+              <a:t>set</a:t>
+            </a:r>
+            <a:endParaRPr lang="de-DE" sz="1200" b="0" kern="1200" dirty="0">
+              <a:solidFill>
+                <a:schemeClr val="tx1"/>
+              </a:solidFill>
+              <a:effectLst/>
+              <a:latin typeface="+mn-lt"/>
+              <a:ea typeface="+mn-ea"/>
+              <a:cs typeface="+mn-cs"/>
+            </a:endParaRPr>
+          </a:p>
+        </p:txBody>
+      </p:sp>
+      <p:sp>
+        <p:nvSpPr>
+          <p:cNvPr id="4" name="Foliennummernplatzhalter 3">
+            <a:extLst>
+              <a:ext uri="{FF2B5EF4-FFF2-40B4-BE49-F238E27FC236}">
+                <a16:creationId xmlns:a16="http://schemas.microsoft.com/office/drawing/2014/main" id="{57AA724F-048C-9840-F6C7-1D143204DC1E}"/>
+              </a:ext>
+            </a:extLst>
+          </p:cNvPr>
+          <p:cNvSpPr>
+            <a:spLocks noGrp="1"/>
+          </p:cNvSpPr>
+          <p:nvPr>
+            <p:ph type="sldNum" sz="quarter" idx="5"/>
+          </p:nvPr>
+        </p:nvSpPr>
+        <p:spPr/>
+        <p:txBody>
+          <a:bodyPr/>
+          <a:lstStyle/>
+          <a:p>
+            <a:fld id="{0492B7F2-6741-7346-B13A-366117EE2BBB}" type="slidenum">
+              <a:rPr lang="de-DE" smtClean="0"/>
+              <a:t>12</a:t>
+            </a:fld>
+            <a:endParaRPr lang="de-DE"/>
+          </a:p>
+        </p:txBody>
+      </p:sp>
+    </p:spTree>
+    <p:extLst>
+      <p:ext uri="{BB962C8B-B14F-4D97-AF65-F5344CB8AC3E}">
+        <p14:creationId xmlns:p14="http://schemas.microsoft.com/office/powerpoint/2010/main" val="1842521283"/>
+      </p:ext>
+    </p:extLst>
+  </p:cSld>
+  <p:clrMapOvr>
+    <a:masterClrMapping/>
+  </p:clrMapOvr>
+</p:notes>
+</file>
+
+<file path=ppt/notesSlides/notesSlide13.xml><?xml version="1.0" encoding="utf-8"?>
 <p:notes xmlns:a="http://schemas.openxmlformats.org/drawingml/2006/main" xmlns:r="http://schemas.openxmlformats.org/officeDocument/2006/relationships" xmlns:p="http://schemas.openxmlformats.org/presentationml/2006/main">
   <p:cSld>
     <p:spTree>
@@ -992,188 +1343,36 @@
           <a:bodyPr/>
           <a:lstStyle/>
           <a:p>
-            <a:pPr marL="0" marR="0" lvl="0" indent="0" algn="l" defTabSz="914400" rtl="0" eaLnBrk="1" fontAlgn="auto" latinLnBrk="0" hangingPunct="1">
-              <a:lnSpc>
-                <a:spcPct val="100000"/>
-              </a:lnSpc>
-              <a:spcBef>
-                <a:spcPts val="0"/>
-              </a:spcBef>
-              <a:spcAft>
-                <a:spcPts val="0"/>
-              </a:spcAft>
-              <a:buClrTx/>
-              <a:buSzTx/>
-              <a:buFontTx/>
-              <a:buNone/>
-              <a:tabLst/>
-              <a:defRPr/>
-            </a:pPr>
-            <a:r>
-              <a:rPr lang="de-DE" sz="1200" b="0" kern="1200" dirty="0">
-                <a:solidFill>
-                  <a:schemeClr val="tx1"/>
-                </a:solidFill>
-                <a:effectLst/>
-                <a:latin typeface="+mn-lt"/>
-                <a:ea typeface="+mn-ea"/>
-                <a:cs typeface="+mn-cs"/>
+            <a:r>
+              <a:rPr lang="de-DE" dirty="0"/>
+              <a:t>ROC x-Achse </a:t>
+            </a:r>
+            <a:r>
+              <a:rPr lang="de-DE" dirty="0">
+                <a:sym typeface="Wingdings" panose="05000000000000000000" pitchFamily="2" charset="2"/>
               </a:rPr>
-              <a:t>David</a:t>
-            </a:r>
-          </a:p>
-          <a:p>
-            <a:pPr marL="0" marR="0" lvl="0" indent="0" algn="l" defTabSz="914400" rtl="0" eaLnBrk="1" fontAlgn="auto" latinLnBrk="0" hangingPunct="1">
-              <a:lnSpc>
-                <a:spcPct val="100000"/>
-              </a:lnSpc>
-              <a:spcBef>
-                <a:spcPts val="0"/>
-              </a:spcBef>
-              <a:spcAft>
-                <a:spcPts val="0"/>
-              </a:spcAft>
-              <a:buClrTx/>
-              <a:buSzTx/>
-              <a:buFontTx/>
-              <a:buNone/>
-              <a:tabLst/>
-              <a:defRPr/>
-            </a:pPr>
-            <a:r>
-              <a:rPr lang="de-DE" sz="1200" b="0" kern="1200" dirty="0">
-                <a:solidFill>
-                  <a:schemeClr val="tx1"/>
-                </a:solidFill>
-                <a:effectLst/>
-                <a:latin typeface="+mn-lt"/>
-                <a:ea typeface="+mn-ea"/>
-                <a:cs typeface="+mn-cs"/>
+              <a:t> </a:t>
+            </a:r>
+            <a:r>
+              <a:rPr lang="de-DE" dirty="0" err="1">
+                <a:sym typeface="Wingdings" panose="05000000000000000000" pitchFamily="2" charset="2"/>
               </a:rPr>
-              <a:t>Die Code-Vorstellung läuft am besten über `main.py`, weil dort alle Schritte sichtbar zusammenlaufen: Signale laden, Split anwenden, Features extrahieren, über `</a:t>
-            </a:r>
-            <a:r>
-              <a:rPr lang="de-DE" sz="1200" b="0" kern="1200" dirty="0" err="1">
-                <a:solidFill>
-                  <a:schemeClr val="tx1"/>
-                </a:solidFill>
-                <a:effectLst/>
-                <a:latin typeface="+mn-lt"/>
-                <a:ea typeface="+mn-ea"/>
-                <a:cs typeface="+mn-cs"/>
+              <a:t>wieviele</a:t>
+            </a:r>
+            <a:r>
+              <a:rPr lang="de-DE" dirty="0">
+                <a:sym typeface="Wingdings" panose="05000000000000000000" pitchFamily="2" charset="2"/>
               </a:rPr>
-              <a:t>mID</a:t>
-            </a:r>
-            <a:r>
-              <a:rPr lang="de-DE" sz="1200" b="0" kern="1200" dirty="0">
-                <a:solidFill>
-                  <a:schemeClr val="tx1"/>
-                </a:solidFill>
-                <a:effectLst/>
-                <a:latin typeface="+mn-lt"/>
-                <a:ea typeface="+mn-ea"/>
-                <a:cs typeface="+mn-cs"/>
+              <a:t> Label 0 haben einen höheren Score als Label 1? </a:t>
+            </a:r>
+          </a:p>
+          <a:p>
+            <a:r>
+              <a:rPr lang="de-DE" dirty="0">
+                <a:sym typeface="Wingdings" panose="05000000000000000000" pitchFamily="2" charset="2"/>
               </a:rPr>
-              <a:t>` mitteln, pro Channel ein Modell trainieren und am Ende Ergebnisse speichern. Die anderen Dateien erklären wir kurz nach ihrer Rolle. `dataframe_manager.py` baut den Rohdaten-Data-Frame aus den WAV-Dateien. `split.py` enthält die methodisch wichtige Aufteilung: `Z01` und `Z02` ins Training, `Z04` in den Entwicklungssatz, `Z03` in den Testsatz und `Z05` positionsbasiert in alle drei Splits. `extraction.py` berechnet die Merkmale wie MFCC, Spektralmerkmale, Chroma, Zero-Crossing-Rate und RMS. `model.py` muss nicht im Detail vorgestellt werden; wichtig ist nur, dass dort `</a:t>
-            </a:r>
-            <a:r>
-              <a:rPr lang="de-DE" sz="1200" b="0" kern="1200" dirty="0" err="1">
-                <a:solidFill>
-                  <a:schemeClr val="tx1"/>
-                </a:solidFill>
-                <a:effectLst/>
-                <a:latin typeface="+mn-lt"/>
-                <a:ea typeface="+mn-ea"/>
-                <a:cs typeface="+mn-cs"/>
-              </a:rPr>
-              <a:t>StandardScaler</a:t>
-            </a:r>
-            <a:r>
-              <a:rPr lang="de-DE" sz="1200" b="0" kern="1200" dirty="0">
-                <a:solidFill>
-                  <a:schemeClr val="tx1"/>
-                </a:solidFill>
-                <a:effectLst/>
-                <a:latin typeface="+mn-lt"/>
-                <a:ea typeface="+mn-ea"/>
-                <a:cs typeface="+mn-cs"/>
-              </a:rPr>
-              <a:t> -&gt; </a:t>
-            </a:r>
-            <a:r>
-              <a:rPr lang="de-DE" sz="1200" b="0" kern="1200" dirty="0" err="1">
-                <a:solidFill>
-                  <a:schemeClr val="tx1"/>
-                </a:solidFill>
-                <a:effectLst/>
-                <a:latin typeface="+mn-lt"/>
-                <a:ea typeface="+mn-ea"/>
-                <a:cs typeface="+mn-cs"/>
-              </a:rPr>
-              <a:t>MLPClassifier</a:t>
-            </a:r>
-            <a:r>
-              <a:rPr lang="de-DE" sz="1200" b="0" kern="1200" dirty="0">
-                <a:solidFill>
-                  <a:schemeClr val="tx1"/>
-                </a:solidFill>
-                <a:effectLst/>
-                <a:latin typeface="+mn-lt"/>
-                <a:ea typeface="+mn-ea"/>
-                <a:cs typeface="+mn-cs"/>
-              </a:rPr>
-              <a:t>`, Hyperparameter-Suche, finale Evaluation, ROC, </a:t>
-            </a:r>
-            <a:r>
-              <a:rPr lang="de-DE" sz="1200" b="0" kern="1200" dirty="0" err="1">
-                <a:solidFill>
-                  <a:schemeClr val="tx1"/>
-                </a:solidFill>
-                <a:effectLst/>
-                <a:latin typeface="+mn-lt"/>
-                <a:ea typeface="+mn-ea"/>
-                <a:cs typeface="+mn-cs"/>
-              </a:rPr>
-              <a:t>Confusion</a:t>
-            </a:r>
-            <a:r>
-              <a:rPr lang="de-DE" sz="1200" b="0" kern="1200" dirty="0">
-                <a:solidFill>
-                  <a:schemeClr val="tx1"/>
-                </a:solidFill>
-                <a:effectLst/>
-                <a:latin typeface="+mn-lt"/>
-                <a:ea typeface="+mn-ea"/>
-                <a:cs typeface="+mn-cs"/>
-              </a:rPr>
-              <a:t> Matrix, Learning </a:t>
-            </a:r>
-            <a:r>
-              <a:rPr lang="de-DE" sz="1200" b="0" kern="1200" dirty="0" err="1">
-                <a:solidFill>
-                  <a:schemeClr val="tx1"/>
-                </a:solidFill>
-                <a:effectLst/>
-                <a:latin typeface="+mn-lt"/>
-                <a:ea typeface="+mn-ea"/>
-                <a:cs typeface="+mn-cs"/>
-              </a:rPr>
-              <a:t>Curves</a:t>
-            </a:r>
-            <a:r>
-              <a:rPr lang="de-DE" sz="1200" b="0" kern="1200" dirty="0">
-                <a:solidFill>
-                  <a:schemeClr val="tx1"/>
-                </a:solidFill>
-                <a:effectLst/>
-                <a:latin typeface="+mn-lt"/>
-                <a:ea typeface="+mn-ea"/>
-                <a:cs typeface="+mn-cs"/>
-              </a:rPr>
-              <a:t> und Loss-Kurven umgesetzt sind.</a:t>
-            </a:r>
-          </a:p>
-          <a:p>
+              <a:t>Wenn 0 bei x-Achse dann alle Label 0 kleineren Score als Label 1.</a:t>
+            </a:r>
             <a:endParaRPr lang="de-DE" dirty="0"/>
           </a:p>
         </p:txBody>
@@ -1195,7 +1394,7 @@
           <a:p>
             <a:fld id="{0492B7F2-6741-7346-B13A-366117EE2BBB}" type="slidenum">
               <a:rPr lang="de-DE" smtClean="0"/>
-              <a:t>11</a:t>
+              <a:t>13</a:t>
             </a:fld>
             <a:endParaRPr lang="de-DE"/>
           </a:p>
@@ -1214,147 +1413,7 @@
 </p:notes>
 </file>
 
-<file path=ppt/notesSlides/notesSlide12.xml><?xml version="1.0" encoding="utf-8"?>
-<p:notes xmlns:a="http://schemas.openxmlformats.org/drawingml/2006/main" xmlns:r="http://schemas.openxmlformats.org/officeDocument/2006/relationships" xmlns:p="http://schemas.openxmlformats.org/presentationml/2006/main">
-  <p:cSld>
-    <p:spTree>
-      <p:nvGrpSpPr>
-        <p:cNvPr id="1" name=""/>
-        <p:cNvGrpSpPr/>
-        <p:nvPr/>
-      </p:nvGrpSpPr>
-      <p:grpSpPr>
-        <a:xfrm>
-          <a:off x="0" y="0"/>
-          <a:ext cx="0" cy="0"/>
-          <a:chOff x="0" y="0"/>
-          <a:chExt cx="0" cy="0"/>
-        </a:xfrm>
-      </p:grpSpPr>
-      <p:sp>
-        <p:nvSpPr>
-          <p:cNvPr id="2" name="Folienbildplatzhalter 1"/>
-          <p:cNvSpPr>
-            <a:spLocks noGrp="1" noRot="1" noChangeAspect="1"/>
-          </p:cNvSpPr>
-          <p:nvPr>
-            <p:ph type="sldImg"/>
-          </p:nvPr>
-        </p:nvSpPr>
-        <p:spPr/>
-        <p:txBody>
-          <a:bodyPr/>
-          <a:lstStyle/>
-          <a:p>
-            <a:endParaRPr lang="de-DE"/>
-          </a:p>
-        </p:txBody>
-      </p:sp>
-      <p:sp>
-        <p:nvSpPr>
-          <p:cNvPr id="3" name="Notizenplatzhalter 2"/>
-          <p:cNvSpPr>
-            <a:spLocks noGrp="1"/>
-          </p:cNvSpPr>
-          <p:nvPr>
-            <p:ph type="body" idx="1"/>
-          </p:nvPr>
-        </p:nvSpPr>
-        <p:spPr/>
-        <p:txBody>
-          <a:bodyPr/>
-          <a:lstStyle/>
-          <a:p>
-            <a:r>
-              <a:rPr lang="de-DE" sz="1200" b="0" kern="1200" dirty="0">
-                <a:solidFill>
-                  <a:schemeClr val="tx1"/>
-                </a:solidFill>
-                <a:effectLst/>
-                <a:latin typeface="+mn-lt"/>
-                <a:ea typeface="+mn-ea"/>
-                <a:cs typeface="+mn-cs"/>
-              </a:rPr>
-              <a:t>David</a:t>
-            </a:r>
-          </a:p>
-          <a:p>
-            <a:r>
-              <a:rPr lang="de-DE" sz="1200" b="0" kern="1200" dirty="0">
-                <a:solidFill>
-                  <a:schemeClr val="tx1"/>
-                </a:solidFill>
-                <a:effectLst/>
-                <a:latin typeface="+mn-lt"/>
-                <a:ea typeface="+mn-ea"/>
-                <a:cs typeface="+mn-cs"/>
-              </a:rPr>
-              <a:t>Die Training-Loss-Kurve zeigt, wie sich der Fehler während des Trainings entwickelt. Der Loss basiert auf den vorhergesagten Wahrscheinlichkeiten des MLP und den echten Labels. Wenn das Modell der richtigen Klasse eine hohe Wahrscheinlichkeit gibt, ist der Loss klein. Wenn es unsicher oder falsch liegt, steigt der Loss. In unseren Kurven sinkt der Loss deutlich ab, was zeigt, dass das Training funktioniert und das Modell die Trainingsdaten zunehmend besser beschreibt. Wichtig ist aber, dass ein niedriger Trainings-Loss allein nicht   ausreicht. Ein Modell kann auf Trainingsdaten sehr gut sein und trotzdem schlecht generalisieren. Deshalb bewerten wir zusätzlich mit Entwicklungssatz, Testsatz, ROC/AUC und Learning </a:t>
-            </a:r>
-            <a:r>
-              <a:rPr lang="de-DE" sz="1200" b="0" kern="1200" dirty="0" err="1">
-                <a:solidFill>
-                  <a:schemeClr val="tx1"/>
-                </a:solidFill>
-                <a:effectLst/>
-                <a:latin typeface="+mn-lt"/>
-                <a:ea typeface="+mn-ea"/>
-                <a:cs typeface="+mn-cs"/>
-              </a:rPr>
-              <a:t>Curves</a:t>
-            </a:r>
-            <a:r>
-              <a:rPr lang="de-DE" sz="1200" b="0" kern="1200" dirty="0">
-                <a:solidFill>
-                  <a:schemeClr val="tx1"/>
-                </a:solidFill>
-                <a:effectLst/>
-                <a:latin typeface="+mn-lt"/>
-                <a:ea typeface="+mn-ea"/>
-                <a:cs typeface="+mn-cs"/>
-              </a:rPr>
-              <a:t>.</a:t>
-            </a:r>
-          </a:p>
-        </p:txBody>
-      </p:sp>
-      <p:sp>
-        <p:nvSpPr>
-          <p:cNvPr id="4" name="Foliennummernplatzhalter 3"/>
-          <p:cNvSpPr>
-            <a:spLocks noGrp="1"/>
-          </p:cNvSpPr>
-          <p:nvPr>
-            <p:ph type="sldNum" sz="quarter" idx="5"/>
-          </p:nvPr>
-        </p:nvSpPr>
-        <p:spPr/>
-        <p:txBody>
-          <a:bodyPr/>
-          <a:lstStyle/>
-          <a:p>
-            <a:fld id="{0492B7F2-6741-7346-B13A-366117EE2BBB}" type="slidenum">
-              <a:rPr lang="de-DE" smtClean="0"/>
-              <a:t>12</a:t>
-            </a:fld>
-            <a:endParaRPr lang="de-DE"/>
-          </a:p>
-        </p:txBody>
-      </p:sp>
-    </p:spTree>
-    <p:extLst>
-      <p:ext uri="{BB962C8B-B14F-4D97-AF65-F5344CB8AC3E}">
-        <p14:creationId xmlns:p14="http://schemas.microsoft.com/office/powerpoint/2010/main" val="1568025164"/>
-      </p:ext>
-    </p:extLst>
-  </p:cSld>
-  <p:clrMapOvr>
-    <a:masterClrMapping/>
-  </p:clrMapOvr>
-</p:notes>
-</file>
-
-<file path=ppt/notesSlides/notesSlide13.xml><?xml version="1.0" encoding="utf-8"?>
+<file path=ppt/notesSlides/notesSlide14.xml><?xml version="1.0" encoding="utf-8"?>
 <p:notes xmlns:a="http://schemas.openxmlformats.org/drawingml/2006/main" xmlns:r="http://schemas.openxmlformats.org/officeDocument/2006/relationships" xmlns:p="http://schemas.openxmlformats.org/presentationml/2006/main">
   <p:cSld>
     <p:spTree>
@@ -1362,7 +1421,7 @@
         <p:cNvPr id="1" name="">
           <a:extLst>
             <a:ext uri="{FF2B5EF4-FFF2-40B4-BE49-F238E27FC236}">
-              <a16:creationId xmlns:a16="http://schemas.microsoft.com/office/drawing/2014/main" id="{F4F32459-7450-A094-EFE4-A5719BBE60A5}"/>
+              <a16:creationId xmlns:a16="http://schemas.microsoft.com/office/drawing/2014/main" id="{5A520170-30E8-2B89-DA31-CFC8D2D6A251}"/>
             </a:ext>
           </a:extLst>
         </p:cNvPr>
@@ -1382,7 +1441,7 @@
           <p:cNvPr id="2" name="Folienbildplatzhalter 1">
             <a:extLst>
               <a:ext uri="{FF2B5EF4-FFF2-40B4-BE49-F238E27FC236}">
-                <a16:creationId xmlns:a16="http://schemas.microsoft.com/office/drawing/2014/main" id="{10A727EB-4506-57C5-94F3-6703BF0E0E89}"/>
+                <a16:creationId xmlns:a16="http://schemas.microsoft.com/office/drawing/2014/main" id="{CB7C22FC-186A-69F1-9253-CC7E29695523}"/>
               </a:ext>
             </a:extLst>
           </p:cNvPr>
@@ -1407,7 +1466,7 @@
           <p:cNvPr id="3" name="Notizenplatzhalter 2">
             <a:extLst>
               <a:ext uri="{FF2B5EF4-FFF2-40B4-BE49-F238E27FC236}">
-                <a16:creationId xmlns:a16="http://schemas.microsoft.com/office/drawing/2014/main" id="{80DF9377-D63B-B215-1E30-95489284FCD2}"/>
+                <a16:creationId xmlns:a16="http://schemas.microsoft.com/office/drawing/2014/main" id="{CCD11782-B80F-1F29-554B-E4A398A145D9}"/>
               </a:ext>
             </a:extLst>
           </p:cNvPr>
@@ -1424,83 +1483,36 @@
           <a:lstStyle/>
           <a:p>
             <a:r>
-              <a:rPr lang="de-DE" sz="1200" b="0" kern="1200" dirty="0">
-                <a:solidFill>
-                  <a:schemeClr val="tx1"/>
-                </a:solidFill>
-                <a:effectLst/>
-                <a:latin typeface="+mn-lt"/>
-                <a:ea typeface="+mn-ea"/>
-                <a:cs typeface="+mn-cs"/>
+              <a:rPr lang="de-DE" dirty="0"/>
+              <a:t>ROC x-Achse </a:t>
+            </a:r>
+            <a:r>
+              <a:rPr lang="de-DE" dirty="0">
+                <a:sym typeface="Wingdings" panose="05000000000000000000" pitchFamily="2" charset="2"/>
               </a:rPr>
-              <a:t>Benjamin</a:t>
-            </a:r>
-          </a:p>
-          <a:p>
-            <a:r>
-              <a:rPr lang="de-DE" sz="1200" b="0" kern="1200" dirty="0">
-                <a:solidFill>
-                  <a:schemeClr val="tx1"/>
-                </a:solidFill>
-                <a:effectLst/>
-                <a:latin typeface="+mn-lt"/>
-                <a:ea typeface="+mn-ea"/>
-                <a:cs typeface="+mn-cs"/>
+              <a:t> </a:t>
+            </a:r>
+            <a:r>
+              <a:rPr lang="de-DE" dirty="0" err="1">
+                <a:sym typeface="Wingdings" panose="05000000000000000000" pitchFamily="2" charset="2"/>
               </a:rPr>
-              <a:t>Die Learning </a:t>
-            </a:r>
-            <a:r>
-              <a:rPr lang="de-DE" sz="1200" b="0" kern="1200" dirty="0" err="1">
-                <a:solidFill>
-                  <a:schemeClr val="tx1"/>
-                </a:solidFill>
-                <a:effectLst/>
-                <a:latin typeface="+mn-lt"/>
-                <a:ea typeface="+mn-ea"/>
-                <a:cs typeface="+mn-cs"/>
+              <a:t>wieviele</a:t>
+            </a:r>
+            <a:r>
+              <a:rPr lang="de-DE" dirty="0">
+                <a:sym typeface="Wingdings" panose="05000000000000000000" pitchFamily="2" charset="2"/>
               </a:rPr>
-              <a:t>Curves</a:t>
-            </a:r>
-            <a:r>
-              <a:rPr lang="de-DE" sz="1200" b="0" kern="1200" dirty="0">
-                <a:solidFill>
-                  <a:schemeClr val="tx1"/>
-                </a:solidFill>
-                <a:effectLst/>
-                <a:latin typeface="+mn-lt"/>
-                <a:ea typeface="+mn-ea"/>
-                <a:cs typeface="+mn-cs"/>
+              <a:t> Label 0 haben einen höheren Score als Label 1? </a:t>
+            </a:r>
+          </a:p>
+          <a:p>
+            <a:r>
+              <a:rPr lang="de-DE" dirty="0">
+                <a:sym typeface="Wingdings" panose="05000000000000000000" pitchFamily="2" charset="2"/>
               </a:rPr>
-              <a:t> zeigen, wie gut das Modell mit wachsender Trainingsmenge wird. </a:t>
-            </a:r>
-          </a:p>
-          <a:p>
-            <a:r>
-              <a:rPr lang="de-DE" sz="1200" b="0" kern="1200" dirty="0">
-                <a:solidFill>
-                  <a:schemeClr val="tx1"/>
-                </a:solidFill>
-                <a:effectLst/>
-                <a:latin typeface="+mn-lt"/>
-                <a:ea typeface="+mn-ea"/>
-                <a:cs typeface="+mn-cs"/>
-              </a:rPr>
-              <a:t>Im aktuellen Split erreicht `Ch1` schon mit kleinen Trainingsmengen perfekte Entwicklungswerte. </a:t>
-            </a:r>
-          </a:p>
-          <a:p>
-            <a:r>
-              <a:rPr lang="de-DE" sz="1200" b="0" kern="1200" dirty="0">
-                <a:solidFill>
-                  <a:schemeClr val="tx1"/>
-                </a:solidFill>
-                <a:effectLst/>
-                <a:latin typeface="+mn-lt"/>
-                <a:ea typeface="+mn-ea"/>
-                <a:cs typeface="+mn-cs"/>
-              </a:rPr>
-              <a:t>`Ch2` verbessert sich schrittweise und erreicht die perfekten Entwicklungswerte erst mit der gesamten Trainingsmenge.</a:t>
-            </a:r>
+              <a:t>Wenn 0 bei x-Achse dann alle Label 0 kleineren Score als Label 1.</a:t>
+            </a:r>
+            <a:endParaRPr lang="de-DE" dirty="0"/>
           </a:p>
         </p:txBody>
       </p:sp>
@@ -1509,113 +1521,10 @@
           <p:cNvPr id="4" name="Foliennummernplatzhalter 3">
             <a:extLst>
               <a:ext uri="{FF2B5EF4-FFF2-40B4-BE49-F238E27FC236}">
-                <a16:creationId xmlns:a16="http://schemas.microsoft.com/office/drawing/2014/main" id="{5714CD32-AC14-F66C-2FDB-9965745FDDFE}"/>
-              </a:ext>
-            </a:extLst>
-          </p:cNvPr>
-          <p:cNvSpPr>
-            <a:spLocks noGrp="1"/>
-          </p:cNvSpPr>
-          <p:nvPr>
-            <p:ph type="sldNum" sz="quarter" idx="5"/>
-          </p:nvPr>
-        </p:nvSpPr>
-        <p:spPr/>
-        <p:txBody>
-          <a:bodyPr/>
-          <a:lstStyle/>
-          <a:p>
-            <a:fld id="{0492B7F2-6741-7346-B13A-366117EE2BBB}" type="slidenum">
-              <a:rPr lang="de-DE" smtClean="0"/>
-              <a:t>13</a:t>
-            </a:fld>
-            <a:endParaRPr lang="de-DE"/>
-          </a:p>
-        </p:txBody>
-      </p:sp>
-    </p:spTree>
-    <p:extLst>
-      <p:ext uri="{BB962C8B-B14F-4D97-AF65-F5344CB8AC3E}">
-        <p14:creationId xmlns:p14="http://schemas.microsoft.com/office/powerpoint/2010/main" val="3583877846"/>
-      </p:ext>
-    </p:extLst>
-  </p:cSld>
-  <p:clrMapOvr>
-    <a:masterClrMapping/>
-  </p:clrMapOvr>
-</p:notes>
-</file>
-
-<file path=ppt/notesSlides/notesSlide14.xml><?xml version="1.0" encoding="utf-8"?>
-<p:notes xmlns:a="http://schemas.openxmlformats.org/drawingml/2006/main" xmlns:r="http://schemas.openxmlformats.org/officeDocument/2006/relationships" xmlns:p="http://schemas.openxmlformats.org/presentationml/2006/main">
-  <p:cSld>
-    <p:spTree>
-      <p:nvGrpSpPr>
-        <p:cNvPr id="1" name=""/>
-        <p:cNvGrpSpPr/>
-        <p:nvPr/>
-      </p:nvGrpSpPr>
-      <p:grpSpPr>
-        <a:xfrm>
-          <a:off x="0" y="0"/>
-          <a:ext cx="0" cy="0"/>
-          <a:chOff x="0" y="0"/>
-          <a:chExt cx="0" cy="0"/>
-        </a:xfrm>
-      </p:grpSpPr>
-      <p:sp>
-        <p:nvSpPr>
-          <p:cNvPr id="2" name="Folienbildplatzhalter 1"/>
-          <p:cNvSpPr>
-            <a:spLocks noGrp="1" noRot="1" noChangeAspect="1"/>
-          </p:cNvSpPr>
-          <p:nvPr>
-            <p:ph type="sldImg"/>
-          </p:nvPr>
-        </p:nvSpPr>
-        <p:spPr/>
-        <p:txBody>
-          <a:bodyPr/>
-          <a:lstStyle/>
-          <a:p>
-            <a:endParaRPr lang="de-DE"/>
-          </a:p>
-        </p:txBody>
-      </p:sp>
-      <p:sp>
-        <p:nvSpPr>
-          <p:cNvPr id="3" name="Notizenplatzhalter 2"/>
-          <p:cNvSpPr>
-            <a:spLocks noGrp="1"/>
-          </p:cNvSpPr>
-          <p:nvPr>
-            <p:ph type="body" idx="1"/>
-          </p:nvPr>
-        </p:nvSpPr>
-        <p:spPr/>
-        <p:txBody>
-          <a:bodyPr/>
-          <a:lstStyle/>
-          <a:p>
-            <a:r>
-              <a:rPr lang="de-DE" sz="1200" b="0" kern="1200" dirty="0">
-                <a:solidFill>
-                  <a:schemeClr val="tx1"/>
-                </a:solidFill>
-                <a:effectLst/>
-                <a:latin typeface="+mn-lt"/>
-                <a:ea typeface="+mn-ea"/>
-                <a:cs typeface="+mn-cs"/>
-              </a:rPr>
-              <a:t>Benjamin</a:t>
-            </a:r>
-            <a:endParaRPr lang="de-DE" dirty="0"/>
-          </a:p>
-        </p:txBody>
-      </p:sp>
-      <p:sp>
-        <p:nvSpPr>
-          <p:cNvPr id="4" name="Foliennummernplatzhalter 3"/>
+                <a16:creationId xmlns:a16="http://schemas.microsoft.com/office/drawing/2014/main" id="{8B22ACB8-9C77-6EBF-B432-B33D2A56E7F8}"/>
+              </a:ext>
+            </a:extLst>
+          </p:cNvPr>
           <p:cNvSpPr>
             <a:spLocks noGrp="1"/>
           </p:cNvSpPr>
@@ -1639,7 +1548,7 @@
     </p:spTree>
     <p:extLst>
       <p:ext uri="{BB962C8B-B14F-4D97-AF65-F5344CB8AC3E}">
-        <p14:creationId xmlns:p14="http://schemas.microsoft.com/office/powerpoint/2010/main" val="2133910754"/>
+        <p14:creationId xmlns:p14="http://schemas.microsoft.com/office/powerpoint/2010/main" val="3877335352"/>
       </p:ext>
     </p:extLst>
   </p:cSld>
@@ -1657,7 +1566,7 @@
         <p:cNvPr id="1" name="">
           <a:extLst>
             <a:ext uri="{FF2B5EF4-FFF2-40B4-BE49-F238E27FC236}">
-              <a16:creationId xmlns:a16="http://schemas.microsoft.com/office/drawing/2014/main" id="{63DFF985-53AC-E751-BA8C-BC7DEA5F3C7B}"/>
+              <a16:creationId xmlns:a16="http://schemas.microsoft.com/office/drawing/2014/main" id="{DA3B1F09-352B-6E4F-1FA4-5A2E30ED477F}"/>
             </a:ext>
           </a:extLst>
         </p:cNvPr>
@@ -1677,7 +1586,7 @@
           <p:cNvPr id="2" name="Folienbildplatzhalter 1">
             <a:extLst>
               <a:ext uri="{FF2B5EF4-FFF2-40B4-BE49-F238E27FC236}">
-                <a16:creationId xmlns:a16="http://schemas.microsoft.com/office/drawing/2014/main" id="{7D88C51C-D20F-5D3F-AFB8-301D93D8137F}"/>
+                <a16:creationId xmlns:a16="http://schemas.microsoft.com/office/drawing/2014/main" id="{ED30A2D9-B7E1-AD36-5EAE-205C8CA04720}"/>
               </a:ext>
             </a:extLst>
           </p:cNvPr>
@@ -1702,7 +1611,7 @@
           <p:cNvPr id="3" name="Notizenplatzhalter 2">
             <a:extLst>
               <a:ext uri="{FF2B5EF4-FFF2-40B4-BE49-F238E27FC236}">
-                <a16:creationId xmlns:a16="http://schemas.microsoft.com/office/drawing/2014/main" id="{20285DFC-E835-86B2-BB91-E156E3F0C14C}"/>
+                <a16:creationId xmlns:a16="http://schemas.microsoft.com/office/drawing/2014/main" id="{DC01EDD2-981B-1065-883E-F79081F17924}"/>
               </a:ext>
             </a:extLst>
           </p:cNvPr>
@@ -1719,16 +1628,34 @@
           <a:lstStyle/>
           <a:p>
             <a:r>
-              <a:rPr lang="de-DE" sz="1200" b="0" kern="1200" dirty="0">
-                <a:solidFill>
-                  <a:schemeClr val="tx1"/>
-                </a:solidFill>
-                <a:effectLst/>
-                <a:latin typeface="+mn-lt"/>
-                <a:ea typeface="+mn-ea"/>
-                <a:cs typeface="+mn-cs"/>
+              <a:rPr lang="de-DE" dirty="0"/>
+              <a:t>ROC x-Achse </a:t>
+            </a:r>
+            <a:r>
+              <a:rPr lang="de-DE" dirty="0">
+                <a:sym typeface="Wingdings" panose="05000000000000000000" pitchFamily="2" charset="2"/>
               </a:rPr>
-              <a:t>Benjamin</a:t>
+              <a:t> </a:t>
+            </a:r>
+            <a:r>
+              <a:rPr lang="de-DE" dirty="0" err="1">
+                <a:sym typeface="Wingdings" panose="05000000000000000000" pitchFamily="2" charset="2"/>
+              </a:rPr>
+              <a:t>wieviele</a:t>
+            </a:r>
+            <a:r>
+              <a:rPr lang="de-DE" dirty="0">
+                <a:sym typeface="Wingdings" panose="05000000000000000000" pitchFamily="2" charset="2"/>
+              </a:rPr>
+              <a:t> Label 0 haben einen höheren Score als Label 1? </a:t>
+            </a:r>
+          </a:p>
+          <a:p>
+            <a:r>
+              <a:rPr lang="de-DE" dirty="0">
+                <a:sym typeface="Wingdings" panose="05000000000000000000" pitchFamily="2" charset="2"/>
+              </a:rPr>
+              <a:t>Wenn 0 bei x-Achse dann alle Label 0 kleineren Score als Label 1.</a:t>
             </a:r>
             <a:endParaRPr lang="de-DE" dirty="0"/>
           </a:p>
@@ -1739,7 +1666,7 @@
           <p:cNvPr id="4" name="Foliennummernplatzhalter 3">
             <a:extLst>
               <a:ext uri="{FF2B5EF4-FFF2-40B4-BE49-F238E27FC236}">
-                <a16:creationId xmlns:a16="http://schemas.microsoft.com/office/drawing/2014/main" id="{A4A929B9-3971-4019-B480-8B92AE76D090}"/>
+                <a16:creationId xmlns:a16="http://schemas.microsoft.com/office/drawing/2014/main" id="{EB030EE1-3907-FB42-0CDF-65975B87C35B}"/>
               </a:ext>
             </a:extLst>
           </p:cNvPr>
@@ -1766,7 +1693,7 @@
     </p:spTree>
     <p:extLst>
       <p:ext uri="{BB962C8B-B14F-4D97-AF65-F5344CB8AC3E}">
-        <p14:creationId xmlns:p14="http://schemas.microsoft.com/office/powerpoint/2010/main" val="434411322"/>
+        <p14:creationId xmlns:p14="http://schemas.microsoft.com/office/powerpoint/2010/main" val="3102286844"/>
       </p:ext>
     </p:extLst>
   </p:cSld>
@@ -1784,7 +1711,7 @@
         <p:cNvPr id="1" name="">
           <a:extLst>
             <a:ext uri="{FF2B5EF4-FFF2-40B4-BE49-F238E27FC236}">
-              <a16:creationId xmlns:a16="http://schemas.microsoft.com/office/drawing/2014/main" id="{D796223C-46EC-F132-120C-79DCC285922F}"/>
+              <a16:creationId xmlns:a16="http://schemas.microsoft.com/office/drawing/2014/main" id="{E7FA8DAC-873E-943E-8CFC-98EE272084B1}"/>
             </a:ext>
           </a:extLst>
         </p:cNvPr>
@@ -1804,7 +1731,7 @@
           <p:cNvPr id="2" name="Folienbildplatzhalter 1">
             <a:extLst>
               <a:ext uri="{FF2B5EF4-FFF2-40B4-BE49-F238E27FC236}">
-                <a16:creationId xmlns:a16="http://schemas.microsoft.com/office/drawing/2014/main" id="{B31AB49A-A181-E6C4-52A9-32F54132F86C}"/>
+                <a16:creationId xmlns:a16="http://schemas.microsoft.com/office/drawing/2014/main" id="{234931D3-77B0-893D-4F29-2702FBC77A52}"/>
               </a:ext>
             </a:extLst>
           </p:cNvPr>
@@ -1829,7 +1756,7 @@
           <p:cNvPr id="3" name="Notizenplatzhalter 2">
             <a:extLst>
               <a:ext uri="{FF2B5EF4-FFF2-40B4-BE49-F238E27FC236}">
-                <a16:creationId xmlns:a16="http://schemas.microsoft.com/office/drawing/2014/main" id="{1A1B5407-2556-B13C-8BA6-1F2CF5FC46B8}"/>
+                <a16:creationId xmlns:a16="http://schemas.microsoft.com/office/drawing/2014/main" id="{5211EE8A-7C83-9BEE-0AA3-422F4582E718}"/>
               </a:ext>
             </a:extLst>
           </p:cNvPr>
@@ -1846,186 +1773,42 @@
           <a:lstStyle/>
           <a:p>
             <a:r>
-              <a:rPr lang="de-DE" sz="1200" b="0" kern="1200" dirty="0">
-                <a:solidFill>
-                  <a:schemeClr val="tx1"/>
-                </a:solidFill>
-                <a:effectLst/>
-                <a:latin typeface="+mn-lt"/>
-                <a:ea typeface="+mn-ea"/>
-                <a:cs typeface="+mn-cs"/>
+              <a:rPr lang="de-DE" dirty="0"/>
+              <a:t>Benny</a:t>
+            </a:r>
+          </a:p>
+          <a:p>
+            <a:r>
+              <a:rPr lang="de-DE" dirty="0"/>
+              <a:t>ROC x-Achse </a:t>
+            </a:r>
+            <a:r>
+              <a:rPr lang="de-DE" dirty="0">
+                <a:sym typeface="Wingdings" panose="05000000000000000000" pitchFamily="2" charset="2"/>
               </a:rPr>
-              <a:t>Benjamin</a:t>
-            </a:r>
-          </a:p>
-          <a:p>
-            <a:r>
-              <a:rPr lang="de-DE" sz="1200" b="0" kern="1200" dirty="0">
-                <a:solidFill>
-                  <a:schemeClr val="tx1"/>
-                </a:solidFill>
-                <a:effectLst/>
-                <a:latin typeface="+mn-lt"/>
-                <a:ea typeface="+mn-ea"/>
-                <a:cs typeface="+mn-cs"/>
+              <a:t> </a:t>
+            </a:r>
+            <a:r>
+              <a:rPr lang="de-DE" dirty="0" err="1">
+                <a:sym typeface="Wingdings" panose="05000000000000000000" pitchFamily="2" charset="2"/>
               </a:rPr>
-              <a:t>Die </a:t>
-            </a:r>
-            <a:r>
-              <a:rPr lang="de-DE" sz="1200" b="0" kern="1200" dirty="0" err="1">
-                <a:solidFill>
-                  <a:schemeClr val="tx1"/>
-                </a:solidFill>
-                <a:effectLst/>
-                <a:latin typeface="+mn-lt"/>
-                <a:ea typeface="+mn-ea"/>
-                <a:cs typeface="+mn-cs"/>
+              <a:t>wieviele</a:t>
+            </a:r>
+            <a:r>
+              <a:rPr lang="de-DE" dirty="0">
+                <a:sym typeface="Wingdings" panose="05000000000000000000" pitchFamily="2" charset="2"/>
               </a:rPr>
-              <a:t>Confusion</a:t>
-            </a:r>
-            <a:r>
-              <a:rPr lang="de-DE" sz="1200" b="0" kern="1200" dirty="0">
-                <a:solidFill>
-                  <a:schemeClr val="tx1"/>
-                </a:solidFill>
-                <a:effectLst/>
-                <a:latin typeface="+mn-lt"/>
-                <a:ea typeface="+mn-ea"/>
-                <a:cs typeface="+mn-cs"/>
+              <a:t> Label 0 haben einen höheren Score als Label 1? </a:t>
+            </a:r>
+          </a:p>
+          <a:p>
+            <a:r>
+              <a:rPr lang="de-DE" dirty="0">
+                <a:sym typeface="Wingdings" panose="05000000000000000000" pitchFamily="2" charset="2"/>
               </a:rPr>
-              <a:t> Matrix zeigt, dass im aktuellen Testsatz alle Beispiele korrekt klassifiziert wurden. </a:t>
-            </a:r>
-          </a:p>
-          <a:p>
-            <a:r>
-              <a:rPr lang="de-DE" sz="1200" b="0" kern="1200" dirty="0">
-                <a:solidFill>
-                  <a:schemeClr val="tx1"/>
-                </a:solidFill>
-                <a:effectLst/>
-                <a:latin typeface="+mn-lt"/>
-                <a:ea typeface="+mn-ea"/>
-                <a:cs typeface="+mn-cs"/>
-              </a:rPr>
-              <a:t>Besonders wichtig ist der  für Klasse 0</a:t>
-            </a:r>
-            <a:br>
-              <a:rPr lang="de-DE" sz="1200" b="0" kern="1200" dirty="0">
-                <a:solidFill>
-                  <a:schemeClr val="tx1"/>
-                </a:solidFill>
-                <a:effectLst/>
-                <a:latin typeface="+mn-lt"/>
-                <a:ea typeface="+mn-ea"/>
-                <a:cs typeface="+mn-cs"/>
-              </a:rPr>
-            </a:br>
-            <a:r>
-              <a:rPr lang="de-DE" sz="1200" b="0" kern="1200" dirty="0" err="1">
-                <a:solidFill>
-                  <a:schemeClr val="tx1"/>
-                </a:solidFill>
-                <a:effectLst/>
-                <a:latin typeface="+mn-lt"/>
-                <a:ea typeface="+mn-ea"/>
-                <a:cs typeface="+mn-cs"/>
-              </a:rPr>
-              <a:t>Accuracy</a:t>
-            </a:r>
-            <a:r>
-              <a:rPr lang="de-DE" sz="1200" b="0" kern="1200" dirty="0">
-                <a:solidFill>
-                  <a:schemeClr val="tx1"/>
-                </a:solidFill>
-                <a:effectLst/>
-                <a:latin typeface="+mn-lt"/>
-                <a:ea typeface="+mn-ea"/>
-                <a:cs typeface="+mn-cs"/>
-              </a:rPr>
-              <a:t>: Wie viele Vorhersagen waren insgesamt richtig?</a:t>
-            </a:r>
-            <a:br>
-              <a:rPr lang="de-DE" sz="1200" b="0" kern="1200" dirty="0">
-                <a:solidFill>
-                  <a:schemeClr val="tx1"/>
-                </a:solidFill>
-                <a:effectLst/>
-                <a:latin typeface="+mn-lt"/>
-                <a:ea typeface="+mn-ea"/>
-                <a:cs typeface="+mn-cs"/>
-              </a:rPr>
-            </a:br>
-            <a:r>
-              <a:rPr lang="de-DE" sz="1200" b="0" kern="1200" dirty="0" err="1">
-                <a:solidFill>
-                  <a:schemeClr val="tx1"/>
-                </a:solidFill>
-                <a:effectLst/>
-                <a:latin typeface="+mn-lt"/>
-                <a:ea typeface="+mn-ea"/>
-                <a:cs typeface="+mn-cs"/>
-              </a:rPr>
-              <a:t>Balanced</a:t>
-            </a:r>
-            <a:r>
-              <a:rPr lang="de-DE" sz="1200" b="0" kern="1200" dirty="0">
-                <a:solidFill>
-                  <a:schemeClr val="tx1"/>
-                </a:solidFill>
-                <a:effectLst/>
-                <a:latin typeface="+mn-lt"/>
-                <a:ea typeface="+mn-ea"/>
-                <a:cs typeface="+mn-cs"/>
-              </a:rPr>
-              <a:t> </a:t>
-            </a:r>
-            <a:r>
-              <a:rPr lang="de-DE" sz="1200" b="0" kern="1200" dirty="0" err="1">
-                <a:solidFill>
-                  <a:schemeClr val="tx1"/>
-                </a:solidFill>
-                <a:effectLst/>
-                <a:latin typeface="+mn-lt"/>
-                <a:ea typeface="+mn-ea"/>
-                <a:cs typeface="+mn-cs"/>
-              </a:rPr>
-              <a:t>Accuracy</a:t>
-            </a:r>
-            <a:r>
-              <a:rPr lang="de-DE" sz="1200" b="0" kern="1200" dirty="0">
-                <a:solidFill>
-                  <a:schemeClr val="tx1"/>
-                </a:solidFill>
-                <a:effectLst/>
-                <a:latin typeface="+mn-lt"/>
-                <a:ea typeface="+mn-ea"/>
-                <a:cs typeface="+mn-cs"/>
-              </a:rPr>
-              <a:t>: Wie gut funktioniert das Modell durchschnittlich für beide Klassen?</a:t>
-            </a:r>
-            <a:br>
-              <a:rPr lang="de-DE" sz="1200" b="0" kern="1200" dirty="0">
-                <a:solidFill>
-                  <a:schemeClr val="tx1"/>
-                </a:solidFill>
-                <a:effectLst/>
-                <a:latin typeface="+mn-lt"/>
-                <a:ea typeface="+mn-ea"/>
-                <a:cs typeface="+mn-cs"/>
-              </a:rPr>
-            </a:br>
-            <a:r>
-              <a:rPr lang="de-DE" sz="1200" b="0" kern="1200" dirty="0">
-                <a:solidFill>
-                  <a:schemeClr val="tx1"/>
-                </a:solidFill>
-                <a:effectLst/>
-                <a:latin typeface="+mn-lt"/>
-                <a:ea typeface="+mn-ea"/>
-                <a:cs typeface="+mn-cs"/>
-              </a:rPr>
-              <a:t>F1: Wie gut ist der Kompromiss zwischen TPR und TNR</a:t>
-            </a:r>
+              <a:t>Wenn 0 bei x-Achse dann alle Label 0 kleineren Score als Label 1.</a:t>
+            </a:r>
+            <a:endParaRPr lang="de-DE" dirty="0"/>
           </a:p>
         </p:txBody>
       </p:sp>
@@ -2034,7 +1817,7 @@
           <p:cNvPr id="4" name="Foliennummernplatzhalter 3">
             <a:extLst>
               <a:ext uri="{FF2B5EF4-FFF2-40B4-BE49-F238E27FC236}">
-                <a16:creationId xmlns:a16="http://schemas.microsoft.com/office/drawing/2014/main" id="{71FC3C16-880E-E124-F68B-73B6A73B0C69}"/>
+                <a16:creationId xmlns:a16="http://schemas.microsoft.com/office/drawing/2014/main" id="{7A25C5E9-C839-3BEE-2D2F-0298BCB6471F}"/>
               </a:ext>
             </a:extLst>
           </p:cNvPr>
@@ -2061,7 +1844,7 @@
     </p:spTree>
     <p:extLst>
       <p:ext uri="{BB962C8B-B14F-4D97-AF65-F5344CB8AC3E}">
-        <p14:creationId xmlns:p14="http://schemas.microsoft.com/office/powerpoint/2010/main" val="2066585660"/>
+        <p14:creationId xmlns:p14="http://schemas.microsoft.com/office/powerpoint/2010/main" val="985495962"/>
       </p:ext>
     </p:extLst>
   </p:cSld>
@@ -2123,128 +1906,8 @@
           <a:lstStyle/>
           <a:p>
             <a:r>
-              <a:rPr lang="de-DE" sz="1200" b="0" kern="1200" dirty="0">
-                <a:solidFill>
-                  <a:schemeClr val="tx1"/>
-                </a:solidFill>
-                <a:effectLst/>
-                <a:latin typeface="+mn-lt"/>
-                <a:ea typeface="+mn-ea"/>
-                <a:cs typeface="+mn-cs"/>
-              </a:rPr>
-              <a:t>Benjamin</a:t>
-            </a:r>
-          </a:p>
-          <a:p>
-            <a:r>
-              <a:rPr lang="de-DE" sz="1200" b="0" kern="1200" dirty="0">
-                <a:solidFill>
-                  <a:schemeClr val="tx1"/>
-                </a:solidFill>
-                <a:effectLst/>
-                <a:latin typeface="+mn-lt"/>
-                <a:ea typeface="+mn-ea"/>
-                <a:cs typeface="+mn-cs"/>
-              </a:rPr>
-              <a:t>ROC: </a:t>
-            </a:r>
-            <a:r>
               <a:rPr lang="de-DE" dirty="0"/>
-              <a:t>Receiver Operating </a:t>
-            </a:r>
-            <a:r>
-              <a:rPr lang="de-DE" dirty="0" err="1"/>
-              <a:t>Characteristic</a:t>
-            </a:r>
-            <a:br>
-              <a:rPr lang="de-DE" dirty="0"/>
-            </a:br>
-            <a:r>
-              <a:rPr lang="de-DE" dirty="0"/>
-              <a:t>AUC: Area Under </a:t>
-            </a:r>
-            <a:r>
-              <a:rPr lang="de-DE" dirty="0" err="1"/>
-              <a:t>the</a:t>
-            </a:r>
-            <a:r>
-              <a:rPr lang="de-DE" dirty="0"/>
-              <a:t> </a:t>
-            </a:r>
-            <a:r>
-              <a:rPr lang="de-DE" dirty="0" err="1"/>
-              <a:t>Curve</a:t>
-            </a:r>
-            <a:endParaRPr lang="de-DE" sz="1200" b="0" kern="1200" dirty="0">
-              <a:solidFill>
-                <a:schemeClr val="tx1"/>
-              </a:solidFill>
-              <a:effectLst/>
-              <a:latin typeface="+mn-lt"/>
-              <a:ea typeface="+mn-ea"/>
-              <a:cs typeface="+mn-cs"/>
-            </a:endParaRPr>
-          </a:p>
-          <a:p>
-            <a:r>
-              <a:rPr lang="de-DE" sz="1200" b="0" kern="1200" dirty="0">
-                <a:solidFill>
-                  <a:schemeClr val="tx1"/>
-                </a:solidFill>
-                <a:effectLst/>
-                <a:latin typeface="+mn-lt"/>
-                <a:ea typeface="+mn-ea"/>
-                <a:cs typeface="+mn-cs"/>
-              </a:rPr>
-              <a:t>Die ROC-Kurve zeigt, wie gut das Modell zwischen </a:t>
-            </a:r>
-            <a:r>
-              <a:rPr lang="de-DE" sz="1200" b="0" kern="1200" dirty="0" err="1">
-                <a:solidFill>
-                  <a:schemeClr val="tx1"/>
-                </a:solidFill>
-                <a:effectLst/>
-                <a:latin typeface="+mn-lt"/>
-                <a:ea typeface="+mn-ea"/>
-                <a:cs typeface="+mn-cs"/>
-              </a:rPr>
-              <a:t>beschaedigt</a:t>
-            </a:r>
-            <a:r>
-              <a:rPr lang="de-DE" sz="1200" b="0" kern="1200" dirty="0">
-                <a:solidFill>
-                  <a:schemeClr val="tx1"/>
-                </a:solidFill>
-                <a:effectLst/>
-                <a:latin typeface="+mn-lt"/>
-                <a:ea typeface="+mn-ea"/>
-                <a:cs typeface="+mn-cs"/>
-              </a:rPr>
-              <a:t> und gut trennt, wenn man den Entscheidungsschwellwert </a:t>
-            </a:r>
-            <a:r>
-              <a:rPr lang="de-DE" sz="1200" b="0" kern="1200" dirty="0" err="1">
-                <a:solidFill>
-                  <a:schemeClr val="tx1"/>
-                </a:solidFill>
-                <a:effectLst/>
-                <a:latin typeface="+mn-lt"/>
-                <a:ea typeface="+mn-ea"/>
-                <a:cs typeface="+mn-cs"/>
-              </a:rPr>
-              <a:t>veraendert</a:t>
-            </a:r>
-            <a:r>
-              <a:rPr lang="de-DE" sz="1200" b="0" kern="1200" dirty="0">
-                <a:solidFill>
-                  <a:schemeClr val="tx1"/>
-                </a:solidFill>
-                <a:effectLst/>
-                <a:latin typeface="+mn-lt"/>
-                <a:ea typeface="+mn-ea"/>
-                <a:cs typeface="+mn-cs"/>
-              </a:rPr>
-              <a:t>. Eine AUC von 1.0 bedeutet perfekte Trennung im aktuellen Testsatz. Auch hier gilt: Das ist ein starkes Ergebnis, aber wegen der Datenlage vorsichtig zu interpretieren.</a:t>
+              <a:t>Tim</a:t>
             </a:r>
           </a:p>
         </p:txBody>
@@ -2275,7 +1938,7 @@
     </p:spTree>
     <p:extLst>
       <p:ext uri="{BB962C8B-B14F-4D97-AF65-F5344CB8AC3E}">
-        <p14:creationId xmlns:p14="http://schemas.microsoft.com/office/powerpoint/2010/main" val="3954313880"/>
+        <p14:creationId xmlns:p14="http://schemas.microsoft.com/office/powerpoint/2010/main" val="2265726828"/>
       </p:ext>
     </p:extLst>
   </p:cSld>
@@ -2367,35 +2030,37 @@
             </a:r>
           </a:p>
           <a:p>
-            <a:pPr marL="0" marR="0" lvl="0" indent="0" algn="l" defTabSz="914400" rtl="0" eaLnBrk="1" fontAlgn="auto" latinLnBrk="0" hangingPunct="1">
-              <a:lnSpc>
-                <a:spcPct val="100000"/>
-              </a:lnSpc>
-              <a:spcBef>
-                <a:spcPts val="0"/>
-              </a:spcBef>
-              <a:spcAft>
-                <a:spcPts val="0"/>
-              </a:spcAft>
-              <a:buClrTx/>
-              <a:buSzTx/>
-              <a:buFontTx/>
-              <a:buNone/>
-              <a:tabLst/>
-              <a:defRPr/>
-            </a:pPr>
-            <a:r>
-              <a:rPr lang="de-DE" sz="1200" b="0" kern="1200" dirty="0">
-                <a:solidFill>
-                  <a:schemeClr val="tx1"/>
-                </a:solidFill>
-                <a:effectLst/>
-                <a:latin typeface="+mn-lt"/>
-                <a:ea typeface="+mn-ea"/>
-                <a:cs typeface="+mn-cs"/>
+            <a:r>
+              <a:rPr lang="de-DE" dirty="0"/>
+              <a:t>ROC x-Achse </a:t>
+            </a:r>
+            <a:r>
+              <a:rPr lang="de-DE" dirty="0">
+                <a:sym typeface="Wingdings" panose="05000000000000000000" pitchFamily="2" charset="2"/>
               </a:rPr>
-              <a:t>Der wichtigste Diskussionsteil ist die Einordnung. Der neue Split prüft die guten Zahnräder strenger, weil `Z03` im Test nicht im Training vorkommt. Für die beschädigte Klasse bleibt die Aussage begrenzt, weil alle beschädigten Signale aus `Z05` stammen. Für eine robuste Aussage bräuchte man weitere beschädigte Zahnräder.</a:t>
-            </a:r>
+              <a:t> </a:t>
+            </a:r>
+            <a:r>
+              <a:rPr lang="de-DE" dirty="0" err="1">
+                <a:sym typeface="Wingdings" panose="05000000000000000000" pitchFamily="2" charset="2"/>
+              </a:rPr>
+              <a:t>wieviele</a:t>
+            </a:r>
+            <a:r>
+              <a:rPr lang="de-DE" dirty="0">
+                <a:sym typeface="Wingdings" panose="05000000000000000000" pitchFamily="2" charset="2"/>
+              </a:rPr>
+              <a:t> Label 0 haben einen höheren Score als Label 1? </a:t>
+            </a:r>
+          </a:p>
+          <a:p>
+            <a:r>
+              <a:rPr lang="de-DE" dirty="0">
+                <a:sym typeface="Wingdings" panose="05000000000000000000" pitchFamily="2" charset="2"/>
+              </a:rPr>
+              <a:t>Wenn 0 bei x-Achse dann alle Label 0 kleineren Score als Label 1. (Kein Schwellenwert)</a:t>
+            </a:r>
+            <a:endParaRPr lang="de-DE" dirty="0"/>
           </a:p>
           <a:p>
             <a:endParaRPr lang="de-DE" dirty="0"/>
@@ -2428,7 +2093,7 @@
     </p:spTree>
     <p:extLst>
       <p:ext uri="{BB962C8B-B14F-4D97-AF65-F5344CB8AC3E}">
-        <p14:creationId xmlns:p14="http://schemas.microsoft.com/office/powerpoint/2010/main" val="2265726828"/>
+        <p14:creationId xmlns:p14="http://schemas.microsoft.com/office/powerpoint/2010/main" val="3001266698"/>
       </p:ext>
     </p:extLst>
   </p:cSld>
@@ -2507,72 +2172,10 @@
               <a:defRPr/>
             </a:pPr>
             <a:r>
-              <a:rPr lang="de-DE" sz="1200" b="0" kern="1200" dirty="0">
-                <a:solidFill>
-                  <a:schemeClr val="tx1"/>
-                </a:solidFill>
-                <a:effectLst/>
-                <a:latin typeface="+mn-lt"/>
-                <a:ea typeface="+mn-ea"/>
-                <a:cs typeface="+mn-cs"/>
-              </a:rPr>
+              <a:rPr lang="de-DE"/>
               <a:t>Tim</a:t>
             </a:r>
-          </a:p>
-          <a:p>
-            <a:pPr marL="0" marR="0" lvl="0" indent="0" algn="l" defTabSz="914400" rtl="0" eaLnBrk="1" fontAlgn="auto" latinLnBrk="0" hangingPunct="1">
-              <a:lnSpc>
-                <a:spcPct val="100000"/>
-              </a:lnSpc>
-              <a:spcBef>
-                <a:spcPts val="0"/>
-              </a:spcBef>
-              <a:spcAft>
-                <a:spcPts val="0"/>
-              </a:spcAft>
-              <a:buClrTx/>
-              <a:buSzTx/>
-              <a:buFontTx/>
-              <a:buNone/>
-              <a:tabLst/>
-              <a:defRPr/>
-            </a:pPr>
-            <a:r>
-              <a:rPr lang="de-DE" sz="1200" b="0" kern="1200" dirty="0">
-                <a:solidFill>
-                  <a:schemeClr val="tx1"/>
-                </a:solidFill>
-                <a:effectLst/>
-                <a:latin typeface="+mn-lt"/>
-                <a:ea typeface="+mn-ea"/>
-                <a:cs typeface="+mn-cs"/>
-              </a:rPr>
-              <a:t>Zusammenfassend haben wir eine vollständige Klassifikationspipeline aufgebaut. Die wichtigsten methodischen Entscheidungen waren die Feature-Mittelung über `</a:t>
-            </a:r>
-            <a:r>
-              <a:rPr lang="de-DE" sz="1200" b="0" kern="1200" dirty="0" err="1">
-                <a:solidFill>
-                  <a:schemeClr val="tx1"/>
-                </a:solidFill>
-                <a:effectLst/>
-                <a:latin typeface="+mn-lt"/>
-                <a:ea typeface="+mn-ea"/>
-                <a:cs typeface="+mn-cs"/>
-              </a:rPr>
-              <a:t>mID</a:t>
-            </a:r>
-            <a:r>
-              <a:rPr lang="de-DE" sz="1200" b="0" kern="1200" dirty="0">
-                <a:solidFill>
-                  <a:schemeClr val="tx1"/>
-                </a:solidFill>
-                <a:effectLst/>
-                <a:latin typeface="+mn-lt"/>
-                <a:ea typeface="+mn-ea"/>
-                <a:cs typeface="+mn-cs"/>
-              </a:rPr>
-              <a:t>`, der zahnradbasierte Split und zwei getrennte Modelle für `Ch1` und `Ch2`. Das Ergebnis ist sehr gut, muss aber wegen der begrenzten Datenbasis kritisch diskutiert werden. Für eine robustere Aussage wären weitere beschädigte Zahnräder notwendig.</a:t>
-            </a:r>
+            <a:endParaRPr lang="de-DE" dirty="0"/>
           </a:p>
           <a:p>
             <a:endParaRPr lang="de-DE" dirty="0"/>
@@ -2605,7 +2208,7 @@
     </p:spTree>
     <p:extLst>
       <p:ext uri="{BB962C8B-B14F-4D97-AF65-F5344CB8AC3E}">
-        <p14:creationId xmlns:p14="http://schemas.microsoft.com/office/powerpoint/2010/main" val="3001266698"/>
+        <p14:creationId xmlns:p14="http://schemas.microsoft.com/office/powerpoint/2010/main" val="177677867"/>
       </p:ext>
     </p:extLst>
   </p:cSld>
@@ -2761,121 +2364,6 @@
     <p:extLst>
       <p:ext uri="{BB962C8B-B14F-4D97-AF65-F5344CB8AC3E}">
         <p14:creationId xmlns:p14="http://schemas.microsoft.com/office/powerpoint/2010/main" val="2591093164"/>
-      </p:ext>
-    </p:extLst>
-  </p:cSld>
-  <p:clrMapOvr>
-    <a:masterClrMapping/>
-  </p:clrMapOvr>
-</p:notes>
-</file>
-
-<file path=ppt/notesSlides/notesSlide20.xml><?xml version="1.0" encoding="utf-8"?>
-<p:notes xmlns:a="http://schemas.openxmlformats.org/drawingml/2006/main" xmlns:r="http://schemas.openxmlformats.org/officeDocument/2006/relationships" xmlns:p="http://schemas.openxmlformats.org/presentationml/2006/main">
-  <p:cSld>
-    <p:spTree>
-      <p:nvGrpSpPr>
-        <p:cNvPr id="1" name=""/>
-        <p:cNvGrpSpPr/>
-        <p:nvPr/>
-      </p:nvGrpSpPr>
-      <p:grpSpPr>
-        <a:xfrm>
-          <a:off x="0" y="0"/>
-          <a:ext cx="0" cy="0"/>
-          <a:chOff x="0" y="0"/>
-          <a:chExt cx="0" cy="0"/>
-        </a:xfrm>
-      </p:grpSpPr>
-      <p:sp>
-        <p:nvSpPr>
-          <p:cNvPr id="2" name="Folienbildplatzhalter 1"/>
-          <p:cNvSpPr>
-            <a:spLocks noGrp="1" noRot="1" noChangeAspect="1"/>
-          </p:cNvSpPr>
-          <p:nvPr>
-            <p:ph type="sldImg"/>
-          </p:nvPr>
-        </p:nvSpPr>
-        <p:spPr/>
-        <p:txBody>
-          <a:bodyPr/>
-          <a:lstStyle/>
-          <a:p>
-            <a:endParaRPr lang="de-DE"/>
-          </a:p>
-        </p:txBody>
-      </p:sp>
-      <p:sp>
-        <p:nvSpPr>
-          <p:cNvPr id="3" name="Notizenplatzhalter 2"/>
-          <p:cNvSpPr>
-            <a:spLocks noGrp="1"/>
-          </p:cNvSpPr>
-          <p:nvPr>
-            <p:ph type="body" idx="1"/>
-          </p:nvPr>
-        </p:nvSpPr>
-        <p:spPr/>
-        <p:txBody>
-          <a:bodyPr/>
-          <a:lstStyle/>
-          <a:p>
-            <a:pPr marL="0" marR="0" lvl="0" indent="0" algn="l" defTabSz="914400" rtl="0" eaLnBrk="1" fontAlgn="auto" latinLnBrk="0" hangingPunct="1">
-              <a:lnSpc>
-                <a:spcPct val="100000"/>
-              </a:lnSpc>
-              <a:spcBef>
-                <a:spcPts val="0"/>
-              </a:spcBef>
-              <a:spcAft>
-                <a:spcPts val="0"/>
-              </a:spcAft>
-              <a:buClrTx/>
-              <a:buSzTx/>
-              <a:buFontTx/>
-              <a:buNone/>
-              <a:tabLst/>
-              <a:defRPr/>
-            </a:pPr>
-            <a:r>
-              <a:rPr lang="de-DE"/>
-              <a:t>Tim</a:t>
-            </a:r>
-            <a:endParaRPr lang="de-DE" dirty="0"/>
-          </a:p>
-          <a:p>
-            <a:endParaRPr lang="de-DE" dirty="0"/>
-          </a:p>
-        </p:txBody>
-      </p:sp>
-      <p:sp>
-        <p:nvSpPr>
-          <p:cNvPr id="4" name="Foliennummernplatzhalter 3"/>
-          <p:cNvSpPr>
-            <a:spLocks noGrp="1"/>
-          </p:cNvSpPr>
-          <p:nvPr>
-            <p:ph type="sldNum" sz="quarter" idx="5"/>
-          </p:nvPr>
-        </p:nvSpPr>
-        <p:spPr/>
-        <p:txBody>
-          <a:bodyPr/>
-          <a:lstStyle/>
-          <a:p>
-            <a:fld id="{0492B7F2-6741-7346-B13A-366117EE2BBB}" type="slidenum">
-              <a:rPr lang="de-DE" smtClean="0"/>
-              <a:t>20</a:t>
-            </a:fld>
-            <a:endParaRPr lang="de-DE"/>
-          </a:p>
-        </p:txBody>
-      </p:sp>
-    </p:spTree>
-    <p:extLst>
-      <p:ext uri="{BB962C8B-B14F-4D97-AF65-F5344CB8AC3E}">
-        <p14:creationId xmlns:p14="http://schemas.microsoft.com/office/powerpoint/2010/main" val="177677867"/>
       </p:ext>
     </p:extLst>
   </p:cSld>
@@ -3095,23 +2583,6 @@
           <a:bodyPr/>
           <a:lstStyle/>
           <a:p>
-            <a:pPr marL="0" marR="0" lvl="0" indent="0" algn="l" defTabSz="914400" rtl="0" eaLnBrk="1" fontAlgn="auto" latinLnBrk="0" hangingPunct="1">
-              <a:lnSpc>
-                <a:spcPct val="100000"/>
-              </a:lnSpc>
-              <a:spcBef>
-                <a:spcPts val="0"/>
-              </a:spcBef>
-              <a:spcAft>
-                <a:spcPts val="0"/>
-              </a:spcAft>
-              <a:buClrTx/>
-              <a:buSzTx/>
-              <a:buFontTx/>
-              <a:buNone/>
-              <a:tabLst/>
-              <a:defRPr/>
-            </a:pPr>
             <a:r>
               <a:rPr lang="de-DE" sz="1200" b="0" kern="1200" dirty="0">
                 <a:solidFill>
@@ -3126,197 +2597,6 @@
             </a:r>
           </a:p>
           <a:p>
-            <a:pPr marL="0" marR="0" lvl="0" indent="0" algn="l" defTabSz="914400" rtl="0" eaLnBrk="1" fontAlgn="auto" latinLnBrk="0" hangingPunct="1">
-              <a:lnSpc>
-                <a:spcPct val="100000"/>
-              </a:lnSpc>
-              <a:spcBef>
-                <a:spcPts val="0"/>
-              </a:spcBef>
-              <a:spcAft>
-                <a:spcPts val="0"/>
-              </a:spcAft>
-              <a:buClrTx/>
-              <a:buSzTx/>
-              <a:buFontTx/>
-              <a:buNone/>
-              <a:tabLst/>
-              <a:defRPr/>
-            </a:pPr>
-            <a:r>
-              <a:rPr lang="de-DE" sz="1200" b="0" kern="1200" dirty="0">
-                <a:solidFill>
-                  <a:schemeClr val="tx1"/>
-                </a:solidFill>
-                <a:effectLst/>
-                <a:latin typeface="+mn-lt"/>
-                <a:ea typeface="+mn-ea"/>
-                <a:cs typeface="+mn-cs"/>
-              </a:rPr>
-              <a:t>Die Label-Zuordnung basiert auf den Ergebnissen aus Aufgabe 2. Dort wurde `Z05` als beschädigt betrachtet, während `Z01` bis `Z04` als gut verwendet werden. Wichtig ist, dass nur eine Probe die Klasse 0 bildet. Das ist für die spätere Diskussion relevant, weil das Modell dadurch nicht viele verschiedene beschädigte Zahnräder sieht.</a:t>
-            </a:r>
-          </a:p>
-          <a:p>
-            <a:pPr marL="0" marR="0" lvl="0" indent="0" algn="l" defTabSz="914400" rtl="0" eaLnBrk="1" fontAlgn="auto" latinLnBrk="0" hangingPunct="1">
-              <a:lnSpc>
-                <a:spcPct val="100000"/>
-              </a:lnSpc>
-              <a:spcBef>
-                <a:spcPts val="0"/>
-              </a:spcBef>
-              <a:spcAft>
-                <a:spcPts val="0"/>
-              </a:spcAft>
-              <a:buClrTx/>
-              <a:buSzTx/>
-              <a:buFontTx/>
-              <a:buNone/>
-              <a:tabLst/>
-              <a:defRPr/>
-            </a:pPr>
-            <a:r>
-              <a:rPr lang="de-DE" sz="1200" b="0" kern="1200" dirty="0">
-                <a:solidFill>
-                  <a:schemeClr val="tx1"/>
-                </a:solidFill>
-                <a:effectLst/>
-                <a:latin typeface="+mn-lt"/>
-                <a:ea typeface="+mn-ea"/>
-                <a:cs typeface="+mn-cs"/>
-              </a:rPr>
-              <a:t>Deshalb in Dataframe-manager neue Spalte `</a:t>
-            </a:r>
-            <a:r>
-              <a:rPr lang="de-DE" sz="1200" b="0" kern="1200" dirty="0" err="1">
-                <a:solidFill>
-                  <a:schemeClr val="tx1"/>
-                </a:solidFill>
-                <a:effectLst/>
-                <a:latin typeface="+mn-lt"/>
-                <a:ea typeface="+mn-ea"/>
-                <a:cs typeface="+mn-cs"/>
-              </a:rPr>
-              <a:t>label</a:t>
-            </a:r>
-            <a:r>
-              <a:rPr lang="de-DE" sz="1200" b="0" kern="1200" dirty="0">
-                <a:solidFill>
-                  <a:schemeClr val="tx1"/>
-                </a:solidFill>
-                <a:effectLst/>
-                <a:latin typeface="+mn-lt"/>
-                <a:ea typeface="+mn-ea"/>
-                <a:cs typeface="+mn-cs"/>
-              </a:rPr>
-              <a:t>`</a:t>
-            </a:r>
-          </a:p>
-          <a:p>
-            <a:endParaRPr lang="de-DE" dirty="0"/>
-          </a:p>
-        </p:txBody>
-      </p:sp>
-      <p:sp>
-        <p:nvSpPr>
-          <p:cNvPr id="4" name="Foliennummernplatzhalter 3"/>
-          <p:cNvSpPr>
-            <a:spLocks noGrp="1"/>
-          </p:cNvSpPr>
-          <p:nvPr>
-            <p:ph type="sldNum" sz="quarter" idx="5"/>
-          </p:nvPr>
-        </p:nvSpPr>
-        <p:spPr/>
-        <p:txBody>
-          <a:bodyPr/>
-          <a:lstStyle/>
-          <a:p>
-            <a:fld id="{0492B7F2-6741-7346-B13A-366117EE2BBB}" type="slidenum">
-              <a:rPr lang="de-DE" smtClean="0"/>
-              <a:t>4</a:t>
-            </a:fld>
-            <a:endParaRPr lang="de-DE"/>
-          </a:p>
-        </p:txBody>
-      </p:sp>
-    </p:spTree>
-    <p:extLst>
-      <p:ext uri="{BB962C8B-B14F-4D97-AF65-F5344CB8AC3E}">
-        <p14:creationId xmlns:p14="http://schemas.microsoft.com/office/powerpoint/2010/main" val="1014031099"/>
-      </p:ext>
-    </p:extLst>
-  </p:cSld>
-  <p:clrMapOvr>
-    <a:masterClrMapping/>
-  </p:clrMapOvr>
-</p:notes>
-</file>
-
-<file path=ppt/notesSlides/notesSlide5.xml><?xml version="1.0" encoding="utf-8"?>
-<p:notes xmlns:a="http://schemas.openxmlformats.org/drawingml/2006/main" xmlns:r="http://schemas.openxmlformats.org/officeDocument/2006/relationships" xmlns:p="http://schemas.openxmlformats.org/presentationml/2006/main">
-  <p:cSld>
-    <p:spTree>
-      <p:nvGrpSpPr>
-        <p:cNvPr id="1" name=""/>
-        <p:cNvGrpSpPr/>
-        <p:nvPr/>
-      </p:nvGrpSpPr>
-      <p:grpSpPr>
-        <a:xfrm>
-          <a:off x="0" y="0"/>
-          <a:ext cx="0" cy="0"/>
-          <a:chOff x="0" y="0"/>
-          <a:chExt cx="0" cy="0"/>
-        </a:xfrm>
-      </p:grpSpPr>
-      <p:sp>
-        <p:nvSpPr>
-          <p:cNvPr id="2" name="Folienbildplatzhalter 1"/>
-          <p:cNvSpPr>
-            <a:spLocks noGrp="1" noRot="1" noChangeAspect="1"/>
-          </p:cNvSpPr>
-          <p:nvPr>
-            <p:ph type="sldImg"/>
-          </p:nvPr>
-        </p:nvSpPr>
-        <p:spPr/>
-        <p:txBody>
-          <a:bodyPr/>
-          <a:lstStyle/>
-          <a:p>
-            <a:endParaRPr lang="de-DE"/>
-          </a:p>
-        </p:txBody>
-      </p:sp>
-      <p:sp>
-        <p:nvSpPr>
-          <p:cNvPr id="3" name="Notizenplatzhalter 2"/>
-          <p:cNvSpPr>
-            <a:spLocks noGrp="1"/>
-          </p:cNvSpPr>
-          <p:nvPr>
-            <p:ph type="body" idx="1"/>
-          </p:nvPr>
-        </p:nvSpPr>
-        <p:spPr/>
-        <p:txBody>
-          <a:bodyPr/>
-          <a:lstStyle/>
-          <a:p>
-            <a:r>
-              <a:rPr lang="de-DE" sz="1200" b="0" kern="1200" dirty="0">
-                <a:solidFill>
-                  <a:schemeClr val="tx1"/>
-                </a:solidFill>
-                <a:effectLst/>
-                <a:latin typeface="+mn-lt"/>
-                <a:ea typeface="+mn-ea"/>
-                <a:cs typeface="+mn-cs"/>
-              </a:rPr>
-              <a:t>Victor</a:t>
-            </a:r>
-          </a:p>
-          <a:p>
             <a:r>
               <a:rPr lang="de-DE" sz="1200" b="0" kern="1200" dirty="0">
                 <a:solidFill>
@@ -3363,7 +2643,7 @@
           <a:p>
             <a:fld id="{0492B7F2-6741-7346-B13A-366117EE2BBB}" type="slidenum">
               <a:rPr lang="de-DE" smtClean="0"/>
-              <a:t>5</a:t>
+              <a:t>4</a:t>
             </a:fld>
             <a:endParaRPr lang="de-DE"/>
           </a:p>
@@ -3382,7 +2662,7 @@
 </p:notes>
 </file>
 
-<file path=ppt/notesSlides/notesSlide6.xml><?xml version="1.0" encoding="utf-8"?>
+<file path=ppt/notesSlides/notesSlide5.xml><?xml version="1.0" encoding="utf-8"?>
 <p:notes xmlns:a="http://schemas.openxmlformats.org/drawingml/2006/main" xmlns:r="http://schemas.openxmlformats.org/officeDocument/2006/relationships" xmlns:p="http://schemas.openxmlformats.org/presentationml/2006/main">
   <p:cSld>
     <p:spTree>
@@ -3461,7 +2741,7 @@
                 <a:ea typeface="+mn-ea"/>
                 <a:cs typeface="+mn-cs"/>
               </a:rPr>
-              <a:t>Victor</a:t>
+              <a:t>David</a:t>
             </a:r>
             <a:br>
               <a:rPr lang="de-DE" sz="1200" b="0" kern="1200" dirty="0">
@@ -3557,7 +2837,7 @@
           <a:p>
             <a:fld id="{0492B7F2-6741-7346-B13A-366117EE2BBB}" type="slidenum">
               <a:rPr lang="de-DE" smtClean="0"/>
-              <a:t>6</a:t>
+              <a:t>5</a:t>
             </a:fld>
             <a:endParaRPr lang="de-DE"/>
           </a:p>
@@ -3567,6 +2847,201 @@
     <p:extLst>
       <p:ext uri="{BB962C8B-B14F-4D97-AF65-F5344CB8AC3E}">
         <p14:creationId xmlns:p14="http://schemas.microsoft.com/office/powerpoint/2010/main" val="2678451260"/>
+      </p:ext>
+    </p:extLst>
+  </p:cSld>
+  <p:clrMapOvr>
+    <a:masterClrMapping/>
+  </p:clrMapOvr>
+</p:notes>
+</file>
+
+<file path=ppt/notesSlides/notesSlide6.xml><?xml version="1.0" encoding="utf-8"?>
+<p:notes xmlns:a="http://schemas.openxmlformats.org/drawingml/2006/main" xmlns:r="http://schemas.openxmlformats.org/officeDocument/2006/relationships" xmlns:p="http://schemas.openxmlformats.org/presentationml/2006/main">
+  <p:cSld>
+    <p:spTree>
+      <p:nvGrpSpPr>
+        <p:cNvPr id="1" name=""/>
+        <p:cNvGrpSpPr/>
+        <p:nvPr/>
+      </p:nvGrpSpPr>
+      <p:grpSpPr>
+        <a:xfrm>
+          <a:off x="0" y="0"/>
+          <a:ext cx="0" cy="0"/>
+          <a:chOff x="0" y="0"/>
+          <a:chExt cx="0" cy="0"/>
+        </a:xfrm>
+      </p:grpSpPr>
+      <p:sp>
+        <p:nvSpPr>
+          <p:cNvPr id="2" name="Folienbildplatzhalter 1"/>
+          <p:cNvSpPr>
+            <a:spLocks noGrp="1" noRot="1" noChangeAspect="1"/>
+          </p:cNvSpPr>
+          <p:nvPr>
+            <p:ph type="sldImg"/>
+          </p:nvPr>
+        </p:nvSpPr>
+        <p:spPr/>
+        <p:txBody>
+          <a:bodyPr/>
+          <a:lstStyle/>
+          <a:p>
+            <a:endParaRPr lang="de-DE"/>
+          </a:p>
+        </p:txBody>
+      </p:sp>
+      <p:sp>
+        <p:nvSpPr>
+          <p:cNvPr id="3" name="Notizenplatzhalter 2"/>
+          <p:cNvSpPr>
+            <a:spLocks noGrp="1"/>
+          </p:cNvSpPr>
+          <p:nvPr>
+            <p:ph type="body" idx="1"/>
+          </p:nvPr>
+        </p:nvSpPr>
+        <p:spPr/>
+        <p:txBody>
+          <a:bodyPr/>
+          <a:lstStyle/>
+          <a:p>
+            <a:pPr marL="0" marR="0" lvl="0" indent="0" algn="l" defTabSz="914400" rtl="0" eaLnBrk="1" fontAlgn="auto" latinLnBrk="0" hangingPunct="1">
+              <a:lnSpc>
+                <a:spcPct val="100000"/>
+              </a:lnSpc>
+              <a:spcBef>
+                <a:spcPts val="0"/>
+              </a:spcBef>
+              <a:spcAft>
+                <a:spcPts val="0"/>
+              </a:spcAft>
+              <a:buClrTx/>
+              <a:buSzTx/>
+              <a:buFontTx/>
+              <a:buNone/>
+              <a:tabLst/>
+              <a:defRPr/>
+            </a:pPr>
+            <a:r>
+              <a:rPr lang="de-DE" sz="1200" b="0" kern="1200" dirty="0">
+                <a:solidFill>
+                  <a:schemeClr val="tx1"/>
+                </a:solidFill>
+                <a:effectLst/>
+                <a:latin typeface="+mn-lt"/>
+                <a:ea typeface="+mn-ea"/>
+                <a:cs typeface="+mn-cs"/>
+              </a:rPr>
+              <a:t>David</a:t>
+            </a:r>
+          </a:p>
+          <a:p>
+            <a:pPr marL="0" marR="0" lvl="0" indent="0" algn="l" defTabSz="914400" rtl="0" eaLnBrk="1" fontAlgn="auto" latinLnBrk="0" hangingPunct="1">
+              <a:lnSpc>
+                <a:spcPct val="100000"/>
+              </a:lnSpc>
+              <a:spcBef>
+                <a:spcPts val="0"/>
+              </a:spcBef>
+              <a:spcAft>
+                <a:spcPts val="0"/>
+              </a:spcAft>
+              <a:buClrTx/>
+              <a:buSzTx/>
+              <a:buFontTx/>
+              <a:buNone/>
+              <a:tabLst/>
+              <a:defRPr/>
+            </a:pPr>
+            <a:r>
+              <a:rPr lang="de-DE" sz="1200" b="0" kern="1200" dirty="0">
+                <a:solidFill>
+                  <a:schemeClr val="tx1"/>
+                </a:solidFill>
+                <a:effectLst/>
+                <a:latin typeface="+mn-lt"/>
+                <a:ea typeface="+mn-ea"/>
+                <a:cs typeface="+mn-cs"/>
+              </a:rPr>
+              <a:t>Quantil wurde zwischen 95% und 99% getestet mit 98% erster wert bei dem keine FN auftreten und die maximale Anzahl an TN gefunden werden.</a:t>
+            </a:r>
+          </a:p>
+          <a:p>
+            <a:r>
+              <a:rPr lang="de-DE" sz="1200" b="0" kern="1200" dirty="0">
+                <a:solidFill>
+                  <a:schemeClr val="tx1"/>
+                </a:solidFill>
+                <a:effectLst/>
+                <a:latin typeface="+mn-lt"/>
+                <a:ea typeface="+mn-ea"/>
+                <a:cs typeface="+mn-cs"/>
+              </a:rPr>
+              <a:t>Ein gepoolter Vergleich allein wäre unfair: Ohne Mittelung hat Fold 4 wegen</a:t>
+            </a:r>
+          </a:p>
+          <a:p>
+            <a:r>
+              <a:rPr lang="de-DE" sz="1200" b="0" kern="1200" dirty="0">
+                <a:solidFill>
+                  <a:schemeClr val="tx1"/>
+                </a:solidFill>
+                <a:effectLst/>
+                <a:latin typeface="+mn-lt"/>
+                <a:ea typeface="+mn-ea"/>
+                <a:cs typeface="+mn-cs"/>
+              </a:rPr>
+              <a:t>Z01 besonders viele Testzeilen. BAR gleicht Klassen aus; das Makromittel gibt</a:t>
+            </a:r>
+          </a:p>
+          <a:p>
+            <a:r>
+              <a:rPr lang="de-DE" sz="1200" b="0" kern="1200" dirty="0">
+                <a:solidFill>
+                  <a:schemeClr val="tx1"/>
+                </a:solidFill>
+                <a:effectLst/>
+                <a:latin typeface="+mn-lt"/>
+                <a:ea typeface="+mn-ea"/>
+                <a:cs typeface="+mn-cs"/>
+              </a:rPr>
+              <a:t>zusätzlich jedem der acht Modelle dasselbe Gewicht.</a:t>
+            </a:r>
+          </a:p>
+          <a:p>
+            <a:endParaRPr lang="de-DE" dirty="0"/>
+          </a:p>
+        </p:txBody>
+      </p:sp>
+      <p:sp>
+        <p:nvSpPr>
+          <p:cNvPr id="4" name="Foliennummernplatzhalter 3"/>
+          <p:cNvSpPr>
+            <a:spLocks noGrp="1"/>
+          </p:cNvSpPr>
+          <p:nvPr>
+            <p:ph type="sldNum" sz="quarter" idx="5"/>
+          </p:nvPr>
+        </p:nvSpPr>
+        <p:spPr/>
+        <p:txBody>
+          <a:bodyPr/>
+          <a:lstStyle/>
+          <a:p>
+            <a:fld id="{0492B7F2-6741-7346-B13A-366117EE2BBB}" type="slidenum">
+              <a:rPr lang="de-DE" smtClean="0"/>
+              <a:t>6</a:t>
+            </a:fld>
+            <a:endParaRPr lang="de-DE"/>
+          </a:p>
+        </p:txBody>
+      </p:sp>
+    </p:spTree>
+    <p:extLst>
+      <p:ext uri="{BB962C8B-B14F-4D97-AF65-F5344CB8AC3E}">
+        <p14:creationId xmlns:p14="http://schemas.microsoft.com/office/powerpoint/2010/main" val="1783365533"/>
       </p:ext>
     </p:extLst>
   </p:cSld>
@@ -3654,171 +3129,7 @@
                 <a:ea typeface="+mn-ea"/>
                 <a:cs typeface="+mn-cs"/>
               </a:rPr>
-              <a:t>Tim</a:t>
-            </a:r>
-          </a:p>
-          <a:p>
-            <a:r>
-              <a:rPr lang="de-DE" sz="1200" b="0" kern="1200" dirty="0">
-                <a:solidFill>
-                  <a:schemeClr val="tx1"/>
-                </a:solidFill>
-                <a:effectLst/>
-                <a:latin typeface="+mn-lt"/>
-                <a:ea typeface="+mn-ea"/>
-                <a:cs typeface="+mn-cs"/>
-              </a:rPr>
-              <a:t>Ein gepoolter Vergleich allein wäre unfair: Ohne Mittelung hat Fold 4 wegen</a:t>
-            </a:r>
-          </a:p>
-          <a:p>
-            <a:r>
-              <a:rPr lang="de-DE" sz="1200" b="0" kern="1200" dirty="0">
-                <a:solidFill>
-                  <a:schemeClr val="tx1"/>
-                </a:solidFill>
-                <a:effectLst/>
-                <a:latin typeface="+mn-lt"/>
-                <a:ea typeface="+mn-ea"/>
-                <a:cs typeface="+mn-cs"/>
-              </a:rPr>
-              <a:t>Z01 besonders viele Testzeilen. BAR gleicht Klassen aus; das Makromittel gibt</a:t>
-            </a:r>
-          </a:p>
-          <a:p>
-            <a:r>
-              <a:rPr lang="de-DE" sz="1200" b="0" kern="1200" dirty="0">
-                <a:solidFill>
-                  <a:schemeClr val="tx1"/>
-                </a:solidFill>
-                <a:effectLst/>
-                <a:latin typeface="+mn-lt"/>
-                <a:ea typeface="+mn-ea"/>
-                <a:cs typeface="+mn-cs"/>
-              </a:rPr>
-              <a:t>zusätzlich jedem der acht Modelle dasselbe Gewicht.</a:t>
-            </a:r>
-          </a:p>
-          <a:p>
-            <a:endParaRPr lang="de-DE" dirty="0"/>
-          </a:p>
-        </p:txBody>
-      </p:sp>
-      <p:sp>
-        <p:nvSpPr>
-          <p:cNvPr id="4" name="Foliennummernplatzhalter 3"/>
-          <p:cNvSpPr>
-            <a:spLocks noGrp="1"/>
-          </p:cNvSpPr>
-          <p:nvPr>
-            <p:ph type="sldNum" sz="quarter" idx="5"/>
-          </p:nvPr>
-        </p:nvSpPr>
-        <p:spPr/>
-        <p:txBody>
-          <a:bodyPr/>
-          <a:lstStyle/>
-          <a:p>
-            <a:fld id="{0492B7F2-6741-7346-B13A-366117EE2BBB}" type="slidenum">
-              <a:rPr lang="de-DE" smtClean="0"/>
-              <a:t>7</a:t>
-            </a:fld>
-            <a:endParaRPr lang="de-DE"/>
-          </a:p>
-        </p:txBody>
-      </p:sp>
-    </p:spTree>
-    <p:extLst>
-      <p:ext uri="{BB962C8B-B14F-4D97-AF65-F5344CB8AC3E}">
-        <p14:creationId xmlns:p14="http://schemas.microsoft.com/office/powerpoint/2010/main" val="1783365533"/>
-      </p:ext>
-    </p:extLst>
-  </p:cSld>
-  <p:clrMapOvr>
-    <a:masterClrMapping/>
-  </p:clrMapOvr>
-</p:notes>
-</file>
-
-<file path=ppt/notesSlides/notesSlide8.xml><?xml version="1.0" encoding="utf-8"?>
-<p:notes xmlns:a="http://schemas.openxmlformats.org/drawingml/2006/main" xmlns:r="http://schemas.openxmlformats.org/officeDocument/2006/relationships" xmlns:p="http://schemas.openxmlformats.org/presentationml/2006/main">
-  <p:cSld>
-    <p:spTree>
-      <p:nvGrpSpPr>
-        <p:cNvPr id="1" name=""/>
-        <p:cNvGrpSpPr/>
-        <p:nvPr/>
-      </p:nvGrpSpPr>
-      <p:grpSpPr>
-        <a:xfrm>
-          <a:off x="0" y="0"/>
-          <a:ext cx="0" cy="0"/>
-          <a:chOff x="0" y="0"/>
-          <a:chExt cx="0" cy="0"/>
-        </a:xfrm>
-      </p:grpSpPr>
-      <p:sp>
-        <p:nvSpPr>
-          <p:cNvPr id="2" name="Folienbildplatzhalter 1"/>
-          <p:cNvSpPr>
-            <a:spLocks noGrp="1" noRot="1" noChangeAspect="1"/>
-          </p:cNvSpPr>
-          <p:nvPr>
-            <p:ph type="sldImg"/>
-          </p:nvPr>
-        </p:nvSpPr>
-        <p:spPr/>
-        <p:txBody>
-          <a:bodyPr/>
-          <a:lstStyle/>
-          <a:p>
-            <a:endParaRPr lang="de-DE"/>
-          </a:p>
-        </p:txBody>
-      </p:sp>
-      <p:sp>
-        <p:nvSpPr>
-          <p:cNvPr id="3" name="Notizenplatzhalter 2"/>
-          <p:cNvSpPr>
-            <a:spLocks noGrp="1"/>
-          </p:cNvSpPr>
-          <p:nvPr>
-            <p:ph type="body" idx="1"/>
-          </p:nvPr>
-        </p:nvSpPr>
-        <p:spPr/>
-        <p:txBody>
-          <a:bodyPr/>
-          <a:lstStyle/>
-          <a:p>
-            <a:pPr marL="0" marR="0" lvl="0" indent="0" algn="l" defTabSz="914400" rtl="0" eaLnBrk="1" fontAlgn="auto" latinLnBrk="0" hangingPunct="1">
-              <a:lnSpc>
-                <a:spcPct val="100000"/>
-              </a:lnSpc>
-              <a:spcBef>
-                <a:spcPts val="0"/>
-              </a:spcBef>
-              <a:spcAft>
-                <a:spcPts val="0"/>
-              </a:spcAft>
-              <a:buClrTx/>
-              <a:buSzTx/>
-              <a:buFontTx/>
-              <a:buNone/>
-              <a:tabLst/>
-              <a:defRPr/>
-            </a:pPr>
-            <a:r>
-              <a:rPr lang="de-DE" sz="1200" b="0" kern="1200" dirty="0">
-                <a:solidFill>
-                  <a:schemeClr val="tx1"/>
-                </a:solidFill>
-                <a:effectLst/>
-                <a:latin typeface="+mn-lt"/>
-                <a:ea typeface="+mn-ea"/>
-                <a:cs typeface="+mn-cs"/>
-              </a:rPr>
-              <a:t>Tim</a:t>
+              <a:t>Benny</a:t>
             </a:r>
           </a:p>
           <a:p>
@@ -3944,7 +3255,7 @@
           <a:p>
             <a:fld id="{0492B7F2-6741-7346-B13A-366117EE2BBB}" type="slidenum">
               <a:rPr lang="de-DE" smtClean="0"/>
-              <a:t>8</a:t>
+              <a:t>7</a:t>
             </a:fld>
             <a:endParaRPr lang="de-DE"/>
           </a:p>
@@ -3963,7 +3274,7 @@
 </p:notes>
 </file>
 
-<file path=ppt/notesSlides/notesSlide9.xml><?xml version="1.0" encoding="utf-8"?>
+<file path=ppt/notesSlides/notesSlide8.xml><?xml version="1.0" encoding="utf-8"?>
 <p:notes xmlns:a="http://schemas.openxmlformats.org/drawingml/2006/main" xmlns:r="http://schemas.openxmlformats.org/officeDocument/2006/relationships" xmlns:p="http://schemas.openxmlformats.org/presentationml/2006/main">
   <p:cSld>
     <p:spTree>
@@ -4059,7 +3370,7 @@
                 <a:ea typeface="+mn-ea"/>
                 <a:cs typeface="+mn-cs"/>
               </a:rPr>
-              <a:t>David</a:t>
+              <a:t>Benny</a:t>
             </a:r>
           </a:p>
           <a:p>
@@ -4101,7 +3412,7 @@
           <a:p>
             <a:fld id="{0492B7F2-6741-7346-B13A-366117EE2BBB}" type="slidenum">
               <a:rPr lang="de-DE" smtClean="0"/>
-              <a:t>9</a:t>
+              <a:t>8</a:t>
             </a:fld>
             <a:endParaRPr lang="de-DE"/>
           </a:p>
@@ -4111,6 +3422,108 @@
     <p:extLst>
       <p:ext uri="{BB962C8B-B14F-4D97-AF65-F5344CB8AC3E}">
         <p14:creationId xmlns:p14="http://schemas.microsoft.com/office/powerpoint/2010/main" val="1770632462"/>
+      </p:ext>
+    </p:extLst>
+  </p:cSld>
+  <p:clrMapOvr>
+    <a:masterClrMapping/>
+  </p:clrMapOvr>
+</p:notes>
+</file>
+
+<file path=ppt/notesSlides/notesSlide9.xml><?xml version="1.0" encoding="utf-8"?>
+<p:notes xmlns:a="http://schemas.openxmlformats.org/drawingml/2006/main" xmlns:r="http://schemas.openxmlformats.org/officeDocument/2006/relationships" xmlns:p="http://schemas.openxmlformats.org/presentationml/2006/main">
+  <p:cSld>
+    <p:spTree>
+      <p:nvGrpSpPr>
+        <p:cNvPr id="1" name=""/>
+        <p:cNvGrpSpPr/>
+        <p:nvPr/>
+      </p:nvGrpSpPr>
+      <p:grpSpPr>
+        <a:xfrm>
+          <a:off x="0" y="0"/>
+          <a:ext cx="0" cy="0"/>
+          <a:chOff x="0" y="0"/>
+          <a:chExt cx="0" cy="0"/>
+        </a:xfrm>
+      </p:grpSpPr>
+      <p:sp>
+        <p:nvSpPr>
+          <p:cNvPr id="2" name="Folienbildplatzhalter 1"/>
+          <p:cNvSpPr>
+            <a:spLocks noGrp="1" noRot="1" noChangeAspect="1"/>
+          </p:cNvSpPr>
+          <p:nvPr>
+            <p:ph type="sldImg"/>
+          </p:nvPr>
+        </p:nvSpPr>
+        <p:spPr/>
+        <p:txBody>
+          <a:bodyPr/>
+          <a:lstStyle/>
+          <a:p>
+            <a:endParaRPr lang="de-DE"/>
+          </a:p>
+        </p:txBody>
+      </p:sp>
+      <p:sp>
+        <p:nvSpPr>
+          <p:cNvPr id="3" name="Notizenplatzhalter 2"/>
+          <p:cNvSpPr>
+            <a:spLocks noGrp="1"/>
+          </p:cNvSpPr>
+          <p:nvPr>
+            <p:ph type="body" idx="1"/>
+          </p:nvPr>
+        </p:nvSpPr>
+        <p:spPr/>
+        <p:txBody>
+          <a:bodyPr/>
+          <a:lstStyle/>
+          <a:p>
+            <a:r>
+              <a:rPr lang="de-DE" sz="1200" b="0" kern="1200" dirty="0">
+                <a:solidFill>
+                  <a:schemeClr val="tx1"/>
+                </a:solidFill>
+                <a:effectLst/>
+                <a:latin typeface="+mn-lt"/>
+                <a:ea typeface="+mn-ea"/>
+                <a:cs typeface="+mn-cs"/>
+              </a:rPr>
+              <a:t>60 Gesunde (Label 0) Signale von Z04, da aber Z01 (die wie wir in Task 2 gesehen haben ziemlich verstreut ist) in Training ist sind die Ergebnisse „ok“</a:t>
+            </a:r>
+          </a:p>
+        </p:txBody>
+      </p:sp>
+      <p:sp>
+        <p:nvSpPr>
+          <p:cNvPr id="4" name="Foliennummernplatzhalter 3"/>
+          <p:cNvSpPr>
+            <a:spLocks noGrp="1"/>
+          </p:cNvSpPr>
+          <p:nvPr>
+            <p:ph type="sldNum" sz="quarter" idx="5"/>
+          </p:nvPr>
+        </p:nvSpPr>
+        <p:spPr/>
+        <p:txBody>
+          <a:bodyPr/>
+          <a:lstStyle/>
+          <a:p>
+            <a:fld id="{0492B7F2-6741-7346-B13A-366117EE2BBB}" type="slidenum">
+              <a:rPr lang="de-DE" smtClean="0"/>
+              <a:t>9</a:t>
+            </a:fld>
+            <a:endParaRPr lang="de-DE"/>
+          </a:p>
+        </p:txBody>
+      </p:sp>
+    </p:spTree>
+    <p:extLst>
+      <p:ext uri="{BB962C8B-B14F-4D97-AF65-F5344CB8AC3E}">
+        <p14:creationId xmlns:p14="http://schemas.microsoft.com/office/powerpoint/2010/main" val="4205122503"/>
       </p:ext>
     </p:extLst>
   </p:cSld>
@@ -6638,7 +6051,7 @@
         <p:cNvPr id="1" name="">
           <a:extLst>
             <a:ext uri="{FF2B5EF4-FFF2-40B4-BE49-F238E27FC236}">
-              <a16:creationId xmlns:a16="http://schemas.microsoft.com/office/drawing/2014/main" id="{711A0095-53C7-3F5E-182B-1605E00E0FC0}"/>
+              <a16:creationId xmlns:a16="http://schemas.microsoft.com/office/drawing/2014/main" id="{9156A420-195F-AE6A-BF05-E430617A7687}"/>
             </a:ext>
           </a:extLst>
         </p:cNvPr>
@@ -6658,7 +6071,7 @@
           <p:cNvPr id="5" name="Titel 4">
             <a:extLst>
               <a:ext uri="{FF2B5EF4-FFF2-40B4-BE49-F238E27FC236}">
-                <a16:creationId xmlns:a16="http://schemas.microsoft.com/office/drawing/2014/main" id="{D757B5A5-6051-FFCC-0340-6B2A2309AADC}"/>
+                <a16:creationId xmlns:a16="http://schemas.microsoft.com/office/drawing/2014/main" id="{44F5F173-CFCA-46AF-3825-95D573C0C940}"/>
               </a:ext>
             </a:extLst>
           </p:cNvPr>
@@ -6669,15 +6082,53 @@
             <p:ph type="title"/>
           </p:nvPr>
         </p:nvSpPr>
-        <p:spPr/>
-        <p:txBody>
-          <a:bodyPr/>
-          <a:lstStyle/>
-          <a:p>
+        <p:spPr>
+          <a:xfrm>
+            <a:off x="341811" y="567600"/>
+            <a:ext cx="6016948" cy="706030"/>
+          </a:xfrm>
+        </p:spPr>
+        <p:txBody>
+          <a:bodyPr/>
+          <a:lstStyle/>
+          <a:p>
+            <a:r>
+              <a:rPr lang="de-DE" sz="3200" dirty="0" err="1"/>
+              <a:t>Confusion</a:t>
+            </a:r>
             <a:r>
               <a:rPr lang="de-DE" sz="3200" dirty="0"/>
-              <a:t>Hyperparameter-Suche</a:t>
-            </a:r>
+              <a:t>-Matrix Vergleich Fold 2</a:t>
+            </a:r>
+          </a:p>
+        </p:txBody>
+      </p:sp>
+      <p:sp>
+        <p:nvSpPr>
+          <p:cNvPr id="14" name="Foliennummernplatzhalter 13">
+            <a:extLst>
+              <a:ext uri="{FF2B5EF4-FFF2-40B4-BE49-F238E27FC236}">
+                <a16:creationId xmlns:a16="http://schemas.microsoft.com/office/drawing/2014/main" id="{4A79E1E8-34E0-A99D-E9E8-B1CA1F50C63E}"/>
+              </a:ext>
+            </a:extLst>
+          </p:cNvPr>
+          <p:cNvSpPr>
+            <a:spLocks noGrp="1"/>
+          </p:cNvSpPr>
+          <p:nvPr>
+            <p:ph type="sldNum" sz="quarter" idx="10"/>
+          </p:nvPr>
+        </p:nvSpPr>
+        <p:spPr/>
+        <p:txBody>
+          <a:bodyPr/>
+          <a:lstStyle/>
+          <a:p>
+            <a:fld id="{80B4FCE6-DC73-4135-BC56-1F242D45A84C}" type="slidenum">
+              <a:rPr lang="de-DE" smtClean="0"/>
+              <a:t>10</a:t>
+            </a:fld>
+            <a:endParaRPr lang="de-DE"/>
           </a:p>
         </p:txBody>
       </p:sp>
@@ -6686,7 +6137,7 @@
           <p:cNvPr id="6" name="Fußzeilenplatzhalter 5">
             <a:extLst>
               <a:ext uri="{FF2B5EF4-FFF2-40B4-BE49-F238E27FC236}">
-                <a16:creationId xmlns:a16="http://schemas.microsoft.com/office/drawing/2014/main" id="{8AEF4587-D828-91EE-B123-AA8CB8A7F45A}"/>
+                <a16:creationId xmlns:a16="http://schemas.microsoft.com/office/drawing/2014/main" id="{EBE1B724-A15D-5168-DB31-DD4CA842F33C}"/>
               </a:ext>
             </a:extLst>
           </p:cNvPr>
@@ -6715,7 +6166,7 @@
           <p:cNvPr id="2" name="Datumsplatzhalter 1">
             <a:extLst>
               <a:ext uri="{FF2B5EF4-FFF2-40B4-BE49-F238E27FC236}">
-                <a16:creationId xmlns:a16="http://schemas.microsoft.com/office/drawing/2014/main" id="{CE98F3A7-4DE5-447B-E8E2-5AA1A1F5B2C0}"/>
+                <a16:creationId xmlns:a16="http://schemas.microsoft.com/office/drawing/2014/main" id="{ED5C9E13-2494-8FF8-0639-BEDB9DC944CA}"/>
               </a:ext>
             </a:extLst>
           </p:cNvPr>
@@ -6738,67 +6189,12 @@
           </a:p>
         </p:txBody>
       </p:sp>
-      <p:sp>
-        <p:nvSpPr>
-          <p:cNvPr id="10" name="Inhaltsplatzhalter 9">
-            <a:extLst>
-              <a:ext uri="{FF2B5EF4-FFF2-40B4-BE49-F238E27FC236}">
-                <a16:creationId xmlns:a16="http://schemas.microsoft.com/office/drawing/2014/main" id="{20B76E1B-945A-5A48-7E66-249178791166}"/>
-              </a:ext>
-            </a:extLst>
-          </p:cNvPr>
-          <p:cNvSpPr>
-            <a:spLocks noGrp="1"/>
-          </p:cNvSpPr>
-          <p:nvPr>
-            <p:ph sz="quarter" idx="13"/>
-          </p:nvPr>
-        </p:nvSpPr>
-        <p:spPr>
-          <a:xfrm>
-            <a:off x="341312" y="1620000"/>
-            <a:ext cx="8476867" cy="965545"/>
-          </a:xfrm>
-        </p:spPr>
-        <p:txBody>
-          <a:bodyPr/>
-          <a:lstStyle/>
-          <a:p>
-            <a:pPr>
-              <a:buFont typeface="Arial" panose="020B0604020202020204" pitchFamily="34" charset="0"/>
-              <a:buChar char="•"/>
-            </a:pPr>
-            <a:r>
-              <a:rPr lang="de-DE" dirty="0"/>
-              <a:t>Optimierung auf Entwicklungssatz</a:t>
-            </a:r>
-          </a:p>
-          <a:p>
-            <a:pPr>
-              <a:buFont typeface="Arial" panose="020B0604020202020204" pitchFamily="34" charset="0"/>
-              <a:buChar char="•"/>
-            </a:pPr>
-            <a:r>
-              <a:rPr lang="de-DE" dirty="0"/>
-              <a:t>Hidden Layer, Lernrate, Batchgröße, Regularisierung </a:t>
-            </a:r>
-            <a:r>
-              <a:rPr lang="de-DE" dirty="0" err="1"/>
-              <a:t>alpha</a:t>
-            </a:r>
-            <a:endParaRPr lang="de-DE" dirty="0"/>
-          </a:p>
-          <a:p>
-            <a:endParaRPr lang="de-DE" dirty="0"/>
-          </a:p>
-        </p:txBody>
-      </p:sp>
       <p:pic>
         <p:nvPicPr>
-          <p:cNvPr id="13" name="Inhaltsplatzhalter 12">
-            <a:extLst>
-              <a:ext uri="{FF2B5EF4-FFF2-40B4-BE49-F238E27FC236}">
-                <a16:creationId xmlns:a16="http://schemas.microsoft.com/office/drawing/2014/main" id="{3A09BFB8-89AB-C482-3A0A-A8AB1AA7F62E}"/>
+          <p:cNvPr id="11" name="Inhaltsplatzhalter 10">
+            <a:extLst>
+              <a:ext uri="{FF2B5EF4-FFF2-40B4-BE49-F238E27FC236}">
+                <a16:creationId xmlns:a16="http://schemas.microsoft.com/office/drawing/2014/main" id="{D0FD7253-3DF1-9C7D-B68A-1760623D2AD8}"/>
               </a:ext>
             </a:extLst>
           </p:cNvPr>
@@ -6806,7 +6202,7 @@
             <a:picLocks noGrp="1" noChangeAspect="1"/>
           </p:cNvPicPr>
           <p:nvPr>
-            <p:ph sz="quarter" idx="14"/>
+            <p:ph sz="quarter" idx="13"/>
           </p:nvPr>
         </p:nvPicPr>
         <p:blipFill>
@@ -6816,47 +6212,49 @@
         </p:blipFill>
         <p:spPr>
           <a:xfrm>
-            <a:off x="1857566" y="2631831"/>
-            <a:ext cx="8476867" cy="3816026"/>
+            <a:off x="447040" y="1619250"/>
+            <a:ext cx="5179695" cy="4316413"/>
           </a:xfrm>
           <a:prstGeom prst="rect">
             <a:avLst/>
           </a:prstGeom>
         </p:spPr>
       </p:pic>
-      <p:sp>
-        <p:nvSpPr>
-          <p:cNvPr id="14" name="Foliennummernplatzhalter 13">
-            <a:extLst>
-              <a:ext uri="{FF2B5EF4-FFF2-40B4-BE49-F238E27FC236}">
-                <a16:creationId xmlns:a16="http://schemas.microsoft.com/office/drawing/2014/main" id="{F5D0BE65-A2B4-48E0-17C8-1A3BCBA53756}"/>
-              </a:ext>
-            </a:extLst>
-          </p:cNvPr>
-          <p:cNvSpPr>
-            <a:spLocks noGrp="1"/>
-          </p:cNvSpPr>
-          <p:nvPr>
-            <p:ph type="sldNum" sz="quarter" idx="10"/>
-          </p:nvPr>
-        </p:nvSpPr>
-        <p:spPr/>
-        <p:txBody>
-          <a:bodyPr/>
-          <a:lstStyle/>
-          <a:p>
-            <a:fld id="{80B4FCE6-DC73-4135-BC56-1F242D45A84C}" type="slidenum">
-              <a:rPr lang="de-DE" smtClean="0"/>
-              <a:t>10</a:t>
-            </a:fld>
-            <a:endParaRPr lang="de-DE"/>
-          </a:p>
-        </p:txBody>
-      </p:sp>
+      <p:pic>
+        <p:nvPicPr>
+          <p:cNvPr id="15" name="Inhaltsplatzhalter 14">
+            <a:extLst>
+              <a:ext uri="{FF2B5EF4-FFF2-40B4-BE49-F238E27FC236}">
+                <a16:creationId xmlns:a16="http://schemas.microsoft.com/office/drawing/2014/main" id="{EE11EAAE-CB13-B6A6-E1D7-9AD86609A0F7}"/>
+              </a:ext>
+            </a:extLst>
+          </p:cNvPr>
+          <p:cNvPicPr>
+            <a:picLocks noGrp="1" noChangeAspect="1"/>
+          </p:cNvPicPr>
+          <p:nvPr>
+            <p:ph sz="quarter" idx="14"/>
+          </p:nvPr>
+        </p:nvPicPr>
+        <p:blipFill>
+          <a:blip r:embed="rId4"/>
+          <a:srcRect/>
+          <a:stretch/>
+        </p:blipFill>
+        <p:spPr>
+          <a:xfrm>
+            <a:off x="6565265" y="1619250"/>
+            <a:ext cx="5179695" cy="4316413"/>
+          </a:xfrm>
+          <a:prstGeom prst="rect">
+            <a:avLst/>
+          </a:prstGeom>
+        </p:spPr>
+      </p:pic>
     </p:spTree>
     <p:extLst>
       <p:ext uri="{BB962C8B-B14F-4D97-AF65-F5344CB8AC3E}">
-        <p14:creationId xmlns:p14="http://schemas.microsoft.com/office/powerpoint/2010/main" val="1026886502"/>
+        <p14:creationId xmlns:p14="http://schemas.microsoft.com/office/powerpoint/2010/main" val="2660300570"/>
       </p:ext>
     </p:extLst>
   </p:cSld>
@@ -6871,7 +6269,13 @@
   <p:cSld>
     <p:spTree>
       <p:nvGrpSpPr>
-        <p:cNvPr id="1" name=""/>
+        <p:cNvPr id="1" name="">
+          <a:extLst>
+            <a:ext uri="{FF2B5EF4-FFF2-40B4-BE49-F238E27FC236}">
+              <a16:creationId xmlns:a16="http://schemas.microsoft.com/office/drawing/2014/main" id="{60A7F4FB-957D-C777-D17B-03DB060A1941}"/>
+            </a:ext>
+          </a:extLst>
+        </p:cNvPr>
         <p:cNvGrpSpPr/>
         <p:nvPr/>
       </p:nvGrpSpPr>
@@ -6885,10 +6289,10 @@
       </p:grpSpPr>
       <p:sp>
         <p:nvSpPr>
-          <p:cNvPr id="2" name="Titel 1">
-            <a:extLst>
-              <a:ext uri="{FF2B5EF4-FFF2-40B4-BE49-F238E27FC236}">
-                <a16:creationId xmlns:a16="http://schemas.microsoft.com/office/drawing/2014/main" id="{CF324D3E-0F2F-AB0F-B173-23CAC68258D5}"/>
+          <p:cNvPr id="5" name="Titel 4">
+            <a:extLst>
+              <a:ext uri="{FF2B5EF4-FFF2-40B4-BE49-F238E27FC236}">
+                <a16:creationId xmlns:a16="http://schemas.microsoft.com/office/drawing/2014/main" id="{70FA0071-9D28-E701-6775-DAD246DFC539}"/>
               </a:ext>
             </a:extLst>
           </p:cNvPr>
@@ -6901,8 +6305,8 @@
         </p:nvSpPr>
         <p:spPr>
           <a:xfrm>
-            <a:off x="341811" y="567600"/>
-            <a:ext cx="6328812" cy="706030"/>
+            <a:off x="341810" y="567600"/>
+            <a:ext cx="5995927" cy="706030"/>
           </a:xfrm>
         </p:spPr>
         <p:txBody>
@@ -6910,205 +6314,22 @@
           <a:lstStyle/>
           <a:p>
             <a:r>
+              <a:rPr lang="de-DE" sz="3200" dirty="0" err="1"/>
+              <a:t>Confusion</a:t>
+            </a:r>
+            <a:r>
               <a:rPr lang="de-DE" sz="3200" dirty="0"/>
-              <a:t>Code-Überblick</a:t>
-            </a:r>
-          </a:p>
-        </p:txBody>
-      </p:sp>
-      <p:sp>
-        <p:nvSpPr>
-          <p:cNvPr id="3" name="Datumsplatzhalter 2">
-            <a:extLst>
-              <a:ext uri="{FF2B5EF4-FFF2-40B4-BE49-F238E27FC236}">
-                <a16:creationId xmlns:a16="http://schemas.microsoft.com/office/drawing/2014/main" id="{10DEE32E-D555-A5C0-5E56-51A5968FB217}"/>
-              </a:ext>
-            </a:extLst>
-          </p:cNvPr>
-          <p:cNvSpPr>
-            <a:spLocks noGrp="1"/>
-          </p:cNvSpPr>
-          <p:nvPr>
-            <p:ph type="dt" sz="half" idx="12"/>
-          </p:nvPr>
-        </p:nvSpPr>
-        <p:spPr/>
-        <p:txBody>
-          <a:bodyPr/>
-          <a:lstStyle/>
-          <a:p>
-            <a:r>
-              <a:rPr lang="de-DE"/>
-              <a:t>23.07.2026</a:t>
-            </a:r>
-          </a:p>
-        </p:txBody>
-      </p:sp>
-      <p:sp>
-        <p:nvSpPr>
-          <p:cNvPr id="5" name="Fußzeilenplatzhalter 4">
-            <a:extLst>
-              <a:ext uri="{FF2B5EF4-FFF2-40B4-BE49-F238E27FC236}">
-                <a16:creationId xmlns:a16="http://schemas.microsoft.com/office/drawing/2014/main" id="{769D6D17-25F8-CC0D-9807-336DAF75B7C5}"/>
-              </a:ext>
-            </a:extLst>
-          </p:cNvPr>
-          <p:cNvSpPr>
-            <a:spLocks noGrp="1"/>
-          </p:cNvSpPr>
-          <p:nvPr>
-            <p:ph type="ftr" sz="quarter" idx="11"/>
-          </p:nvPr>
-        </p:nvSpPr>
-        <p:spPr/>
-        <p:txBody>
-          <a:bodyPr/>
-          <a:lstStyle/>
-          <a:p>
-            <a:r>
-              <a:rPr lang="de-DE"/>
-              <a:t>Materialdiagnostik: Task 4</a:t>
-            </a:r>
-            <a:endParaRPr lang="de-DE" dirty="0"/>
-          </a:p>
-        </p:txBody>
-      </p:sp>
-      <p:sp>
-        <p:nvSpPr>
-          <p:cNvPr id="7" name="Inhaltsplatzhalter 6">
-            <a:extLst>
-              <a:ext uri="{FF2B5EF4-FFF2-40B4-BE49-F238E27FC236}">
-                <a16:creationId xmlns:a16="http://schemas.microsoft.com/office/drawing/2014/main" id="{D292BAE9-0055-7A55-987D-2D8376847BEA}"/>
-              </a:ext>
-            </a:extLst>
-          </p:cNvPr>
-          <p:cNvSpPr>
-            <a:spLocks noGrp="1"/>
-          </p:cNvSpPr>
-          <p:nvPr>
-            <p:ph sz="quarter" idx="13"/>
-          </p:nvPr>
-        </p:nvSpPr>
-        <p:spPr>
-          <a:xfrm>
-            <a:off x="341811" y="1696595"/>
-            <a:ext cx="11512052" cy="4395788"/>
-          </a:xfrm>
-        </p:spPr>
-        <p:txBody>
-          <a:bodyPr/>
-          <a:lstStyle/>
-          <a:p>
-            <a:pPr>
-              <a:buFont typeface="Arial" panose="020B0604020202020204" pitchFamily="34" charset="0"/>
-              <a:buChar char="•"/>
-            </a:pPr>
-            <a:r>
-              <a:rPr lang="de-DE" dirty="0"/>
-              <a:t>main.py: </a:t>
-            </a:r>
-          </a:p>
-          <a:p>
-            <a:pPr lvl="1">
-              <a:buFont typeface="Arial" panose="020B0604020202020204" pitchFamily="34" charset="0"/>
-              <a:buChar char="•"/>
-            </a:pPr>
-            <a:r>
-              <a:rPr lang="de-DE" dirty="0"/>
-              <a:t>steuert die komplette Pipeline</a:t>
-            </a:r>
-          </a:p>
-          <a:p>
-            <a:pPr>
-              <a:buFont typeface="Arial" panose="020B0604020202020204" pitchFamily="34" charset="0"/>
-              <a:buChar char="•"/>
-            </a:pPr>
-            <a:r>
-              <a:rPr lang="de-DE" dirty="0"/>
-              <a:t>dataframe_manager.py: </a:t>
-            </a:r>
-          </a:p>
-          <a:p>
-            <a:pPr lvl="1">
-              <a:buFont typeface="Arial" panose="020B0604020202020204" pitchFamily="34" charset="0"/>
-              <a:buChar char="•"/>
-            </a:pPr>
-            <a:r>
-              <a:rPr lang="de-DE" dirty="0"/>
-              <a:t>lädt WAV-Dateien und Metadaten</a:t>
-            </a:r>
-          </a:p>
-          <a:p>
-            <a:pPr>
-              <a:buFont typeface="Arial" panose="020B0604020202020204" pitchFamily="34" charset="0"/>
-              <a:buChar char="•"/>
-            </a:pPr>
-            <a:r>
-              <a:rPr lang="de-DE" dirty="0"/>
-              <a:t>split.py: </a:t>
-            </a:r>
-          </a:p>
-          <a:p>
-            <a:pPr lvl="1">
-              <a:buFont typeface="Arial" panose="020B0604020202020204" pitchFamily="34" charset="0"/>
-              <a:buChar char="•"/>
-            </a:pPr>
-            <a:r>
-              <a:rPr lang="de-DE" dirty="0"/>
-              <a:t>ordnet Rohsignale Train, Dev und Test zu</a:t>
-            </a:r>
-          </a:p>
-          <a:p>
-            <a:pPr>
-              <a:buFont typeface="Arial" panose="020B0604020202020204" pitchFamily="34" charset="0"/>
-              <a:buChar char="•"/>
-            </a:pPr>
-            <a:r>
-              <a:rPr lang="de-DE" dirty="0"/>
-              <a:t>extraction.py: </a:t>
-            </a:r>
-          </a:p>
-          <a:p>
-            <a:pPr lvl="1">
-              <a:buFont typeface="Arial" panose="020B0604020202020204" pitchFamily="34" charset="0"/>
-              <a:buChar char="•"/>
-            </a:pPr>
-            <a:r>
-              <a:rPr lang="de-DE" dirty="0"/>
-              <a:t>berechnet Signalmerkmale pro Datei</a:t>
-            </a:r>
-          </a:p>
-          <a:p>
-            <a:pPr>
-              <a:buFont typeface="Arial" panose="020B0604020202020204" pitchFamily="34" charset="0"/>
-              <a:buChar char="•"/>
-            </a:pPr>
-            <a:r>
-              <a:rPr lang="de-DE" dirty="0"/>
-              <a:t>model.py: </a:t>
-            </a:r>
-          </a:p>
-          <a:p>
-            <a:pPr lvl="1">
-              <a:buFont typeface="Arial" panose="020B0604020202020204" pitchFamily="34" charset="0"/>
-              <a:buChar char="•"/>
-            </a:pPr>
-            <a:r>
-              <a:rPr lang="de-DE" dirty="0"/>
-              <a:t>trainiert, optimiert und bewertet die MLP-Modelle</a:t>
-            </a:r>
-          </a:p>
-          <a:p>
-            <a:endParaRPr lang="de-DE" dirty="0"/>
-          </a:p>
-        </p:txBody>
-      </p:sp>
-      <p:sp>
-        <p:nvSpPr>
-          <p:cNvPr id="8" name="Foliennummernplatzhalter 7">
-            <a:extLst>
-              <a:ext uri="{FF2B5EF4-FFF2-40B4-BE49-F238E27FC236}">
-                <a16:creationId xmlns:a16="http://schemas.microsoft.com/office/drawing/2014/main" id="{2F72B419-304B-ACE9-A0CD-B2C1E713F427}"/>
+              <a:t>-Matrix Vergleich Fold 3</a:t>
+            </a:r>
+          </a:p>
+        </p:txBody>
+      </p:sp>
+      <p:sp>
+        <p:nvSpPr>
+          <p:cNvPr id="14" name="Foliennummernplatzhalter 13">
+            <a:extLst>
+              <a:ext uri="{FF2B5EF4-FFF2-40B4-BE49-F238E27FC236}">
+                <a16:creationId xmlns:a16="http://schemas.microsoft.com/office/drawing/2014/main" id="{6CA9F601-B423-5E4A-4C0D-61333D330743}"/>
               </a:ext>
             </a:extLst>
           </p:cNvPr>
@@ -7132,10 +6353,129 @@
           </a:p>
         </p:txBody>
       </p:sp>
+      <p:sp>
+        <p:nvSpPr>
+          <p:cNvPr id="6" name="Fußzeilenplatzhalter 5">
+            <a:extLst>
+              <a:ext uri="{FF2B5EF4-FFF2-40B4-BE49-F238E27FC236}">
+                <a16:creationId xmlns:a16="http://schemas.microsoft.com/office/drawing/2014/main" id="{DB99D166-1036-73A5-42E9-EDFAB77196E3}"/>
+              </a:ext>
+            </a:extLst>
+          </p:cNvPr>
+          <p:cNvSpPr>
+            <a:spLocks noGrp="1"/>
+          </p:cNvSpPr>
+          <p:nvPr>
+            <p:ph type="ftr" sz="quarter" idx="11"/>
+          </p:nvPr>
+        </p:nvSpPr>
+        <p:spPr/>
+        <p:txBody>
+          <a:bodyPr/>
+          <a:lstStyle/>
+          <a:p>
+            <a:r>
+              <a:rPr lang="de-DE"/>
+              <a:t>Materialdiagnostik: Task 4</a:t>
+            </a:r>
+            <a:endParaRPr lang="de-DE" dirty="0"/>
+          </a:p>
+        </p:txBody>
+      </p:sp>
+      <p:sp>
+        <p:nvSpPr>
+          <p:cNvPr id="2" name="Datumsplatzhalter 1">
+            <a:extLst>
+              <a:ext uri="{FF2B5EF4-FFF2-40B4-BE49-F238E27FC236}">
+                <a16:creationId xmlns:a16="http://schemas.microsoft.com/office/drawing/2014/main" id="{366AF41F-F91F-A40C-8B0D-E3FD2B2086A2}"/>
+              </a:ext>
+            </a:extLst>
+          </p:cNvPr>
+          <p:cNvSpPr>
+            <a:spLocks noGrp="1"/>
+          </p:cNvSpPr>
+          <p:nvPr>
+            <p:ph type="dt" sz="half" idx="12"/>
+          </p:nvPr>
+        </p:nvSpPr>
+        <p:spPr/>
+        <p:txBody>
+          <a:bodyPr/>
+          <a:lstStyle/>
+          <a:p>
+            <a:r>
+              <a:rPr lang="de-DE"/>
+              <a:t>23.07.2026</a:t>
+            </a:r>
+          </a:p>
+        </p:txBody>
+      </p:sp>
+      <p:pic>
+        <p:nvPicPr>
+          <p:cNvPr id="11" name="Inhaltsplatzhalter 10">
+            <a:extLst>
+              <a:ext uri="{FF2B5EF4-FFF2-40B4-BE49-F238E27FC236}">
+                <a16:creationId xmlns:a16="http://schemas.microsoft.com/office/drawing/2014/main" id="{B3E90FE8-49B9-1D1F-B1FE-FA678FB277B7}"/>
+              </a:ext>
+            </a:extLst>
+          </p:cNvPr>
+          <p:cNvPicPr>
+            <a:picLocks noGrp="1" noChangeAspect="1"/>
+          </p:cNvPicPr>
+          <p:nvPr>
+            <p:ph sz="quarter" idx="13"/>
+          </p:nvPr>
+        </p:nvPicPr>
+        <p:blipFill>
+          <a:blip r:embed="rId3"/>
+          <a:srcRect/>
+          <a:stretch/>
+        </p:blipFill>
+        <p:spPr>
+          <a:xfrm>
+            <a:off x="447040" y="1619250"/>
+            <a:ext cx="5179695" cy="4316413"/>
+          </a:xfrm>
+          <a:prstGeom prst="rect">
+            <a:avLst/>
+          </a:prstGeom>
+        </p:spPr>
+      </p:pic>
+      <p:pic>
+        <p:nvPicPr>
+          <p:cNvPr id="15" name="Inhaltsplatzhalter 14">
+            <a:extLst>
+              <a:ext uri="{FF2B5EF4-FFF2-40B4-BE49-F238E27FC236}">
+                <a16:creationId xmlns:a16="http://schemas.microsoft.com/office/drawing/2014/main" id="{37E5B077-C654-E7CA-A38E-DB1C604295AF}"/>
+              </a:ext>
+            </a:extLst>
+          </p:cNvPr>
+          <p:cNvPicPr>
+            <a:picLocks noGrp="1" noChangeAspect="1"/>
+          </p:cNvPicPr>
+          <p:nvPr>
+            <p:ph sz="quarter" idx="14"/>
+          </p:nvPr>
+        </p:nvPicPr>
+        <p:blipFill>
+          <a:blip r:embed="rId4"/>
+          <a:srcRect/>
+          <a:stretch/>
+        </p:blipFill>
+        <p:spPr>
+          <a:xfrm>
+            <a:off x="6565265" y="1619250"/>
+            <a:ext cx="5179695" cy="4316413"/>
+          </a:xfrm>
+          <a:prstGeom prst="rect">
+            <a:avLst/>
+          </a:prstGeom>
+        </p:spPr>
+      </p:pic>
     </p:spTree>
     <p:extLst>
       <p:ext uri="{BB962C8B-B14F-4D97-AF65-F5344CB8AC3E}">
-        <p14:creationId xmlns:p14="http://schemas.microsoft.com/office/powerpoint/2010/main" val="4106251163"/>
+        <p14:creationId xmlns:p14="http://schemas.microsoft.com/office/powerpoint/2010/main" val="3863973935"/>
       </p:ext>
     </p:extLst>
   </p:cSld>
@@ -7153,7 +6493,7 @@
         <p:cNvPr id="1" name="">
           <a:extLst>
             <a:ext uri="{FF2B5EF4-FFF2-40B4-BE49-F238E27FC236}">
-              <a16:creationId xmlns:a16="http://schemas.microsoft.com/office/drawing/2014/main" id="{73CF3C4D-956F-CF44-1DA8-88DDD2237ABF}"/>
+              <a16:creationId xmlns:a16="http://schemas.microsoft.com/office/drawing/2014/main" id="{8C12F724-9340-0C52-F77E-E37E31870DAD}"/>
             </a:ext>
           </a:extLst>
         </p:cNvPr>
@@ -7170,147 +6510,76 @@
       </p:grpSpPr>
       <p:sp>
         <p:nvSpPr>
-          <p:cNvPr id="13" name="Rechteck: eine Ecke abgerundet 12">
-            <a:extLst>
-              <a:ext uri="{FF2B5EF4-FFF2-40B4-BE49-F238E27FC236}">
-                <a16:creationId xmlns:a16="http://schemas.microsoft.com/office/drawing/2014/main" id="{C084ADCD-CF21-F408-4472-3372DC76ABC1}"/>
-              </a:ext>
-            </a:extLst>
-          </p:cNvPr>
-          <p:cNvSpPr/>
-          <p:nvPr/>
-        </p:nvSpPr>
-        <p:spPr bwMode="auto">
+          <p:cNvPr id="5" name="Titel 4">
+            <a:extLst>
+              <a:ext uri="{FF2B5EF4-FFF2-40B4-BE49-F238E27FC236}">
+                <a16:creationId xmlns:a16="http://schemas.microsoft.com/office/drawing/2014/main" id="{7B5C4E3E-FDDB-0A91-9E25-816E8A3DB1C3}"/>
+              </a:ext>
+            </a:extLst>
+          </p:cNvPr>
+          <p:cNvSpPr>
+            <a:spLocks noGrp="1"/>
+          </p:cNvSpPr>
+          <p:nvPr>
+            <p:ph type="title"/>
+          </p:nvPr>
+        </p:nvSpPr>
+        <p:spPr>
           <a:xfrm>
-            <a:off x="6459536" y="1740625"/>
-            <a:ext cx="750559" cy="704193"/>
+            <a:off x="341810" y="567600"/>
+            <a:ext cx="5995927" cy="706030"/>
           </a:xfrm>
-          <a:prstGeom prst="round1Rect">
-            <a:avLst/>
-          </a:prstGeom>
-          <a:solidFill>
-            <a:schemeClr val="bg2">
-              <a:lumMod val="40000"/>
-              <a:lumOff val="60000"/>
-            </a:schemeClr>
-          </a:solidFill>
-          <a:ln w="9525" cap="flat" cmpd="sng" algn="ctr">
-            <a:noFill/>
-            <a:prstDash val="solid"/>
-            <a:round/>
-            <a:headEnd type="none" w="med" len="med"/>
-            <a:tailEnd type="none" w="med" len="med"/>
-          </a:ln>
-          <a:effectLst/>
         </p:spPr>
         <p:txBody>
-          <a:bodyPr vert="horz" wrap="square" lIns="91440" tIns="45720" rIns="91440" bIns="45720" numCol="1" rtlCol="0" anchor="t" anchorCtr="0" compatLnSpc="1">
-            <a:prstTxWarp prst="textNoShape">
-              <a:avLst/>
-            </a:prstTxWarp>
-          </a:bodyPr>
-          <a:lstStyle/>
-          <a:p>
-            <a:pPr marL="0" marR="0" indent="0" algn="l" defTabSz="914400" rtl="0" eaLnBrk="0" fontAlgn="base" latinLnBrk="0" hangingPunct="0">
-              <a:lnSpc>
-                <a:spcPct val="100000"/>
-              </a:lnSpc>
-              <a:spcBef>
-                <a:spcPct val="0"/>
-              </a:spcBef>
-              <a:spcAft>
-                <a:spcPct val="0"/>
-              </a:spcAft>
-              <a:buClrTx/>
-              <a:buSzTx/>
-              <a:buFontTx/>
-              <a:buNone/>
-              <a:tabLst/>
-            </a:pPr>
-            <a:r>
-              <a:rPr kumimoji="0" lang="de-DE" sz="1800" b="0" i="0" u="none" strike="noStrike" cap="none" normalizeH="0" baseline="0" dirty="0" err="1">
-                <a:ln>
-                  <a:noFill/>
-                </a:ln>
-                <a:solidFill>
-                  <a:schemeClr val="tx1"/>
-                </a:solidFill>
-                <a:effectLst/>
-                <a:latin typeface="Arial" pitchFamily="-109" charset="0"/>
-                <a:ea typeface="ヒラギノ角ゴ Pro W3" pitchFamily="-109" charset="-128"/>
-                <a:cs typeface="ヒラギノ角ゴ Pro W3" pitchFamily="-109" charset="-128"/>
-              </a:rPr>
-              <a:t>Ch</a:t>
-            </a:r>
-            <a:r>
-              <a:rPr kumimoji="0" lang="de-DE" sz="1800" b="0" i="0" u="none" strike="noStrike" cap="none" normalizeH="0" baseline="0" dirty="0">
-                <a:ln>
-                  <a:noFill/>
-                </a:ln>
-                <a:solidFill>
-                  <a:schemeClr val="tx1"/>
-                </a:solidFill>
-                <a:effectLst/>
-                <a:latin typeface="Arial" pitchFamily="-109" charset="0"/>
-                <a:ea typeface="ヒラギノ角ゴ Pro W3" pitchFamily="-109" charset="-128"/>
-                <a:cs typeface="ヒラギノ角ゴ Pro W3" pitchFamily="-109" charset="-128"/>
-              </a:rPr>
-              <a:t> 1</a:t>
-            </a:r>
-            <a:endParaRPr kumimoji="0" lang="de-DE" sz="2400" b="0" i="0" u="none" strike="noStrike" cap="none" normalizeH="0" baseline="0" dirty="0">
-              <a:ln>
-                <a:noFill/>
-              </a:ln>
-              <a:solidFill>
-                <a:schemeClr val="tx1"/>
-              </a:solidFill>
-              <a:effectLst/>
-              <a:latin typeface="Arial" pitchFamily="-109" charset="0"/>
-              <a:ea typeface="ヒラギノ角ゴ Pro W3" pitchFamily="-109" charset="-128"/>
-              <a:cs typeface="ヒラギノ角ゴ Pro W3" pitchFamily="-109" charset="-128"/>
-            </a:endParaRPr>
-          </a:p>
-        </p:txBody>
-      </p:sp>
-      <p:sp>
-        <p:nvSpPr>
-          <p:cNvPr id="2" name="Titel 1">
-            <a:extLst>
-              <a:ext uri="{FF2B5EF4-FFF2-40B4-BE49-F238E27FC236}">
-                <a16:creationId xmlns:a16="http://schemas.microsoft.com/office/drawing/2014/main" id="{10501F1A-FCB7-133D-6F5D-FABA9A2F000C}"/>
-              </a:ext>
-            </a:extLst>
-          </p:cNvPr>
-          <p:cNvSpPr>
-            <a:spLocks noGrp="1"/>
-          </p:cNvSpPr>
-          <p:nvPr>
-            <p:ph type="title"/>
-          </p:nvPr>
-        </p:nvSpPr>
-        <p:spPr/>
-        <p:txBody>
-          <a:bodyPr/>
-          <a:lstStyle/>
-          <a:p>
+          <a:bodyPr/>
+          <a:lstStyle/>
+          <a:p>
+            <a:r>
+              <a:rPr lang="de-DE" sz="3200" dirty="0" err="1"/>
+              <a:t>Confusion</a:t>
+            </a:r>
             <a:r>
               <a:rPr lang="de-DE" sz="3200" dirty="0"/>
-              <a:t>Loss </a:t>
-            </a:r>
-            <a:r>
-              <a:rPr lang="de-DE" sz="3200" dirty="0" err="1"/>
-              <a:t>Curves</a:t>
-            </a:r>
-            <a:endParaRPr lang="de-DE" dirty="0"/>
-          </a:p>
-        </p:txBody>
-      </p:sp>
-      <p:sp>
-        <p:nvSpPr>
-          <p:cNvPr id="5" name="Fußzeilenplatzhalter 4">
-            <a:extLst>
-              <a:ext uri="{FF2B5EF4-FFF2-40B4-BE49-F238E27FC236}">
-                <a16:creationId xmlns:a16="http://schemas.microsoft.com/office/drawing/2014/main" id="{B326B563-4C74-A0AC-BD19-B0D9D3AA03C6}"/>
+              <a:t>-Matrix Vergleich Fold 4</a:t>
+            </a:r>
+          </a:p>
+        </p:txBody>
+      </p:sp>
+      <p:sp>
+        <p:nvSpPr>
+          <p:cNvPr id="14" name="Foliennummernplatzhalter 13">
+            <a:extLst>
+              <a:ext uri="{FF2B5EF4-FFF2-40B4-BE49-F238E27FC236}">
+                <a16:creationId xmlns:a16="http://schemas.microsoft.com/office/drawing/2014/main" id="{75CAE18E-A74D-F847-DC73-973671E102E9}"/>
+              </a:ext>
+            </a:extLst>
+          </p:cNvPr>
+          <p:cNvSpPr>
+            <a:spLocks noGrp="1"/>
+          </p:cNvSpPr>
+          <p:nvPr>
+            <p:ph type="sldNum" sz="quarter" idx="10"/>
+          </p:nvPr>
+        </p:nvSpPr>
+        <p:spPr/>
+        <p:txBody>
+          <a:bodyPr/>
+          <a:lstStyle/>
+          <a:p>
+            <a:fld id="{80B4FCE6-DC73-4135-BC56-1F242D45A84C}" type="slidenum">
+              <a:rPr lang="de-DE" smtClean="0"/>
+              <a:t>12</a:t>
+            </a:fld>
+            <a:endParaRPr lang="de-DE"/>
+          </a:p>
+        </p:txBody>
+      </p:sp>
+      <p:sp>
+        <p:nvSpPr>
+          <p:cNvPr id="6" name="Fußzeilenplatzhalter 5">
+            <a:extLst>
+              <a:ext uri="{FF2B5EF4-FFF2-40B4-BE49-F238E27FC236}">
+                <a16:creationId xmlns:a16="http://schemas.microsoft.com/office/drawing/2014/main" id="{1A3E2241-3ED3-9978-AB6C-C0D86F388513}"/>
               </a:ext>
             </a:extLst>
           </p:cNvPr>
@@ -7336,10 +6605,10 @@
       </p:sp>
       <p:sp>
         <p:nvSpPr>
-          <p:cNvPr id="3" name="Datumsplatzhalter 2">
-            <a:extLst>
-              <a:ext uri="{FF2B5EF4-FFF2-40B4-BE49-F238E27FC236}">
-                <a16:creationId xmlns:a16="http://schemas.microsoft.com/office/drawing/2014/main" id="{A6F37E5F-3907-6F85-DAC7-339604EB1496}"/>
+          <p:cNvPr id="2" name="Datumsplatzhalter 1">
+            <a:extLst>
+              <a:ext uri="{FF2B5EF4-FFF2-40B4-BE49-F238E27FC236}">
+                <a16:creationId xmlns:a16="http://schemas.microsoft.com/office/drawing/2014/main" id="{1EB728BA-14A3-FD9A-E16E-2E08B4358ACC}"/>
               </a:ext>
             </a:extLst>
           </p:cNvPr>
@@ -7359,83 +6628,6 @@
               <a:rPr lang="de-DE"/>
               <a:t>23.07.2026</a:t>
             </a:r>
-          </a:p>
-        </p:txBody>
-      </p:sp>
-      <p:sp>
-        <p:nvSpPr>
-          <p:cNvPr id="8" name="Inhaltsplatzhalter 7">
-            <a:extLst>
-              <a:ext uri="{FF2B5EF4-FFF2-40B4-BE49-F238E27FC236}">
-                <a16:creationId xmlns:a16="http://schemas.microsoft.com/office/drawing/2014/main" id="{9E321134-F1B0-51A0-36A7-EE8C324D145B}"/>
-              </a:ext>
-            </a:extLst>
-          </p:cNvPr>
-          <p:cNvSpPr>
-            <a:spLocks noGrp="1"/>
-          </p:cNvSpPr>
-          <p:nvPr>
-            <p:ph sz="quarter" idx="13"/>
-          </p:nvPr>
-        </p:nvSpPr>
-        <p:spPr/>
-        <p:txBody>
-          <a:bodyPr/>
-          <a:lstStyle/>
-          <a:p>
-            <a:pPr>
-              <a:buFont typeface="Arial" panose="020B0604020202020204" pitchFamily="34" charset="0"/>
-              <a:buChar char="•"/>
-            </a:pPr>
-            <a:r>
-              <a:rPr lang="de-DE" dirty="0"/>
-              <a:t>Loss misst den Fehler der Modellvorhersagen</a:t>
-            </a:r>
-          </a:p>
-          <a:p>
-            <a:pPr>
-              <a:buFont typeface="Arial" panose="020B0604020202020204" pitchFamily="34" charset="0"/>
-              <a:buChar char="•"/>
-            </a:pPr>
-            <a:r>
-              <a:rPr lang="de-DE" dirty="0"/>
-              <a:t>Sinkende Kurve zeigt: Modell lernt</a:t>
-            </a:r>
-          </a:p>
-          <a:p>
-            <a:pPr>
-              <a:buFont typeface="Arial" panose="020B0604020202020204" pitchFamily="34" charset="0"/>
-              <a:buChar char="•"/>
-            </a:pPr>
-            <a:r>
-              <a:rPr lang="de-DE" dirty="0"/>
-              <a:t>Stabiler Verlauf zeigt: Training konvergiert</a:t>
-            </a:r>
-          </a:p>
-          <a:p>
-            <a:pPr>
-              <a:buFont typeface="Arial" panose="020B0604020202020204" pitchFamily="34" charset="0"/>
-              <a:buChar char="•"/>
-            </a:pPr>
-            <a:r>
-              <a:rPr lang="de-DE" dirty="0"/>
-              <a:t>Niedriger Loss allein beweist keine Generalisierung</a:t>
-            </a:r>
-          </a:p>
-          <a:p>
-            <a:pPr>
-              <a:buFont typeface="Arial" panose="020B0604020202020204" pitchFamily="34" charset="0"/>
-              <a:buChar char="•"/>
-            </a:pPr>
-            <a:r>
-              <a:rPr lang="de-DE" dirty="0"/>
-              <a:t>Deshalb zusätzlich: Dev/Test-Metriken, ROC/AUC, Learning </a:t>
-            </a:r>
-            <a:r>
-              <a:rPr lang="de-DE" dirty="0" err="1"/>
-              <a:t>Curves</a:t>
-            </a:r>
-            <a:endParaRPr lang="de-DE" dirty="0"/>
           </a:p>
         </p:txBody>
       </p:sp>
@@ -7444,7 +6636,7 @@
           <p:cNvPr id="11" name="Inhaltsplatzhalter 10">
             <a:extLst>
               <a:ext uri="{FF2B5EF4-FFF2-40B4-BE49-F238E27FC236}">
-                <a16:creationId xmlns:a16="http://schemas.microsoft.com/office/drawing/2014/main" id="{C29B9310-6F11-0E1E-D9E3-58059F9BE356}"/>
+                <a16:creationId xmlns:a16="http://schemas.microsoft.com/office/drawing/2014/main" id="{E4914CFD-9705-AB7B-4B0B-FB1E85D39F55}"/>
               </a:ext>
             </a:extLst>
           </p:cNvPr>
@@ -7452,142 +6644,39 @@
             <a:picLocks noGrp="1" noChangeAspect="1"/>
           </p:cNvPicPr>
           <p:nvPr>
-            <p:ph sz="quarter" idx="14"/>
+            <p:ph sz="quarter" idx="13"/>
           </p:nvPr>
         </p:nvPicPr>
         <p:blipFill>
           <a:blip r:embed="rId3"/>
-          <a:stretch>
-            <a:fillRect/>
-          </a:stretch>
+          <a:srcRect/>
+          <a:stretch/>
         </p:blipFill>
         <p:spPr>
           <a:xfrm>
-            <a:off x="6459538" y="2092722"/>
-            <a:ext cx="5391150" cy="3369468"/>
+            <a:off x="447040" y="1619250"/>
+            <a:ext cx="5179695" cy="4316413"/>
           </a:xfrm>
           <a:prstGeom prst="rect">
             <a:avLst/>
           </a:prstGeom>
         </p:spPr>
       </p:pic>
-      <p:sp>
-        <p:nvSpPr>
-          <p:cNvPr id="15" name="Rechteck: eine Ecke abgerundet 14">
-            <a:extLst>
-              <a:ext uri="{FF2B5EF4-FFF2-40B4-BE49-F238E27FC236}">
-                <a16:creationId xmlns:a16="http://schemas.microsoft.com/office/drawing/2014/main" id="{00B6B237-AAA7-0524-D844-6633D85D7E7C}"/>
-              </a:ext>
-            </a:extLst>
-          </p:cNvPr>
-          <p:cNvSpPr/>
-          <p:nvPr/>
-        </p:nvSpPr>
-        <p:spPr bwMode="auto">
-          <a:xfrm>
-            <a:off x="6459535" y="1740625"/>
-            <a:ext cx="750559" cy="704193"/>
-          </a:xfrm>
-          <a:prstGeom prst="round1Rect">
-            <a:avLst/>
-          </a:prstGeom>
-          <a:solidFill>
-            <a:schemeClr val="bg2">
-              <a:lumMod val="40000"/>
-              <a:lumOff val="60000"/>
-            </a:schemeClr>
-          </a:solidFill>
-          <a:ln w="9525" cap="flat" cmpd="sng" algn="ctr">
-            <a:noFill/>
-            <a:prstDash val="solid"/>
-            <a:round/>
-            <a:headEnd type="none" w="med" len="med"/>
-            <a:tailEnd type="none" w="med" len="med"/>
-          </a:ln>
-          <a:effectLst/>
-        </p:spPr>
-        <p:txBody>
-          <a:bodyPr vert="horz" wrap="square" lIns="91440" tIns="45720" rIns="91440" bIns="45720" numCol="1" rtlCol="0" anchor="t" anchorCtr="0" compatLnSpc="1">
-            <a:prstTxWarp prst="textNoShape">
-              <a:avLst/>
-            </a:prstTxWarp>
-          </a:bodyPr>
-          <a:lstStyle/>
-          <a:p>
-            <a:pPr marL="0" marR="0" indent="0" algn="l" defTabSz="914400" rtl="0" eaLnBrk="0" fontAlgn="base" latinLnBrk="0" hangingPunct="0">
-              <a:lnSpc>
-                <a:spcPct val="100000"/>
-              </a:lnSpc>
-              <a:spcBef>
-                <a:spcPct val="0"/>
-              </a:spcBef>
-              <a:spcAft>
-                <a:spcPct val="0"/>
-              </a:spcAft>
-              <a:buClrTx/>
-              <a:buSzTx/>
-              <a:buFontTx/>
-              <a:buNone/>
-              <a:tabLst/>
-            </a:pPr>
-            <a:r>
-              <a:rPr kumimoji="0" lang="de-DE" sz="1800" b="0" i="0" u="none" strike="noStrike" cap="none" normalizeH="0" baseline="0" dirty="0" err="1">
-                <a:ln>
-                  <a:noFill/>
-                </a:ln>
-                <a:solidFill>
-                  <a:schemeClr val="tx1"/>
-                </a:solidFill>
-                <a:effectLst/>
-                <a:latin typeface="Arial" pitchFamily="-109" charset="0"/>
-                <a:ea typeface="ヒラギノ角ゴ Pro W3" pitchFamily="-109" charset="-128"/>
-                <a:cs typeface="ヒラギノ角ゴ Pro W3" pitchFamily="-109" charset="-128"/>
-              </a:rPr>
-              <a:t>Ch</a:t>
-            </a:r>
-            <a:r>
-              <a:rPr kumimoji="0" lang="de-DE" sz="1800" b="0" i="0" u="none" strike="noStrike" cap="none" normalizeH="0" baseline="0" dirty="0">
-                <a:ln>
-                  <a:noFill/>
-                </a:ln>
-                <a:solidFill>
-                  <a:schemeClr val="tx1"/>
-                </a:solidFill>
-                <a:effectLst/>
-                <a:latin typeface="Arial" pitchFamily="-109" charset="0"/>
-                <a:ea typeface="ヒラギノ角ゴ Pro W3" pitchFamily="-109" charset="-128"/>
-                <a:cs typeface="ヒラギノ角ゴ Pro W3" pitchFamily="-109" charset="-128"/>
-              </a:rPr>
-              <a:t> 2</a:t>
-            </a:r>
-            <a:endParaRPr kumimoji="0" lang="de-DE" sz="2400" b="0" i="0" u="none" strike="noStrike" cap="none" normalizeH="0" baseline="0" dirty="0">
-              <a:ln>
-                <a:noFill/>
-              </a:ln>
-              <a:solidFill>
-                <a:schemeClr val="tx1"/>
-              </a:solidFill>
-              <a:effectLst/>
-              <a:latin typeface="Arial" pitchFamily="-109" charset="0"/>
-              <a:ea typeface="ヒラギノ角ゴ Pro W3" pitchFamily="-109" charset="-128"/>
-              <a:cs typeface="ヒラギノ角ゴ Pro W3" pitchFamily="-109" charset="-128"/>
-            </a:endParaRPr>
-          </a:p>
-        </p:txBody>
-      </p:sp>
       <p:pic>
         <p:nvPicPr>
-          <p:cNvPr id="12" name="Inhaltsplatzhalter 10">
-            <a:extLst>
-              <a:ext uri="{FF2B5EF4-FFF2-40B4-BE49-F238E27FC236}">
-                <a16:creationId xmlns:a16="http://schemas.microsoft.com/office/drawing/2014/main" id="{737B854A-413A-5164-83D6-D96C58A53D53}"/>
+          <p:cNvPr id="15" name="Inhaltsplatzhalter 14">
+            <a:extLst>
+              <a:ext uri="{FF2B5EF4-FFF2-40B4-BE49-F238E27FC236}">
+                <a16:creationId xmlns:a16="http://schemas.microsoft.com/office/drawing/2014/main" id="{13754023-48FA-6D20-6A19-4DA8C0FC511A}"/>
               </a:ext>
             </a:extLst>
           </p:cNvPr>
           <p:cNvPicPr>
-            <a:picLocks noChangeAspect="1"/>
+            <a:picLocks noGrp="1" noChangeAspect="1"/>
           </p:cNvPicPr>
-          <p:nvPr/>
+          <p:nvPr>
+            <p:ph sz="quarter" idx="14"/>
+          </p:nvPr>
         </p:nvPicPr>
         <p:blipFill>
           <a:blip r:embed="rId4"/>
@@ -7596,229 +6685,24 @@
         </p:blipFill>
         <p:spPr>
           <a:xfrm>
-            <a:off x="6459538" y="2092721"/>
-            <a:ext cx="5391149" cy="3369468"/>
+            <a:off x="6565265" y="1619250"/>
+            <a:ext cx="5179695" cy="4316413"/>
           </a:xfrm>
           <a:prstGeom prst="rect">
             <a:avLst/>
           </a:prstGeom>
         </p:spPr>
       </p:pic>
-      <p:sp>
-        <p:nvSpPr>
-          <p:cNvPr id="16" name="Foliennummernplatzhalter 15">
-            <a:extLst>
-              <a:ext uri="{FF2B5EF4-FFF2-40B4-BE49-F238E27FC236}">
-                <a16:creationId xmlns:a16="http://schemas.microsoft.com/office/drawing/2014/main" id="{13BD7E67-86CA-510A-9CDB-07DDA5F2BEF9}"/>
-              </a:ext>
-            </a:extLst>
-          </p:cNvPr>
-          <p:cNvSpPr>
-            <a:spLocks noGrp="1"/>
-          </p:cNvSpPr>
-          <p:nvPr>
-            <p:ph type="sldNum" sz="quarter" idx="10"/>
-          </p:nvPr>
-        </p:nvSpPr>
-        <p:spPr/>
-        <p:txBody>
-          <a:bodyPr/>
-          <a:lstStyle/>
-          <a:p>
-            <a:fld id="{80B4FCE6-DC73-4135-BC56-1F242D45A84C}" type="slidenum">
-              <a:rPr lang="de-DE" smtClean="0"/>
-              <a:t>12</a:t>
-            </a:fld>
-            <a:endParaRPr lang="de-DE"/>
-          </a:p>
-        </p:txBody>
-      </p:sp>
-      <p:sp>
-        <p:nvSpPr>
-          <p:cNvPr id="4" name="Rechteck 3">
-            <a:extLst>
-              <a:ext uri="{FF2B5EF4-FFF2-40B4-BE49-F238E27FC236}">
-                <a16:creationId xmlns:a16="http://schemas.microsoft.com/office/drawing/2014/main" id="{A62FCFAB-90C4-BC2F-0E0E-35EA9DB353D8}"/>
-              </a:ext>
-            </a:extLst>
-          </p:cNvPr>
-          <p:cNvSpPr/>
-          <p:nvPr/>
-        </p:nvSpPr>
-        <p:spPr bwMode="auto">
-          <a:xfrm>
-            <a:off x="9049407" y="5244662"/>
-            <a:ext cx="578069" cy="217527"/>
-          </a:xfrm>
-          <a:prstGeom prst="rect">
-            <a:avLst/>
-          </a:prstGeom>
-          <a:solidFill>
-            <a:schemeClr val="bg1"/>
-          </a:solidFill>
-          <a:ln w="9525" cap="flat" cmpd="sng" algn="ctr">
-            <a:noFill/>
-            <a:prstDash val="solid"/>
-            <a:round/>
-            <a:headEnd type="none" w="med" len="med"/>
-            <a:tailEnd type="none" w="med" len="med"/>
-          </a:ln>
-          <a:effectLst/>
-        </p:spPr>
-        <p:txBody>
-          <a:bodyPr vert="horz" wrap="square" lIns="91440" tIns="45720" rIns="91440" bIns="45720" numCol="1" rtlCol="0" anchor="t" anchorCtr="0" compatLnSpc="1">
-            <a:prstTxWarp prst="textNoShape">
-              <a:avLst/>
-            </a:prstTxWarp>
-          </a:bodyPr>
-          <a:lstStyle/>
-          <a:p>
-            <a:pPr marL="0" marR="0" indent="0" algn="l" defTabSz="914400" rtl="0" eaLnBrk="0" fontAlgn="base" latinLnBrk="0" hangingPunct="0">
-              <a:lnSpc>
-                <a:spcPct val="100000"/>
-              </a:lnSpc>
-              <a:spcBef>
-                <a:spcPct val="0"/>
-              </a:spcBef>
-              <a:spcAft>
-                <a:spcPct val="0"/>
-              </a:spcAft>
-              <a:buClrTx/>
-              <a:buSzTx/>
-              <a:buFontTx/>
-              <a:buNone/>
-              <a:tabLst/>
-            </a:pPr>
-            <a:endParaRPr kumimoji="0" lang="de-DE" sz="2400" b="0" i="0" u="none" strike="noStrike" cap="none" normalizeH="0" baseline="0">
-              <a:ln>
-                <a:noFill/>
-              </a:ln>
-              <a:solidFill>
-                <a:schemeClr val="tx1"/>
-              </a:solidFill>
-              <a:effectLst/>
-              <a:latin typeface="Arial" pitchFamily="-109" charset="0"/>
-              <a:ea typeface="ヒラギノ角ゴ Pro W3" pitchFamily="-109" charset="-128"/>
-              <a:cs typeface="ヒラギノ角ゴ Pro W3" pitchFamily="-109" charset="-128"/>
-            </a:endParaRPr>
-          </a:p>
-        </p:txBody>
-      </p:sp>
     </p:spTree>
     <p:extLst>
       <p:ext uri="{BB962C8B-B14F-4D97-AF65-F5344CB8AC3E}">
-        <p14:creationId xmlns:p14="http://schemas.microsoft.com/office/powerpoint/2010/main" val="1533880017"/>
+        <p14:creationId xmlns:p14="http://schemas.microsoft.com/office/powerpoint/2010/main" val="2295782215"/>
       </p:ext>
     </p:extLst>
   </p:cSld>
   <p:clrMapOvr>
     <a:masterClrMapping/>
   </p:clrMapOvr>
-  <p:timing>
-    <p:tnLst>
-      <p:par>
-        <p:cTn id="1" dur="indefinite" restart="never" nodeType="tmRoot">
-          <p:childTnLst>
-            <p:seq concurrent="1" nextAc="seek">
-              <p:cTn id="2" dur="indefinite" nodeType="mainSeq">
-                <p:childTnLst>
-                  <p:par>
-                    <p:cTn id="3" fill="hold">
-                      <p:stCondLst>
-                        <p:cond delay="indefinite"/>
-                      </p:stCondLst>
-                      <p:childTnLst>
-                        <p:par>
-                          <p:cTn id="4" fill="hold">
-                            <p:stCondLst>
-                              <p:cond delay="0"/>
-                            </p:stCondLst>
-                            <p:childTnLst>
-                              <p:par>
-                                <p:cTn id="5" presetID="1" presetClass="entr" presetSubtype="0" fill="hold" nodeType="clickEffect">
-                                  <p:stCondLst>
-                                    <p:cond delay="0"/>
-                                  </p:stCondLst>
-                                  <p:childTnLst>
-                                    <p:set>
-                                      <p:cBhvr>
-                                        <p:cTn id="6" dur="1" fill="hold">
-                                          <p:stCondLst>
-                                            <p:cond delay="0"/>
-                                          </p:stCondLst>
-                                        </p:cTn>
-                                        <p:tgtEl>
-                                          <p:spTgt spid="12"/>
-                                        </p:tgtEl>
-                                        <p:attrNameLst>
-                                          <p:attrName>style.visibility</p:attrName>
-                                        </p:attrNameLst>
-                                      </p:cBhvr>
-                                      <p:to>
-                                        <p:strVal val="visible"/>
-                                      </p:to>
-                                    </p:set>
-                                  </p:childTnLst>
-                                </p:cTn>
-                              </p:par>
-                              <p:par>
-                                <p:cTn id="7" presetID="1" presetClass="entr" presetSubtype="0" fill="hold" grpId="0" nodeType="withEffect">
-                                  <p:stCondLst>
-                                    <p:cond delay="0"/>
-                                  </p:stCondLst>
-                                  <p:childTnLst>
-                                    <p:set>
-                                      <p:cBhvr>
-                                        <p:cTn id="8" dur="1" fill="hold">
-                                          <p:stCondLst>
-                                            <p:cond delay="0"/>
-                                          </p:stCondLst>
-                                        </p:cTn>
-                                        <p:tgtEl>
-                                          <p:spTgt spid="15"/>
-                                        </p:tgtEl>
-                                        <p:attrNameLst>
-                                          <p:attrName>style.visibility</p:attrName>
-                                        </p:attrNameLst>
-                                      </p:cBhvr>
-                                      <p:to>
-                                        <p:strVal val="visible"/>
-                                      </p:to>
-                                    </p:set>
-                                  </p:childTnLst>
-                                </p:cTn>
-                              </p:par>
-                            </p:childTnLst>
-                          </p:cTn>
-                        </p:par>
-                      </p:childTnLst>
-                    </p:cTn>
-                  </p:par>
-                </p:childTnLst>
-              </p:cTn>
-              <p:prevCondLst>
-                <p:cond evt="onPrev" delay="0">
-                  <p:tgtEl>
-                    <p:sldTgt/>
-                  </p:tgtEl>
-                </p:cond>
-              </p:prevCondLst>
-              <p:nextCondLst>
-                <p:cond evt="onNext" delay="0">
-                  <p:tgtEl>
-                    <p:sldTgt/>
-                  </p:tgtEl>
-                </p:cond>
-              </p:nextCondLst>
-            </p:seq>
-          </p:childTnLst>
-        </p:cTn>
-      </p:par>
-    </p:tnLst>
-    <p:bldLst>
-      <p:bldP spid="15" grpId="0" animBg="1"/>
-    </p:bldLst>
-  </p:timing>
 </p:sld>
 </file>
 
@@ -7827,10 +6711,216 @@
   <p:cSld>
     <p:spTree>
       <p:nvGrpSpPr>
+        <p:cNvPr id="1" name=""/>
+        <p:cNvGrpSpPr/>
+        <p:nvPr/>
+      </p:nvGrpSpPr>
+      <p:grpSpPr>
+        <a:xfrm>
+          <a:off x="0" y="0"/>
+          <a:ext cx="0" cy="0"/>
+          <a:chOff x="0" y="0"/>
+          <a:chExt cx="0" cy="0"/>
+        </a:xfrm>
+      </p:grpSpPr>
+      <p:sp>
+        <p:nvSpPr>
+          <p:cNvPr id="2" name="Titel 1">
+            <a:extLst>
+              <a:ext uri="{FF2B5EF4-FFF2-40B4-BE49-F238E27FC236}">
+                <a16:creationId xmlns:a16="http://schemas.microsoft.com/office/drawing/2014/main" id="{CF324D3E-0F2F-AB0F-B173-23CAC68258D5}"/>
+              </a:ext>
+            </a:extLst>
+          </p:cNvPr>
+          <p:cNvSpPr>
+            <a:spLocks noGrp="1"/>
+          </p:cNvSpPr>
+          <p:nvPr>
+            <p:ph type="title"/>
+          </p:nvPr>
+        </p:nvSpPr>
+        <p:spPr/>
+        <p:txBody>
+          <a:bodyPr/>
+          <a:lstStyle/>
+          <a:p>
+            <a:r>
+              <a:rPr lang="de-DE" sz="3200" dirty="0"/>
+              <a:t>ROC-Kurve</a:t>
+            </a:r>
+          </a:p>
+        </p:txBody>
+      </p:sp>
+      <p:sp>
+        <p:nvSpPr>
+          <p:cNvPr id="8" name="Foliennummernplatzhalter 7">
+            <a:extLst>
+              <a:ext uri="{FF2B5EF4-FFF2-40B4-BE49-F238E27FC236}">
+                <a16:creationId xmlns:a16="http://schemas.microsoft.com/office/drawing/2014/main" id="{2F72B419-304B-ACE9-A0CD-B2C1E713F427}"/>
+              </a:ext>
+            </a:extLst>
+          </p:cNvPr>
+          <p:cNvSpPr>
+            <a:spLocks noGrp="1"/>
+          </p:cNvSpPr>
+          <p:nvPr>
+            <p:ph type="sldNum" sz="quarter" idx="10"/>
+          </p:nvPr>
+        </p:nvSpPr>
+        <p:spPr/>
+        <p:txBody>
+          <a:bodyPr/>
+          <a:lstStyle/>
+          <a:p>
+            <a:fld id="{80B4FCE6-DC73-4135-BC56-1F242D45A84C}" type="slidenum">
+              <a:rPr lang="de-DE" smtClean="0"/>
+              <a:t>13</a:t>
+            </a:fld>
+            <a:endParaRPr lang="de-DE"/>
+          </a:p>
+        </p:txBody>
+      </p:sp>
+      <p:sp>
+        <p:nvSpPr>
+          <p:cNvPr id="5" name="Fußzeilenplatzhalter 4">
+            <a:extLst>
+              <a:ext uri="{FF2B5EF4-FFF2-40B4-BE49-F238E27FC236}">
+                <a16:creationId xmlns:a16="http://schemas.microsoft.com/office/drawing/2014/main" id="{769D6D17-25F8-CC0D-9807-336DAF75B7C5}"/>
+              </a:ext>
+            </a:extLst>
+          </p:cNvPr>
+          <p:cNvSpPr>
+            <a:spLocks noGrp="1"/>
+          </p:cNvSpPr>
+          <p:nvPr>
+            <p:ph type="ftr" sz="quarter" idx="11"/>
+          </p:nvPr>
+        </p:nvSpPr>
+        <p:spPr/>
+        <p:txBody>
+          <a:bodyPr/>
+          <a:lstStyle/>
+          <a:p>
+            <a:r>
+              <a:rPr lang="de-DE"/>
+              <a:t>Materialdiagnostik: Task 4</a:t>
+            </a:r>
+            <a:endParaRPr lang="de-DE" dirty="0"/>
+          </a:p>
+        </p:txBody>
+      </p:sp>
+      <p:sp>
+        <p:nvSpPr>
+          <p:cNvPr id="3" name="Datumsplatzhalter 2">
+            <a:extLst>
+              <a:ext uri="{FF2B5EF4-FFF2-40B4-BE49-F238E27FC236}">
+                <a16:creationId xmlns:a16="http://schemas.microsoft.com/office/drawing/2014/main" id="{10DEE32E-D555-A5C0-5E56-51A5968FB217}"/>
+              </a:ext>
+            </a:extLst>
+          </p:cNvPr>
+          <p:cNvSpPr>
+            <a:spLocks noGrp="1"/>
+          </p:cNvSpPr>
+          <p:nvPr>
+            <p:ph type="dt" sz="half" idx="12"/>
+          </p:nvPr>
+        </p:nvSpPr>
+        <p:spPr/>
+        <p:txBody>
+          <a:bodyPr/>
+          <a:lstStyle/>
+          <a:p>
+            <a:r>
+              <a:rPr lang="de-DE"/>
+              <a:t>23.07.2026</a:t>
+            </a:r>
+          </a:p>
+        </p:txBody>
+      </p:sp>
+      <p:pic>
+        <p:nvPicPr>
+          <p:cNvPr id="9" name="Inhaltsplatzhalter 8">
+            <a:extLst>
+              <a:ext uri="{FF2B5EF4-FFF2-40B4-BE49-F238E27FC236}">
+                <a16:creationId xmlns:a16="http://schemas.microsoft.com/office/drawing/2014/main" id="{85A3FBC0-059F-4ED9-5BA3-D31613BCAF47}"/>
+              </a:ext>
+            </a:extLst>
+          </p:cNvPr>
+          <p:cNvPicPr>
+            <a:picLocks noGrp="1" noChangeAspect="1"/>
+          </p:cNvPicPr>
+          <p:nvPr>
+            <p:ph sz="quarter" idx="13"/>
+          </p:nvPr>
+        </p:nvPicPr>
+        <p:blipFill>
+          <a:blip r:embed="rId3"/>
+          <a:srcRect/>
+          <a:stretch/>
+        </p:blipFill>
+        <p:spPr>
+          <a:xfrm>
+            <a:off x="380634" y="1619250"/>
+            <a:ext cx="5312507" cy="4316413"/>
+          </a:xfrm>
+          <a:prstGeom prst="rect">
+            <a:avLst/>
+          </a:prstGeom>
+        </p:spPr>
+      </p:pic>
+      <p:pic>
+        <p:nvPicPr>
+          <p:cNvPr id="11" name="Inhaltsplatzhalter 10">
+            <a:extLst>
+              <a:ext uri="{FF2B5EF4-FFF2-40B4-BE49-F238E27FC236}">
+                <a16:creationId xmlns:a16="http://schemas.microsoft.com/office/drawing/2014/main" id="{F86CA4C6-9E33-E6CF-9E33-E5BDFD921EFA}"/>
+              </a:ext>
+            </a:extLst>
+          </p:cNvPr>
+          <p:cNvPicPr>
+            <a:picLocks noGrp="1" noChangeAspect="1"/>
+          </p:cNvPicPr>
+          <p:nvPr>
+            <p:ph sz="quarter" idx="14"/>
+          </p:nvPr>
+        </p:nvPicPr>
+        <p:blipFill>
+          <a:blip r:embed="rId4"/>
+          <a:srcRect/>
+          <a:stretch/>
+        </p:blipFill>
+        <p:spPr>
+          <a:xfrm>
+            <a:off x="6498859" y="1619250"/>
+            <a:ext cx="5312507" cy="4316413"/>
+          </a:xfrm>
+          <a:prstGeom prst="rect">
+            <a:avLst/>
+          </a:prstGeom>
+        </p:spPr>
+      </p:pic>
+    </p:spTree>
+    <p:extLst>
+      <p:ext uri="{BB962C8B-B14F-4D97-AF65-F5344CB8AC3E}">
+        <p14:creationId xmlns:p14="http://schemas.microsoft.com/office/powerpoint/2010/main" val="4106251163"/>
+      </p:ext>
+    </p:extLst>
+  </p:cSld>
+  <p:clrMapOvr>
+    <a:masterClrMapping/>
+  </p:clrMapOvr>
+</p:sld>
+</file>
+
+<file path=ppt/slides/slide14.xml><?xml version="1.0" encoding="utf-8"?>
+<p:sld xmlns:a="http://schemas.openxmlformats.org/drawingml/2006/main" xmlns:r="http://schemas.openxmlformats.org/officeDocument/2006/relationships" xmlns:p="http://schemas.openxmlformats.org/presentationml/2006/main">
+  <p:cSld>
+    <p:spTree>
+      <p:nvGrpSpPr>
         <p:cNvPr id="1" name="">
           <a:extLst>
             <a:ext uri="{FF2B5EF4-FFF2-40B4-BE49-F238E27FC236}">
-              <a16:creationId xmlns:a16="http://schemas.microsoft.com/office/drawing/2014/main" id="{36E692F4-4654-12E9-0B81-867C770DCA55}"/>
+              <a16:creationId xmlns:a16="http://schemas.microsoft.com/office/drawing/2014/main" id="{7AF2FAD6-4627-9F34-DB87-1A86966F8E93}"/>
             </a:ext>
           </a:extLst>
         </p:cNvPr>
@@ -7847,114 +6937,10 @@
       </p:grpSpPr>
       <p:sp>
         <p:nvSpPr>
-          <p:cNvPr id="13" name="Rechteck: eine Ecke abgerundet 12">
-            <a:extLst>
-              <a:ext uri="{FF2B5EF4-FFF2-40B4-BE49-F238E27FC236}">
-                <a16:creationId xmlns:a16="http://schemas.microsoft.com/office/drawing/2014/main" id="{D05955E5-D0B7-9962-B4D8-6BCD6AE466DA}"/>
-              </a:ext>
-            </a:extLst>
-          </p:cNvPr>
-          <p:cNvSpPr/>
-          <p:nvPr/>
-        </p:nvSpPr>
-        <p:spPr bwMode="auto">
-          <a:xfrm>
-            <a:off x="6459536" y="1740625"/>
-            <a:ext cx="750559" cy="704193"/>
-          </a:xfrm>
-          <a:prstGeom prst="round1Rect">
-            <a:avLst/>
-          </a:prstGeom>
-          <a:solidFill>
-            <a:schemeClr val="bg2">
-              <a:lumMod val="40000"/>
-              <a:lumOff val="60000"/>
-            </a:schemeClr>
-          </a:solidFill>
-          <a:ln w="9525" cap="flat" cmpd="sng" algn="ctr">
-            <a:noFill/>
-            <a:prstDash val="solid"/>
-            <a:round/>
-            <a:headEnd type="none" w="med" len="med"/>
-            <a:tailEnd type="none" w="med" len="med"/>
-          </a:ln>
-          <a:effectLst/>
-        </p:spPr>
-        <p:txBody>
-          <a:bodyPr vert="horz" wrap="square" lIns="91440" tIns="45720" rIns="91440" bIns="45720" numCol="1" rtlCol="0" anchor="t" anchorCtr="0" compatLnSpc="1">
-            <a:prstTxWarp prst="textNoShape">
-              <a:avLst/>
-            </a:prstTxWarp>
-          </a:bodyPr>
-          <a:lstStyle/>
-          <a:p>
-            <a:pPr marL="0" marR="0" indent="0" algn="l" defTabSz="914400" rtl="0" eaLnBrk="0" fontAlgn="base" latinLnBrk="0" hangingPunct="0">
-              <a:lnSpc>
-                <a:spcPct val="100000"/>
-              </a:lnSpc>
-              <a:spcBef>
-                <a:spcPct val="0"/>
-              </a:spcBef>
-              <a:spcAft>
-                <a:spcPct val="0"/>
-              </a:spcAft>
-              <a:buClrTx/>
-              <a:buSzTx/>
-              <a:buFontTx/>
-              <a:buNone/>
-              <a:tabLst/>
-            </a:pPr>
-            <a:r>
-              <a:rPr kumimoji="0" lang="de-DE" sz="1800" b="0" i="0" u="none" strike="noStrike" cap="none" normalizeH="0" baseline="0" dirty="0" err="1">
-                <a:ln>
-                  <a:noFill/>
-                </a:ln>
-                <a:solidFill>
-                  <a:schemeClr val="tx1"/>
-                </a:solidFill>
-                <a:effectLst/>
-                <a:latin typeface="Arial" pitchFamily="-109" charset="0"/>
-                <a:ea typeface="ヒラギノ角ゴ Pro W3" pitchFamily="-109" charset="-128"/>
-                <a:cs typeface="ヒラギノ角ゴ Pro W3" pitchFamily="-109" charset="-128"/>
-              </a:rPr>
-              <a:t>Ch</a:t>
-            </a:r>
-            <a:r>
-              <a:rPr kumimoji="0" lang="de-DE" sz="1800" b="0" i="0" u="none" strike="noStrike" cap="none" normalizeH="0" baseline="0" dirty="0">
-                <a:ln>
-                  <a:noFill/>
-                </a:ln>
-                <a:solidFill>
-                  <a:schemeClr val="tx1"/>
-                </a:solidFill>
-                <a:effectLst/>
-                <a:latin typeface="Arial" pitchFamily="-109" charset="0"/>
-                <a:ea typeface="ヒラギノ角ゴ Pro W3" pitchFamily="-109" charset="-128"/>
-                <a:cs typeface="ヒラギノ角ゴ Pro W3" pitchFamily="-109" charset="-128"/>
-              </a:rPr>
-              <a:t> 1</a:t>
-            </a:r>
-            <a:endParaRPr kumimoji="0" lang="de-DE" sz="2400" b="0" i="0" u="none" strike="noStrike" cap="none" normalizeH="0" baseline="0" dirty="0">
-              <a:ln>
-                <a:noFill/>
-              </a:ln>
-              <a:solidFill>
-                <a:schemeClr val="tx1"/>
-              </a:solidFill>
-              <a:effectLst/>
-              <a:latin typeface="Arial" pitchFamily="-109" charset="0"/>
-              <a:ea typeface="ヒラギノ角ゴ Pro W3" pitchFamily="-109" charset="-128"/>
-              <a:cs typeface="ヒラギノ角ゴ Pro W3" pitchFamily="-109" charset="-128"/>
-            </a:endParaRPr>
-          </a:p>
-        </p:txBody>
-      </p:sp>
-      <p:sp>
-        <p:nvSpPr>
           <p:cNvPr id="2" name="Titel 1">
             <a:extLst>
               <a:ext uri="{FF2B5EF4-FFF2-40B4-BE49-F238E27FC236}">
-                <a16:creationId xmlns:a16="http://schemas.microsoft.com/office/drawing/2014/main" id="{6EABEA5B-6080-FBE9-6DA6-10DB7E45DD2D}"/>
+                <a16:creationId xmlns:a16="http://schemas.microsoft.com/office/drawing/2014/main" id="{6603F7AB-64A5-5BEA-9CFA-3394BAF2F33D}"/>
               </a:ext>
             </a:extLst>
           </p:cNvPr>
@@ -7972,13 +6958,37 @@
           <a:p>
             <a:r>
               <a:rPr lang="de-DE" sz="3200" dirty="0"/>
-              <a:t>Learning </a:t>
-            </a:r>
-            <a:r>
-              <a:rPr lang="de-DE" sz="3200" dirty="0" err="1"/>
-              <a:t>Curves</a:t>
-            </a:r>
-            <a:endParaRPr lang="de-DE" dirty="0"/>
+              <a:t>ROC-Kurve</a:t>
+            </a:r>
+          </a:p>
+        </p:txBody>
+      </p:sp>
+      <p:sp>
+        <p:nvSpPr>
+          <p:cNvPr id="8" name="Foliennummernplatzhalter 7">
+            <a:extLst>
+              <a:ext uri="{FF2B5EF4-FFF2-40B4-BE49-F238E27FC236}">
+                <a16:creationId xmlns:a16="http://schemas.microsoft.com/office/drawing/2014/main" id="{2A1B6DE5-3B0D-93F4-35C4-FCDF73FBA84A}"/>
+              </a:ext>
+            </a:extLst>
+          </p:cNvPr>
+          <p:cNvSpPr>
+            <a:spLocks noGrp="1"/>
+          </p:cNvSpPr>
+          <p:nvPr>
+            <p:ph type="sldNum" sz="quarter" idx="10"/>
+          </p:nvPr>
+        </p:nvSpPr>
+        <p:spPr/>
+        <p:txBody>
+          <a:bodyPr/>
+          <a:lstStyle/>
+          <a:p>
+            <a:fld id="{80B4FCE6-DC73-4135-BC56-1F242D45A84C}" type="slidenum">
+              <a:rPr lang="de-DE" smtClean="0"/>
+              <a:t>14</a:t>
+            </a:fld>
+            <a:endParaRPr lang="de-DE"/>
           </a:p>
         </p:txBody>
       </p:sp>
@@ -7987,7 +6997,7 @@
           <p:cNvPr id="5" name="Fußzeilenplatzhalter 4">
             <a:extLst>
               <a:ext uri="{FF2B5EF4-FFF2-40B4-BE49-F238E27FC236}">
-                <a16:creationId xmlns:a16="http://schemas.microsoft.com/office/drawing/2014/main" id="{C21741FB-233F-9B62-BDE5-78CC9DF1F194}"/>
+                <a16:creationId xmlns:a16="http://schemas.microsoft.com/office/drawing/2014/main" id="{DE5536E9-606F-C983-1408-2DE58604BA76}"/>
               </a:ext>
             </a:extLst>
           </p:cNvPr>
@@ -8016,7 +7026,7 @@
           <p:cNvPr id="3" name="Datumsplatzhalter 2">
             <a:extLst>
               <a:ext uri="{FF2B5EF4-FFF2-40B4-BE49-F238E27FC236}">
-                <a16:creationId xmlns:a16="http://schemas.microsoft.com/office/drawing/2014/main" id="{0F533060-8BC0-E7A8-47E6-F36742E1101E}"/>
+                <a16:creationId xmlns:a16="http://schemas.microsoft.com/office/drawing/2014/main" id="{95A6DE22-34B6-1D47-836E-ECFCAA83236B}"/>
               </a:ext>
             </a:extLst>
           </p:cNvPr>
@@ -8039,87 +7049,12 @@
           </a:p>
         </p:txBody>
       </p:sp>
-      <p:sp>
-        <p:nvSpPr>
-          <p:cNvPr id="8" name="Inhaltsplatzhalter 7">
-            <a:extLst>
-              <a:ext uri="{FF2B5EF4-FFF2-40B4-BE49-F238E27FC236}">
-                <a16:creationId xmlns:a16="http://schemas.microsoft.com/office/drawing/2014/main" id="{66F2D5E8-ACE1-A626-1A4C-3BEEED0736C2}"/>
-              </a:ext>
-            </a:extLst>
-          </p:cNvPr>
-          <p:cNvSpPr>
-            <a:spLocks noGrp="1"/>
-          </p:cNvSpPr>
-          <p:nvPr>
-            <p:ph sz="quarter" idx="13"/>
-          </p:nvPr>
-        </p:nvSpPr>
-        <p:spPr/>
-        <p:txBody>
-          <a:bodyPr/>
-          <a:lstStyle/>
-          <a:p>
-            <a:pPr>
-              <a:buFont typeface="Arial" panose="020B0604020202020204" pitchFamily="34" charset="0"/>
-              <a:buChar char="•"/>
-            </a:pPr>
-            <a:r>
-              <a:rPr lang="de-DE" dirty="0"/>
-              <a:t>Train- und Dev-Score pro Trainingsmenge</a:t>
-            </a:r>
-          </a:p>
-          <a:p>
-            <a:pPr>
-              <a:buFont typeface="Arial" panose="020B0604020202020204" pitchFamily="34" charset="0"/>
-              <a:buChar char="•"/>
-            </a:pPr>
-            <a:r>
-              <a:rPr lang="de-DE" dirty="0"/>
-              <a:t>Kurven zeigen Datenbedarf des Modells</a:t>
-            </a:r>
-          </a:p>
-          <a:p>
-            <a:pPr>
-              <a:buFont typeface="Arial" panose="020B0604020202020204" pitchFamily="34" charset="0"/>
-              <a:buChar char="•"/>
-            </a:pPr>
-            <a:r>
-              <a:rPr lang="de-DE" dirty="0"/>
-              <a:t>Bereits kleine Trainingsmenge trennt fast perfekt</a:t>
-            </a:r>
-          </a:p>
-          <a:p>
-            <a:pPr>
-              <a:buFont typeface="Arial" panose="020B0604020202020204" pitchFamily="34" charset="0"/>
-              <a:buChar char="•"/>
-            </a:pPr>
-            <a:r>
-              <a:rPr lang="de-DE" dirty="0"/>
-              <a:t>Ch1 erreicht früh perfekte Dev-Werte</a:t>
-            </a:r>
-          </a:p>
-          <a:p>
-            <a:pPr>
-              <a:buFont typeface="Arial" panose="020B0604020202020204" pitchFamily="34" charset="0"/>
-              <a:buChar char="•"/>
-            </a:pPr>
-            <a:r>
-              <a:rPr lang="de-DE" dirty="0"/>
-              <a:t>Ch2 braucht im aktuellen Split die volle Trainingsmenge für perfekte Dev-Werte</a:t>
-            </a:r>
-          </a:p>
-          <a:p>
-            <a:endParaRPr lang="de-DE" dirty="0"/>
-          </a:p>
-        </p:txBody>
-      </p:sp>
       <p:pic>
         <p:nvPicPr>
-          <p:cNvPr id="11" name="Inhaltsplatzhalter 10">
-            <a:extLst>
-              <a:ext uri="{FF2B5EF4-FFF2-40B4-BE49-F238E27FC236}">
-                <a16:creationId xmlns:a16="http://schemas.microsoft.com/office/drawing/2014/main" id="{4DF0D70F-DBE3-307B-70EE-0B255331894E}"/>
+          <p:cNvPr id="9" name="Inhaltsplatzhalter 8">
+            <a:extLst>
+              <a:ext uri="{FF2B5EF4-FFF2-40B4-BE49-F238E27FC236}">
+                <a16:creationId xmlns:a16="http://schemas.microsoft.com/office/drawing/2014/main" id="{F1620877-DE8F-42AA-70E2-6F8FFF497514}"/>
               </a:ext>
             </a:extLst>
           </p:cNvPr>
@@ -8127,7 +7062,7 @@
             <a:picLocks noGrp="1" noChangeAspect="1"/>
           </p:cNvPicPr>
           <p:nvPr>
-            <p:ph sz="quarter" idx="14"/>
+            <p:ph sz="quarter" idx="13"/>
           </p:nvPr>
         </p:nvPicPr>
         <p:blipFill>
@@ -8137,131 +7072,29 @@
         </p:blipFill>
         <p:spPr>
           <a:xfrm>
-            <a:off x="6459538" y="2092722"/>
-            <a:ext cx="5391150" cy="3369468"/>
+            <a:off x="380634" y="1619250"/>
+            <a:ext cx="5312507" cy="4316413"/>
           </a:xfrm>
           <a:prstGeom prst="rect">
             <a:avLst/>
           </a:prstGeom>
         </p:spPr>
       </p:pic>
-      <p:sp>
-        <p:nvSpPr>
-          <p:cNvPr id="15" name="Rechteck: eine Ecke abgerundet 14">
-            <a:extLst>
-              <a:ext uri="{FF2B5EF4-FFF2-40B4-BE49-F238E27FC236}">
-                <a16:creationId xmlns:a16="http://schemas.microsoft.com/office/drawing/2014/main" id="{221FC070-FA1A-089D-1456-55000A5089FD}"/>
-              </a:ext>
-            </a:extLst>
-          </p:cNvPr>
-          <p:cNvSpPr/>
-          <p:nvPr/>
-        </p:nvSpPr>
-        <p:spPr bwMode="auto">
-          <a:xfrm>
-            <a:off x="6459535" y="1740625"/>
-            <a:ext cx="750559" cy="704193"/>
-          </a:xfrm>
-          <a:prstGeom prst="round1Rect">
-            <a:avLst/>
-          </a:prstGeom>
-          <a:solidFill>
-            <a:schemeClr val="bg2">
-              <a:lumMod val="40000"/>
-              <a:lumOff val="60000"/>
-            </a:schemeClr>
-          </a:solidFill>
-          <a:ln w="9525" cap="flat" cmpd="sng" algn="ctr">
-            <a:noFill/>
-            <a:prstDash val="solid"/>
-            <a:round/>
-            <a:headEnd type="none" w="med" len="med"/>
-            <a:tailEnd type="none" w="med" len="med"/>
-          </a:ln>
-          <a:effectLst/>
-        </p:spPr>
-        <p:txBody>
-          <a:bodyPr vert="horz" wrap="square" lIns="91440" tIns="45720" rIns="91440" bIns="45720" numCol="1" rtlCol="0" anchor="t" anchorCtr="0" compatLnSpc="1">
-            <a:prstTxWarp prst="textNoShape">
-              <a:avLst/>
-            </a:prstTxWarp>
-          </a:bodyPr>
-          <a:lstStyle/>
-          <a:p>
-            <a:pPr marL="0" marR="0" indent="0" algn="l" defTabSz="914400" rtl="0" eaLnBrk="0" fontAlgn="base" latinLnBrk="0" hangingPunct="0">
-              <a:lnSpc>
-                <a:spcPct val="100000"/>
-              </a:lnSpc>
-              <a:spcBef>
-                <a:spcPct val="0"/>
-              </a:spcBef>
-              <a:spcAft>
-                <a:spcPct val="0"/>
-              </a:spcAft>
-              <a:buClrTx/>
-              <a:buSzTx/>
-              <a:buFontTx/>
-              <a:buNone/>
-              <a:tabLst/>
-            </a:pPr>
-            <a:r>
-              <a:rPr kumimoji="0" lang="de-DE" sz="1800" b="0" i="0" u="none" strike="noStrike" cap="none" normalizeH="0" baseline="0" dirty="0" err="1">
-                <a:ln>
-                  <a:noFill/>
-                </a:ln>
-                <a:solidFill>
-                  <a:schemeClr val="tx1"/>
-                </a:solidFill>
-                <a:effectLst/>
-                <a:latin typeface="Arial" pitchFamily="-109" charset="0"/>
-                <a:ea typeface="ヒラギノ角ゴ Pro W3" pitchFamily="-109" charset="-128"/>
-                <a:cs typeface="ヒラギノ角ゴ Pro W3" pitchFamily="-109" charset="-128"/>
-              </a:rPr>
-              <a:t>Ch</a:t>
-            </a:r>
-            <a:r>
-              <a:rPr kumimoji="0" lang="de-DE" sz="1800" b="0" i="0" u="none" strike="noStrike" cap="none" normalizeH="0" baseline="0" dirty="0">
-                <a:ln>
-                  <a:noFill/>
-                </a:ln>
-                <a:solidFill>
-                  <a:schemeClr val="tx1"/>
-                </a:solidFill>
-                <a:effectLst/>
-                <a:latin typeface="Arial" pitchFamily="-109" charset="0"/>
-                <a:ea typeface="ヒラギノ角ゴ Pro W3" pitchFamily="-109" charset="-128"/>
-                <a:cs typeface="ヒラギノ角ゴ Pro W3" pitchFamily="-109" charset="-128"/>
-              </a:rPr>
-              <a:t> 2</a:t>
-            </a:r>
-            <a:endParaRPr kumimoji="0" lang="de-DE" sz="2400" b="0" i="0" u="none" strike="noStrike" cap="none" normalizeH="0" baseline="0" dirty="0">
-              <a:ln>
-                <a:noFill/>
-              </a:ln>
-              <a:solidFill>
-                <a:schemeClr val="tx1"/>
-              </a:solidFill>
-              <a:effectLst/>
-              <a:latin typeface="Arial" pitchFamily="-109" charset="0"/>
-              <a:ea typeface="ヒラギノ角ゴ Pro W3" pitchFamily="-109" charset="-128"/>
-              <a:cs typeface="ヒラギノ角ゴ Pro W3" pitchFamily="-109" charset="-128"/>
-            </a:endParaRPr>
-          </a:p>
-        </p:txBody>
-      </p:sp>
       <p:pic>
         <p:nvPicPr>
-          <p:cNvPr id="12" name="Inhaltsplatzhalter 10">
-            <a:extLst>
-              <a:ext uri="{FF2B5EF4-FFF2-40B4-BE49-F238E27FC236}">
-                <a16:creationId xmlns:a16="http://schemas.microsoft.com/office/drawing/2014/main" id="{B661D436-2233-506D-7A2F-E10C843CD71E}"/>
+          <p:cNvPr id="11" name="Inhaltsplatzhalter 10">
+            <a:extLst>
+              <a:ext uri="{FF2B5EF4-FFF2-40B4-BE49-F238E27FC236}">
+                <a16:creationId xmlns:a16="http://schemas.microsoft.com/office/drawing/2014/main" id="{C7057071-71C8-AF87-8458-AFDB1C5F56A2}"/>
               </a:ext>
             </a:extLst>
           </p:cNvPr>
           <p:cNvPicPr>
-            <a:picLocks noChangeAspect="1"/>
+            <a:picLocks noGrp="1" noChangeAspect="1"/>
           </p:cNvPicPr>
-          <p:nvPr/>
+          <p:nvPr>
+            <p:ph sz="quarter" idx="14"/>
+          </p:nvPr>
         </p:nvPicPr>
         <p:blipFill>
           <a:blip r:embed="rId4"/>
@@ -8270,405 +7103,18 @@
         </p:blipFill>
         <p:spPr>
           <a:xfrm>
-            <a:off x="6459538" y="2092721"/>
-            <a:ext cx="5391149" cy="3369467"/>
+            <a:off x="6498859" y="1619250"/>
+            <a:ext cx="5312507" cy="4316413"/>
           </a:xfrm>
           <a:prstGeom prst="rect">
             <a:avLst/>
           </a:prstGeom>
         </p:spPr>
       </p:pic>
-      <p:sp>
-        <p:nvSpPr>
-          <p:cNvPr id="6" name="Foliennummernplatzhalter 5">
-            <a:extLst>
-              <a:ext uri="{FF2B5EF4-FFF2-40B4-BE49-F238E27FC236}">
-                <a16:creationId xmlns:a16="http://schemas.microsoft.com/office/drawing/2014/main" id="{FDDD861D-7BC1-A08C-170C-81699AAD47C7}"/>
-              </a:ext>
-            </a:extLst>
-          </p:cNvPr>
-          <p:cNvSpPr>
-            <a:spLocks noGrp="1"/>
-          </p:cNvSpPr>
-          <p:nvPr>
-            <p:ph type="sldNum" sz="quarter" idx="10"/>
-          </p:nvPr>
-        </p:nvSpPr>
-        <p:spPr/>
-        <p:txBody>
-          <a:bodyPr/>
-          <a:lstStyle/>
-          <a:p>
-            <a:fld id="{80B4FCE6-DC73-4135-BC56-1F242D45A84C}" type="slidenum">
-              <a:rPr lang="de-DE" smtClean="0"/>
-              <a:t>13</a:t>
-            </a:fld>
-            <a:endParaRPr lang="de-DE"/>
-          </a:p>
-        </p:txBody>
-      </p:sp>
     </p:spTree>
     <p:extLst>
       <p:ext uri="{BB962C8B-B14F-4D97-AF65-F5344CB8AC3E}">
-        <p14:creationId xmlns:p14="http://schemas.microsoft.com/office/powerpoint/2010/main" val="3382246788"/>
-      </p:ext>
-    </p:extLst>
-  </p:cSld>
-  <p:clrMapOvr>
-    <a:masterClrMapping/>
-  </p:clrMapOvr>
-  <p:timing>
-    <p:tnLst>
-      <p:par>
-        <p:cTn id="1" dur="indefinite" restart="never" nodeType="tmRoot">
-          <p:childTnLst>
-            <p:seq concurrent="1" nextAc="seek">
-              <p:cTn id="2" dur="indefinite" nodeType="mainSeq">
-                <p:childTnLst>
-                  <p:par>
-                    <p:cTn id="3" fill="hold">
-                      <p:stCondLst>
-                        <p:cond delay="indefinite"/>
-                      </p:stCondLst>
-                      <p:childTnLst>
-                        <p:par>
-                          <p:cTn id="4" fill="hold">
-                            <p:stCondLst>
-                              <p:cond delay="0"/>
-                            </p:stCondLst>
-                            <p:childTnLst>
-                              <p:par>
-                                <p:cTn id="5" presetID="1" presetClass="entr" presetSubtype="0" fill="hold" nodeType="clickEffect">
-                                  <p:stCondLst>
-                                    <p:cond delay="0"/>
-                                  </p:stCondLst>
-                                  <p:childTnLst>
-                                    <p:set>
-                                      <p:cBhvr>
-                                        <p:cTn id="6" dur="1" fill="hold">
-                                          <p:stCondLst>
-                                            <p:cond delay="0"/>
-                                          </p:stCondLst>
-                                        </p:cTn>
-                                        <p:tgtEl>
-                                          <p:spTgt spid="12"/>
-                                        </p:tgtEl>
-                                        <p:attrNameLst>
-                                          <p:attrName>style.visibility</p:attrName>
-                                        </p:attrNameLst>
-                                      </p:cBhvr>
-                                      <p:to>
-                                        <p:strVal val="visible"/>
-                                      </p:to>
-                                    </p:set>
-                                  </p:childTnLst>
-                                </p:cTn>
-                              </p:par>
-                              <p:par>
-                                <p:cTn id="7" presetID="1" presetClass="entr" presetSubtype="0" fill="hold" grpId="0" nodeType="withEffect">
-                                  <p:stCondLst>
-                                    <p:cond delay="0"/>
-                                  </p:stCondLst>
-                                  <p:childTnLst>
-                                    <p:set>
-                                      <p:cBhvr>
-                                        <p:cTn id="8" dur="1" fill="hold">
-                                          <p:stCondLst>
-                                            <p:cond delay="0"/>
-                                          </p:stCondLst>
-                                        </p:cTn>
-                                        <p:tgtEl>
-                                          <p:spTgt spid="15"/>
-                                        </p:tgtEl>
-                                        <p:attrNameLst>
-                                          <p:attrName>style.visibility</p:attrName>
-                                        </p:attrNameLst>
-                                      </p:cBhvr>
-                                      <p:to>
-                                        <p:strVal val="visible"/>
-                                      </p:to>
-                                    </p:set>
-                                  </p:childTnLst>
-                                </p:cTn>
-                              </p:par>
-                            </p:childTnLst>
-                          </p:cTn>
-                        </p:par>
-                      </p:childTnLst>
-                    </p:cTn>
-                  </p:par>
-                </p:childTnLst>
-              </p:cTn>
-              <p:prevCondLst>
-                <p:cond evt="onPrev" delay="0">
-                  <p:tgtEl>
-                    <p:sldTgt/>
-                  </p:tgtEl>
-                </p:cond>
-              </p:prevCondLst>
-              <p:nextCondLst>
-                <p:cond evt="onNext" delay="0">
-                  <p:tgtEl>
-                    <p:sldTgt/>
-                  </p:tgtEl>
-                </p:cond>
-              </p:nextCondLst>
-            </p:seq>
-          </p:childTnLst>
-        </p:cTn>
-      </p:par>
-    </p:tnLst>
-    <p:bldLst>
-      <p:bldP spid="15" grpId="0" animBg="1"/>
-    </p:bldLst>
-  </p:timing>
-</p:sld>
-</file>
-
-<file path=ppt/slides/slide14.xml><?xml version="1.0" encoding="utf-8"?>
-<p:sld xmlns:a="http://schemas.openxmlformats.org/drawingml/2006/main" xmlns:r="http://schemas.openxmlformats.org/officeDocument/2006/relationships" xmlns:p="http://schemas.openxmlformats.org/presentationml/2006/main">
-  <p:cSld>
-    <p:spTree>
-      <p:nvGrpSpPr>
-        <p:cNvPr id="1" name="">
-          <a:extLst>
-            <a:ext uri="{FF2B5EF4-FFF2-40B4-BE49-F238E27FC236}">
-              <a16:creationId xmlns:a16="http://schemas.microsoft.com/office/drawing/2014/main" id="{5B1114C7-DE47-0944-DF0C-B611520E41A2}"/>
-            </a:ext>
-          </a:extLst>
-        </p:cNvPr>
-        <p:cNvGrpSpPr/>
-        <p:nvPr/>
-      </p:nvGrpSpPr>
-      <p:grpSpPr>
-        <a:xfrm>
-          <a:off x="0" y="0"/>
-          <a:ext cx="0" cy="0"/>
-          <a:chOff x="0" y="0"/>
-          <a:chExt cx="0" cy="0"/>
-        </a:xfrm>
-      </p:grpSpPr>
-      <p:sp>
-        <p:nvSpPr>
-          <p:cNvPr id="2" name="Titel 1">
-            <a:extLst>
-              <a:ext uri="{FF2B5EF4-FFF2-40B4-BE49-F238E27FC236}">
-                <a16:creationId xmlns:a16="http://schemas.microsoft.com/office/drawing/2014/main" id="{77D077AA-8134-0C8E-A018-B8169899F662}"/>
-              </a:ext>
-            </a:extLst>
-          </p:cNvPr>
-          <p:cNvSpPr>
-            <a:spLocks noGrp="1"/>
-          </p:cNvSpPr>
-          <p:nvPr>
-            <p:ph type="title"/>
-          </p:nvPr>
-        </p:nvSpPr>
-        <p:spPr>
-          <a:xfrm>
-            <a:off x="341811" y="567600"/>
-            <a:ext cx="5753662" cy="706030"/>
-          </a:xfrm>
-        </p:spPr>
-        <p:txBody>
-          <a:bodyPr/>
-          <a:lstStyle/>
-          <a:p>
-            <a:r>
-              <a:rPr lang="de-DE" sz="3200" dirty="0"/>
-              <a:t>Entscheidungsgrenze im Training</a:t>
-            </a:r>
-            <a:endParaRPr lang="de-DE" dirty="0"/>
-          </a:p>
-        </p:txBody>
-      </p:sp>
-      <p:sp>
-        <p:nvSpPr>
-          <p:cNvPr id="7" name="Fußzeilenplatzhalter 6">
-            <a:extLst>
-              <a:ext uri="{FF2B5EF4-FFF2-40B4-BE49-F238E27FC236}">
-                <a16:creationId xmlns:a16="http://schemas.microsoft.com/office/drawing/2014/main" id="{577BF275-4CD1-7013-A879-C0A89D49357B}"/>
-              </a:ext>
-            </a:extLst>
-          </p:cNvPr>
-          <p:cNvSpPr>
-            <a:spLocks noGrp="1"/>
-          </p:cNvSpPr>
-          <p:nvPr>
-            <p:ph type="ftr" sz="quarter" idx="11"/>
-          </p:nvPr>
-        </p:nvSpPr>
-        <p:spPr/>
-        <p:txBody>
-          <a:bodyPr/>
-          <a:lstStyle/>
-          <a:p>
-            <a:r>
-              <a:rPr lang="de-DE"/>
-              <a:t>Materialdiagnostik: Task 4</a:t>
-            </a:r>
-            <a:endParaRPr lang="de-DE" dirty="0"/>
-          </a:p>
-        </p:txBody>
-      </p:sp>
-      <p:sp>
-        <p:nvSpPr>
-          <p:cNvPr id="6" name="Datumsplatzhalter 5">
-            <a:extLst>
-              <a:ext uri="{FF2B5EF4-FFF2-40B4-BE49-F238E27FC236}">
-                <a16:creationId xmlns:a16="http://schemas.microsoft.com/office/drawing/2014/main" id="{71B4C461-0198-1068-BC96-763CE6D3F62D}"/>
-              </a:ext>
-            </a:extLst>
-          </p:cNvPr>
-          <p:cNvSpPr>
-            <a:spLocks noGrp="1"/>
-          </p:cNvSpPr>
-          <p:nvPr>
-            <p:ph type="dt" sz="half" idx="12"/>
-          </p:nvPr>
-        </p:nvSpPr>
-        <p:spPr/>
-        <p:txBody>
-          <a:bodyPr/>
-          <a:lstStyle/>
-          <a:p>
-            <a:r>
-              <a:rPr lang="de-DE"/>
-              <a:t>23.07.2026</a:t>
-            </a:r>
-          </a:p>
-        </p:txBody>
-      </p:sp>
-      <p:sp>
-        <p:nvSpPr>
-          <p:cNvPr id="3" name="Inhaltsplatzhalter 2">
-            <a:extLst>
-              <a:ext uri="{FF2B5EF4-FFF2-40B4-BE49-F238E27FC236}">
-                <a16:creationId xmlns:a16="http://schemas.microsoft.com/office/drawing/2014/main" id="{E2941D31-2190-EAE9-0CC8-F35EF0683372}"/>
-              </a:ext>
-            </a:extLst>
-          </p:cNvPr>
-          <p:cNvSpPr>
-            <a:spLocks noGrp="1"/>
-          </p:cNvSpPr>
-          <p:nvPr>
-            <p:ph sz="quarter" idx="13"/>
-          </p:nvPr>
-        </p:nvSpPr>
-        <p:spPr/>
-        <p:txBody>
-          <a:bodyPr/>
-          <a:lstStyle/>
-          <a:p>
-            <a:pPr>
-              <a:buFont typeface="Arial" panose="020B0604020202020204" pitchFamily="34" charset="0"/>
-              <a:buChar char="•"/>
-            </a:pPr>
-            <a:r>
-              <a:rPr lang="de-DE" dirty="0"/>
-              <a:t>Punkte: Trainingsdaten in 2D-PCA-Projektion</a:t>
-            </a:r>
-          </a:p>
-          <a:p>
-            <a:pPr>
-              <a:buFont typeface="Arial" panose="020B0604020202020204" pitchFamily="34" charset="0"/>
-              <a:buChar char="•"/>
-            </a:pPr>
-            <a:r>
-              <a:rPr lang="de-DE" dirty="0"/>
-              <a:t>Linie: lineare Entscheidungsgrenze in der PCA-Ebene</a:t>
-            </a:r>
-          </a:p>
-          <a:p>
-            <a:pPr>
-              <a:buFont typeface="Arial" panose="020B0604020202020204" pitchFamily="34" charset="0"/>
-              <a:buChar char="•"/>
-            </a:pPr>
-            <a:r>
-              <a:rPr lang="de-DE" dirty="0"/>
-              <a:t>Rot: beschädigt `0`</a:t>
-            </a:r>
-          </a:p>
-          <a:p>
-            <a:pPr>
-              <a:buFont typeface="Arial" panose="020B0604020202020204" pitchFamily="34" charset="0"/>
-              <a:buChar char="•"/>
-            </a:pPr>
-            <a:r>
-              <a:rPr lang="de-DE" dirty="0"/>
-              <a:t>Blau: gut `1`</a:t>
-            </a:r>
-          </a:p>
-          <a:p>
-            <a:endParaRPr lang="de-DE" dirty="0"/>
-          </a:p>
-        </p:txBody>
-      </p:sp>
-      <p:pic>
-        <p:nvPicPr>
-          <p:cNvPr id="10" name="Inhaltsplatzhalter 9">
-            <a:extLst>
-              <a:ext uri="{FF2B5EF4-FFF2-40B4-BE49-F238E27FC236}">
-                <a16:creationId xmlns:a16="http://schemas.microsoft.com/office/drawing/2014/main" id="{D4CDC262-EB45-F7AD-7318-38B1E600D84C}"/>
-              </a:ext>
-            </a:extLst>
-          </p:cNvPr>
-          <p:cNvPicPr>
-            <a:picLocks noGrp="1" noChangeAspect="1"/>
-          </p:cNvPicPr>
-          <p:nvPr>
-            <p:ph sz="quarter" idx="14"/>
-          </p:nvPr>
-        </p:nvPicPr>
-        <p:blipFill>
-          <a:blip r:embed="rId3"/>
-          <a:stretch>
-            <a:fillRect/>
-          </a:stretch>
-        </p:blipFill>
-        <p:spPr>
-          <a:xfrm>
-            <a:off x="6095473" y="1755774"/>
-            <a:ext cx="5755215" cy="4316411"/>
-          </a:xfrm>
-          <a:prstGeom prst="rect">
-            <a:avLst/>
-          </a:prstGeom>
-        </p:spPr>
-      </p:pic>
-      <p:sp>
-        <p:nvSpPr>
-          <p:cNvPr id="11" name="Foliennummernplatzhalter 10">
-            <a:extLst>
-              <a:ext uri="{FF2B5EF4-FFF2-40B4-BE49-F238E27FC236}">
-                <a16:creationId xmlns:a16="http://schemas.microsoft.com/office/drawing/2014/main" id="{58E06D0E-653E-42A5-34F5-C3CC178A4CE6}"/>
-              </a:ext>
-            </a:extLst>
-          </p:cNvPr>
-          <p:cNvSpPr>
-            <a:spLocks noGrp="1"/>
-          </p:cNvSpPr>
-          <p:nvPr>
-            <p:ph type="sldNum" sz="quarter" idx="10"/>
-          </p:nvPr>
-        </p:nvSpPr>
-        <p:spPr/>
-        <p:txBody>
-          <a:bodyPr/>
-          <a:lstStyle/>
-          <a:p>
-            <a:fld id="{80B4FCE6-DC73-4135-BC56-1F242D45A84C}" type="slidenum">
-              <a:rPr lang="de-DE" smtClean="0"/>
-              <a:t>14</a:t>
-            </a:fld>
-            <a:endParaRPr lang="de-DE"/>
-          </a:p>
-        </p:txBody>
-      </p:sp>
-    </p:spTree>
-    <p:extLst>
-      <p:ext uri="{BB962C8B-B14F-4D97-AF65-F5344CB8AC3E}">
-        <p14:creationId xmlns:p14="http://schemas.microsoft.com/office/powerpoint/2010/main" val="641672160"/>
+        <p14:creationId xmlns:p14="http://schemas.microsoft.com/office/powerpoint/2010/main" val="301113731"/>
       </p:ext>
     </p:extLst>
   </p:cSld>
@@ -8686,7 +7132,7 @@
         <p:cNvPr id="1" name="">
           <a:extLst>
             <a:ext uri="{FF2B5EF4-FFF2-40B4-BE49-F238E27FC236}">
-              <a16:creationId xmlns:a16="http://schemas.microsoft.com/office/drawing/2014/main" id="{34E937EF-8FA5-3B82-EE02-E696CA86C502}"/>
+              <a16:creationId xmlns:a16="http://schemas.microsoft.com/office/drawing/2014/main" id="{A23C85E5-FAA6-C964-CEBE-45537634857E}"/>
             </a:ext>
           </a:extLst>
         </p:cNvPr>
@@ -8706,7 +7152,7 @@
           <p:cNvPr id="2" name="Titel 1">
             <a:extLst>
               <a:ext uri="{FF2B5EF4-FFF2-40B4-BE49-F238E27FC236}">
-                <a16:creationId xmlns:a16="http://schemas.microsoft.com/office/drawing/2014/main" id="{2E8ED65B-A4A9-8253-D3F5-86AF9FABE744}"/>
+                <a16:creationId xmlns:a16="http://schemas.microsoft.com/office/drawing/2014/main" id="{C75B23E4-E3F5-3DE5-EBB2-83E6F81B1E58}"/>
               </a:ext>
             </a:extLst>
           </p:cNvPr>
@@ -8717,30 +7163,53 @@
             <p:ph type="title"/>
           </p:nvPr>
         </p:nvSpPr>
-        <p:spPr>
-          <a:xfrm>
-            <a:off x="341811" y="567600"/>
-            <a:ext cx="5753662" cy="706030"/>
-          </a:xfrm>
-        </p:spPr>
+        <p:spPr/>
         <p:txBody>
           <a:bodyPr/>
           <a:lstStyle/>
           <a:p>
             <a:r>
               <a:rPr lang="de-DE" sz="3200" dirty="0"/>
-              <a:t>Entscheidungsgrenze im Training</a:t>
-            </a:r>
-            <a:endParaRPr lang="de-DE" dirty="0"/>
-          </a:p>
-        </p:txBody>
-      </p:sp>
-      <p:sp>
-        <p:nvSpPr>
-          <p:cNvPr id="7" name="Fußzeilenplatzhalter 6">
-            <a:extLst>
-              <a:ext uri="{FF2B5EF4-FFF2-40B4-BE49-F238E27FC236}">
-                <a16:creationId xmlns:a16="http://schemas.microsoft.com/office/drawing/2014/main" id="{B92395F9-CFA2-195F-9385-397DB9FE5811}"/>
+              <a:t>ROC-Kurve</a:t>
+            </a:r>
+          </a:p>
+        </p:txBody>
+      </p:sp>
+      <p:sp>
+        <p:nvSpPr>
+          <p:cNvPr id="8" name="Foliennummernplatzhalter 7">
+            <a:extLst>
+              <a:ext uri="{FF2B5EF4-FFF2-40B4-BE49-F238E27FC236}">
+                <a16:creationId xmlns:a16="http://schemas.microsoft.com/office/drawing/2014/main" id="{5D2A95ED-F98C-6262-163F-41115FB83FB7}"/>
+              </a:ext>
+            </a:extLst>
+          </p:cNvPr>
+          <p:cNvSpPr>
+            <a:spLocks noGrp="1"/>
+          </p:cNvSpPr>
+          <p:nvPr>
+            <p:ph type="sldNum" sz="quarter" idx="10"/>
+          </p:nvPr>
+        </p:nvSpPr>
+        <p:spPr/>
+        <p:txBody>
+          <a:bodyPr/>
+          <a:lstStyle/>
+          <a:p>
+            <a:fld id="{80B4FCE6-DC73-4135-BC56-1F242D45A84C}" type="slidenum">
+              <a:rPr lang="de-DE" smtClean="0"/>
+              <a:t>15</a:t>
+            </a:fld>
+            <a:endParaRPr lang="de-DE"/>
+          </a:p>
+        </p:txBody>
+      </p:sp>
+      <p:sp>
+        <p:nvSpPr>
+          <p:cNvPr id="5" name="Fußzeilenplatzhalter 4">
+            <a:extLst>
+              <a:ext uri="{FF2B5EF4-FFF2-40B4-BE49-F238E27FC236}">
+                <a16:creationId xmlns:a16="http://schemas.microsoft.com/office/drawing/2014/main" id="{3CDB1AEE-102C-A7A1-3383-C3DE105E5772}"/>
               </a:ext>
             </a:extLst>
           </p:cNvPr>
@@ -8766,10 +7235,10 @@
       </p:sp>
       <p:sp>
         <p:nvSpPr>
-          <p:cNvPr id="6" name="Datumsplatzhalter 5">
-            <a:extLst>
-              <a:ext uri="{FF2B5EF4-FFF2-40B4-BE49-F238E27FC236}">
-                <a16:creationId xmlns:a16="http://schemas.microsoft.com/office/drawing/2014/main" id="{1847D22D-9F17-A821-E459-143396AD6852}"/>
+          <p:cNvPr id="3" name="Datumsplatzhalter 2">
+            <a:extLst>
+              <a:ext uri="{FF2B5EF4-FFF2-40B4-BE49-F238E27FC236}">
+                <a16:creationId xmlns:a16="http://schemas.microsoft.com/office/drawing/2014/main" id="{EF239192-025A-2F06-6926-4A07097FD807}"/>
               </a:ext>
             </a:extLst>
           </p:cNvPr>
@@ -8792,77 +7261,12 @@
           </a:p>
         </p:txBody>
       </p:sp>
-      <p:sp>
-        <p:nvSpPr>
-          <p:cNvPr id="3" name="Inhaltsplatzhalter 2">
-            <a:extLst>
-              <a:ext uri="{FF2B5EF4-FFF2-40B4-BE49-F238E27FC236}">
-                <a16:creationId xmlns:a16="http://schemas.microsoft.com/office/drawing/2014/main" id="{471E2137-723A-08A3-959D-6D24A2077FF4}"/>
-              </a:ext>
-            </a:extLst>
-          </p:cNvPr>
-          <p:cNvSpPr>
-            <a:spLocks noGrp="1"/>
-          </p:cNvSpPr>
-          <p:nvPr>
-            <p:ph sz="quarter" idx="13"/>
-          </p:nvPr>
-        </p:nvSpPr>
-        <p:spPr/>
-        <p:txBody>
-          <a:bodyPr/>
-          <a:lstStyle/>
-          <a:p>
-            <a:pPr>
-              <a:buFont typeface="Arial" panose="020B0604020202020204" pitchFamily="34" charset="0"/>
-              <a:buChar char="•"/>
-            </a:pPr>
-            <a:r>
-              <a:rPr lang="de-DE" dirty="0"/>
-              <a:t>Punkte: Trainingsdaten in 2D-PCA-Projektion</a:t>
-            </a:r>
-          </a:p>
-          <a:p>
-            <a:pPr>
-              <a:buFont typeface="Arial" panose="020B0604020202020204" pitchFamily="34" charset="0"/>
-              <a:buChar char="•"/>
-            </a:pPr>
-            <a:r>
-              <a:rPr lang="de-DE" dirty="0"/>
-              <a:t>Linie: lineare Entscheidungsgrenze in der PCA-Ebene</a:t>
-            </a:r>
-          </a:p>
-          <a:p>
-            <a:pPr>
-              <a:buFont typeface="Arial" panose="020B0604020202020204" pitchFamily="34" charset="0"/>
-              <a:buChar char="•"/>
-            </a:pPr>
-            <a:r>
-              <a:rPr lang="de-DE" dirty="0"/>
-              <a:t>Rot: beschädigt `0`</a:t>
-            </a:r>
-          </a:p>
-          <a:p>
-            <a:pPr>
-              <a:buFont typeface="Arial" panose="020B0604020202020204" pitchFamily="34" charset="0"/>
-              <a:buChar char="•"/>
-            </a:pPr>
-            <a:r>
-              <a:rPr lang="de-DE" dirty="0"/>
-              <a:t>Blau: gut `1`</a:t>
-            </a:r>
-          </a:p>
-          <a:p>
-            <a:endParaRPr lang="de-DE" dirty="0"/>
-          </a:p>
-        </p:txBody>
-      </p:sp>
       <p:pic>
         <p:nvPicPr>
-          <p:cNvPr id="10" name="Inhaltsplatzhalter 9">
-            <a:extLst>
-              <a:ext uri="{FF2B5EF4-FFF2-40B4-BE49-F238E27FC236}">
-                <a16:creationId xmlns:a16="http://schemas.microsoft.com/office/drawing/2014/main" id="{D7DFFD06-9975-6A88-DD50-841259834DAE}"/>
+          <p:cNvPr id="9" name="Inhaltsplatzhalter 8">
+            <a:extLst>
+              <a:ext uri="{FF2B5EF4-FFF2-40B4-BE49-F238E27FC236}">
+                <a16:creationId xmlns:a16="http://schemas.microsoft.com/office/drawing/2014/main" id="{E58803F8-F76A-E078-5AD1-146E22CD1EC6}"/>
               </a:ext>
             </a:extLst>
           </p:cNvPr>
@@ -8870,7 +7274,7 @@
             <a:picLocks noGrp="1" noChangeAspect="1"/>
           </p:cNvPicPr>
           <p:nvPr>
-            <p:ph sz="quarter" idx="14"/>
+            <p:ph sz="quarter" idx="13"/>
           </p:nvPr>
         </p:nvPicPr>
         <p:blipFill>
@@ -8880,47 +7284,49 @@
         </p:blipFill>
         <p:spPr>
           <a:xfrm>
-            <a:off x="6095473" y="1755774"/>
-            <a:ext cx="5755215" cy="4316411"/>
+            <a:off x="380634" y="1619250"/>
+            <a:ext cx="5312507" cy="4316413"/>
           </a:xfrm>
           <a:prstGeom prst="rect">
             <a:avLst/>
           </a:prstGeom>
         </p:spPr>
       </p:pic>
-      <p:sp>
-        <p:nvSpPr>
-          <p:cNvPr id="5" name="Foliennummernplatzhalter 4">
-            <a:extLst>
-              <a:ext uri="{FF2B5EF4-FFF2-40B4-BE49-F238E27FC236}">
-                <a16:creationId xmlns:a16="http://schemas.microsoft.com/office/drawing/2014/main" id="{01107926-37B1-CA57-B637-A5F611C3389F}"/>
-              </a:ext>
-            </a:extLst>
-          </p:cNvPr>
-          <p:cNvSpPr>
-            <a:spLocks noGrp="1"/>
-          </p:cNvSpPr>
-          <p:nvPr>
-            <p:ph type="sldNum" sz="quarter" idx="10"/>
-          </p:nvPr>
-        </p:nvSpPr>
-        <p:spPr/>
-        <p:txBody>
-          <a:bodyPr/>
-          <a:lstStyle/>
-          <a:p>
-            <a:fld id="{80B4FCE6-DC73-4135-BC56-1F242D45A84C}" type="slidenum">
-              <a:rPr lang="de-DE" smtClean="0"/>
-              <a:t>15</a:t>
-            </a:fld>
-            <a:endParaRPr lang="de-DE"/>
-          </a:p>
-        </p:txBody>
-      </p:sp>
+      <p:pic>
+        <p:nvPicPr>
+          <p:cNvPr id="11" name="Inhaltsplatzhalter 10">
+            <a:extLst>
+              <a:ext uri="{FF2B5EF4-FFF2-40B4-BE49-F238E27FC236}">
+                <a16:creationId xmlns:a16="http://schemas.microsoft.com/office/drawing/2014/main" id="{AD0FB3FB-5656-701E-0288-466A2B67D029}"/>
+              </a:ext>
+            </a:extLst>
+          </p:cNvPr>
+          <p:cNvPicPr>
+            <a:picLocks noGrp="1" noChangeAspect="1"/>
+          </p:cNvPicPr>
+          <p:nvPr>
+            <p:ph sz="quarter" idx="14"/>
+          </p:nvPr>
+        </p:nvPicPr>
+        <p:blipFill>
+          <a:blip r:embed="rId4"/>
+          <a:srcRect/>
+          <a:stretch/>
+        </p:blipFill>
+        <p:spPr>
+          <a:xfrm>
+            <a:off x="6498859" y="1619250"/>
+            <a:ext cx="5312507" cy="4316413"/>
+          </a:xfrm>
+          <a:prstGeom prst="rect">
+            <a:avLst/>
+          </a:prstGeom>
+        </p:spPr>
+      </p:pic>
     </p:spTree>
     <p:extLst>
       <p:ext uri="{BB962C8B-B14F-4D97-AF65-F5344CB8AC3E}">
-        <p14:creationId xmlns:p14="http://schemas.microsoft.com/office/powerpoint/2010/main" val="3463300181"/>
+        <p14:creationId xmlns:p14="http://schemas.microsoft.com/office/powerpoint/2010/main" val="529354321"/>
       </p:ext>
     </p:extLst>
   </p:cSld>
@@ -8938,7 +7344,7 @@
         <p:cNvPr id="1" name="">
           <a:extLst>
             <a:ext uri="{FF2B5EF4-FFF2-40B4-BE49-F238E27FC236}">
-              <a16:creationId xmlns:a16="http://schemas.microsoft.com/office/drawing/2014/main" id="{8493E163-6174-0335-CC5D-4CCB2676747C}"/>
+              <a16:creationId xmlns:a16="http://schemas.microsoft.com/office/drawing/2014/main" id="{D07AEF58-2125-4D08-AD0B-E3880D48646E}"/>
             </a:ext>
           </a:extLst>
         </p:cNvPr>
@@ -8955,114 +7361,10 @@
       </p:grpSpPr>
       <p:sp>
         <p:nvSpPr>
-          <p:cNvPr id="13" name="Rechteck: eine Ecke abgerundet 12">
-            <a:extLst>
-              <a:ext uri="{FF2B5EF4-FFF2-40B4-BE49-F238E27FC236}">
-                <a16:creationId xmlns:a16="http://schemas.microsoft.com/office/drawing/2014/main" id="{F8E8A0BF-6C91-BB25-F574-EF1EB3FFC47E}"/>
-              </a:ext>
-            </a:extLst>
-          </p:cNvPr>
-          <p:cNvSpPr/>
-          <p:nvPr/>
-        </p:nvSpPr>
-        <p:spPr bwMode="auto">
-          <a:xfrm>
-            <a:off x="6459536" y="1740625"/>
-            <a:ext cx="750559" cy="704193"/>
-          </a:xfrm>
-          <a:prstGeom prst="round1Rect">
-            <a:avLst/>
-          </a:prstGeom>
-          <a:solidFill>
-            <a:schemeClr val="bg2">
-              <a:lumMod val="40000"/>
-              <a:lumOff val="60000"/>
-            </a:schemeClr>
-          </a:solidFill>
-          <a:ln w="9525" cap="flat" cmpd="sng" algn="ctr">
-            <a:noFill/>
-            <a:prstDash val="solid"/>
-            <a:round/>
-            <a:headEnd type="none" w="med" len="med"/>
-            <a:tailEnd type="none" w="med" len="med"/>
-          </a:ln>
-          <a:effectLst/>
-        </p:spPr>
-        <p:txBody>
-          <a:bodyPr vert="horz" wrap="square" lIns="91440" tIns="45720" rIns="91440" bIns="45720" numCol="1" rtlCol="0" anchor="t" anchorCtr="0" compatLnSpc="1">
-            <a:prstTxWarp prst="textNoShape">
-              <a:avLst/>
-            </a:prstTxWarp>
-          </a:bodyPr>
-          <a:lstStyle/>
-          <a:p>
-            <a:pPr marL="0" marR="0" indent="0" algn="l" defTabSz="914400" rtl="0" eaLnBrk="0" fontAlgn="base" latinLnBrk="0" hangingPunct="0">
-              <a:lnSpc>
-                <a:spcPct val="100000"/>
-              </a:lnSpc>
-              <a:spcBef>
-                <a:spcPct val="0"/>
-              </a:spcBef>
-              <a:spcAft>
-                <a:spcPct val="0"/>
-              </a:spcAft>
-              <a:buClrTx/>
-              <a:buSzTx/>
-              <a:buFontTx/>
-              <a:buNone/>
-              <a:tabLst/>
-            </a:pPr>
-            <a:r>
-              <a:rPr kumimoji="0" lang="de-DE" sz="1800" b="0" i="0" u="none" strike="noStrike" cap="none" normalizeH="0" baseline="0" dirty="0" err="1">
-                <a:ln>
-                  <a:noFill/>
-                </a:ln>
-                <a:solidFill>
-                  <a:schemeClr val="tx1"/>
-                </a:solidFill>
-                <a:effectLst/>
-                <a:latin typeface="Arial" pitchFamily="-109" charset="0"/>
-                <a:ea typeface="ヒラギノ角ゴ Pro W3" pitchFamily="-109" charset="-128"/>
-                <a:cs typeface="ヒラギノ角ゴ Pro W3" pitchFamily="-109" charset="-128"/>
-              </a:rPr>
-              <a:t>Ch</a:t>
-            </a:r>
-            <a:r>
-              <a:rPr kumimoji="0" lang="de-DE" sz="1800" b="0" i="0" u="none" strike="noStrike" cap="none" normalizeH="0" baseline="0" dirty="0">
-                <a:ln>
-                  <a:noFill/>
-                </a:ln>
-                <a:solidFill>
-                  <a:schemeClr val="tx1"/>
-                </a:solidFill>
-                <a:effectLst/>
-                <a:latin typeface="Arial" pitchFamily="-109" charset="0"/>
-                <a:ea typeface="ヒラギノ角ゴ Pro W3" pitchFamily="-109" charset="-128"/>
-                <a:cs typeface="ヒラギノ角ゴ Pro W3" pitchFamily="-109" charset="-128"/>
-              </a:rPr>
-              <a:t> 1</a:t>
-            </a:r>
-            <a:endParaRPr kumimoji="0" lang="de-DE" sz="2400" b="0" i="0" u="none" strike="noStrike" cap="none" normalizeH="0" baseline="0" dirty="0">
-              <a:ln>
-                <a:noFill/>
-              </a:ln>
-              <a:solidFill>
-                <a:schemeClr val="tx1"/>
-              </a:solidFill>
-              <a:effectLst/>
-              <a:latin typeface="Arial" pitchFamily="-109" charset="0"/>
-              <a:ea typeface="ヒラギノ角ゴ Pro W3" pitchFamily="-109" charset="-128"/>
-              <a:cs typeface="ヒラギノ角ゴ Pro W3" pitchFamily="-109" charset="-128"/>
-            </a:endParaRPr>
-          </a:p>
-        </p:txBody>
-      </p:sp>
-      <p:sp>
-        <p:nvSpPr>
           <p:cNvPr id="2" name="Titel 1">
             <a:extLst>
               <a:ext uri="{FF2B5EF4-FFF2-40B4-BE49-F238E27FC236}">
-                <a16:creationId xmlns:a16="http://schemas.microsoft.com/office/drawing/2014/main" id="{FF7BE80C-ADD9-4B83-0F35-FABC25DABF97}"/>
+                <a16:creationId xmlns:a16="http://schemas.microsoft.com/office/drawing/2014/main" id="{BB4AAB81-87D7-0FF4-7BF1-6AAAED5EC66D}"/>
               </a:ext>
             </a:extLst>
           </p:cNvPr>
@@ -9080,9 +7382,37 @@
           <a:p>
             <a:r>
               <a:rPr lang="de-DE" sz="3200" dirty="0"/>
-              <a:t>Testergebnisse</a:t>
-            </a:r>
-            <a:endParaRPr lang="de-DE" dirty="0"/>
+              <a:t>ROC-Kurve</a:t>
+            </a:r>
+          </a:p>
+        </p:txBody>
+      </p:sp>
+      <p:sp>
+        <p:nvSpPr>
+          <p:cNvPr id="8" name="Foliennummernplatzhalter 7">
+            <a:extLst>
+              <a:ext uri="{FF2B5EF4-FFF2-40B4-BE49-F238E27FC236}">
+                <a16:creationId xmlns:a16="http://schemas.microsoft.com/office/drawing/2014/main" id="{FF8F33D0-988F-7EF7-B4B1-A3A839DD5E84}"/>
+              </a:ext>
+            </a:extLst>
+          </p:cNvPr>
+          <p:cNvSpPr>
+            <a:spLocks noGrp="1"/>
+          </p:cNvSpPr>
+          <p:nvPr>
+            <p:ph type="sldNum" sz="quarter" idx="10"/>
+          </p:nvPr>
+        </p:nvSpPr>
+        <p:spPr/>
+        <p:txBody>
+          <a:bodyPr/>
+          <a:lstStyle/>
+          <a:p>
+            <a:fld id="{80B4FCE6-DC73-4135-BC56-1F242D45A84C}" type="slidenum">
+              <a:rPr lang="de-DE" smtClean="0"/>
+              <a:t>16</a:t>
+            </a:fld>
+            <a:endParaRPr lang="de-DE"/>
           </a:p>
         </p:txBody>
       </p:sp>
@@ -9091,7 +7421,7 @@
           <p:cNvPr id="5" name="Fußzeilenplatzhalter 4">
             <a:extLst>
               <a:ext uri="{FF2B5EF4-FFF2-40B4-BE49-F238E27FC236}">
-                <a16:creationId xmlns:a16="http://schemas.microsoft.com/office/drawing/2014/main" id="{3700FFC5-AF95-B68C-5F71-A8EF47B9C797}"/>
+                <a16:creationId xmlns:a16="http://schemas.microsoft.com/office/drawing/2014/main" id="{CE31FBDB-E4F0-6CAF-93D9-EE31834FD099}"/>
               </a:ext>
             </a:extLst>
           </p:cNvPr>
@@ -9120,7 +7450,7 @@
           <p:cNvPr id="3" name="Datumsplatzhalter 2">
             <a:extLst>
               <a:ext uri="{FF2B5EF4-FFF2-40B4-BE49-F238E27FC236}">
-                <a16:creationId xmlns:a16="http://schemas.microsoft.com/office/drawing/2014/main" id="{34CADDE5-67A5-2686-564A-CA60BE28A110}"/>
+                <a16:creationId xmlns:a16="http://schemas.microsoft.com/office/drawing/2014/main" id="{210A17B6-32AB-A500-2054-6CC058B5812B}"/>
               </a:ext>
             </a:extLst>
           </p:cNvPr>
@@ -9143,118 +7473,12 @@
           </a:p>
         </p:txBody>
       </p:sp>
-      <p:sp>
-        <p:nvSpPr>
-          <p:cNvPr id="8" name="Inhaltsplatzhalter 7">
-            <a:extLst>
-              <a:ext uri="{FF2B5EF4-FFF2-40B4-BE49-F238E27FC236}">
-                <a16:creationId xmlns:a16="http://schemas.microsoft.com/office/drawing/2014/main" id="{75AFD3C3-3EFB-85A6-8836-7191C35AF37E}"/>
-              </a:ext>
-            </a:extLst>
-          </p:cNvPr>
-          <p:cNvSpPr>
-            <a:spLocks noGrp="1"/>
-          </p:cNvSpPr>
-          <p:nvPr>
-            <p:ph sz="quarter" idx="13"/>
-          </p:nvPr>
-        </p:nvSpPr>
-        <p:spPr/>
-        <p:txBody>
-          <a:bodyPr/>
-          <a:lstStyle/>
-          <a:p>
-            <a:pPr>
-              <a:buFont typeface="Arial" panose="020B0604020202020204" pitchFamily="34" charset="0"/>
-              <a:buChar char="•"/>
-            </a:pPr>
-            <a:r>
-              <a:rPr lang="de-DE" dirty="0"/>
-              <a:t>Finale Bewertung auf Testsatz</a:t>
-            </a:r>
-          </a:p>
-          <a:p>
-            <a:pPr>
-              <a:buFont typeface="Arial" panose="020B0604020202020204" pitchFamily="34" charset="0"/>
-              <a:buChar char="•"/>
-            </a:pPr>
-            <a:r>
-              <a:rPr lang="de-DE" dirty="0"/>
-              <a:t>Aktuelle </a:t>
-            </a:r>
-            <a:r>
-              <a:rPr lang="de-DE" dirty="0" err="1"/>
-              <a:t>Testmetriken</a:t>
-            </a:r>
-            <a:r>
-              <a:rPr lang="de-DE" dirty="0"/>
-              <a:t>:</a:t>
-            </a:r>
-          </a:p>
-          <a:p>
-            <a:pPr lvl="1">
-              <a:buFont typeface="Arial" panose="020B0604020202020204" pitchFamily="34" charset="0"/>
-              <a:buChar char="•"/>
-            </a:pPr>
-            <a:r>
-              <a:rPr lang="de-DE" dirty="0" err="1"/>
-              <a:t>Accuracy</a:t>
-            </a:r>
-            <a:r>
-              <a:rPr lang="de-DE" dirty="0"/>
-              <a:t>: `1.00`</a:t>
-            </a:r>
-          </a:p>
-          <a:p>
-            <a:pPr lvl="1">
-              <a:buFont typeface="Arial" panose="020B0604020202020204" pitchFamily="34" charset="0"/>
-              <a:buChar char="•"/>
-            </a:pPr>
-            <a:r>
-              <a:rPr lang="de-DE" dirty="0" err="1"/>
-              <a:t>Balanced</a:t>
-            </a:r>
-            <a:r>
-              <a:rPr lang="de-DE" dirty="0"/>
-              <a:t> </a:t>
-            </a:r>
-            <a:r>
-              <a:rPr lang="de-DE" dirty="0" err="1"/>
-              <a:t>Accuracy</a:t>
-            </a:r>
-            <a:r>
-              <a:rPr lang="de-DE" dirty="0"/>
-              <a:t>: `1.00`</a:t>
-            </a:r>
-          </a:p>
-          <a:p>
-            <a:pPr lvl="1">
-              <a:buFont typeface="Arial" panose="020B0604020202020204" pitchFamily="34" charset="0"/>
-              <a:buChar char="•"/>
-            </a:pPr>
-            <a:r>
-              <a:rPr lang="de-DE" dirty="0"/>
-              <a:t>F1 für beschädigt: `1.00`</a:t>
-            </a:r>
-          </a:p>
-          <a:p>
-            <a:pPr>
-              <a:buFont typeface="Arial" panose="020B0604020202020204" pitchFamily="34" charset="0"/>
-              <a:buChar char="•"/>
-            </a:pPr>
-            <a:r>
-              <a:rPr lang="de-DE" dirty="0"/>
-              <a:t>Keine Fehlklassifikation im aktuellen Split</a:t>
-            </a:r>
-          </a:p>
-        </p:txBody>
-      </p:sp>
       <p:pic>
         <p:nvPicPr>
-          <p:cNvPr id="11" name="Inhaltsplatzhalter 10">
-            <a:extLst>
-              <a:ext uri="{FF2B5EF4-FFF2-40B4-BE49-F238E27FC236}">
-                <a16:creationId xmlns:a16="http://schemas.microsoft.com/office/drawing/2014/main" id="{6A6044F3-D308-6354-A347-71E8B0322F88}"/>
+          <p:cNvPr id="9" name="Inhaltsplatzhalter 8">
+            <a:extLst>
+              <a:ext uri="{FF2B5EF4-FFF2-40B4-BE49-F238E27FC236}">
+                <a16:creationId xmlns:a16="http://schemas.microsoft.com/office/drawing/2014/main" id="{7606F433-01C5-6688-6F58-11400D50B7CA}"/>
               </a:ext>
             </a:extLst>
           </p:cNvPr>
@@ -9262,7 +7486,7 @@
             <a:picLocks noGrp="1" noChangeAspect="1"/>
           </p:cNvPicPr>
           <p:nvPr>
-            <p:ph sz="quarter" idx="14"/>
+            <p:ph sz="quarter" idx="13"/>
           </p:nvPr>
         </p:nvPicPr>
         <p:blipFill>
@@ -9272,520 +7496,39 @@
         </p:blipFill>
         <p:spPr>
           <a:xfrm>
-            <a:off x="6455727" y="2068701"/>
-            <a:ext cx="5196437" cy="4354385"/>
+            <a:off x="380634" y="1619250"/>
+            <a:ext cx="5312507" cy="4316413"/>
           </a:xfrm>
           <a:prstGeom prst="rect">
             <a:avLst/>
           </a:prstGeom>
         </p:spPr>
       </p:pic>
-      <p:sp>
-        <p:nvSpPr>
-          <p:cNvPr id="15" name="Rechteck: eine Ecke abgerundet 14">
-            <a:extLst>
-              <a:ext uri="{FF2B5EF4-FFF2-40B4-BE49-F238E27FC236}">
-                <a16:creationId xmlns:a16="http://schemas.microsoft.com/office/drawing/2014/main" id="{8A72FF3C-2C7B-8705-2775-AB010BAE17F4}"/>
-              </a:ext>
-            </a:extLst>
-          </p:cNvPr>
-          <p:cNvSpPr/>
-          <p:nvPr/>
-        </p:nvSpPr>
-        <p:spPr bwMode="auto">
-          <a:xfrm>
-            <a:off x="6459536" y="1740625"/>
-            <a:ext cx="750559" cy="704193"/>
-          </a:xfrm>
-          <a:prstGeom prst="round1Rect">
-            <a:avLst/>
-          </a:prstGeom>
-          <a:solidFill>
-            <a:schemeClr val="bg2">
-              <a:lumMod val="40000"/>
-              <a:lumOff val="60000"/>
-            </a:schemeClr>
-          </a:solidFill>
-          <a:ln w="9525" cap="flat" cmpd="sng" algn="ctr">
-            <a:noFill/>
-            <a:prstDash val="solid"/>
-            <a:round/>
-            <a:headEnd type="none" w="med" len="med"/>
-            <a:tailEnd type="none" w="med" len="med"/>
-          </a:ln>
-          <a:effectLst/>
-        </p:spPr>
-        <p:txBody>
-          <a:bodyPr vert="horz" wrap="square" lIns="91440" tIns="45720" rIns="91440" bIns="45720" numCol="1" rtlCol="0" anchor="t" anchorCtr="0" compatLnSpc="1">
-            <a:prstTxWarp prst="textNoShape">
-              <a:avLst/>
-            </a:prstTxWarp>
-          </a:bodyPr>
-          <a:lstStyle/>
-          <a:p>
-            <a:pPr marL="0" marR="0" indent="0" algn="l" defTabSz="914400" rtl="0" eaLnBrk="0" fontAlgn="base" latinLnBrk="0" hangingPunct="0">
-              <a:lnSpc>
-                <a:spcPct val="100000"/>
-              </a:lnSpc>
-              <a:spcBef>
-                <a:spcPct val="0"/>
-              </a:spcBef>
-              <a:spcAft>
-                <a:spcPct val="0"/>
-              </a:spcAft>
-              <a:buClrTx/>
-              <a:buSzTx/>
-              <a:buFontTx/>
-              <a:buNone/>
-              <a:tabLst/>
-            </a:pPr>
-            <a:r>
-              <a:rPr kumimoji="0" lang="de-DE" sz="1800" b="0" i="0" u="none" strike="noStrike" cap="none" normalizeH="0" baseline="0" dirty="0" err="1">
-                <a:ln>
-                  <a:noFill/>
-                </a:ln>
-                <a:solidFill>
-                  <a:schemeClr val="tx1"/>
-                </a:solidFill>
-                <a:effectLst/>
-                <a:latin typeface="Arial" pitchFamily="-109" charset="0"/>
-                <a:ea typeface="ヒラギノ角ゴ Pro W3" pitchFamily="-109" charset="-128"/>
-                <a:cs typeface="ヒラギノ角ゴ Pro W3" pitchFamily="-109" charset="-128"/>
-              </a:rPr>
-              <a:t>Ch</a:t>
-            </a:r>
-            <a:r>
-              <a:rPr kumimoji="0" lang="de-DE" sz="1800" b="0" i="0" u="none" strike="noStrike" cap="none" normalizeH="0" baseline="0" dirty="0">
-                <a:ln>
-                  <a:noFill/>
-                </a:ln>
-                <a:solidFill>
-                  <a:schemeClr val="tx1"/>
-                </a:solidFill>
-                <a:effectLst/>
-                <a:latin typeface="Arial" pitchFamily="-109" charset="0"/>
-                <a:ea typeface="ヒラギノ角ゴ Pro W3" pitchFamily="-109" charset="-128"/>
-                <a:cs typeface="ヒラギノ角ゴ Pro W3" pitchFamily="-109" charset="-128"/>
-              </a:rPr>
-              <a:t> 2</a:t>
-            </a:r>
-            <a:endParaRPr kumimoji="0" lang="de-DE" sz="2400" b="0" i="0" u="none" strike="noStrike" cap="none" normalizeH="0" baseline="0" dirty="0">
-              <a:ln>
-                <a:noFill/>
-              </a:ln>
-              <a:solidFill>
-                <a:schemeClr val="tx1"/>
-              </a:solidFill>
-              <a:effectLst/>
-              <a:latin typeface="Arial" pitchFamily="-109" charset="0"/>
-              <a:ea typeface="ヒラギノ角ゴ Pro W3" pitchFamily="-109" charset="-128"/>
-              <a:cs typeface="ヒラギノ角ゴ Pro W3" pitchFamily="-109" charset="-128"/>
-            </a:endParaRPr>
-          </a:p>
-        </p:txBody>
-      </p:sp>
       <p:pic>
         <p:nvPicPr>
-          <p:cNvPr id="12" name="Inhaltsplatzhalter 10">
-            <a:extLst>
-              <a:ext uri="{FF2B5EF4-FFF2-40B4-BE49-F238E27FC236}">
-                <a16:creationId xmlns:a16="http://schemas.microsoft.com/office/drawing/2014/main" id="{C2D05996-D3A4-BF54-4EB7-5C95131B19A7}"/>
+          <p:cNvPr id="11" name="Inhaltsplatzhalter 10">
+            <a:extLst>
+              <a:ext uri="{FF2B5EF4-FFF2-40B4-BE49-F238E27FC236}">
+                <a16:creationId xmlns:a16="http://schemas.microsoft.com/office/drawing/2014/main" id="{B5A8FE23-C07E-236A-A02B-DDD4EF8DC173}"/>
               </a:ext>
             </a:extLst>
           </p:cNvPr>
           <p:cNvPicPr>
-            <a:picLocks noChangeAspect="1"/>
+            <a:picLocks noGrp="1" noChangeAspect="1"/>
           </p:cNvPicPr>
-          <p:nvPr/>
+          <p:nvPr>
+            <p:ph sz="quarter" idx="14"/>
+          </p:nvPr>
         </p:nvPicPr>
         <p:blipFill>
-          <a:blip r:embed="rId3"/>
+          <a:blip r:embed="rId4"/>
           <a:srcRect/>
           <a:stretch/>
         </p:blipFill>
         <p:spPr>
           <a:xfrm>
-            <a:off x="6455727" y="2068701"/>
-            <a:ext cx="5196437" cy="4354385"/>
-          </a:xfrm>
-          <a:prstGeom prst="rect">
-            <a:avLst/>
-          </a:prstGeom>
-        </p:spPr>
-      </p:pic>
-      <p:sp>
-        <p:nvSpPr>
-          <p:cNvPr id="6" name="Foliennummernplatzhalter 5">
-            <a:extLst>
-              <a:ext uri="{FF2B5EF4-FFF2-40B4-BE49-F238E27FC236}">
-                <a16:creationId xmlns:a16="http://schemas.microsoft.com/office/drawing/2014/main" id="{375A9587-B8AB-9FF9-3DB6-4B6D8BB7397F}"/>
-              </a:ext>
-            </a:extLst>
-          </p:cNvPr>
-          <p:cNvSpPr>
-            <a:spLocks noGrp="1"/>
-          </p:cNvSpPr>
-          <p:nvPr>
-            <p:ph type="sldNum" sz="quarter" idx="10"/>
-          </p:nvPr>
-        </p:nvSpPr>
-        <p:spPr/>
-        <p:txBody>
-          <a:bodyPr/>
-          <a:lstStyle/>
-          <a:p>
-            <a:fld id="{80B4FCE6-DC73-4135-BC56-1F242D45A84C}" type="slidenum">
-              <a:rPr lang="de-DE" smtClean="0"/>
-              <a:t>16</a:t>
-            </a:fld>
-            <a:endParaRPr lang="de-DE"/>
-          </a:p>
-        </p:txBody>
-      </p:sp>
-    </p:spTree>
-    <p:extLst>
-      <p:ext uri="{BB962C8B-B14F-4D97-AF65-F5344CB8AC3E}">
-        <p14:creationId xmlns:p14="http://schemas.microsoft.com/office/powerpoint/2010/main" val="2351703905"/>
-      </p:ext>
-    </p:extLst>
-  </p:cSld>
-  <p:clrMapOvr>
-    <a:masterClrMapping/>
-  </p:clrMapOvr>
-  <p:timing>
-    <p:tnLst>
-      <p:par>
-        <p:cTn id="1" dur="indefinite" restart="never" nodeType="tmRoot">
-          <p:childTnLst>
-            <p:seq concurrent="1" nextAc="seek">
-              <p:cTn id="2" dur="indefinite" nodeType="mainSeq">
-                <p:childTnLst>
-                  <p:par>
-                    <p:cTn id="3" fill="hold">
-                      <p:stCondLst>
-                        <p:cond delay="indefinite"/>
-                      </p:stCondLst>
-                      <p:childTnLst>
-                        <p:par>
-                          <p:cTn id="4" fill="hold">
-                            <p:stCondLst>
-                              <p:cond delay="0"/>
-                            </p:stCondLst>
-                            <p:childTnLst>
-                              <p:par>
-                                <p:cTn id="5" presetID="1" presetClass="entr" presetSubtype="0" fill="hold" nodeType="clickEffect">
-                                  <p:stCondLst>
-                                    <p:cond delay="0"/>
-                                  </p:stCondLst>
-                                  <p:childTnLst>
-                                    <p:set>
-                                      <p:cBhvr>
-                                        <p:cTn id="6" dur="1" fill="hold">
-                                          <p:stCondLst>
-                                            <p:cond delay="0"/>
-                                          </p:stCondLst>
-                                        </p:cTn>
-                                        <p:tgtEl>
-                                          <p:spTgt spid="12"/>
-                                        </p:tgtEl>
-                                        <p:attrNameLst>
-                                          <p:attrName>style.visibility</p:attrName>
-                                        </p:attrNameLst>
-                                      </p:cBhvr>
-                                      <p:to>
-                                        <p:strVal val="visible"/>
-                                      </p:to>
-                                    </p:set>
-                                  </p:childTnLst>
-                                </p:cTn>
-                              </p:par>
-                              <p:par>
-                                <p:cTn id="7" presetID="1" presetClass="entr" presetSubtype="0" fill="hold" grpId="0" nodeType="withEffect">
-                                  <p:stCondLst>
-                                    <p:cond delay="0"/>
-                                  </p:stCondLst>
-                                  <p:childTnLst>
-                                    <p:set>
-                                      <p:cBhvr>
-                                        <p:cTn id="8" dur="1" fill="hold">
-                                          <p:stCondLst>
-                                            <p:cond delay="0"/>
-                                          </p:stCondLst>
-                                        </p:cTn>
-                                        <p:tgtEl>
-                                          <p:spTgt spid="15"/>
-                                        </p:tgtEl>
-                                        <p:attrNameLst>
-                                          <p:attrName>style.visibility</p:attrName>
-                                        </p:attrNameLst>
-                                      </p:cBhvr>
-                                      <p:to>
-                                        <p:strVal val="visible"/>
-                                      </p:to>
-                                    </p:set>
-                                  </p:childTnLst>
-                                </p:cTn>
-                              </p:par>
-                            </p:childTnLst>
-                          </p:cTn>
-                        </p:par>
-                      </p:childTnLst>
-                    </p:cTn>
-                  </p:par>
-                </p:childTnLst>
-              </p:cTn>
-              <p:prevCondLst>
-                <p:cond evt="onPrev" delay="0">
-                  <p:tgtEl>
-                    <p:sldTgt/>
-                  </p:tgtEl>
-                </p:cond>
-              </p:prevCondLst>
-              <p:nextCondLst>
-                <p:cond evt="onNext" delay="0">
-                  <p:tgtEl>
-                    <p:sldTgt/>
-                  </p:tgtEl>
-                </p:cond>
-              </p:nextCondLst>
-            </p:seq>
-          </p:childTnLst>
-        </p:cTn>
-      </p:par>
-    </p:tnLst>
-    <p:bldLst>
-      <p:bldP spid="15" grpId="0" animBg="1"/>
-    </p:bldLst>
-  </p:timing>
-</p:sld>
-</file>
-
-<file path=ppt/slides/slide17.xml><?xml version="1.0" encoding="utf-8"?>
-<p:sld xmlns:a="http://schemas.openxmlformats.org/drawingml/2006/main" xmlns:r="http://schemas.openxmlformats.org/officeDocument/2006/relationships" xmlns:p="http://schemas.openxmlformats.org/presentationml/2006/main">
-  <p:cSld>
-    <p:spTree>
-      <p:nvGrpSpPr>
-        <p:cNvPr id="1" name="">
-          <a:extLst>
-            <a:ext uri="{FF2B5EF4-FFF2-40B4-BE49-F238E27FC236}">
-              <a16:creationId xmlns:a16="http://schemas.microsoft.com/office/drawing/2014/main" id="{487AAFDA-5709-6898-CE4E-940E6A34EADE}"/>
-            </a:ext>
-          </a:extLst>
-        </p:cNvPr>
-        <p:cNvGrpSpPr/>
-        <p:nvPr/>
-      </p:nvGrpSpPr>
-      <p:grpSpPr>
-        <a:xfrm>
-          <a:off x="0" y="0"/>
-          <a:ext cx="0" cy="0"/>
-          <a:chOff x="0" y="0"/>
-          <a:chExt cx="0" cy="0"/>
-        </a:xfrm>
-      </p:grpSpPr>
-      <p:sp>
-        <p:nvSpPr>
-          <p:cNvPr id="2" name="Titel 1">
-            <a:extLst>
-              <a:ext uri="{FF2B5EF4-FFF2-40B4-BE49-F238E27FC236}">
-                <a16:creationId xmlns:a16="http://schemas.microsoft.com/office/drawing/2014/main" id="{11DF8090-BADC-27B4-F673-12947654E7F5}"/>
-              </a:ext>
-            </a:extLst>
-          </p:cNvPr>
-          <p:cNvSpPr>
-            <a:spLocks noGrp="1"/>
-          </p:cNvSpPr>
-          <p:nvPr>
-            <p:ph type="title"/>
-          </p:nvPr>
-        </p:nvSpPr>
-        <p:spPr/>
-        <p:txBody>
-          <a:bodyPr/>
-          <a:lstStyle/>
-          <a:p>
-            <a:r>
-              <a:rPr lang="de-DE" dirty="0"/>
-              <a:t>ROC und AUC</a:t>
-            </a:r>
-            <a:endParaRPr lang="de-DE" b="0" dirty="0"/>
-          </a:p>
-        </p:txBody>
-      </p:sp>
-      <p:sp>
-        <p:nvSpPr>
-          <p:cNvPr id="3" name="Foliennummernplatzhalter 2">
-            <a:extLst>
-              <a:ext uri="{FF2B5EF4-FFF2-40B4-BE49-F238E27FC236}">
-                <a16:creationId xmlns:a16="http://schemas.microsoft.com/office/drawing/2014/main" id="{86D9B423-944C-1C30-B5CC-D3E5B59E7598}"/>
-              </a:ext>
-            </a:extLst>
-          </p:cNvPr>
-          <p:cNvSpPr>
-            <a:spLocks noGrp="1"/>
-          </p:cNvSpPr>
-          <p:nvPr>
-            <p:ph type="sldNum" sz="quarter" idx="10"/>
-          </p:nvPr>
-        </p:nvSpPr>
-        <p:spPr/>
-        <p:txBody>
-          <a:bodyPr/>
-          <a:lstStyle/>
-          <a:p>
-            <a:fld id="{80B4FCE6-DC73-4135-BC56-1F242D45A84C}" type="slidenum">
-              <a:rPr lang="de-DE" smtClean="0"/>
-              <a:t>17</a:t>
-            </a:fld>
-            <a:endParaRPr lang="de-DE"/>
-          </a:p>
-        </p:txBody>
-      </p:sp>
-      <p:sp>
-        <p:nvSpPr>
-          <p:cNvPr id="7" name="Fußzeilenplatzhalter 6">
-            <a:extLst>
-              <a:ext uri="{FF2B5EF4-FFF2-40B4-BE49-F238E27FC236}">
-                <a16:creationId xmlns:a16="http://schemas.microsoft.com/office/drawing/2014/main" id="{61398641-4C2C-6031-67B2-033E0BC9BEAF}"/>
-              </a:ext>
-            </a:extLst>
-          </p:cNvPr>
-          <p:cNvSpPr>
-            <a:spLocks noGrp="1"/>
-          </p:cNvSpPr>
-          <p:nvPr>
-            <p:ph type="ftr" sz="quarter" idx="11"/>
-          </p:nvPr>
-        </p:nvSpPr>
-        <p:spPr/>
-        <p:txBody>
-          <a:bodyPr/>
-          <a:lstStyle/>
-          <a:p>
-            <a:r>
-              <a:rPr lang="de-DE"/>
-              <a:t>Materialdiagnostik: Task 4</a:t>
-            </a:r>
-            <a:endParaRPr lang="de-DE" dirty="0"/>
-          </a:p>
-        </p:txBody>
-      </p:sp>
-      <p:sp>
-        <p:nvSpPr>
-          <p:cNvPr id="6" name="Datumsplatzhalter 5">
-            <a:extLst>
-              <a:ext uri="{FF2B5EF4-FFF2-40B4-BE49-F238E27FC236}">
-                <a16:creationId xmlns:a16="http://schemas.microsoft.com/office/drawing/2014/main" id="{9CD15804-53A8-F6A6-4020-8B7067A69EC8}"/>
-              </a:ext>
-            </a:extLst>
-          </p:cNvPr>
-          <p:cNvSpPr>
-            <a:spLocks noGrp="1"/>
-          </p:cNvSpPr>
-          <p:nvPr>
-            <p:ph type="dt" sz="half" idx="12"/>
-          </p:nvPr>
-        </p:nvSpPr>
-        <p:spPr/>
-        <p:txBody>
-          <a:bodyPr/>
-          <a:lstStyle/>
-          <a:p>
-            <a:r>
-              <a:rPr lang="de-DE"/>
-              <a:t>23.07.2026</a:t>
-            </a:r>
-          </a:p>
-        </p:txBody>
-      </p:sp>
-      <p:sp>
-        <p:nvSpPr>
-          <p:cNvPr id="4" name="Inhaltsplatzhalter 3">
-            <a:extLst>
-              <a:ext uri="{FF2B5EF4-FFF2-40B4-BE49-F238E27FC236}">
-                <a16:creationId xmlns:a16="http://schemas.microsoft.com/office/drawing/2014/main" id="{9E24C8D9-E4E3-E9CF-1805-31E38BF75F4C}"/>
-              </a:ext>
-            </a:extLst>
-          </p:cNvPr>
-          <p:cNvSpPr>
-            <a:spLocks noGrp="1"/>
-          </p:cNvSpPr>
-          <p:nvPr>
-            <p:ph sz="quarter" idx="13"/>
-          </p:nvPr>
-        </p:nvSpPr>
-        <p:spPr/>
-        <p:txBody>
-          <a:bodyPr/>
-          <a:lstStyle/>
-          <a:p>
-            <a:pPr>
-              <a:buFont typeface="Arial" panose="020B0604020202020204" pitchFamily="34" charset="0"/>
-              <a:buChar char="•"/>
-            </a:pPr>
-            <a:endParaRPr lang="de-DE" dirty="0"/>
-          </a:p>
-          <a:p>
-            <a:pPr>
-              <a:buFont typeface="Arial" panose="020B0604020202020204" pitchFamily="34" charset="0"/>
-              <a:buChar char="•"/>
-            </a:pPr>
-            <a:r>
-              <a:rPr lang="de-DE" dirty="0"/>
-              <a:t>ROC für Klasse 0 = beschädigt</a:t>
-            </a:r>
-          </a:p>
-          <a:p>
-            <a:pPr>
-              <a:buFont typeface="Arial" panose="020B0604020202020204" pitchFamily="34" charset="0"/>
-              <a:buChar char="•"/>
-            </a:pPr>
-            <a:r>
-              <a:rPr lang="de-DE" dirty="0"/>
-              <a:t>AUC: 1.00</a:t>
-            </a:r>
-          </a:p>
-          <a:p>
-            <a:pPr>
-              <a:buFont typeface="Arial" panose="020B0604020202020204" pitchFamily="34" charset="0"/>
-              <a:buChar char="•"/>
-            </a:pPr>
-            <a:r>
-              <a:rPr lang="de-DE" dirty="0"/>
-              <a:t>Kurve liegt ideal links oben</a:t>
-            </a:r>
-          </a:p>
-          <a:p>
-            <a:endParaRPr lang="de-DE" dirty="0"/>
-          </a:p>
-        </p:txBody>
-      </p:sp>
-      <p:pic>
-        <p:nvPicPr>
-          <p:cNvPr id="10" name="Inhaltsplatzhalter 9">
-            <a:extLst>
-              <a:ext uri="{FF2B5EF4-FFF2-40B4-BE49-F238E27FC236}">
-                <a16:creationId xmlns:a16="http://schemas.microsoft.com/office/drawing/2014/main" id="{C5D9F17E-32D1-AC34-CA50-AD008C0C61A7}"/>
-              </a:ext>
-            </a:extLst>
-          </p:cNvPr>
-          <p:cNvPicPr>
-            <a:picLocks noGrp="1" noChangeAspect="1"/>
-          </p:cNvPicPr>
-          <p:nvPr>
-            <p:ph sz="quarter" idx="14"/>
-          </p:nvPr>
-        </p:nvPicPr>
-        <p:blipFill>
-          <a:blip r:embed="rId3"/>
-          <a:stretch>
-            <a:fillRect/>
-          </a:stretch>
-        </p:blipFill>
-        <p:spPr>
-          <a:xfrm>
-            <a:off x="6637205" y="1619250"/>
-            <a:ext cx="5035815" cy="4316413"/>
+            <a:off x="6498859" y="1619250"/>
+            <a:ext cx="5312507" cy="4316413"/>
           </a:xfrm>
           <a:prstGeom prst="rect">
             <a:avLst/>
@@ -9795,7 +7538,7 @@
     </p:spTree>
     <p:extLst>
       <p:ext uri="{BB962C8B-B14F-4D97-AF65-F5344CB8AC3E}">
-        <p14:creationId xmlns:p14="http://schemas.microsoft.com/office/powerpoint/2010/main" val="2916641920"/>
+        <p14:creationId xmlns:p14="http://schemas.microsoft.com/office/powerpoint/2010/main" val="2654329450"/>
       </p:ext>
     </p:extLst>
   </p:cSld>
@@ -9805,7 +7548,7 @@
 </p:sld>
 </file>
 
-<file path=ppt/slides/slide18.xml><?xml version="1.0" encoding="utf-8"?>
+<file path=ppt/slides/slide17.xml><?xml version="1.0" encoding="utf-8"?>
 <p:sld xmlns:a="http://schemas.openxmlformats.org/drawingml/2006/main" xmlns:r="http://schemas.openxmlformats.org/officeDocument/2006/relationships" xmlns:p="http://schemas.openxmlformats.org/presentationml/2006/main">
   <p:cSld>
     <p:spTree>
@@ -9851,7 +7594,7 @@
           <a:p>
             <a:fld id="{80B4FCE6-DC73-4135-BC56-1F242D45A84C}" type="slidenum">
               <a:rPr lang="de-DE" smtClean="0"/>
-              <a:t>18</a:t>
+              <a:t>17</a:t>
             </a:fld>
             <a:endParaRPr lang="de-DE"/>
           </a:p>
@@ -9934,6 +7677,191 @@
         <p:txBody>
           <a:bodyPr/>
           <a:lstStyle/>
+          <a:p>
+            <a:pPr>
+              <a:buFont typeface="Arial" panose="020B0604020202020204" pitchFamily="34" charset="0"/>
+              <a:buChar char="•"/>
+            </a:pPr>
+            <a:r>
+              <a:rPr lang="de-DE" b="1" dirty="0"/>
+              <a:t>Hohe Sensitivität:</a:t>
+            </a:r>
+            <a:r>
+              <a:rPr lang="de-DE" dirty="0"/>
+              <a:t> beide Pipelines erreichen in jedem Fold eine TPR von </a:t>
+            </a:r>
+            <a:r>
+              <a:rPr lang="de-DE" b="1" dirty="0"/>
+              <a:t>1,000</a:t>
+            </a:r>
+            <a:endParaRPr lang="de-DE" dirty="0"/>
+          </a:p>
+          <a:p>
+            <a:pPr>
+              <a:buFont typeface="Arial" panose="020B0604020202020204" pitchFamily="34" charset="0"/>
+              <a:buChar char="•"/>
+            </a:pPr>
+            <a:r>
+              <a:rPr lang="de-DE" b="1" dirty="0"/>
+              <a:t>Einzelmessung:</a:t>
+            </a:r>
+            <a:r>
+              <a:rPr lang="de-DE" dirty="0"/>
+              <a:t> bessere BA und deutlich robuster in Fold 3</a:t>
+            </a:r>
+          </a:p>
+          <a:p>
+            <a:pPr>
+              <a:buFont typeface="Arial" panose="020B0604020202020204" pitchFamily="34" charset="0"/>
+              <a:buChar char="•"/>
+            </a:pPr>
+            <a:r>
+              <a:rPr lang="de-DE" b="1" dirty="0" err="1"/>
+              <a:t>mID-Mittlung</a:t>
+            </a:r>
+            <a:r>
+              <a:rPr lang="de-DE" b="1" dirty="0"/>
+              <a:t>: </a:t>
+            </a:r>
+            <a:r>
+              <a:rPr lang="de-DE" dirty="0"/>
+              <a:t>Fold 1 kommt auf ähnliche Werte wie Fold 3 Einzelmessung hat aber weniger Daten für das Training durch die </a:t>
+            </a:r>
+            <a:r>
+              <a:rPr lang="de-DE" dirty="0" err="1"/>
+              <a:t>Mittlung</a:t>
+            </a:r>
+            <a:endParaRPr lang="de-DE" dirty="0"/>
+          </a:p>
+          <a:p>
+            <a:pPr>
+              <a:buFont typeface="Arial" panose="020B0604020202020204" pitchFamily="34" charset="0"/>
+              <a:buChar char="•"/>
+            </a:pPr>
+            <a:r>
+              <a:rPr lang="de-DE" b="1" dirty="0"/>
+              <a:t>Allgemein für Einzelmessung: </a:t>
+            </a:r>
+            <a:r>
+              <a:rPr lang="de-DE" dirty="0"/>
+              <a:t>in der Einzelmessung erkennen wir, dass Fold 1 und Fold 4 durch viele Testfälle und wenige Trainings Signale viele FP gefunden werden </a:t>
+            </a:r>
+          </a:p>
+          <a:p>
+            <a:pPr lvl="1">
+              <a:buFont typeface="Arial" panose="020B0604020202020204" pitchFamily="34" charset="0"/>
+              <a:buChar char="•"/>
+            </a:pPr>
+            <a:r>
+              <a:rPr lang="de-DE" dirty="0"/>
+              <a:t>Vor allem Fold 4 mit den sehr verteilten Messungen durch Z01 im Testfall erkennt sehr viele FP</a:t>
+            </a:r>
+          </a:p>
+          <a:p>
+            <a:pPr>
+              <a:buFont typeface="Arial" panose="020B0604020202020204" pitchFamily="34" charset="0"/>
+              <a:buChar char="•"/>
+            </a:pPr>
+            <a:r>
+              <a:rPr lang="de-DE" b="1" dirty="0"/>
+              <a:t>Grenze:</a:t>
+            </a:r>
+            <a:r>
+              <a:rPr lang="de-DE" dirty="0"/>
+              <a:t> Die 98%-Trainingsschwelle generalisiert nicht immer auf eine neue gesunde Z-Gruppe</a:t>
+            </a:r>
+          </a:p>
+        </p:txBody>
+      </p:sp>
+      <p:sp>
+        <p:nvSpPr>
+          <p:cNvPr id="2" name="Titel 1">
+            <a:extLst>
+              <a:ext uri="{FF2B5EF4-FFF2-40B4-BE49-F238E27FC236}">
+                <a16:creationId xmlns:a16="http://schemas.microsoft.com/office/drawing/2014/main" id="{6697FF2F-4ABD-DBF1-1A9F-CD59B441583D}"/>
+              </a:ext>
+            </a:extLst>
+          </p:cNvPr>
+          <p:cNvSpPr>
+            <a:spLocks noGrp="1"/>
+          </p:cNvSpPr>
+          <p:nvPr>
+            <p:ph type="title"/>
+          </p:nvPr>
+        </p:nvSpPr>
+        <p:spPr/>
+        <p:txBody>
+          <a:bodyPr/>
+          <a:lstStyle/>
+          <a:p>
+            <a:r>
+              <a:rPr lang="de-DE" sz="3200" dirty="0"/>
+              <a:t>Kritische Diskussion</a:t>
+            </a:r>
+            <a:endParaRPr lang="de-DE" dirty="0"/>
+          </a:p>
+        </p:txBody>
+      </p:sp>
+    </p:spTree>
+    <p:extLst>
+      <p:ext uri="{BB962C8B-B14F-4D97-AF65-F5344CB8AC3E}">
+        <p14:creationId xmlns:p14="http://schemas.microsoft.com/office/powerpoint/2010/main" val="2865727699"/>
+      </p:ext>
+    </p:extLst>
+  </p:cSld>
+  <p:clrMapOvr>
+    <a:masterClrMapping/>
+  </p:clrMapOvr>
+</p:sld>
+</file>
+
+<file path=ppt/slides/slide18.xml><?xml version="1.0" encoding="utf-8"?>
+<p:sld xmlns:a="http://schemas.openxmlformats.org/drawingml/2006/main" xmlns:r="http://schemas.openxmlformats.org/officeDocument/2006/relationships" xmlns:p="http://schemas.openxmlformats.org/presentationml/2006/main">
+  <p:cSld>
+    <p:spTree>
+      <p:nvGrpSpPr>
+        <p:cNvPr id="1" name=""/>
+        <p:cNvGrpSpPr/>
+        <p:nvPr/>
+      </p:nvGrpSpPr>
+      <p:grpSpPr>
+        <a:xfrm>
+          <a:off x="0" y="0"/>
+          <a:ext cx="0" cy="0"/>
+          <a:chOff x="0" y="0"/>
+          <a:chExt cx="0" cy="0"/>
+        </a:xfrm>
+      </p:grpSpPr>
+      <p:sp>
+        <p:nvSpPr>
+          <p:cNvPr id="3" name="Inhaltsplatzhalter 2">
+            <a:extLst>
+              <a:ext uri="{FF2B5EF4-FFF2-40B4-BE49-F238E27FC236}">
+                <a16:creationId xmlns:a16="http://schemas.microsoft.com/office/drawing/2014/main" id="{EC792880-C870-78F8-FD9F-3732660E48D9}"/>
+              </a:ext>
+            </a:extLst>
+          </p:cNvPr>
+          <p:cNvSpPr>
+            <a:spLocks noGrp="1"/>
+          </p:cNvSpPr>
+          <p:nvPr>
+            <p:ph sz="quarter" idx="13"/>
+          </p:nvPr>
+        </p:nvSpPr>
+        <p:spPr/>
+        <p:txBody>
+          <a:bodyPr/>
+          <a:lstStyle/>
+          <a:p>
+            <a:pPr>
+              <a:buFont typeface="Arial" panose="020B0604020202020204" pitchFamily="34" charset="0"/>
+              <a:buChar char="•"/>
+            </a:pPr>
+            <a:r>
+              <a:rPr lang="de-DE" dirty="0"/>
+              <a:t>Ch1 und Ch2 werden für die Bewertung je Fold gepoolt.</a:t>
+            </a:r>
+          </a:p>
           <a:p>
             <a:pPr>
               <a:buFont typeface="Arial" panose="020B0604020202020204" pitchFamily="34" charset="0"/>
@@ -9946,72 +7874,70 @@
               <a:buFont typeface="Arial" panose="020B0604020202020204" pitchFamily="34" charset="0"/>
               <a:buChar char="•"/>
             </a:pPr>
-            <a:r>
-              <a:rPr lang="de-DE" dirty="0"/>
-              <a:t>Sehr gute Ergebnisse im aktuellen Split</a:t>
-            </a:r>
+            <a:endParaRPr lang="de-DE" dirty="0"/>
           </a:p>
           <a:p>
             <a:pPr>
               <a:buFont typeface="Arial" panose="020B0604020202020204" pitchFamily="34" charset="0"/>
               <a:buChar char="•"/>
             </a:pPr>
-            <a:r>
-              <a:rPr lang="de-DE" dirty="0"/>
-              <a:t>Aber:</a:t>
-            </a:r>
-          </a:p>
-          <a:p>
-            <a:pPr lvl="1">
+            <a:endParaRPr lang="de-DE" dirty="0"/>
+          </a:p>
+          <a:p>
+            <a:pPr>
               <a:buFont typeface="Arial" panose="020B0604020202020204" pitchFamily="34" charset="0"/>
               <a:buChar char="•"/>
             </a:pPr>
-            <a:r>
-              <a:rPr lang="de-DE" dirty="0"/>
-              <a:t>kleiner Datensatz</a:t>
-            </a:r>
-          </a:p>
-          <a:p>
-            <a:pPr lvl="1">
+            <a:endParaRPr lang="de-DE" dirty="0"/>
+          </a:p>
+          <a:p>
+            <a:pPr>
               <a:buFont typeface="Arial" panose="020B0604020202020204" pitchFamily="34" charset="0"/>
               <a:buChar char="•"/>
             </a:pPr>
-            <a:r>
-              <a:rPr lang="de-DE" dirty="0"/>
-              <a:t>nur Z05 ist beschädigt</a:t>
-            </a:r>
-          </a:p>
-          <a:p>
-            <a:pPr lvl="1">
+            <a:endParaRPr lang="de-DE" dirty="0"/>
+          </a:p>
+          <a:p>
+            <a:pPr>
               <a:buFont typeface="Arial" panose="020B0604020202020204" pitchFamily="34" charset="0"/>
               <a:buChar char="•"/>
             </a:pPr>
-            <a:r>
-              <a:rPr lang="de-DE" dirty="0"/>
-              <a:t>gute Testdaten stammen aus unbekanntem Zahnrad Z03</a:t>
-            </a:r>
-          </a:p>
-          <a:p>
-            <a:pPr lvl="1">
+            <a:endParaRPr lang="de-DE" dirty="0"/>
+          </a:p>
+          <a:p>
+            <a:pPr>
               <a:buFont typeface="Arial" panose="020B0604020202020204" pitchFamily="34" charset="0"/>
               <a:buChar char="•"/>
             </a:pPr>
-            <a:r>
-              <a:rPr lang="de-DE" dirty="0"/>
-              <a:t>beschädigte Klasse stammt weiterhin nur aus Z05</a:t>
-            </a:r>
-          </a:p>
-          <a:p>
-            <a:pPr lvl="1">
+            <a:endParaRPr lang="de-DE" dirty="0"/>
+          </a:p>
+          <a:p>
+            <a:pPr>
               <a:buFont typeface="Arial" panose="020B0604020202020204" pitchFamily="34" charset="0"/>
               <a:buChar char="•"/>
             </a:pPr>
             <a:r>
+              <a:rPr lang="de-DE" b="1" dirty="0"/>
+              <a:t>ROC-Hinweis:</a:t>
+            </a:r>
+            <a:r>
               <a:rPr lang="de-DE" dirty="0"/>
-              <a:t>Generalisierung auf neue beschädigte Zahnräder offen</a:t>
-            </a:r>
-          </a:p>
-          <a:p>
+              <a:t> Fold 2 erreicht in Ch1 und Ch2 jeweils </a:t>
+            </a:r>
+            <a:r>
+              <a:rPr lang="de-DE" b="1" dirty="0"/>
+              <a:t>ROC-AUC 1,000</a:t>
+            </a:r>
+            <a:r>
+              <a:rPr lang="de-DE" dirty="0"/>
+              <a:t>.</a:t>
+            </a:r>
+          </a:p>
+          <a:p>
+            <a:pPr>
+              <a:buFont typeface="Arial" panose="020B0604020202020204" pitchFamily="34" charset="0"/>
+              <a:buChar char="•"/>
+            </a:pPr>
             <a:endParaRPr lang="de-DE" dirty="0"/>
           </a:p>
         </p:txBody>
@@ -10021,7 +7947,7 @@
           <p:cNvPr id="2" name="Titel 1">
             <a:extLst>
               <a:ext uri="{FF2B5EF4-FFF2-40B4-BE49-F238E27FC236}">
-                <a16:creationId xmlns:a16="http://schemas.microsoft.com/office/drawing/2014/main" id="{6697FF2F-4ABD-DBF1-1A9F-CD59B441583D}"/>
+                <a16:creationId xmlns:a16="http://schemas.microsoft.com/office/drawing/2014/main" id="{C254BBB6-51EB-B8DF-B124-F43AAB73DC5D}"/>
               </a:ext>
             </a:extLst>
           </p:cNvPr>
@@ -10039,16 +7965,633 @@
           <a:p>
             <a:r>
               <a:rPr lang="de-DE" sz="3200" dirty="0"/>
-              <a:t>Kritische Diskussion</a:t>
+              <a:t>Fazit</a:t>
+            </a:r>
+          </a:p>
+        </p:txBody>
+      </p:sp>
+      <p:sp>
+        <p:nvSpPr>
+          <p:cNvPr id="5" name="Datumsplatzhalter 4">
+            <a:extLst>
+              <a:ext uri="{FF2B5EF4-FFF2-40B4-BE49-F238E27FC236}">
+                <a16:creationId xmlns:a16="http://schemas.microsoft.com/office/drawing/2014/main" id="{A1BB0821-ACF4-FAAA-FCFD-FE000BACD3BE}"/>
+              </a:ext>
+            </a:extLst>
+          </p:cNvPr>
+          <p:cNvSpPr>
+            <a:spLocks noGrp="1"/>
+          </p:cNvSpPr>
+          <p:nvPr>
+            <p:ph type="dt" sz="half" idx="12"/>
+          </p:nvPr>
+        </p:nvSpPr>
+        <p:spPr/>
+        <p:txBody>
+          <a:bodyPr/>
+          <a:lstStyle/>
+          <a:p>
+            <a:r>
+              <a:rPr lang="de-DE"/>
+              <a:t>23.07.2026</a:t>
+            </a:r>
+          </a:p>
+        </p:txBody>
+      </p:sp>
+      <p:sp>
+        <p:nvSpPr>
+          <p:cNvPr id="6" name="Fußzeilenplatzhalter 5">
+            <a:extLst>
+              <a:ext uri="{FF2B5EF4-FFF2-40B4-BE49-F238E27FC236}">
+                <a16:creationId xmlns:a16="http://schemas.microsoft.com/office/drawing/2014/main" id="{44504410-AB8A-471C-1D33-002F641A2C98}"/>
+              </a:ext>
+            </a:extLst>
+          </p:cNvPr>
+          <p:cNvSpPr>
+            <a:spLocks noGrp="1"/>
+          </p:cNvSpPr>
+          <p:nvPr>
+            <p:ph type="ftr" sz="quarter" idx="11"/>
+          </p:nvPr>
+        </p:nvSpPr>
+        <p:spPr/>
+        <p:txBody>
+          <a:bodyPr/>
+          <a:lstStyle/>
+          <a:p>
+            <a:r>
+              <a:rPr lang="de-DE"/>
+              <a:t>Materialdiagnostik: Task 4</a:t>
             </a:r>
             <a:endParaRPr lang="de-DE" dirty="0"/>
           </a:p>
         </p:txBody>
       </p:sp>
+      <p:sp>
+        <p:nvSpPr>
+          <p:cNvPr id="7" name="Foliennummernplatzhalter 6">
+            <a:extLst>
+              <a:ext uri="{FF2B5EF4-FFF2-40B4-BE49-F238E27FC236}">
+                <a16:creationId xmlns:a16="http://schemas.microsoft.com/office/drawing/2014/main" id="{A8EACD8A-4E1D-8443-CADB-49E8F22A8887}"/>
+              </a:ext>
+            </a:extLst>
+          </p:cNvPr>
+          <p:cNvSpPr>
+            <a:spLocks noGrp="1"/>
+          </p:cNvSpPr>
+          <p:nvPr>
+            <p:ph type="sldNum" sz="quarter" idx="10"/>
+          </p:nvPr>
+        </p:nvSpPr>
+        <p:spPr/>
+        <p:txBody>
+          <a:bodyPr/>
+          <a:lstStyle/>
+          <a:p>
+            <a:fld id="{80B4FCE6-DC73-4135-BC56-1F242D45A84C}" type="slidenum">
+              <a:rPr lang="de-DE" smtClean="0"/>
+              <a:t>18</a:t>
+            </a:fld>
+            <a:endParaRPr lang="de-DE"/>
+          </a:p>
+        </p:txBody>
+      </p:sp>
+      <p:graphicFrame>
+        <p:nvGraphicFramePr>
+          <p:cNvPr id="4" name="Tabelle 3">
+            <a:extLst>
+              <a:ext uri="{FF2B5EF4-FFF2-40B4-BE49-F238E27FC236}">
+                <a16:creationId xmlns:a16="http://schemas.microsoft.com/office/drawing/2014/main" id="{629F289D-2D85-626C-314C-A0BDD66220C6}"/>
+              </a:ext>
+            </a:extLst>
+          </p:cNvPr>
+          <p:cNvGraphicFramePr>
+            <a:graphicFrameLocks noGrp="1"/>
+          </p:cNvGraphicFramePr>
+          <p:nvPr>
+            <p:extLst>
+              <p:ext uri="{D42A27DB-BD31-4B8C-83A1-F6EECF244321}">
+                <p14:modId xmlns:p14="http://schemas.microsoft.com/office/powerpoint/2010/main" val="1273015678"/>
+              </p:ext>
+            </p:extLst>
+          </p:nvPr>
+        </p:nvGraphicFramePr>
+        <p:xfrm>
+          <a:off x="338136" y="2226346"/>
+          <a:ext cx="11244264" cy="2818620"/>
+        </p:xfrm>
+        <a:graphic>
+          <a:graphicData uri="http://schemas.openxmlformats.org/drawingml/2006/table">
+            <a:tbl>
+              <a:tblPr firstRow="1" bandRow="1">
+                <a:tableStyleId>{5C22544A-7EE6-4342-B048-85BDC9FD1C3A}</a:tableStyleId>
+              </a:tblPr>
+              <a:tblGrid>
+                <a:gridCol w="2142305">
+                  <a:extLst>
+                    <a:ext uri="{9D8B030D-6E8A-4147-A177-3AD203B41FA5}">
+                      <a16:colId xmlns:a16="http://schemas.microsoft.com/office/drawing/2014/main" val="2705374214"/>
+                    </a:ext>
+                  </a:extLst>
+                </a:gridCol>
+                <a:gridCol w="1605783">
+                  <a:extLst>
+                    <a:ext uri="{9D8B030D-6E8A-4147-A177-3AD203B41FA5}">
+                      <a16:colId xmlns:a16="http://schemas.microsoft.com/office/drawing/2014/main" val="2785795376"/>
+                    </a:ext>
+                  </a:extLst>
+                </a:gridCol>
+                <a:gridCol w="1874044">
+                  <a:extLst>
+                    <a:ext uri="{9D8B030D-6E8A-4147-A177-3AD203B41FA5}">
+                      <a16:colId xmlns:a16="http://schemas.microsoft.com/office/drawing/2014/main" val="171928383"/>
+                    </a:ext>
+                  </a:extLst>
+                </a:gridCol>
+                <a:gridCol w="1874044">
+                  <a:extLst>
+                    <a:ext uri="{9D8B030D-6E8A-4147-A177-3AD203B41FA5}">
+                      <a16:colId xmlns:a16="http://schemas.microsoft.com/office/drawing/2014/main" val="3769601062"/>
+                    </a:ext>
+                  </a:extLst>
+                </a:gridCol>
+                <a:gridCol w="1874044">
+                  <a:extLst>
+                    <a:ext uri="{9D8B030D-6E8A-4147-A177-3AD203B41FA5}">
+                      <a16:colId xmlns:a16="http://schemas.microsoft.com/office/drawing/2014/main" val="3807350254"/>
+                    </a:ext>
+                  </a:extLst>
+                </a:gridCol>
+                <a:gridCol w="1874044">
+                  <a:extLst>
+                    <a:ext uri="{9D8B030D-6E8A-4147-A177-3AD203B41FA5}">
+                      <a16:colId xmlns:a16="http://schemas.microsoft.com/office/drawing/2014/main" val="3982025148"/>
+                    </a:ext>
+                  </a:extLst>
+                </a:gridCol>
+              </a:tblGrid>
+              <a:tr h="563724">
+                <a:tc>
+                  <a:txBody>
+                    <a:bodyPr/>
+                    <a:lstStyle/>
+                    <a:p>
+                      <a:r>
+                        <a:rPr lang="de-DE" dirty="0">
+                          <a:solidFill>
+                            <a:schemeClr val="tx1"/>
+                          </a:solidFill>
+                        </a:rPr>
+                        <a:t>Fold (gesunder Test)</a:t>
+                      </a:r>
+                    </a:p>
+                  </a:txBody>
+                  <a:tcPr/>
+                </a:tc>
+                <a:tc>
+                  <a:txBody>
+                    <a:bodyPr/>
+                    <a:lstStyle/>
+                    <a:p>
+                      <a:r>
+                        <a:rPr lang="de-DE" dirty="0">
+                          <a:solidFill>
+                            <a:schemeClr val="tx1"/>
+                          </a:solidFill>
+                        </a:rPr>
+                        <a:t>TPR</a:t>
+                      </a:r>
+                    </a:p>
+                  </a:txBody>
+                  <a:tcPr/>
+                </a:tc>
+                <a:tc>
+                  <a:txBody>
+                    <a:bodyPr/>
+                    <a:lstStyle/>
+                    <a:p>
+                      <a:r>
+                        <a:rPr lang="de-DE" dirty="0">
+                          <a:solidFill>
+                            <a:schemeClr val="tx1"/>
+                          </a:solidFill>
+                        </a:rPr>
+                        <a:t>TNR</a:t>
+                      </a:r>
+                    </a:p>
+                  </a:txBody>
+                  <a:tcPr/>
+                </a:tc>
+                <a:tc>
+                  <a:txBody>
+                    <a:bodyPr/>
+                    <a:lstStyle/>
+                    <a:p>
+                      <a:r>
+                        <a:rPr lang="de-DE" dirty="0" err="1">
+                          <a:solidFill>
+                            <a:schemeClr val="tx1"/>
+                          </a:solidFill>
+                        </a:rPr>
+                        <a:t>Accuracy</a:t>
+                      </a:r>
+                      <a:endParaRPr lang="de-DE" dirty="0">
+                        <a:solidFill>
+                          <a:schemeClr val="tx1"/>
+                        </a:solidFill>
+                      </a:endParaRPr>
+                    </a:p>
+                  </a:txBody>
+                  <a:tcPr/>
+                </a:tc>
+                <a:tc>
+                  <a:txBody>
+                    <a:bodyPr/>
+                    <a:lstStyle/>
+                    <a:p>
+                      <a:r>
+                        <a:rPr lang="de-DE" dirty="0">
+                          <a:solidFill>
+                            <a:schemeClr val="tx1"/>
+                          </a:solidFill>
+                        </a:rPr>
+                        <a:t>BA</a:t>
+                      </a:r>
+                    </a:p>
+                  </a:txBody>
+                  <a:tcPr/>
+                </a:tc>
+                <a:tc>
+                  <a:txBody>
+                    <a:bodyPr/>
+                    <a:lstStyle/>
+                    <a:p>
+                      <a:r>
+                        <a:rPr lang="de-DE" dirty="0">
+                          <a:solidFill>
+                            <a:schemeClr val="tx1"/>
+                          </a:solidFill>
+                        </a:rPr>
+                        <a:t>F1</a:t>
+                      </a:r>
+                    </a:p>
+                  </a:txBody>
+                  <a:tcPr/>
+                </a:tc>
+                <a:extLst>
+                  <a:ext uri="{0D108BD9-81ED-4DB2-BD59-A6C34878D82A}">
+                    <a16:rowId xmlns:a16="http://schemas.microsoft.com/office/drawing/2014/main" val="175312995"/>
+                  </a:ext>
+                </a:extLst>
+              </a:tr>
+              <a:tr h="563724">
+                <a:tc>
+                  <a:txBody>
+                    <a:bodyPr/>
+                    <a:lstStyle/>
+                    <a:p>
+                      <a:r>
+                        <a:rPr lang="de-DE" dirty="0"/>
+                        <a:t>1 (Z04)</a:t>
+                      </a:r>
+                    </a:p>
+                  </a:txBody>
+                  <a:tcPr/>
+                </a:tc>
+                <a:tc>
+                  <a:txBody>
+                    <a:bodyPr/>
+                    <a:lstStyle/>
+                    <a:p>
+                      <a:r>
+                        <a:rPr lang="de-DE" dirty="0"/>
+                        <a:t>1.00</a:t>
+                      </a:r>
+                    </a:p>
+                  </a:txBody>
+                  <a:tcPr/>
+                </a:tc>
+                <a:tc>
+                  <a:txBody>
+                    <a:bodyPr/>
+                    <a:lstStyle/>
+                    <a:p>
+                      <a:r>
+                        <a:rPr lang="de-DE" dirty="0"/>
+                        <a:t>0.875</a:t>
+                      </a:r>
+                    </a:p>
+                  </a:txBody>
+                  <a:tcPr/>
+                </a:tc>
+                <a:tc>
+                  <a:txBody>
+                    <a:bodyPr/>
+                    <a:lstStyle/>
+                    <a:p>
+                      <a:r>
+                        <a:rPr lang="de-DE" dirty="0"/>
+                        <a:t>0.906</a:t>
+                      </a:r>
+                    </a:p>
+                  </a:txBody>
+                  <a:tcPr/>
+                </a:tc>
+                <a:tc>
+                  <a:txBody>
+                    <a:bodyPr/>
+                    <a:lstStyle/>
+                    <a:p>
+                      <a:r>
+                        <a:rPr lang="de-DE" dirty="0"/>
+                        <a:t>0.938</a:t>
+                      </a:r>
+                    </a:p>
+                  </a:txBody>
+                  <a:tcPr/>
+                </a:tc>
+                <a:tc>
+                  <a:txBody>
+                    <a:bodyPr/>
+                    <a:lstStyle/>
+                    <a:p>
+                      <a:r>
+                        <a:rPr lang="de-DE" dirty="0"/>
+                        <a:t>0.842</a:t>
+                      </a:r>
+                    </a:p>
+                  </a:txBody>
+                  <a:tcPr/>
+                </a:tc>
+                <a:extLst>
+                  <a:ext uri="{0D108BD9-81ED-4DB2-BD59-A6C34878D82A}">
+                    <a16:rowId xmlns:a16="http://schemas.microsoft.com/office/drawing/2014/main" val="1396284393"/>
+                  </a:ext>
+                </a:extLst>
+              </a:tr>
+              <a:tr h="563724">
+                <a:tc>
+                  <a:txBody>
+                    <a:bodyPr/>
+                    <a:lstStyle/>
+                    <a:p>
+                      <a:r>
+                        <a:rPr lang="de-DE" dirty="0"/>
+                        <a:t>2 (Z03)</a:t>
+                      </a:r>
+                    </a:p>
+                  </a:txBody>
+                  <a:tcPr/>
+                </a:tc>
+                <a:tc>
+                  <a:txBody>
+                    <a:bodyPr/>
+                    <a:lstStyle/>
+                    <a:p>
+                      <a:r>
+                        <a:rPr lang="de-DE" dirty="0"/>
+                        <a:t>1.00</a:t>
+                      </a:r>
+                    </a:p>
+                  </a:txBody>
+                  <a:tcPr/>
+                </a:tc>
+                <a:tc>
+                  <a:txBody>
+                    <a:bodyPr/>
+                    <a:lstStyle/>
+                    <a:p>
+                      <a:r>
+                        <a:rPr lang="de-DE" dirty="0"/>
+                        <a:t>0.875</a:t>
+                      </a:r>
+                    </a:p>
+                  </a:txBody>
+                  <a:tcPr/>
+                </a:tc>
+                <a:tc>
+                  <a:txBody>
+                    <a:bodyPr/>
+                    <a:lstStyle/>
+                    <a:p>
+                      <a:r>
+                        <a:rPr lang="de-DE" dirty="0"/>
+                        <a:t>0.938</a:t>
+                      </a:r>
+                    </a:p>
+                  </a:txBody>
+                  <a:tcPr/>
+                </a:tc>
+                <a:tc>
+                  <a:txBody>
+                    <a:bodyPr/>
+                    <a:lstStyle/>
+                    <a:p>
+                      <a:r>
+                        <a:rPr lang="de-DE" dirty="0"/>
+                        <a:t>0.938</a:t>
+                      </a:r>
+                    </a:p>
+                  </a:txBody>
+                  <a:tcPr/>
+                </a:tc>
+                <a:tc>
+                  <a:txBody>
+                    <a:bodyPr/>
+                    <a:lstStyle/>
+                    <a:p>
+                      <a:r>
+                        <a:rPr lang="de-DE" dirty="0"/>
+                        <a:t>0.941</a:t>
+                      </a:r>
+                    </a:p>
+                  </a:txBody>
+                  <a:tcPr/>
+                </a:tc>
+                <a:extLst>
+                  <a:ext uri="{0D108BD9-81ED-4DB2-BD59-A6C34878D82A}">
+                    <a16:rowId xmlns:a16="http://schemas.microsoft.com/office/drawing/2014/main" val="668171056"/>
+                  </a:ext>
+                </a:extLst>
+              </a:tr>
+              <a:tr h="563724">
+                <a:tc>
+                  <a:txBody>
+                    <a:bodyPr/>
+                    <a:lstStyle/>
+                    <a:p>
+                      <a:r>
+                        <a:rPr lang="de-DE" dirty="0"/>
+                        <a:t>3 (Z02)</a:t>
+                      </a:r>
+                    </a:p>
+                  </a:txBody>
+                  <a:tcPr/>
+                </a:tc>
+                <a:tc>
+                  <a:txBody>
+                    <a:bodyPr/>
+                    <a:lstStyle/>
+                    <a:p>
+                      <a:r>
+                        <a:rPr lang="de-DE" dirty="0"/>
+                        <a:t>1.00</a:t>
+                      </a:r>
+                    </a:p>
+                  </a:txBody>
+                  <a:tcPr/>
+                </a:tc>
+                <a:tc>
+                  <a:txBody>
+                    <a:bodyPr/>
+                    <a:lstStyle/>
+                    <a:p>
+                      <a:r>
+                        <a:rPr lang="de-DE" dirty="0"/>
+                        <a:t>0.950</a:t>
+                      </a:r>
+                    </a:p>
+                  </a:txBody>
+                  <a:tcPr/>
+                </a:tc>
+                <a:tc>
+                  <a:txBody>
+                    <a:bodyPr/>
+                    <a:lstStyle/>
+                    <a:p>
+                      <a:r>
+                        <a:rPr lang="de-DE" dirty="0"/>
+                        <a:t>0.975</a:t>
+                      </a:r>
+                    </a:p>
+                  </a:txBody>
+                  <a:tcPr/>
+                </a:tc>
+                <a:tc>
+                  <a:txBody>
+                    <a:bodyPr/>
+                    <a:lstStyle/>
+                    <a:p>
+                      <a:r>
+                        <a:rPr lang="de-DE" dirty="0"/>
+                        <a:t>0.975</a:t>
+                      </a:r>
+                    </a:p>
+                  </a:txBody>
+                  <a:tcPr/>
+                </a:tc>
+                <a:tc>
+                  <a:txBody>
+                    <a:bodyPr/>
+                    <a:lstStyle/>
+                    <a:p>
+                      <a:r>
+                        <a:rPr lang="de-DE" dirty="0"/>
+                        <a:t>0.976</a:t>
+                      </a:r>
+                    </a:p>
+                  </a:txBody>
+                  <a:tcPr/>
+                </a:tc>
+                <a:extLst>
+                  <a:ext uri="{0D108BD9-81ED-4DB2-BD59-A6C34878D82A}">
+                    <a16:rowId xmlns:a16="http://schemas.microsoft.com/office/drawing/2014/main" val="1690458472"/>
+                  </a:ext>
+                </a:extLst>
+              </a:tr>
+              <a:tr h="563724">
+                <a:tc>
+                  <a:txBody>
+                    <a:bodyPr/>
+                    <a:lstStyle/>
+                    <a:p>
+                      <a:r>
+                        <a:rPr lang="de-DE" dirty="0"/>
+                        <a:t>4 (Z01)</a:t>
+                      </a:r>
+                    </a:p>
+                  </a:txBody>
+                  <a:tcPr/>
+                </a:tc>
+                <a:tc>
+                  <a:txBody>
+                    <a:bodyPr/>
+                    <a:lstStyle/>
+                    <a:p>
+                      <a:r>
+                        <a:rPr lang="de-DE" dirty="0"/>
+                        <a:t>1.00</a:t>
+                      </a:r>
+                    </a:p>
+                  </a:txBody>
+                  <a:tcPr/>
+                </a:tc>
+                <a:tc>
+                  <a:txBody>
+                    <a:bodyPr/>
+                    <a:lstStyle/>
+                    <a:p>
+                      <a:r>
+                        <a:rPr lang="de-DE" dirty="0"/>
+                        <a:t>0.510</a:t>
+                      </a:r>
+                    </a:p>
+                  </a:txBody>
+                  <a:tcPr/>
+                </a:tc>
+                <a:tc>
+                  <a:txBody>
+                    <a:bodyPr/>
+                    <a:lstStyle/>
+                    <a:p>
+                      <a:r>
+                        <a:rPr lang="de-DE" dirty="0"/>
+                        <a:t>0.592</a:t>
+                      </a:r>
+                    </a:p>
+                  </a:txBody>
+                  <a:tcPr/>
+                </a:tc>
+                <a:tc>
+                  <a:txBody>
+                    <a:bodyPr/>
+                    <a:lstStyle/>
+                    <a:p>
+                      <a:r>
+                        <a:rPr lang="de-DE" dirty="0"/>
+                        <a:t>0.755</a:t>
+                      </a:r>
+                    </a:p>
+                  </a:txBody>
+                  <a:tcPr/>
+                </a:tc>
+                <a:tc>
+                  <a:txBody>
+                    <a:bodyPr/>
+                    <a:lstStyle/>
+                    <a:p>
+                      <a:r>
+                        <a:rPr lang="de-DE" dirty="0"/>
+                        <a:t>0.449</a:t>
+                      </a:r>
+                    </a:p>
+                  </a:txBody>
+                  <a:tcPr/>
+                </a:tc>
+                <a:extLst>
+                  <a:ext uri="{0D108BD9-81ED-4DB2-BD59-A6C34878D82A}">
+                    <a16:rowId xmlns:a16="http://schemas.microsoft.com/office/drawing/2014/main" val="1893996887"/>
+                  </a:ext>
+                </a:extLst>
+              </a:tr>
+            </a:tbl>
+          </a:graphicData>
+        </a:graphic>
+      </p:graphicFrame>
     </p:spTree>
     <p:extLst>
       <p:ext uri="{BB962C8B-B14F-4D97-AF65-F5344CB8AC3E}">
-        <p14:creationId xmlns:p14="http://schemas.microsoft.com/office/powerpoint/2010/main" val="2865727699"/>
+        <p14:creationId xmlns:p14="http://schemas.microsoft.com/office/powerpoint/2010/main" val="176930895"/>
       </p:ext>
     </p:extLst>
   </p:cSld>
@@ -10077,201 +8620,36 @@
       </p:grpSpPr>
       <p:sp>
         <p:nvSpPr>
-          <p:cNvPr id="3" name="Inhaltsplatzhalter 2">
-            <a:extLst>
-              <a:ext uri="{FF2B5EF4-FFF2-40B4-BE49-F238E27FC236}">
-                <a16:creationId xmlns:a16="http://schemas.microsoft.com/office/drawing/2014/main" id="{EC792880-C870-78F8-FD9F-3732660E48D9}"/>
-              </a:ext>
-            </a:extLst>
-          </p:cNvPr>
-          <p:cNvSpPr>
-            <a:spLocks noGrp="1"/>
-          </p:cNvSpPr>
-          <p:nvPr>
-            <p:ph sz="quarter" idx="13"/>
-          </p:nvPr>
-        </p:nvSpPr>
-        <p:spPr/>
-        <p:txBody>
-          <a:bodyPr/>
-          <a:lstStyle/>
-          <a:p>
-            <a:pPr>
-              <a:buFont typeface="Arial" panose="020B0604020202020204" pitchFamily="34" charset="0"/>
-              <a:buChar char="•"/>
-            </a:pPr>
-            <a:endParaRPr lang="de-DE" dirty="0"/>
-          </a:p>
-          <a:p>
-            <a:pPr>
-              <a:buFont typeface="Arial" panose="020B0604020202020204" pitchFamily="34" charset="0"/>
-              <a:buChar char="•"/>
-            </a:pPr>
+          <p:cNvPr id="2" name="Titel 1">
+            <a:extLst>
+              <a:ext uri="{FF2B5EF4-FFF2-40B4-BE49-F238E27FC236}">
+                <a16:creationId xmlns:a16="http://schemas.microsoft.com/office/drawing/2014/main" id="{77E9BDB3-AF05-698B-206C-6C9919554531}"/>
+              </a:ext>
+            </a:extLst>
+          </p:cNvPr>
+          <p:cNvSpPr>
+            <a:spLocks noGrp="1"/>
+          </p:cNvSpPr>
+          <p:nvPr>
+            <p:ph type="title"/>
+          </p:nvPr>
+        </p:nvSpPr>
+        <p:spPr/>
+        <p:txBody>
+          <a:bodyPr/>
+          <a:lstStyle/>
+          <a:p>
             <a:r>
               <a:rPr lang="de-DE" dirty="0"/>
-              <a:t>Pipeline von gemittelten Merkmalen zu zwei Channel-MLPs</a:t>
-            </a:r>
-          </a:p>
-          <a:p>
-            <a:pPr>
-              <a:buFont typeface="Arial" panose="020B0604020202020204" pitchFamily="34" charset="0"/>
-              <a:buChar char="•"/>
-            </a:pPr>
-            <a:r>
-              <a:rPr lang="de-DE" dirty="0"/>
-              <a:t>Zahnrad basierter Split statt zufälligem Dateisplit</a:t>
-            </a:r>
-          </a:p>
-          <a:p>
-            <a:pPr>
-              <a:buFont typeface="Arial" panose="020B0604020202020204" pitchFamily="34" charset="0"/>
-              <a:buChar char="•"/>
-            </a:pPr>
-            <a:r>
-              <a:rPr lang="de-DE" dirty="0"/>
-              <a:t>Testsignale werden nach Channel geroutet</a:t>
-            </a:r>
-          </a:p>
-          <a:p>
-            <a:pPr>
-              <a:buFont typeface="Arial" panose="020B0604020202020204" pitchFamily="34" charset="0"/>
-              <a:buChar char="•"/>
-            </a:pPr>
-            <a:r>
-              <a:rPr lang="de-DE" dirty="0"/>
-              <a:t>Beide MLPs erreichen perfekte Testwerte im aktuellen Datensatz</a:t>
-            </a:r>
-          </a:p>
-          <a:p>
-            <a:pPr>
-              <a:buFont typeface="Arial" panose="020B0604020202020204" pitchFamily="34" charset="0"/>
-              <a:buChar char="•"/>
-            </a:pPr>
-            <a:r>
-              <a:rPr lang="de-DE" dirty="0"/>
-              <a:t>Nächster Schritt: mehr beschädigte Proben testen</a:t>
-            </a:r>
-          </a:p>
-        </p:txBody>
-      </p:sp>
-      <p:sp>
-        <p:nvSpPr>
-          <p:cNvPr id="2" name="Titel 1">
-            <a:extLst>
-              <a:ext uri="{FF2B5EF4-FFF2-40B4-BE49-F238E27FC236}">
-                <a16:creationId xmlns:a16="http://schemas.microsoft.com/office/drawing/2014/main" id="{C254BBB6-51EB-B8DF-B124-F43AAB73DC5D}"/>
-              </a:ext>
-            </a:extLst>
-          </p:cNvPr>
-          <p:cNvSpPr>
-            <a:spLocks noGrp="1"/>
-          </p:cNvSpPr>
-          <p:nvPr>
-            <p:ph type="title"/>
-          </p:nvPr>
-        </p:nvSpPr>
-        <p:spPr/>
-        <p:txBody>
-          <a:bodyPr/>
-          <a:lstStyle/>
-          <a:p>
-            <a:r>
-              <a:rPr lang="de-DE" sz="3200" dirty="0"/>
-              <a:t>Fazit</a:t>
-            </a:r>
-          </a:p>
-        </p:txBody>
-      </p:sp>
-      <p:sp>
-        <p:nvSpPr>
-          <p:cNvPr id="5" name="Datumsplatzhalter 4">
-            <a:extLst>
-              <a:ext uri="{FF2B5EF4-FFF2-40B4-BE49-F238E27FC236}">
-                <a16:creationId xmlns:a16="http://schemas.microsoft.com/office/drawing/2014/main" id="{A1BB0821-ACF4-FAAA-FCFD-FE000BACD3BE}"/>
-              </a:ext>
-            </a:extLst>
-          </p:cNvPr>
-          <p:cNvSpPr>
-            <a:spLocks noGrp="1"/>
-          </p:cNvSpPr>
-          <p:nvPr>
-            <p:ph type="dt" sz="half" idx="12"/>
-          </p:nvPr>
-        </p:nvSpPr>
-        <p:spPr/>
-        <p:txBody>
-          <a:bodyPr/>
-          <a:lstStyle/>
-          <a:p>
-            <a:r>
-              <a:rPr lang="de-DE"/>
-              <a:t>23.07.2026</a:t>
-            </a:r>
-          </a:p>
-        </p:txBody>
-      </p:sp>
-      <p:sp>
-        <p:nvSpPr>
-          <p:cNvPr id="6" name="Fußzeilenplatzhalter 5">
-            <a:extLst>
-              <a:ext uri="{FF2B5EF4-FFF2-40B4-BE49-F238E27FC236}">
-                <a16:creationId xmlns:a16="http://schemas.microsoft.com/office/drawing/2014/main" id="{44504410-AB8A-471C-1D33-002F641A2C98}"/>
-              </a:ext>
-            </a:extLst>
-          </p:cNvPr>
-          <p:cNvSpPr>
-            <a:spLocks noGrp="1"/>
-          </p:cNvSpPr>
-          <p:nvPr>
-            <p:ph type="ftr" sz="quarter" idx="11"/>
-          </p:nvPr>
-        </p:nvSpPr>
-        <p:spPr/>
-        <p:txBody>
-          <a:bodyPr/>
-          <a:lstStyle/>
-          <a:p>
-            <a:r>
-              <a:rPr lang="de-DE"/>
-              <a:t>Materialdiagnostik: Task 4</a:t>
-            </a:r>
-            <a:endParaRPr lang="de-DE" dirty="0"/>
-          </a:p>
-        </p:txBody>
-      </p:sp>
-      <p:sp>
-        <p:nvSpPr>
-          <p:cNvPr id="7" name="Foliennummernplatzhalter 6">
-            <a:extLst>
-              <a:ext uri="{FF2B5EF4-FFF2-40B4-BE49-F238E27FC236}">
-                <a16:creationId xmlns:a16="http://schemas.microsoft.com/office/drawing/2014/main" id="{A8EACD8A-4E1D-8443-CADB-49E8F22A8887}"/>
-              </a:ext>
-            </a:extLst>
-          </p:cNvPr>
-          <p:cNvSpPr>
-            <a:spLocks noGrp="1"/>
-          </p:cNvSpPr>
-          <p:nvPr>
-            <p:ph type="sldNum" sz="quarter" idx="10"/>
-          </p:nvPr>
-        </p:nvSpPr>
-        <p:spPr/>
-        <p:txBody>
-          <a:bodyPr/>
-          <a:lstStyle/>
-          <a:p>
-            <a:fld id="{80B4FCE6-DC73-4135-BC56-1F242D45A84C}" type="slidenum">
-              <a:rPr lang="de-DE" smtClean="0"/>
-              <a:t>19</a:t>
-            </a:fld>
-            <a:endParaRPr lang="de-DE"/>
+              <a:t>Ende</a:t>
+            </a:r>
           </a:p>
         </p:txBody>
       </p:sp>
     </p:spTree>
     <p:extLst>
       <p:ext uri="{BB962C8B-B14F-4D97-AF65-F5344CB8AC3E}">
-        <p14:creationId xmlns:p14="http://schemas.microsoft.com/office/powerpoint/2010/main" val="176930895"/>
+        <p14:creationId xmlns:p14="http://schemas.microsoft.com/office/powerpoint/2010/main" val="467022224"/>
       </p:ext>
     </p:extLst>
   </p:cSld>
@@ -10513,64 +8891,6 @@
 </p:sld>
 </file>
 
-<file path=ppt/slides/slide20.xml><?xml version="1.0" encoding="utf-8"?>
-<p:sld xmlns:a="http://schemas.openxmlformats.org/drawingml/2006/main" xmlns:r="http://schemas.openxmlformats.org/officeDocument/2006/relationships" xmlns:p="http://schemas.openxmlformats.org/presentationml/2006/main">
-  <p:cSld>
-    <p:spTree>
-      <p:nvGrpSpPr>
-        <p:cNvPr id="1" name=""/>
-        <p:cNvGrpSpPr/>
-        <p:nvPr/>
-      </p:nvGrpSpPr>
-      <p:grpSpPr>
-        <a:xfrm>
-          <a:off x="0" y="0"/>
-          <a:ext cx="0" cy="0"/>
-          <a:chOff x="0" y="0"/>
-          <a:chExt cx="0" cy="0"/>
-        </a:xfrm>
-      </p:grpSpPr>
-      <p:sp>
-        <p:nvSpPr>
-          <p:cNvPr id="2" name="Titel 1">
-            <a:extLst>
-              <a:ext uri="{FF2B5EF4-FFF2-40B4-BE49-F238E27FC236}">
-                <a16:creationId xmlns:a16="http://schemas.microsoft.com/office/drawing/2014/main" id="{77E9BDB3-AF05-698B-206C-6C9919554531}"/>
-              </a:ext>
-            </a:extLst>
-          </p:cNvPr>
-          <p:cNvSpPr>
-            <a:spLocks noGrp="1"/>
-          </p:cNvSpPr>
-          <p:nvPr>
-            <p:ph type="title"/>
-          </p:nvPr>
-        </p:nvSpPr>
-        <p:spPr/>
-        <p:txBody>
-          <a:bodyPr/>
-          <a:lstStyle/>
-          <a:p>
-            <a:r>
-              <a:rPr lang="de-DE" dirty="0"/>
-              <a:t>Ende</a:t>
-            </a:r>
-          </a:p>
-        </p:txBody>
-      </p:sp>
-    </p:spTree>
-    <p:extLst>
-      <p:ext uri="{BB962C8B-B14F-4D97-AF65-F5344CB8AC3E}">
-        <p14:creationId xmlns:p14="http://schemas.microsoft.com/office/powerpoint/2010/main" val="467022224"/>
-      </p:ext>
-    </p:extLst>
-  </p:cSld>
-  <p:clrMapOvr>
-    <a:masterClrMapping/>
-  </p:clrMapOvr>
-</p:sld>
-</file>
-
 <file path=ppt/slides/slide3.xml><?xml version="1.0" encoding="utf-8"?>
 <p:sld xmlns:a="http://schemas.openxmlformats.org/drawingml/2006/main" xmlns:r="http://schemas.openxmlformats.org/officeDocument/2006/relationships" xmlns:p="http://schemas.openxmlformats.org/presentationml/2006/main">
   <p:cSld>
@@ -10826,7 +9146,7 @@
             <p:ph sz="quarter" idx="14"/>
             <p:extLst>
               <p:ext uri="{D42A27DB-BD31-4B8C-83A1-F6EECF244321}">
-                <p14:modId xmlns:p14="http://schemas.microsoft.com/office/powerpoint/2010/main" val="1964912950"/>
+                <p14:modId xmlns:p14="http://schemas.microsoft.com/office/powerpoint/2010/main" val="2728364096"/>
               </p:ext>
             </p:extLst>
           </p:nvPr>
@@ -10871,7 +9191,11 @@
                     <a:lstStyle/>
                     <a:p>
                       <a:r>
-                        <a:rPr lang="de-DE" dirty="0"/>
+                        <a:rPr lang="de-DE" dirty="0">
+                          <a:solidFill>
+                            <a:schemeClr val="tx1"/>
+                          </a:solidFill>
+                        </a:rPr>
                         <a:t>Pipeline</a:t>
                       </a:r>
                     </a:p>
@@ -10884,7 +9208,11 @@
                     <a:lstStyle/>
                     <a:p>
                       <a:r>
-                        <a:rPr lang="de-DE" dirty="0"/>
+                        <a:rPr lang="de-DE" dirty="0">
+                          <a:solidFill>
+                            <a:schemeClr val="tx1"/>
+                          </a:solidFill>
+                        </a:rPr>
                         <a:t>Verarbeitung nach Feature-Extraktion</a:t>
                       </a:r>
                     </a:p>
@@ -10897,7 +9225,11 @@
                     <a:lstStyle/>
                     <a:p>
                       <a:r>
-                        <a:rPr lang="de-DE" dirty="0"/>
+                        <a:rPr lang="de-DE" dirty="0">
+                          <a:solidFill>
+                            <a:schemeClr val="tx1"/>
+                          </a:solidFill>
+                        </a:rPr>
                         <a:t>Samples</a:t>
                       </a:r>
                     </a:p>
@@ -11052,270 +9384,6 @@
   <p:cSld>
     <p:spTree>
       <p:nvGrpSpPr>
-        <p:cNvPr id="1" name=""/>
-        <p:cNvGrpSpPr/>
-        <p:nvPr/>
-      </p:nvGrpSpPr>
-      <p:grpSpPr>
-        <a:xfrm>
-          <a:off x="0" y="0"/>
-          <a:ext cx="0" cy="0"/>
-          <a:chOff x="0" y="0"/>
-          <a:chExt cx="0" cy="0"/>
-        </a:xfrm>
-      </p:grpSpPr>
-      <p:sp>
-        <p:nvSpPr>
-          <p:cNvPr id="10" name="Inhaltsplatzhalter 9">
-            <a:extLst>
-              <a:ext uri="{FF2B5EF4-FFF2-40B4-BE49-F238E27FC236}">
-                <a16:creationId xmlns:a16="http://schemas.microsoft.com/office/drawing/2014/main" id="{7B8D0937-7521-B2D4-9DC6-F495F659D7E3}"/>
-              </a:ext>
-            </a:extLst>
-          </p:cNvPr>
-          <p:cNvSpPr>
-            <a:spLocks noGrp="1"/>
-          </p:cNvSpPr>
-          <p:nvPr>
-            <p:ph sz="quarter" idx="13"/>
-          </p:nvPr>
-        </p:nvSpPr>
-        <p:spPr/>
-        <p:txBody>
-          <a:bodyPr/>
-          <a:lstStyle/>
-          <a:p>
-            <a:pPr>
-              <a:buFont typeface="Arial" panose="020B0604020202020204" pitchFamily="34" charset="0"/>
-              <a:buChar char="•"/>
-            </a:pPr>
-            <a:r>
-              <a:rPr lang="de-DE" dirty="0"/>
-              <a:t>Datenquelle: selbe wie Task_2</a:t>
-            </a:r>
-          </a:p>
-          <a:p>
-            <a:pPr>
-              <a:buFont typeface="Arial" panose="020B0604020202020204" pitchFamily="34" charset="0"/>
-              <a:buChar char="•"/>
-            </a:pPr>
-            <a:r>
-              <a:rPr lang="de-DE" dirty="0"/>
-              <a:t>Proben: Z01 bis Z05</a:t>
-            </a:r>
-          </a:p>
-          <a:p>
-            <a:pPr>
-              <a:buFont typeface="Arial" panose="020B0604020202020204" pitchFamily="34" charset="0"/>
-              <a:buChar char="•"/>
-            </a:pPr>
-            <a:r>
-              <a:rPr lang="de-DE" dirty="0"/>
-              <a:t>Label-Zuordnung:</a:t>
-            </a:r>
-          </a:p>
-          <a:p>
-            <a:pPr lvl="1">
-              <a:buFont typeface="Arial" panose="020B0604020202020204" pitchFamily="34" charset="0"/>
-              <a:buChar char="•"/>
-            </a:pPr>
-            <a:r>
-              <a:rPr lang="de-DE" dirty="0"/>
-              <a:t>Z01, Z02, Z03, Z04 = gut</a:t>
-            </a:r>
-          </a:p>
-          <a:p>
-            <a:pPr lvl="1">
-              <a:buFont typeface="Arial" panose="020B0604020202020204" pitchFamily="34" charset="0"/>
-              <a:buChar char="•"/>
-            </a:pPr>
-            <a:r>
-              <a:rPr lang="de-DE" dirty="0"/>
-              <a:t>Z05 = beschädigt</a:t>
-            </a:r>
-          </a:p>
-          <a:p>
-            <a:pPr>
-              <a:buFont typeface="Arial" panose="020B0604020202020204" pitchFamily="34" charset="0"/>
-              <a:buChar char="•"/>
-            </a:pPr>
-            <a:r>
-              <a:rPr lang="de-DE" dirty="0"/>
-              <a:t>Kanäle: Ch1, Ch2</a:t>
-            </a:r>
-          </a:p>
-        </p:txBody>
-      </p:sp>
-      <p:sp>
-        <p:nvSpPr>
-          <p:cNvPr id="5" name="Titel 4">
-            <a:extLst>
-              <a:ext uri="{FF2B5EF4-FFF2-40B4-BE49-F238E27FC236}">
-                <a16:creationId xmlns:a16="http://schemas.microsoft.com/office/drawing/2014/main" id="{FF548E49-692C-4BBE-8063-A0FA8DCFE074}"/>
-              </a:ext>
-            </a:extLst>
-          </p:cNvPr>
-          <p:cNvSpPr>
-            <a:spLocks noGrp="1"/>
-          </p:cNvSpPr>
-          <p:nvPr>
-            <p:ph type="title"/>
-          </p:nvPr>
-        </p:nvSpPr>
-        <p:spPr>
-          <a:xfrm>
-            <a:off x="341810" y="567600"/>
-            <a:ext cx="5586023" cy="706030"/>
-          </a:xfrm>
-        </p:spPr>
-        <p:txBody>
-          <a:bodyPr/>
-          <a:lstStyle/>
-          <a:p>
-            <a:r>
-              <a:rPr lang="de-DE" sz="3200" dirty="0">
-                <a:ea typeface="ヒラギノ角ゴ Pro W3"/>
-              </a:rPr>
-              <a:t>Datensatz und Label-Zuordnung</a:t>
-            </a:r>
-            <a:endParaRPr lang="de-DE" dirty="0"/>
-          </a:p>
-        </p:txBody>
-      </p:sp>
-      <p:sp>
-        <p:nvSpPr>
-          <p:cNvPr id="6" name="Datumsplatzhalter 5">
-            <a:extLst>
-              <a:ext uri="{FF2B5EF4-FFF2-40B4-BE49-F238E27FC236}">
-                <a16:creationId xmlns:a16="http://schemas.microsoft.com/office/drawing/2014/main" id="{AD575DA6-9507-24A3-D823-ACF99B904417}"/>
-              </a:ext>
-            </a:extLst>
-          </p:cNvPr>
-          <p:cNvSpPr>
-            <a:spLocks noGrp="1"/>
-          </p:cNvSpPr>
-          <p:nvPr>
-            <p:ph type="dt" sz="half" idx="12"/>
-          </p:nvPr>
-        </p:nvSpPr>
-        <p:spPr/>
-        <p:txBody>
-          <a:bodyPr/>
-          <a:lstStyle/>
-          <a:p>
-            <a:r>
-              <a:rPr lang="de-DE"/>
-              <a:t>23.07.2026</a:t>
-            </a:r>
-          </a:p>
-        </p:txBody>
-      </p:sp>
-      <p:sp>
-        <p:nvSpPr>
-          <p:cNvPr id="7" name="Fußzeilenplatzhalter 6">
-            <a:extLst>
-              <a:ext uri="{FF2B5EF4-FFF2-40B4-BE49-F238E27FC236}">
-                <a16:creationId xmlns:a16="http://schemas.microsoft.com/office/drawing/2014/main" id="{B06C2A5A-D44E-21C3-8924-01BF5842EAE8}"/>
-              </a:ext>
-            </a:extLst>
-          </p:cNvPr>
-          <p:cNvSpPr>
-            <a:spLocks noGrp="1"/>
-          </p:cNvSpPr>
-          <p:nvPr>
-            <p:ph type="ftr" sz="quarter" idx="11"/>
-          </p:nvPr>
-        </p:nvSpPr>
-        <p:spPr/>
-        <p:txBody>
-          <a:bodyPr/>
-          <a:lstStyle/>
-          <a:p>
-            <a:r>
-              <a:rPr lang="de-DE"/>
-              <a:t>Materialdiagnostik: Task 4</a:t>
-            </a:r>
-            <a:endParaRPr lang="de-DE" dirty="0"/>
-          </a:p>
-        </p:txBody>
-      </p:sp>
-      <p:pic>
-        <p:nvPicPr>
-          <p:cNvPr id="3" name="Grafik 2">
-            <a:extLst>
-              <a:ext uri="{FF2B5EF4-FFF2-40B4-BE49-F238E27FC236}">
-                <a16:creationId xmlns:a16="http://schemas.microsoft.com/office/drawing/2014/main" id="{2481C4C0-FA67-CF38-BE6F-A06F2535F1CE}"/>
-              </a:ext>
-            </a:extLst>
-          </p:cNvPr>
-          <p:cNvPicPr>
-            <a:picLocks noChangeAspect="1"/>
-          </p:cNvPicPr>
-          <p:nvPr/>
-        </p:nvPicPr>
-        <p:blipFill>
-          <a:blip r:embed="rId3"/>
-          <a:stretch>
-            <a:fillRect/>
-          </a:stretch>
-        </p:blipFill>
-        <p:spPr>
-          <a:xfrm>
-            <a:off x="7290086" y="1620000"/>
-            <a:ext cx="4054191" cy="2766300"/>
-          </a:xfrm>
-          <a:prstGeom prst="rect">
-            <a:avLst/>
-          </a:prstGeom>
-        </p:spPr>
-      </p:pic>
-      <p:sp>
-        <p:nvSpPr>
-          <p:cNvPr id="2" name="Foliennummernplatzhalter 1">
-            <a:extLst>
-              <a:ext uri="{FF2B5EF4-FFF2-40B4-BE49-F238E27FC236}">
-                <a16:creationId xmlns:a16="http://schemas.microsoft.com/office/drawing/2014/main" id="{604D00BA-4E18-605F-D34D-D84794623B18}"/>
-              </a:ext>
-            </a:extLst>
-          </p:cNvPr>
-          <p:cNvSpPr>
-            <a:spLocks noGrp="1"/>
-          </p:cNvSpPr>
-          <p:nvPr>
-            <p:ph type="sldNum" sz="quarter" idx="10"/>
-          </p:nvPr>
-        </p:nvSpPr>
-        <p:spPr/>
-        <p:txBody>
-          <a:bodyPr/>
-          <a:lstStyle/>
-          <a:p>
-            <a:fld id="{80B4FCE6-DC73-4135-BC56-1F242D45A84C}" type="slidenum">
-              <a:rPr lang="de-DE" smtClean="0"/>
-              <a:t>4</a:t>
-            </a:fld>
-            <a:endParaRPr lang="de-DE"/>
-          </a:p>
-        </p:txBody>
-      </p:sp>
-    </p:spTree>
-    <p:extLst>
-      <p:ext uri="{BB962C8B-B14F-4D97-AF65-F5344CB8AC3E}">
-        <p14:creationId xmlns:p14="http://schemas.microsoft.com/office/powerpoint/2010/main" val="2845843503"/>
-      </p:ext>
-    </p:extLst>
-  </p:cSld>
-  <p:clrMapOvr>
-    <a:masterClrMapping/>
-  </p:clrMapOvr>
-</p:sld>
-</file>
-
-<file path=ppt/slides/slide5.xml><?xml version="1.0" encoding="utf-8"?>
-<p:sld xmlns:a="http://schemas.openxmlformats.org/drawingml/2006/main" xmlns:r="http://schemas.openxmlformats.org/officeDocument/2006/relationships" xmlns:p="http://schemas.openxmlformats.org/presentationml/2006/main">
-  <p:cSld>
-    <p:spTree>
-      <p:nvGrpSpPr>
         <p:cNvPr id="1" name="">
           <a:extLst>
             <a:ext uri="{FF2B5EF4-FFF2-40B4-BE49-F238E27FC236}">
@@ -11357,7 +9425,7 @@
           <a:p>
             <a:fld id="{80B4FCE6-DC73-4135-BC56-1F242D45A84C}" type="slidenum">
               <a:rPr lang="de-DE" smtClean="0"/>
-              <a:t>5</a:t>
+              <a:t>4</a:t>
             </a:fld>
             <a:endParaRPr lang="de-DE"/>
           </a:p>
@@ -11435,7 +9503,7 @@
             <p:ph sz="quarter" idx="13"/>
             <p:extLst>
               <p:ext uri="{D42A27DB-BD31-4B8C-83A1-F6EECF244321}">
-                <p14:modId xmlns:p14="http://schemas.microsoft.com/office/powerpoint/2010/main" val="905040028"/>
+                <p14:modId xmlns:p14="http://schemas.microsoft.com/office/powerpoint/2010/main" val="3331668685"/>
               </p:ext>
             </p:extLst>
           </p:nvPr>
@@ -11487,7 +9555,11 @@
                     <a:lstStyle/>
                     <a:p>
                       <a:r>
-                        <a:rPr lang="de-DE" dirty="0"/>
+                        <a:rPr lang="de-DE" dirty="0">
+                          <a:solidFill>
+                            <a:schemeClr val="tx1"/>
+                          </a:solidFill>
+                        </a:rPr>
                         <a:t>Fold</a:t>
                       </a:r>
                     </a:p>
@@ -11500,7 +9572,11 @@
                     <a:lstStyle/>
                     <a:p>
                       <a:r>
-                        <a:rPr lang="de-DE" dirty="0"/>
+                        <a:rPr lang="de-DE" dirty="0">
+                          <a:solidFill>
+                            <a:schemeClr val="tx1"/>
+                          </a:solidFill>
+                        </a:rPr>
                         <a:t>Gesundes Training</a:t>
                       </a:r>
                     </a:p>
@@ -11513,7 +9589,11 @@
                     <a:lstStyle/>
                     <a:p>
                       <a:r>
-                        <a:rPr lang="de-DE" dirty="0"/>
+                        <a:rPr lang="de-DE" dirty="0">
+                          <a:solidFill>
+                            <a:schemeClr val="tx1"/>
+                          </a:solidFill>
+                        </a:rPr>
                         <a:t>Test: gesund</a:t>
                       </a:r>
                     </a:p>
@@ -11526,7 +9606,11 @@
                     <a:lstStyle/>
                     <a:p>
                       <a:r>
-                        <a:rPr lang="de-DE" dirty="0"/>
+                        <a:rPr lang="de-DE" dirty="0">
+                          <a:solidFill>
+                            <a:schemeClr val="tx1"/>
+                          </a:solidFill>
+                        </a:rPr>
                         <a:t>Test: anomal</a:t>
                       </a:r>
                     </a:p>
@@ -11886,7 +9970,7 @@
 </p:sld>
 </file>
 
-<file path=ppt/slides/slide6.xml><?xml version="1.0" encoding="utf-8"?>
+<file path=ppt/slides/slide5.xml><?xml version="1.0" encoding="utf-8"?>
 <p:sld xmlns:a="http://schemas.openxmlformats.org/drawingml/2006/main" xmlns:r="http://schemas.openxmlformats.org/officeDocument/2006/relationships" xmlns:p="http://schemas.openxmlformats.org/presentationml/2006/main">
   <p:cSld>
     <p:spTree>
@@ -11972,7 +10056,7 @@
           <a:p>
             <a:fld id="{80B4FCE6-DC73-4135-BC56-1F242D45A84C}" type="slidenum">
               <a:rPr lang="de-DE" smtClean="0"/>
-              <a:t>6</a:t>
+              <a:t>5</a:t>
             </a:fld>
             <a:endParaRPr lang="de-DE"/>
           </a:p>
@@ -12149,9 +10233,8 @@
         </p:nvPicPr>
         <p:blipFill>
           <a:blip r:embed="rId3"/>
-          <a:stretch>
-            <a:fillRect/>
-          </a:stretch>
+          <a:srcRect/>
+          <a:stretch/>
         </p:blipFill>
         <p:spPr>
           <a:xfrm>
@@ -12176,7 +10259,7 @@
 </p:sld>
 </file>
 
-<file path=ppt/slides/slide7.xml><?xml version="1.0" encoding="utf-8"?>
+<file path=ppt/slides/slide6.xml><?xml version="1.0" encoding="utf-8"?>
 <p:sld xmlns:a="http://schemas.openxmlformats.org/drawingml/2006/main" xmlns:r="http://schemas.openxmlformats.org/officeDocument/2006/relationships" xmlns:p="http://schemas.openxmlformats.org/presentationml/2006/main">
   <p:cSld>
     <p:spTree>
@@ -12363,7 +10446,7 @@
             </a:pPr>
             <a:r>
               <a:rPr lang="de-DE" dirty="0"/>
-              <a:t>95%-Quantil der Fehler im gesunden Training</a:t>
+              <a:t>98%-Quantil der Fehler im gesunden Training</a:t>
             </a:r>
           </a:p>
           <a:p>
@@ -12475,7 +10558,7 @@
           <a:p>
             <a:fld id="{80B4FCE6-DC73-4135-BC56-1F242D45A84C}" type="slidenum">
               <a:rPr lang="de-DE" smtClean="0"/>
-              <a:t>7</a:t>
+              <a:t>6</a:t>
             </a:fld>
             <a:endParaRPr lang="de-DE"/>
           </a:p>
@@ -12494,7 +10577,7 @@
 </p:sld>
 </file>
 
-<file path=ppt/slides/slide8.xml><?xml version="1.0" encoding="utf-8"?>
+<file path=ppt/slides/slide7.xml><?xml version="1.0" encoding="utf-8"?>
 <p:sld xmlns:a="http://schemas.openxmlformats.org/drawingml/2006/main" xmlns:r="http://schemas.openxmlformats.org/officeDocument/2006/relationships" xmlns:p="http://schemas.openxmlformats.org/presentationml/2006/main">
   <p:cSld>
     <p:spTree>
@@ -12569,7 +10652,7 @@
           <a:p>
             <a:fld id="{80B4FCE6-DC73-4135-BC56-1F242D45A84C}" type="slidenum">
               <a:rPr lang="de-DE" smtClean="0"/>
-              <a:t>8</a:t>
+              <a:t>7</a:t>
             </a:fld>
             <a:endParaRPr lang="de-DE"/>
           </a:p>
@@ -12679,14 +10762,14 @@
             <p:ph sz="quarter" idx="14"/>
             <p:extLst>
               <p:ext uri="{D42A27DB-BD31-4B8C-83A1-F6EECF244321}">
-                <p14:modId xmlns:p14="http://schemas.microsoft.com/office/powerpoint/2010/main" val="545412591"/>
+                <p14:modId xmlns:p14="http://schemas.microsoft.com/office/powerpoint/2010/main" val="2577350532"/>
               </p:ext>
             </p:extLst>
           </p:nvPr>
         </p:nvGraphicFramePr>
         <p:xfrm>
           <a:off x="6096000" y="1935584"/>
-          <a:ext cx="5982792" cy="3321249"/>
+          <a:ext cx="5982792" cy="3386027"/>
         </p:xfrm>
         <a:graphic>
           <a:graphicData uri="http://schemas.openxmlformats.org/drawingml/2006/table">
@@ -12745,7 +10828,7 @@
                   </a:extLst>
                 </a:gridCol>
               </a:tblGrid>
-              <a:tr h="427161">
+              <a:tr h="423216">
                 <a:tc rowSpan="2">
                   <a:txBody>
                     <a:bodyPr/>
@@ -12753,7 +10836,11 @@
                     <a:p>
                       <a:pPr algn="ctr"/>
                       <a:r>
-                        <a:rPr lang="de-DE" dirty="0"/>
+                        <a:rPr lang="de-DE" dirty="0">
+                          <a:solidFill>
+                            <a:schemeClr val="tx1"/>
+                          </a:solidFill>
+                        </a:rPr>
                         <a:t>Fold</a:t>
                       </a:r>
                     </a:p>
@@ -12767,7 +10854,11 @@
                     <a:p>
                       <a:pPr algn="ctr"/>
                       <a:r>
-                        <a:rPr lang="de-DE" dirty="0"/>
+                        <a:rPr lang="de-DE" dirty="0">
+                          <a:solidFill>
+                            <a:schemeClr val="tx1"/>
+                          </a:solidFill>
+                        </a:rPr>
                         <a:t>Sensitivität / TPR</a:t>
                       </a:r>
                     </a:p>
@@ -12791,11 +10882,19 @@
                     <a:p>
                       <a:pPr algn="ctr"/>
                       <a:r>
-                        <a:rPr lang="de-DE" dirty="0" err="1"/>
+                        <a:rPr lang="de-DE" dirty="0" err="1">
+                          <a:solidFill>
+                            <a:schemeClr val="tx1"/>
+                          </a:solidFill>
+                        </a:rPr>
                         <a:t>Spezivität</a:t>
                       </a:r>
                       <a:r>
-                        <a:rPr lang="de-DE" dirty="0"/>
+                        <a:rPr lang="de-DE" dirty="0">
+                          <a:solidFill>
+                            <a:schemeClr val="tx1"/>
+                          </a:solidFill>
+                        </a:rPr>
                         <a:t> / TNR</a:t>
                       </a:r>
                     </a:p>
@@ -12819,18 +10918,34 @@
                     <a:p>
                       <a:pPr algn="ctr"/>
                       <a:r>
-                        <a:rPr lang="de-DE" dirty="0" err="1"/>
+                        <a:rPr lang="de-DE" dirty="0" err="1">
+                          <a:solidFill>
+                            <a:schemeClr val="tx1"/>
+                          </a:solidFill>
+                        </a:rPr>
                         <a:t>Balanced</a:t>
                       </a:r>
                       <a:r>
-                        <a:rPr lang="de-DE" dirty="0"/>
+                        <a:rPr lang="de-DE" dirty="0">
+                          <a:solidFill>
+                            <a:schemeClr val="tx1"/>
+                          </a:solidFill>
+                        </a:rPr>
                         <a:t> </a:t>
                       </a:r>
                       <a:r>
-                        <a:rPr lang="de-DE" dirty="0" err="1"/>
+                        <a:rPr lang="de-DE" dirty="0" err="1">
+                          <a:solidFill>
+                            <a:schemeClr val="tx1"/>
+                          </a:solidFill>
+                        </a:rPr>
                         <a:t>Acc</a:t>
                       </a:r>
-                      <a:endParaRPr lang="de-DE" dirty="0"/>
+                      <a:endParaRPr lang="de-DE" dirty="0">
+                        <a:solidFill>
+                          <a:schemeClr val="tx1"/>
+                        </a:solidFill>
+                      </a:endParaRPr>
                     </a:p>
                   </a:txBody>
                   <a:tcPr/>
@@ -12851,7 +10966,7 @@
                   </a:ext>
                 </a:extLst>
               </a:tr>
-              <a:tr h="0">
+              <a:tr h="362382">
                 <a:tc vMerge="1">
                   <a:txBody>
                     <a:bodyPr/>
@@ -12869,8 +10984,20 @@
                     <a:p>
                       <a:pPr algn="ctr"/>
                       <a:r>
-                        <a:rPr lang="de-DE"/>
-                        <a:t>Ch 1</a:t>
+                        <a:rPr lang="de-DE" dirty="0" err="1">
+                          <a:solidFill>
+                            <a:schemeClr val="tx1"/>
+                          </a:solidFill>
+                        </a:rPr>
+                        <a:t>Ch</a:t>
+                      </a:r>
+                      <a:r>
+                        <a:rPr lang="de-DE" dirty="0">
+                          <a:solidFill>
+                            <a:schemeClr val="tx1"/>
+                          </a:solidFill>
+                        </a:rPr>
+                        <a:t> 1</a:t>
                       </a:r>
                     </a:p>
                   </a:txBody>
@@ -12883,11 +11010,19 @@
                     <a:p>
                       <a:pPr algn="ctr"/>
                       <a:r>
-                        <a:rPr lang="de-DE" dirty="0" err="1"/>
+                        <a:rPr lang="de-DE" dirty="0" err="1">
+                          <a:solidFill>
+                            <a:schemeClr val="tx1"/>
+                          </a:solidFill>
+                        </a:rPr>
                         <a:t>Ch</a:t>
                       </a:r>
                       <a:r>
-                        <a:rPr lang="de-DE" dirty="0"/>
+                        <a:rPr lang="de-DE" dirty="0">
+                          <a:solidFill>
+                            <a:schemeClr val="tx1"/>
+                          </a:solidFill>
+                        </a:rPr>
                         <a:t> 2</a:t>
                       </a:r>
                     </a:p>
@@ -12901,11 +11036,19 @@
                     <a:p>
                       <a:pPr algn="ctr"/>
                       <a:r>
-                        <a:rPr lang="de-DE" dirty="0" err="1"/>
+                        <a:rPr lang="de-DE" dirty="0" err="1">
+                          <a:solidFill>
+                            <a:schemeClr val="tx1"/>
+                          </a:solidFill>
+                        </a:rPr>
                         <a:t>Ch</a:t>
                       </a:r>
                       <a:r>
-                        <a:rPr lang="de-DE" dirty="0"/>
+                        <a:rPr lang="de-DE" dirty="0">
+                          <a:solidFill>
+                            <a:schemeClr val="tx1"/>
+                          </a:solidFill>
+                        </a:rPr>
                         <a:t> 1</a:t>
                       </a:r>
                     </a:p>
@@ -12919,11 +11062,19 @@
                     <a:p>
                       <a:pPr algn="ctr"/>
                       <a:r>
-                        <a:rPr lang="de-DE" dirty="0" err="1"/>
+                        <a:rPr lang="de-DE" dirty="0" err="1">
+                          <a:solidFill>
+                            <a:schemeClr val="tx1"/>
+                          </a:solidFill>
+                        </a:rPr>
                         <a:t>Ch</a:t>
                       </a:r>
                       <a:r>
-                        <a:rPr lang="de-DE" dirty="0"/>
+                        <a:rPr lang="de-DE" dirty="0">
+                          <a:solidFill>
+                            <a:schemeClr val="tx1"/>
+                          </a:solidFill>
+                        </a:rPr>
                         <a:t> 2</a:t>
                       </a:r>
                     </a:p>
@@ -12937,11 +11088,19 @@
                     <a:p>
                       <a:pPr algn="ctr"/>
                       <a:r>
-                        <a:rPr lang="de-DE" dirty="0" err="1"/>
+                        <a:rPr lang="de-DE" dirty="0" err="1">
+                          <a:solidFill>
+                            <a:schemeClr val="tx1"/>
+                          </a:solidFill>
+                        </a:rPr>
                         <a:t>Ch</a:t>
                       </a:r>
                       <a:r>
-                        <a:rPr lang="de-DE" dirty="0"/>
+                        <a:rPr lang="de-DE" dirty="0">
+                          <a:solidFill>
+                            <a:schemeClr val="tx1"/>
+                          </a:solidFill>
+                        </a:rPr>
                         <a:t> 1</a:t>
                       </a:r>
                     </a:p>
@@ -12955,11 +11114,19 @@
                     <a:p>
                       <a:pPr algn="ctr"/>
                       <a:r>
-                        <a:rPr lang="de-DE" dirty="0" err="1"/>
+                        <a:rPr lang="de-DE" dirty="0" err="1">
+                          <a:solidFill>
+                            <a:schemeClr val="tx1"/>
+                          </a:solidFill>
+                        </a:rPr>
                         <a:t>Ch</a:t>
                       </a:r>
                       <a:r>
-                        <a:rPr lang="de-DE" dirty="0"/>
+                        <a:rPr lang="de-DE" dirty="0">
+                          <a:solidFill>
+                            <a:schemeClr val="tx1"/>
+                          </a:solidFill>
+                        </a:rPr>
                         <a:t> 2</a:t>
                       </a:r>
                     </a:p>
@@ -12972,7 +11139,7 @@
                   </a:ext>
                 </a:extLst>
               </a:tr>
-              <a:tr h="632082">
+              <a:tr h="626244">
                 <a:tc>
                   <a:txBody>
                     <a:bodyPr/>
@@ -13023,7 +11190,7 @@
                       <a:pPr algn="ctr"/>
                       <a:r>
                         <a:rPr lang="de-DE" dirty="0"/>
-                        <a:t>0.717</a:t>
+                        <a:t>0.867</a:t>
                       </a:r>
                     </a:p>
                   </a:txBody>
@@ -13037,7 +11204,7 @@
                       <a:pPr algn="ctr"/>
                       <a:r>
                         <a:rPr lang="de-DE" dirty="0"/>
-                        <a:t>0.733</a:t>
+                        <a:t>0.883</a:t>
                       </a:r>
                     </a:p>
                   </a:txBody>
@@ -13051,7 +11218,7 @@
                       <a:pPr algn="ctr"/>
                       <a:r>
                         <a:rPr lang="de-DE" dirty="0"/>
-                        <a:t>0.858</a:t>
+                        <a:t>0.933</a:t>
                       </a:r>
                     </a:p>
                   </a:txBody>
@@ -13065,7 +11232,7 @@
                       <a:pPr algn="ctr"/>
                       <a:r>
                         <a:rPr lang="de-DE" dirty="0"/>
-                        <a:t>0.867</a:t>
+                        <a:t>0.942</a:t>
                       </a:r>
                     </a:p>
                   </a:txBody>
@@ -13077,7 +11244,7 @@
                   </a:ext>
                 </a:extLst>
               </a:tr>
-              <a:tr h="632082">
+              <a:tr h="626244">
                 <a:tc>
                   <a:txBody>
                     <a:bodyPr/>
@@ -13128,7 +11295,7 @@
                       <a:pPr algn="ctr"/>
                       <a:r>
                         <a:rPr lang="de-DE" dirty="0"/>
-                        <a:t>0.750</a:t>
+                        <a:t>0.900</a:t>
                       </a:r>
                     </a:p>
                   </a:txBody>
@@ -13142,7 +11309,7 @@
                       <a:pPr algn="ctr"/>
                       <a:r>
                         <a:rPr lang="de-DE" dirty="0"/>
-                        <a:t>0.750</a:t>
+                        <a:t>0.850</a:t>
                       </a:r>
                     </a:p>
                   </a:txBody>
@@ -13156,7 +11323,7 @@
                       <a:pPr algn="ctr"/>
                       <a:r>
                         <a:rPr lang="de-DE" dirty="0"/>
-                        <a:t>0.875</a:t>
+                        <a:t>0.950</a:t>
                       </a:r>
                     </a:p>
                   </a:txBody>
@@ -13170,7 +11337,7 @@
                       <a:pPr algn="ctr"/>
                       <a:r>
                         <a:rPr lang="de-DE" dirty="0"/>
-                        <a:t>0.875</a:t>
+                        <a:t>0.925</a:t>
                       </a:r>
                     </a:p>
                   </a:txBody>
@@ -13182,7 +11349,7 @@
                   </a:ext>
                 </a:extLst>
               </a:tr>
-              <a:tr h="632082">
+              <a:tr h="626244">
                 <a:tc>
                   <a:txBody>
                     <a:bodyPr/>
@@ -13233,7 +11400,7 @@
                       <a:pPr algn="ctr"/>
                       <a:r>
                         <a:rPr lang="de-DE" dirty="0"/>
-                        <a:t>0.850</a:t>
+                        <a:t>0.950</a:t>
                       </a:r>
                     </a:p>
                   </a:txBody>
@@ -13247,7 +11414,7 @@
                       <a:pPr algn="ctr"/>
                       <a:r>
                         <a:rPr lang="de-DE" dirty="0"/>
-                        <a:t>0.750</a:t>
+                        <a:t>0.950</a:t>
                       </a:r>
                     </a:p>
                   </a:txBody>
@@ -13261,7 +11428,7 @@
                       <a:pPr algn="ctr"/>
                       <a:r>
                         <a:rPr lang="de-DE" dirty="0"/>
-                        <a:t>0.925</a:t>
+                        <a:t>0.975</a:t>
                       </a:r>
                     </a:p>
                   </a:txBody>
@@ -13275,7 +11442,7 @@
                       <a:pPr algn="ctr"/>
                       <a:r>
                         <a:rPr lang="de-DE" dirty="0"/>
-                        <a:t>0.875</a:t>
+                        <a:t>0.975</a:t>
                       </a:r>
                     </a:p>
                   </a:txBody>
@@ -13287,7 +11454,7 @@
                   </a:ext>
                 </a:extLst>
               </a:tr>
-              <a:tr h="632082">
+              <a:tr h="718319">
                 <a:tc>
                   <a:txBody>
                     <a:bodyPr/>
@@ -13338,7 +11505,7 @@
                       <a:pPr algn="ctr"/>
                       <a:r>
                         <a:rPr lang="de-DE" dirty="0"/>
-                        <a:t>0.190</a:t>
+                        <a:t>0.290</a:t>
                       </a:r>
                     </a:p>
                   </a:txBody>
@@ -13352,7 +11519,7 @@
                       <a:pPr algn="ctr"/>
                       <a:r>
                         <a:rPr lang="de-DE" dirty="0"/>
-                        <a:t>0.280</a:t>
+                        <a:t>0.730</a:t>
                       </a:r>
                     </a:p>
                   </a:txBody>
@@ -13366,7 +11533,7 @@
                       <a:pPr algn="ctr"/>
                       <a:r>
                         <a:rPr lang="de-DE" dirty="0"/>
-                        <a:t>0.595</a:t>
+                        <a:t>0.645</a:t>
                       </a:r>
                     </a:p>
                   </a:txBody>
@@ -13380,7 +11547,7 @@
                       <a:pPr algn="ctr"/>
                       <a:r>
                         <a:rPr lang="de-DE" dirty="0"/>
-                        <a:t>0.640</a:t>
+                        <a:t>0.865</a:t>
                       </a:r>
                     </a:p>
                   </a:txBody>
@@ -13409,7 +11576,7 @@
 </p:sld>
 </file>
 
-<file path=ppt/slides/slide9.xml><?xml version="1.0" encoding="utf-8"?>
+<file path=ppt/slides/slide8.xml><?xml version="1.0" encoding="utf-8"?>
 <p:sld xmlns:a="http://schemas.openxmlformats.org/drawingml/2006/main" xmlns:r="http://schemas.openxmlformats.org/officeDocument/2006/relationships" xmlns:p="http://schemas.openxmlformats.org/presentationml/2006/main">
   <p:cSld>
     <p:spTree>
@@ -13448,12 +11615,7 @@
             <p:ph type="title"/>
           </p:nvPr>
         </p:nvSpPr>
-        <p:spPr>
-          <a:xfrm>
-            <a:off x="341810" y="567600"/>
-            <a:ext cx="5646759" cy="706030"/>
-          </a:xfrm>
-        </p:spPr>
+        <p:spPr/>
         <p:txBody>
           <a:bodyPr/>
           <a:lstStyle/>
@@ -13462,7 +11624,7 @@
               <a:rPr lang="de-DE" sz="3200" dirty="0">
                 <a:ea typeface="ヒラギノ角ゴ Pro W3"/>
               </a:rPr>
-              <a:t>MLP-Modell</a:t>
+              <a:t>Pipelinevergleich</a:t>
             </a:r>
             <a:endParaRPr lang="de-DE" dirty="0"/>
           </a:p>
@@ -13470,337 +11632,646 @@
       </p:sp>
       <p:sp>
         <p:nvSpPr>
-          <p:cNvPr id="6" name="Inhaltsplatzhalter 9">
-            <a:extLst>
-              <a:ext uri="{FF2B5EF4-FFF2-40B4-BE49-F238E27FC236}">
-                <a16:creationId xmlns:a16="http://schemas.microsoft.com/office/drawing/2014/main" id="{7AFC9A66-8356-7CE3-2D1D-54900DD9AADA}"/>
-              </a:ext>
-            </a:extLst>
-          </p:cNvPr>
-          <p:cNvSpPr txBox="1">
-            <a:spLocks/>
-          </p:cNvSpPr>
-          <p:nvPr/>
-        </p:nvSpPr>
-        <p:spPr bwMode="auto">
+          <p:cNvPr id="10" name="Foliennummernplatzhalter 9">
+            <a:extLst>
+              <a:ext uri="{FF2B5EF4-FFF2-40B4-BE49-F238E27FC236}">
+                <a16:creationId xmlns:a16="http://schemas.microsoft.com/office/drawing/2014/main" id="{774AB4C3-4602-6C57-8EB1-7749D74FE5AF}"/>
+              </a:ext>
+            </a:extLst>
+          </p:cNvPr>
+          <p:cNvSpPr>
+            <a:spLocks noGrp="1"/>
+          </p:cNvSpPr>
+          <p:nvPr>
+            <p:ph type="sldNum" sz="quarter" idx="10"/>
+          </p:nvPr>
+        </p:nvSpPr>
+        <p:spPr/>
+        <p:txBody>
+          <a:bodyPr/>
+          <a:lstStyle/>
+          <a:p>
+            <a:fld id="{80B4FCE6-DC73-4135-BC56-1F242D45A84C}" type="slidenum">
+              <a:rPr lang="de-DE" smtClean="0"/>
+              <a:t>8</a:t>
+            </a:fld>
+            <a:endParaRPr lang="de-DE"/>
+          </a:p>
+        </p:txBody>
+      </p:sp>
+      <p:sp>
+        <p:nvSpPr>
+          <p:cNvPr id="7" name="Fußzeilenplatzhalter 6">
+            <a:extLst>
+              <a:ext uri="{FF2B5EF4-FFF2-40B4-BE49-F238E27FC236}">
+                <a16:creationId xmlns:a16="http://schemas.microsoft.com/office/drawing/2014/main" id="{6ABEE24C-37F3-78D2-21C6-88F44D571121}"/>
+              </a:ext>
+            </a:extLst>
+          </p:cNvPr>
+          <p:cNvSpPr>
+            <a:spLocks noGrp="1"/>
+          </p:cNvSpPr>
+          <p:nvPr>
+            <p:ph type="ftr" sz="quarter" idx="11"/>
+          </p:nvPr>
+        </p:nvSpPr>
+        <p:spPr/>
+        <p:txBody>
+          <a:bodyPr/>
+          <a:lstStyle/>
+          <a:p>
+            <a:r>
+              <a:rPr lang="de-DE"/>
+              <a:t>Materialdiagnostik: Task 4</a:t>
+            </a:r>
+            <a:endParaRPr lang="de-DE" dirty="0"/>
+          </a:p>
+        </p:txBody>
+      </p:sp>
+      <p:sp>
+        <p:nvSpPr>
+          <p:cNvPr id="2" name="Datumsplatzhalter 1">
+            <a:extLst>
+              <a:ext uri="{FF2B5EF4-FFF2-40B4-BE49-F238E27FC236}">
+                <a16:creationId xmlns:a16="http://schemas.microsoft.com/office/drawing/2014/main" id="{D3CA445C-F940-E013-1AC9-1A366EEA3614}"/>
+              </a:ext>
+            </a:extLst>
+          </p:cNvPr>
+          <p:cNvSpPr>
+            <a:spLocks noGrp="1"/>
+          </p:cNvSpPr>
+          <p:nvPr>
+            <p:ph type="dt" sz="half" idx="12"/>
+          </p:nvPr>
+        </p:nvSpPr>
+        <p:spPr/>
+        <p:txBody>
+          <a:bodyPr/>
+          <a:lstStyle/>
+          <a:p>
+            <a:r>
+              <a:rPr lang="de-DE"/>
+              <a:t>23.07.2026</a:t>
+            </a:r>
+          </a:p>
+        </p:txBody>
+      </p:sp>
+      <p:pic>
+        <p:nvPicPr>
+          <p:cNvPr id="11" name="Inhaltsplatzhalter 10">
+            <a:extLst>
+              <a:ext uri="{FF2B5EF4-FFF2-40B4-BE49-F238E27FC236}">
+                <a16:creationId xmlns:a16="http://schemas.microsoft.com/office/drawing/2014/main" id="{01907500-6CF2-1641-6998-30DB0B987A04}"/>
+              </a:ext>
+            </a:extLst>
+          </p:cNvPr>
+          <p:cNvPicPr>
+            <a:picLocks noGrp="1" noChangeAspect="1"/>
+          </p:cNvPicPr>
+          <p:nvPr>
+            <p:ph sz="quarter" idx="13"/>
+          </p:nvPr>
+        </p:nvPicPr>
+        <p:blipFill>
+          <a:blip r:embed="rId3"/>
+          <a:srcRect/>
+          <a:stretch/>
+        </p:blipFill>
+        <p:spPr>
           <a:xfrm>
-            <a:off x="341811" y="1509009"/>
-            <a:ext cx="8203099" cy="4250660"/>
+            <a:off x="300494" y="2058996"/>
+            <a:ext cx="5795506" cy="3570588"/>
           </a:xfrm>
           <a:prstGeom prst="rect">
             <a:avLst/>
           </a:prstGeom>
-          <a:noFill/>
-          <a:ln>
-            <a:noFill/>
-          </a:ln>
+        </p:spPr>
+      </p:pic>
+      <p:graphicFrame>
+        <p:nvGraphicFramePr>
+          <p:cNvPr id="8" name="Inhaltsplatzhalter 7">
+            <a:extLst>
+              <a:ext uri="{FF2B5EF4-FFF2-40B4-BE49-F238E27FC236}">
+                <a16:creationId xmlns:a16="http://schemas.microsoft.com/office/drawing/2014/main" id="{79BB2E59-1E5D-1A44-72D5-A4F864B90204}"/>
+              </a:ext>
+            </a:extLst>
+          </p:cNvPr>
+          <p:cNvGraphicFramePr>
+            <a:graphicFrameLocks noGrp="1"/>
+          </p:cNvGraphicFramePr>
+          <p:nvPr>
+            <p:ph sz="quarter" idx="14"/>
+            <p:extLst>
+              <p:ext uri="{D42A27DB-BD31-4B8C-83A1-F6EECF244321}">
+                <p14:modId xmlns:p14="http://schemas.microsoft.com/office/powerpoint/2010/main" val="3842105193"/>
+              </p:ext>
+            </p:extLst>
+          </p:nvPr>
+        </p:nvGraphicFramePr>
+        <p:xfrm>
+          <a:off x="6335970" y="2058996"/>
+          <a:ext cx="5391150" cy="2860040"/>
+        </p:xfrm>
+        <a:graphic>
+          <a:graphicData uri="http://schemas.openxmlformats.org/drawingml/2006/table">
+            <a:tbl>
+              <a:tblPr firstRow="1" bandRow="1">
+                <a:tableStyleId>{5C22544A-7EE6-4342-B048-85BDC9FD1C3A}</a:tableStyleId>
+              </a:tblPr>
+              <a:tblGrid>
+                <a:gridCol w="1420664">
+                  <a:extLst>
+                    <a:ext uri="{9D8B030D-6E8A-4147-A177-3AD203B41FA5}">
+                      <a16:colId xmlns:a16="http://schemas.microsoft.com/office/drawing/2014/main" val="153177511"/>
+                    </a:ext>
+                  </a:extLst>
+                </a:gridCol>
+                <a:gridCol w="1996966">
+                  <a:extLst>
+                    <a:ext uri="{9D8B030D-6E8A-4147-A177-3AD203B41FA5}">
+                      <a16:colId xmlns:a16="http://schemas.microsoft.com/office/drawing/2014/main" val="1209798855"/>
+                    </a:ext>
+                  </a:extLst>
+                </a:gridCol>
+                <a:gridCol w="1973520">
+                  <a:extLst>
+                    <a:ext uri="{9D8B030D-6E8A-4147-A177-3AD203B41FA5}">
+                      <a16:colId xmlns:a16="http://schemas.microsoft.com/office/drawing/2014/main" val="1441971969"/>
+                    </a:ext>
+                  </a:extLst>
+                </a:gridCol>
+              </a:tblGrid>
+              <a:tr h="185420">
+                <a:tc>
+                  <a:txBody>
+                    <a:bodyPr/>
+                    <a:lstStyle/>
+                    <a:p>
+                      <a:pPr algn="ctr"/>
+                      <a:r>
+                        <a:rPr lang="de-DE" dirty="0">
+                          <a:solidFill>
+                            <a:schemeClr val="tx1"/>
+                          </a:solidFill>
+                        </a:rPr>
+                        <a:t>Fold</a:t>
+                      </a:r>
+                    </a:p>
+                  </a:txBody>
+                  <a:tcPr/>
+                </a:tc>
+                <a:tc>
+                  <a:txBody>
+                    <a:bodyPr/>
+                    <a:lstStyle/>
+                    <a:p>
+                      <a:pPr algn="ctr"/>
+                      <a:r>
+                        <a:rPr lang="de-DE" dirty="0">
+                          <a:solidFill>
+                            <a:schemeClr val="tx1"/>
+                          </a:solidFill>
+                        </a:rPr>
+                        <a:t>Einzelmessung</a:t>
+                      </a:r>
+                    </a:p>
+                  </a:txBody>
+                  <a:tcPr/>
+                </a:tc>
+                <a:tc>
+                  <a:txBody>
+                    <a:bodyPr/>
+                    <a:lstStyle/>
+                    <a:p>
+                      <a:pPr algn="ctr"/>
+                      <a:r>
+                        <a:rPr lang="de-DE" dirty="0" err="1">
+                          <a:solidFill>
+                            <a:schemeClr val="tx1"/>
+                          </a:solidFill>
+                        </a:rPr>
+                        <a:t>mID</a:t>
+                      </a:r>
+                      <a:r>
+                        <a:rPr lang="de-DE" dirty="0">
+                          <a:solidFill>
+                            <a:schemeClr val="tx1"/>
+                          </a:solidFill>
+                        </a:rPr>
+                        <a:t>-gemittelt</a:t>
+                      </a:r>
+                    </a:p>
+                  </a:txBody>
+                  <a:tcPr/>
+                </a:tc>
+                <a:extLst>
+                  <a:ext uri="{0D108BD9-81ED-4DB2-BD59-A6C34878D82A}">
+                    <a16:rowId xmlns:a16="http://schemas.microsoft.com/office/drawing/2014/main" val="229442809"/>
+                  </a:ext>
+                </a:extLst>
+              </a:tr>
+              <a:tr h="185420">
+                <a:tc>
+                  <a:txBody>
+                    <a:bodyPr/>
+                    <a:lstStyle/>
+                    <a:p>
+                      <a:pPr algn="ctr"/>
+                      <a:endParaRPr lang="de-DE" dirty="0">
+                        <a:solidFill>
+                          <a:schemeClr val="tx1"/>
+                        </a:solidFill>
+                      </a:endParaRPr>
+                    </a:p>
+                  </a:txBody>
+                  <a:tcPr/>
+                </a:tc>
+                <a:tc>
+                  <a:txBody>
+                    <a:bodyPr/>
+                    <a:lstStyle/>
+                    <a:p>
+                      <a:pPr algn="ctr"/>
+                      <a:r>
+                        <a:rPr lang="de-DE" dirty="0">
+                          <a:solidFill>
+                            <a:schemeClr val="tx1"/>
+                          </a:solidFill>
+                        </a:rPr>
+                        <a:t>(BA Ch1 + BA Ch2) / 2</a:t>
+                      </a:r>
+                    </a:p>
+                  </a:txBody>
+                  <a:tcPr/>
+                </a:tc>
+                <a:tc>
+                  <a:txBody>
+                    <a:bodyPr/>
+                    <a:lstStyle/>
+                    <a:p>
+                      <a:pPr marL="0" marR="0" lvl="0" indent="0" algn="ctr" defTabSz="457200" rtl="0" eaLnBrk="1" fontAlgn="auto" latinLnBrk="0" hangingPunct="1">
+                        <a:lnSpc>
+                          <a:spcPct val="100000"/>
+                        </a:lnSpc>
+                        <a:spcBef>
+                          <a:spcPts val="0"/>
+                        </a:spcBef>
+                        <a:spcAft>
+                          <a:spcPts val="0"/>
+                        </a:spcAft>
+                        <a:buClrTx/>
+                        <a:buSzTx/>
+                        <a:buFontTx/>
+                        <a:buNone/>
+                        <a:tabLst/>
+                        <a:defRPr/>
+                      </a:pPr>
+                      <a:r>
+                        <a:rPr lang="de-DE" dirty="0">
+                          <a:solidFill>
+                            <a:schemeClr val="tx1"/>
+                          </a:solidFill>
+                        </a:rPr>
+                        <a:t>(BA Ch1 + BA Ch2) / 2</a:t>
+                      </a:r>
+                    </a:p>
+                  </a:txBody>
+                  <a:tcPr/>
+                </a:tc>
+                <a:extLst>
+                  <a:ext uri="{0D108BD9-81ED-4DB2-BD59-A6C34878D82A}">
+                    <a16:rowId xmlns:a16="http://schemas.microsoft.com/office/drawing/2014/main" val="1249886461"/>
+                  </a:ext>
+                </a:extLst>
+              </a:tr>
+              <a:tr h="370840">
+                <a:tc>
+                  <a:txBody>
+                    <a:bodyPr/>
+                    <a:lstStyle/>
+                    <a:p>
+                      <a:pPr algn="ctr"/>
+                      <a:r>
+                        <a:rPr lang="de-DE" dirty="0"/>
+                        <a:t>1</a:t>
+                      </a:r>
+                    </a:p>
+                  </a:txBody>
+                  <a:tcPr/>
+                </a:tc>
+                <a:tc>
+                  <a:txBody>
+                    <a:bodyPr/>
+                    <a:lstStyle/>
+                    <a:p>
+                      <a:pPr algn="ctr"/>
+                      <a:r>
+                        <a:rPr lang="de-DE" dirty="0"/>
+                        <a:t>0.938</a:t>
+                      </a:r>
+                    </a:p>
+                  </a:txBody>
+                  <a:tcPr/>
+                </a:tc>
+                <a:tc>
+                  <a:txBody>
+                    <a:bodyPr/>
+                    <a:lstStyle/>
+                    <a:p>
+                      <a:pPr algn="ctr"/>
+                      <a:r>
+                        <a:rPr lang="de-DE" dirty="0"/>
+                        <a:t>0.963</a:t>
+                      </a:r>
+                    </a:p>
+                  </a:txBody>
+                  <a:tcPr/>
+                </a:tc>
+                <a:extLst>
+                  <a:ext uri="{0D108BD9-81ED-4DB2-BD59-A6C34878D82A}">
+                    <a16:rowId xmlns:a16="http://schemas.microsoft.com/office/drawing/2014/main" val="3762681257"/>
+                  </a:ext>
+                </a:extLst>
+              </a:tr>
+              <a:tr h="370840">
+                <a:tc>
+                  <a:txBody>
+                    <a:bodyPr/>
+                    <a:lstStyle/>
+                    <a:p>
+                      <a:pPr algn="ctr"/>
+                      <a:r>
+                        <a:rPr lang="de-DE" dirty="0"/>
+                        <a:t>2</a:t>
+                      </a:r>
+                    </a:p>
+                  </a:txBody>
+                  <a:tcPr/>
+                </a:tc>
+                <a:tc>
+                  <a:txBody>
+                    <a:bodyPr/>
+                    <a:lstStyle/>
+                    <a:p>
+                      <a:pPr algn="ctr"/>
+                      <a:r>
+                        <a:rPr lang="de-DE" dirty="0"/>
+                        <a:t>0.938</a:t>
+                      </a:r>
+                    </a:p>
+                  </a:txBody>
+                  <a:tcPr/>
+                </a:tc>
+                <a:tc>
+                  <a:txBody>
+                    <a:bodyPr/>
+                    <a:lstStyle/>
+                    <a:p>
+                      <a:pPr algn="ctr"/>
+                      <a:r>
+                        <a:rPr lang="de-DE" dirty="0"/>
+                        <a:t>0.700</a:t>
+                      </a:r>
+                    </a:p>
+                  </a:txBody>
+                  <a:tcPr/>
+                </a:tc>
+                <a:extLst>
+                  <a:ext uri="{0D108BD9-81ED-4DB2-BD59-A6C34878D82A}">
+                    <a16:rowId xmlns:a16="http://schemas.microsoft.com/office/drawing/2014/main" val="405883056"/>
+                  </a:ext>
+                </a:extLst>
+              </a:tr>
+              <a:tr h="370840">
+                <a:tc>
+                  <a:txBody>
+                    <a:bodyPr/>
+                    <a:lstStyle/>
+                    <a:p>
+                      <a:pPr algn="ctr"/>
+                      <a:r>
+                        <a:rPr lang="de-DE" dirty="0"/>
+                        <a:t>3</a:t>
+                      </a:r>
+                    </a:p>
+                  </a:txBody>
+                  <a:tcPr/>
+                </a:tc>
+                <a:tc>
+                  <a:txBody>
+                    <a:bodyPr/>
+                    <a:lstStyle/>
+                    <a:p>
+                      <a:pPr algn="ctr"/>
+                      <a:r>
+                        <a:rPr lang="de-DE" dirty="0"/>
+                        <a:t>0.975</a:t>
+                      </a:r>
+                    </a:p>
+                  </a:txBody>
+                  <a:tcPr/>
+                </a:tc>
+                <a:tc>
+                  <a:txBody>
+                    <a:bodyPr/>
+                    <a:lstStyle/>
+                    <a:p>
+                      <a:pPr algn="ctr"/>
+                      <a:r>
+                        <a:rPr lang="de-DE" dirty="0"/>
+                        <a:t>0.500</a:t>
+                      </a:r>
+                    </a:p>
+                  </a:txBody>
+                  <a:tcPr/>
+                </a:tc>
+                <a:extLst>
+                  <a:ext uri="{0D108BD9-81ED-4DB2-BD59-A6C34878D82A}">
+                    <a16:rowId xmlns:a16="http://schemas.microsoft.com/office/drawing/2014/main" val="2514947775"/>
+                  </a:ext>
+                </a:extLst>
+              </a:tr>
+              <a:tr h="370840">
+                <a:tc>
+                  <a:txBody>
+                    <a:bodyPr/>
+                    <a:lstStyle/>
+                    <a:p>
+                      <a:pPr algn="ctr"/>
+                      <a:r>
+                        <a:rPr lang="de-DE" dirty="0"/>
+                        <a:t>4</a:t>
+                      </a:r>
+                    </a:p>
+                  </a:txBody>
+                  <a:tcPr/>
+                </a:tc>
+                <a:tc>
+                  <a:txBody>
+                    <a:bodyPr/>
+                    <a:lstStyle/>
+                    <a:p>
+                      <a:pPr algn="ctr"/>
+                      <a:r>
+                        <a:rPr lang="de-DE" dirty="0"/>
+                        <a:t>0.755</a:t>
+                      </a:r>
+                    </a:p>
+                  </a:txBody>
+                  <a:tcPr/>
+                </a:tc>
+                <a:tc>
+                  <a:txBody>
+                    <a:bodyPr/>
+                    <a:lstStyle/>
+                    <a:p>
+                      <a:pPr algn="ctr"/>
+                      <a:r>
+                        <a:rPr lang="de-DE" dirty="0"/>
+                        <a:t>0.838</a:t>
+                      </a:r>
+                    </a:p>
+                  </a:txBody>
+                  <a:tcPr/>
+                </a:tc>
+                <a:extLst>
+                  <a:ext uri="{0D108BD9-81ED-4DB2-BD59-A6C34878D82A}">
+                    <a16:rowId xmlns:a16="http://schemas.microsoft.com/office/drawing/2014/main" val="4142393146"/>
+                  </a:ext>
+                </a:extLst>
+              </a:tr>
+              <a:tr h="370840">
+                <a:tc>
+                  <a:txBody>
+                    <a:bodyPr/>
+                    <a:lstStyle/>
+                    <a:p>
+                      <a:pPr algn="ctr"/>
+                      <a:r>
+                        <a:rPr lang="de-DE" dirty="0"/>
+                        <a:t>Makromittel</a:t>
+                      </a:r>
+                    </a:p>
+                  </a:txBody>
+                  <a:tcPr/>
+                </a:tc>
+                <a:tc>
+                  <a:txBody>
+                    <a:bodyPr/>
+                    <a:lstStyle/>
+                    <a:p>
+                      <a:pPr algn="ctr"/>
+                      <a:r>
+                        <a:rPr lang="de-DE" dirty="0"/>
+                        <a:t>0.901</a:t>
+                      </a:r>
+                    </a:p>
+                  </a:txBody>
+                  <a:tcPr/>
+                </a:tc>
+                <a:tc>
+                  <a:txBody>
+                    <a:bodyPr/>
+                    <a:lstStyle/>
+                    <a:p>
+                      <a:pPr algn="ctr"/>
+                      <a:r>
+                        <a:rPr lang="de-DE" dirty="0"/>
+                        <a:t>0.750</a:t>
+                      </a:r>
+                    </a:p>
+                  </a:txBody>
+                  <a:tcPr/>
+                </a:tc>
+                <a:extLst>
+                  <a:ext uri="{0D108BD9-81ED-4DB2-BD59-A6C34878D82A}">
+                    <a16:rowId xmlns:a16="http://schemas.microsoft.com/office/drawing/2014/main" val="3071965136"/>
+                  </a:ext>
+                </a:extLst>
+              </a:tr>
+            </a:tbl>
+          </a:graphicData>
+        </a:graphic>
+      </p:graphicFrame>
+    </p:spTree>
+    <p:extLst>
+      <p:ext uri="{BB962C8B-B14F-4D97-AF65-F5344CB8AC3E}">
+        <p14:creationId xmlns:p14="http://schemas.microsoft.com/office/powerpoint/2010/main" val="3200753547"/>
+      </p:ext>
+    </p:extLst>
+  </p:cSld>
+  <p:clrMapOvr>
+    <a:masterClrMapping/>
+  </p:clrMapOvr>
+</p:sld>
+</file>
+
+<file path=ppt/slides/slide9.xml><?xml version="1.0" encoding="utf-8"?>
+<p:sld xmlns:a="http://schemas.openxmlformats.org/drawingml/2006/main" xmlns:r="http://schemas.openxmlformats.org/officeDocument/2006/relationships" xmlns:p="http://schemas.openxmlformats.org/presentationml/2006/main">
+  <p:cSld>
+    <p:spTree>
+      <p:nvGrpSpPr>
+        <p:cNvPr id="1" name="">
           <a:extLst>
-            <a:ext uri="{909E8E84-426E-40DD-AFC4-6F175D3DCCD1}">
-              <a14:hiddenFill xmlns:a14="http://schemas.microsoft.com/office/drawing/2010/main">
-                <a:solidFill>
-                  <a:srgbClr val="FFFFFF"/>
-                </a:solidFill>
-              </a14:hiddenFill>
-            </a:ext>
-            <a:ext uri="{91240B29-F687-4F45-9708-019B960494DF}">
-              <a14:hiddenLine xmlns:a14="http://schemas.microsoft.com/office/drawing/2010/main" w="9525">
-                <a:solidFill>
-                  <a:srgbClr val="000000"/>
-                </a:solidFill>
-                <a:miter lim="800000"/>
-                <a:headEnd/>
-                <a:tailEnd/>
-              </a14:hiddenLine>
+            <a:ext uri="{FF2B5EF4-FFF2-40B4-BE49-F238E27FC236}">
+              <a16:creationId xmlns:a16="http://schemas.microsoft.com/office/drawing/2014/main" id="{711A0095-53C7-3F5E-182B-1605E00E0FC0}"/>
             </a:ext>
           </a:extLst>
+        </p:cNvPr>
+        <p:cNvGrpSpPr/>
+        <p:nvPr/>
+      </p:nvGrpSpPr>
+      <p:grpSpPr>
+        <a:xfrm>
+          <a:off x="0" y="0"/>
+          <a:ext cx="0" cy="0"/>
+          <a:chOff x="0" y="0"/>
+          <a:chExt cx="0" cy="0"/>
+        </a:xfrm>
+      </p:grpSpPr>
+      <p:sp>
+        <p:nvSpPr>
+          <p:cNvPr id="5" name="Titel 4">
+            <a:extLst>
+              <a:ext uri="{FF2B5EF4-FFF2-40B4-BE49-F238E27FC236}">
+                <a16:creationId xmlns:a16="http://schemas.microsoft.com/office/drawing/2014/main" id="{D757B5A5-6051-FFCC-0340-6B2A2309AADC}"/>
+              </a:ext>
+            </a:extLst>
+          </p:cNvPr>
+          <p:cNvSpPr>
+            <a:spLocks noGrp="1"/>
+          </p:cNvSpPr>
+          <p:nvPr>
+            <p:ph type="title"/>
+          </p:nvPr>
+        </p:nvSpPr>
+        <p:spPr>
+          <a:xfrm>
+            <a:off x="341810" y="567600"/>
+            <a:ext cx="5995927" cy="706030"/>
+          </a:xfrm>
         </p:spPr>
         <p:txBody>
-          <a:bodyPr vert="horz" wrap="square" lIns="91440" tIns="45720" rIns="91440" bIns="45720" numCol="1" anchor="t" anchorCtr="0" compatLnSpc="1">
-            <a:prstTxWarp prst="textNoShape">
-              <a:avLst/>
-            </a:prstTxWarp>
-          </a:bodyPr>
-          <a:lstStyle>
-            <a:lvl1pPr marL="342900" indent="-342900" algn="l" rtl="0" eaLnBrk="1" fontAlgn="base" hangingPunct="1">
-              <a:spcBef>
-                <a:spcPct val="20000"/>
-              </a:spcBef>
-              <a:spcAft>
-                <a:spcPct val="0"/>
-              </a:spcAft>
-              <a:buFont typeface="Lucida Grande" charset="0"/>
-              <a:buChar char="·"/>
-              <a:defRPr sz="2400">
-                <a:solidFill>
-                  <a:srgbClr val="414141"/>
-                </a:solidFill>
-                <a:latin typeface="+mn-lt"/>
-                <a:ea typeface="+mn-ea"/>
-                <a:cs typeface="+mn-cs"/>
-              </a:defRPr>
-            </a:lvl1pPr>
-            <a:lvl2pPr marL="742950" indent="-285750" algn="l" rtl="0" eaLnBrk="1" fontAlgn="base" hangingPunct="1">
-              <a:spcBef>
-                <a:spcPct val="20000"/>
-              </a:spcBef>
-              <a:spcAft>
-                <a:spcPct val="0"/>
-              </a:spcAft>
-              <a:buFont typeface="Lucida Grande" charset="0"/>
-              <a:buChar char="·"/>
-              <a:defRPr sz="2000">
-                <a:solidFill>
-                  <a:srgbClr val="414141"/>
-                </a:solidFill>
-                <a:latin typeface="+mn-lt"/>
-                <a:ea typeface="+mn-ea"/>
-                <a:cs typeface="+mn-cs"/>
-              </a:defRPr>
-            </a:lvl2pPr>
-            <a:lvl3pPr marL="1143000" indent="-228600" algn="l" rtl="0" eaLnBrk="1" fontAlgn="base" hangingPunct="1">
-              <a:spcBef>
-                <a:spcPct val="20000"/>
-              </a:spcBef>
-              <a:spcAft>
-                <a:spcPct val="0"/>
-              </a:spcAft>
-              <a:buFont typeface="Lucida Grande" charset="0"/>
-              <a:buChar char="·"/>
-              <a:defRPr>
-                <a:solidFill>
-                  <a:srgbClr val="414141"/>
-                </a:solidFill>
-                <a:latin typeface="+mn-lt"/>
-                <a:ea typeface="+mn-ea"/>
-                <a:cs typeface="+mn-cs"/>
-              </a:defRPr>
-            </a:lvl3pPr>
-            <a:lvl4pPr marL="1144588" algn="l" rtl="0" eaLnBrk="1" fontAlgn="base" hangingPunct="1">
-              <a:spcBef>
-                <a:spcPct val="20000"/>
-              </a:spcBef>
-              <a:spcAft>
-                <a:spcPct val="0"/>
-              </a:spcAft>
-              <a:buClr>
-                <a:srgbClr val="414141"/>
-              </a:buClr>
-              <a:defRPr>
-                <a:solidFill>
-                  <a:srgbClr val="414141"/>
-                </a:solidFill>
-                <a:latin typeface="Courier New"/>
-                <a:ea typeface="+mn-ea"/>
-                <a:cs typeface="+mn-cs"/>
-              </a:defRPr>
-            </a:lvl4pPr>
-            <a:lvl5pPr marL="1144588" indent="-228600" algn="l" rtl="0" eaLnBrk="1" fontAlgn="base" hangingPunct="1">
-              <a:spcBef>
-                <a:spcPct val="20000"/>
-              </a:spcBef>
-              <a:spcAft>
-                <a:spcPct val="0"/>
-              </a:spcAft>
-              <a:buFont typeface="Lucida Grande" charset="0"/>
-              <a:buChar char="·"/>
-              <a:defRPr>
-                <a:solidFill>
-                  <a:srgbClr val="A8CC2F"/>
-                </a:solidFill>
-                <a:latin typeface="+mn-lt"/>
-                <a:ea typeface="+mn-ea"/>
-                <a:cs typeface="+mn-cs"/>
-              </a:defRPr>
-            </a:lvl5pPr>
-            <a:lvl6pPr marL="2438400" indent="-228600" algn="l" rtl="0" eaLnBrk="1" fontAlgn="base" hangingPunct="1">
-              <a:spcBef>
-                <a:spcPct val="20000"/>
-              </a:spcBef>
-              <a:spcAft>
-                <a:spcPct val="0"/>
-              </a:spcAft>
-              <a:defRPr sz="1600">
-                <a:solidFill>
-                  <a:srgbClr val="414141"/>
-                </a:solidFill>
-                <a:latin typeface="+mn-lt"/>
-                <a:ea typeface="+mn-ea"/>
-                <a:cs typeface="+mn-cs"/>
-              </a:defRPr>
-            </a:lvl6pPr>
-            <a:lvl7pPr marL="2895600" indent="-228600" algn="l" rtl="0" eaLnBrk="1" fontAlgn="base" hangingPunct="1">
-              <a:spcBef>
-                <a:spcPct val="20000"/>
-              </a:spcBef>
-              <a:spcAft>
-                <a:spcPct val="0"/>
-              </a:spcAft>
-              <a:defRPr sz="1600">
-                <a:solidFill>
-                  <a:srgbClr val="414141"/>
-                </a:solidFill>
-                <a:latin typeface="+mn-lt"/>
-                <a:ea typeface="+mn-ea"/>
-                <a:cs typeface="+mn-cs"/>
-              </a:defRPr>
-            </a:lvl7pPr>
-            <a:lvl8pPr marL="3352800" indent="-228600" algn="l" rtl="0" eaLnBrk="1" fontAlgn="base" hangingPunct="1">
-              <a:spcBef>
-                <a:spcPct val="20000"/>
-              </a:spcBef>
-              <a:spcAft>
-                <a:spcPct val="0"/>
-              </a:spcAft>
-              <a:defRPr sz="1600">
-                <a:solidFill>
-                  <a:srgbClr val="414141"/>
-                </a:solidFill>
-                <a:latin typeface="+mn-lt"/>
-                <a:ea typeface="+mn-ea"/>
-                <a:cs typeface="+mn-cs"/>
-              </a:defRPr>
-            </a:lvl8pPr>
-            <a:lvl9pPr marL="3810000" indent="-228600" algn="l" rtl="0" eaLnBrk="1" fontAlgn="base" hangingPunct="1">
-              <a:spcBef>
-                <a:spcPct val="20000"/>
-              </a:spcBef>
-              <a:spcAft>
-                <a:spcPct val="0"/>
-              </a:spcAft>
-              <a:defRPr sz="1600">
-                <a:solidFill>
-                  <a:srgbClr val="414141"/>
-                </a:solidFill>
-                <a:latin typeface="+mn-lt"/>
-                <a:ea typeface="+mn-ea"/>
-                <a:cs typeface="+mn-cs"/>
-              </a:defRPr>
-            </a:lvl9pPr>
-          </a:lstStyle>
-          <a:p>
-            <a:pPr>
-              <a:buFont typeface="Arial" panose="020B0604020202020204" pitchFamily="34" charset="0"/>
-              <a:buChar char="•"/>
-            </a:pPr>
-            <a:r>
-              <a:rPr lang="de-DE" dirty="0"/>
-              <a:t>Pipeline je Channel:</a:t>
-            </a:r>
-          </a:p>
-          <a:p>
-            <a:pPr lvl="1">
-              <a:buFont typeface="Arial" panose="020B0604020202020204" pitchFamily="34" charset="0"/>
-              <a:buChar char="•"/>
-            </a:pPr>
-            <a:r>
-              <a:rPr lang="de-DE" dirty="0" err="1"/>
-              <a:t>StandardScaler</a:t>
-            </a:r>
-            <a:r>
-              <a:rPr lang="de-DE" dirty="0"/>
-              <a:t> -&gt; </a:t>
-            </a:r>
-            <a:r>
-              <a:rPr lang="de-DE" dirty="0" err="1"/>
-              <a:t>MLPClassifier</a:t>
-            </a:r>
-            <a:endParaRPr lang="de-DE" dirty="0"/>
-          </a:p>
-          <a:p>
-            <a:pPr>
-              <a:buFont typeface="Arial" panose="020B0604020202020204" pitchFamily="34" charset="0"/>
-              <a:buChar char="•"/>
-            </a:pPr>
-            <a:r>
-              <a:rPr lang="de-DE" dirty="0"/>
-              <a:t>Skalierung nur auf Training fitten</a:t>
-            </a:r>
-          </a:p>
-          <a:p>
-            <a:pPr>
-              <a:buFont typeface="Arial" panose="020B0604020202020204" pitchFamily="34" charset="0"/>
-              <a:buChar char="•"/>
-            </a:pPr>
-            <a:r>
-              <a:rPr lang="de-DE" dirty="0"/>
-              <a:t>Finale Features: nur Signalmerkmale des jeweiligen Channels</a:t>
-            </a:r>
-          </a:p>
-          <a:p>
-            <a:pPr>
-              <a:buFont typeface="Arial" panose="020B0604020202020204" pitchFamily="34" charset="0"/>
-              <a:buChar char="•"/>
-            </a:pPr>
-            <a:r>
-              <a:rPr lang="de-DE" dirty="0"/>
-              <a:t>Kleine Netze wegen kleinem Datensatz</a:t>
-            </a:r>
-          </a:p>
-        </p:txBody>
-      </p:sp>
-      <p:sp>
-        <p:nvSpPr>
-          <p:cNvPr id="2" name="Datumsplatzhalter 1">
-            <a:extLst>
-              <a:ext uri="{FF2B5EF4-FFF2-40B4-BE49-F238E27FC236}">
-                <a16:creationId xmlns:a16="http://schemas.microsoft.com/office/drawing/2014/main" id="{D3CA445C-F940-E013-1AC9-1A366EEA3614}"/>
-              </a:ext>
-            </a:extLst>
-          </p:cNvPr>
-          <p:cNvSpPr>
-            <a:spLocks noGrp="1"/>
-          </p:cNvSpPr>
-          <p:nvPr>
-            <p:ph type="dt" sz="half" idx="12"/>
-          </p:nvPr>
-        </p:nvSpPr>
-        <p:spPr/>
-        <p:txBody>
-          <a:bodyPr/>
-          <a:lstStyle/>
-          <a:p>
-            <a:r>
-              <a:rPr lang="de-DE"/>
-              <a:t>23.07.2026</a:t>
-            </a:r>
-          </a:p>
-        </p:txBody>
-      </p:sp>
-      <p:sp>
-        <p:nvSpPr>
-          <p:cNvPr id="7" name="Fußzeilenplatzhalter 6">
-            <a:extLst>
-              <a:ext uri="{FF2B5EF4-FFF2-40B4-BE49-F238E27FC236}">
-                <a16:creationId xmlns:a16="http://schemas.microsoft.com/office/drawing/2014/main" id="{6ABEE24C-37F3-78D2-21C6-88F44D571121}"/>
-              </a:ext>
-            </a:extLst>
-          </p:cNvPr>
-          <p:cNvSpPr>
-            <a:spLocks noGrp="1"/>
-          </p:cNvSpPr>
-          <p:nvPr>
-            <p:ph type="ftr" sz="quarter" idx="11"/>
-          </p:nvPr>
-        </p:nvSpPr>
-        <p:spPr/>
-        <p:txBody>
-          <a:bodyPr/>
-          <a:lstStyle/>
-          <a:p>
-            <a:r>
-              <a:rPr lang="de-DE"/>
-              <a:t>Materialdiagnostik: Task 4</a:t>
-            </a:r>
-            <a:endParaRPr lang="de-DE" dirty="0"/>
-          </a:p>
-        </p:txBody>
-      </p:sp>
-      <p:sp>
-        <p:nvSpPr>
-          <p:cNvPr id="10" name="Foliennummernplatzhalter 9">
-            <a:extLst>
-              <a:ext uri="{FF2B5EF4-FFF2-40B4-BE49-F238E27FC236}">
-                <a16:creationId xmlns:a16="http://schemas.microsoft.com/office/drawing/2014/main" id="{774AB4C3-4602-6C57-8EB1-7749D74FE5AF}"/>
+          <a:bodyPr/>
+          <a:lstStyle/>
+          <a:p>
+            <a:r>
+              <a:rPr lang="de-DE" sz="3200" dirty="0" err="1"/>
+              <a:t>Confusion</a:t>
+            </a:r>
+            <a:r>
+              <a:rPr lang="de-DE" sz="3200" dirty="0"/>
+              <a:t>-Matrix Vergleich Fold 1</a:t>
+            </a:r>
+          </a:p>
+        </p:txBody>
+      </p:sp>
+      <p:sp>
+        <p:nvSpPr>
+          <p:cNvPr id="14" name="Foliennummernplatzhalter 13">
+            <a:extLst>
+              <a:ext uri="{FF2B5EF4-FFF2-40B4-BE49-F238E27FC236}">
+                <a16:creationId xmlns:a16="http://schemas.microsoft.com/office/drawing/2014/main" id="{F5D0BE65-A2B4-48E0-17C8-1A3BCBA53756}"/>
               </a:ext>
             </a:extLst>
           </p:cNvPr>
@@ -13824,10 +12295,129 @@
           </a:p>
         </p:txBody>
       </p:sp>
+      <p:sp>
+        <p:nvSpPr>
+          <p:cNvPr id="6" name="Fußzeilenplatzhalter 5">
+            <a:extLst>
+              <a:ext uri="{FF2B5EF4-FFF2-40B4-BE49-F238E27FC236}">
+                <a16:creationId xmlns:a16="http://schemas.microsoft.com/office/drawing/2014/main" id="{8AEF4587-D828-91EE-B123-AA8CB8A7F45A}"/>
+              </a:ext>
+            </a:extLst>
+          </p:cNvPr>
+          <p:cNvSpPr>
+            <a:spLocks noGrp="1"/>
+          </p:cNvSpPr>
+          <p:nvPr>
+            <p:ph type="ftr" sz="quarter" idx="11"/>
+          </p:nvPr>
+        </p:nvSpPr>
+        <p:spPr/>
+        <p:txBody>
+          <a:bodyPr/>
+          <a:lstStyle/>
+          <a:p>
+            <a:r>
+              <a:rPr lang="de-DE"/>
+              <a:t>Materialdiagnostik: Task 4</a:t>
+            </a:r>
+            <a:endParaRPr lang="de-DE" dirty="0"/>
+          </a:p>
+        </p:txBody>
+      </p:sp>
+      <p:sp>
+        <p:nvSpPr>
+          <p:cNvPr id="2" name="Datumsplatzhalter 1">
+            <a:extLst>
+              <a:ext uri="{FF2B5EF4-FFF2-40B4-BE49-F238E27FC236}">
+                <a16:creationId xmlns:a16="http://schemas.microsoft.com/office/drawing/2014/main" id="{CE98F3A7-4DE5-447B-E8E2-5AA1A1F5B2C0}"/>
+              </a:ext>
+            </a:extLst>
+          </p:cNvPr>
+          <p:cNvSpPr>
+            <a:spLocks noGrp="1"/>
+          </p:cNvSpPr>
+          <p:nvPr>
+            <p:ph type="dt" sz="half" idx="12"/>
+          </p:nvPr>
+        </p:nvSpPr>
+        <p:spPr/>
+        <p:txBody>
+          <a:bodyPr/>
+          <a:lstStyle/>
+          <a:p>
+            <a:r>
+              <a:rPr lang="de-DE"/>
+              <a:t>23.07.2026</a:t>
+            </a:r>
+          </a:p>
+        </p:txBody>
+      </p:sp>
+      <p:pic>
+        <p:nvPicPr>
+          <p:cNvPr id="11" name="Inhaltsplatzhalter 10">
+            <a:extLst>
+              <a:ext uri="{FF2B5EF4-FFF2-40B4-BE49-F238E27FC236}">
+                <a16:creationId xmlns:a16="http://schemas.microsoft.com/office/drawing/2014/main" id="{76E1111D-6EAD-AB55-4658-E026E716E886}"/>
+              </a:ext>
+            </a:extLst>
+          </p:cNvPr>
+          <p:cNvPicPr>
+            <a:picLocks noGrp="1" noChangeAspect="1"/>
+          </p:cNvPicPr>
+          <p:nvPr>
+            <p:ph sz="quarter" idx="13"/>
+          </p:nvPr>
+        </p:nvPicPr>
+        <p:blipFill>
+          <a:blip r:embed="rId3"/>
+          <a:srcRect/>
+          <a:stretch/>
+        </p:blipFill>
+        <p:spPr>
+          <a:xfrm>
+            <a:off x="447040" y="1619250"/>
+            <a:ext cx="5179695" cy="4316413"/>
+          </a:xfrm>
+          <a:prstGeom prst="rect">
+            <a:avLst/>
+          </a:prstGeom>
+        </p:spPr>
+      </p:pic>
+      <p:pic>
+        <p:nvPicPr>
+          <p:cNvPr id="15" name="Inhaltsplatzhalter 14">
+            <a:extLst>
+              <a:ext uri="{FF2B5EF4-FFF2-40B4-BE49-F238E27FC236}">
+                <a16:creationId xmlns:a16="http://schemas.microsoft.com/office/drawing/2014/main" id="{B77F871A-4A0B-1EBD-3652-27ECB1E25FD7}"/>
+              </a:ext>
+            </a:extLst>
+          </p:cNvPr>
+          <p:cNvPicPr>
+            <a:picLocks noGrp="1" noChangeAspect="1"/>
+          </p:cNvPicPr>
+          <p:nvPr>
+            <p:ph sz="quarter" idx="14"/>
+          </p:nvPr>
+        </p:nvPicPr>
+        <p:blipFill>
+          <a:blip r:embed="rId4"/>
+          <a:srcRect/>
+          <a:stretch/>
+        </p:blipFill>
+        <p:spPr>
+          <a:xfrm>
+            <a:off x="6565265" y="1619250"/>
+            <a:ext cx="5179695" cy="4316413"/>
+          </a:xfrm>
+          <a:prstGeom prst="rect">
+            <a:avLst/>
+          </a:prstGeom>
+        </p:spPr>
+      </p:pic>
     </p:spTree>
     <p:extLst>
       <p:ext uri="{BB962C8B-B14F-4D97-AF65-F5344CB8AC3E}">
-        <p14:creationId xmlns:p14="http://schemas.microsoft.com/office/powerpoint/2010/main" val="3200753547"/>
+        <p14:creationId xmlns:p14="http://schemas.microsoft.com/office/powerpoint/2010/main" val="1026886502"/>
       </p:ext>
     </p:extLst>
   </p:cSld>

--- a/Task_4/Presentation_Task4.pptx
+++ b/Task_4/Presentation_Task4.pptx
@@ -274,7 +274,7 @@
           <a:p>
             <a:fld id="{75AB4CA9-CCE6-4DE5-84AD-E1F7B6CB5CBB}" type="datetimeFigureOut">
               <a:rPr lang="de-DE" smtClean="0"/>
-              <a:t>21.07.2026</a:t>
+              <a:t>22.07.2026</a:t>
             </a:fld>
             <a:endParaRPr lang="de-DE"/>
           </a:p>
@@ -451,7 +451,7 @@
           <a:p>
             <a:fld id="{52D5829F-2F94-0B44-A96D-AE852A87AC61}" type="datetimeFigureOut">
               <a:rPr lang="de-DE" smtClean="0"/>
-              <a:t>21.07.2026</a:t>
+              <a:t>22.07.2026</a:t>
             </a:fld>
             <a:endParaRPr lang="de-DE"/>
           </a:p>
@@ -1910,6 +1910,115 @@
               <a:t>Tim</a:t>
             </a:r>
           </a:p>
+          <a:p>
+            <a:r>
+              <a:rPr lang="de-DE" sz="1200" b="0" i="0" kern="1200" dirty="0">
+                <a:solidFill>
+                  <a:schemeClr val="tx1"/>
+                </a:solidFill>
+                <a:effectLst/>
+                <a:latin typeface="+mn-lt"/>
+                <a:ea typeface="+mn-ea"/>
+                <a:cs typeface="+mn-cs"/>
+              </a:rPr>
+              <a:t>Fold 4 -&gt; wissen über Verteilung aus Task 2 </a:t>
+            </a:r>
+            <a:br>
+              <a:rPr lang="de-DE" sz="1200" b="0" i="0" kern="1200" dirty="0">
+                <a:solidFill>
+                  <a:schemeClr val="tx1"/>
+                </a:solidFill>
+                <a:effectLst/>
+                <a:latin typeface="+mn-lt"/>
+                <a:ea typeface="+mn-ea"/>
+                <a:cs typeface="+mn-cs"/>
+              </a:rPr>
+            </a:br>
+            <a:r>
+              <a:rPr lang="de-DE" sz="1200" b="0" i="0" kern="1200" dirty="0">
+                <a:solidFill>
+                  <a:schemeClr val="tx1"/>
+                </a:solidFill>
+                <a:effectLst/>
+                <a:latin typeface="+mn-lt"/>
+                <a:ea typeface="+mn-ea"/>
+                <a:cs typeface="+mn-cs"/>
+              </a:rPr>
+              <a:t>BA = </a:t>
+            </a:r>
+            <a:r>
+              <a:rPr lang="de-DE" sz="1200" b="0" i="0" kern="1200" dirty="0" err="1">
+                <a:solidFill>
+                  <a:schemeClr val="tx1"/>
+                </a:solidFill>
+                <a:effectLst/>
+                <a:latin typeface="+mn-lt"/>
+                <a:ea typeface="+mn-ea"/>
+                <a:cs typeface="+mn-cs"/>
+              </a:rPr>
+              <a:t>Balanced</a:t>
+            </a:r>
+            <a:r>
+              <a:rPr lang="de-DE" sz="1200" b="0" i="0" kern="1200" dirty="0">
+                <a:solidFill>
+                  <a:schemeClr val="tx1"/>
+                </a:solidFill>
+                <a:effectLst/>
+                <a:latin typeface="+mn-lt"/>
+                <a:ea typeface="+mn-ea"/>
+                <a:cs typeface="+mn-cs"/>
+              </a:rPr>
+              <a:t> </a:t>
+            </a:r>
+            <a:r>
+              <a:rPr lang="de-DE" sz="1200" b="0" i="0" kern="1200" dirty="0" err="1">
+                <a:solidFill>
+                  <a:schemeClr val="tx1"/>
+                </a:solidFill>
+                <a:effectLst/>
+                <a:latin typeface="+mn-lt"/>
+                <a:ea typeface="+mn-ea"/>
+                <a:cs typeface="+mn-cs"/>
+              </a:rPr>
+              <a:t>Accuracy</a:t>
+            </a:r>
+            <a:r>
+              <a:rPr lang="de-DE" sz="1200" b="0" i="0" kern="1200" dirty="0">
+                <a:solidFill>
+                  <a:schemeClr val="tx1"/>
+                </a:solidFill>
+                <a:effectLst/>
+                <a:latin typeface="+mn-lt"/>
+                <a:ea typeface="+mn-ea"/>
+                <a:cs typeface="+mn-cs"/>
+              </a:rPr>
+              <a:t> </a:t>
+            </a:r>
+            <a:br>
+              <a:rPr lang="de-DE" sz="1200" b="0" i="0" kern="1200" dirty="0">
+                <a:solidFill>
+                  <a:schemeClr val="tx1"/>
+                </a:solidFill>
+                <a:effectLst/>
+                <a:latin typeface="+mn-lt"/>
+                <a:ea typeface="+mn-ea"/>
+                <a:cs typeface="+mn-cs"/>
+              </a:rPr>
+            </a:br>
+            <a:r>
+              <a:rPr lang="de-DE" sz="1200" b="0" i="0" kern="1200" dirty="0">
+                <a:solidFill>
+                  <a:schemeClr val="tx1"/>
+                </a:solidFill>
+                <a:effectLst/>
+                <a:latin typeface="+mn-lt"/>
+                <a:ea typeface="+mn-ea"/>
+                <a:cs typeface="+mn-cs"/>
+              </a:rPr>
+              <a:t>TPR = True positive Rate</a:t>
+            </a:r>
+            <a:endParaRPr lang="de-DE" dirty="0"/>
+          </a:p>
         </p:txBody>
       </p:sp>
       <p:sp>
@@ -2031,36 +2140,144 @@
           </a:p>
           <a:p>
             <a:r>
-              <a:rPr lang="de-DE" dirty="0"/>
-              <a:t>ROC x-Achse </a:t>
-            </a:r>
-            <a:r>
-              <a:rPr lang="de-DE" dirty="0">
-                <a:sym typeface="Wingdings" panose="05000000000000000000" pitchFamily="2" charset="2"/>
+              <a:rPr lang="de-DE" sz="1200" b="0" i="0" kern="1200" dirty="0">
+                <a:solidFill>
+                  <a:schemeClr val="tx1"/>
+                </a:solidFill>
+                <a:effectLst/>
+                <a:latin typeface="+mn-lt"/>
+                <a:ea typeface="+mn-ea"/>
+                <a:cs typeface="+mn-cs"/>
               </a:rPr>
-              <a:t> </a:t>
-            </a:r>
-            <a:r>
-              <a:rPr lang="de-DE" dirty="0" err="1">
-                <a:sym typeface="Wingdings" panose="05000000000000000000" pitchFamily="2" charset="2"/>
+              <a:t>TPR = True positive Rate </a:t>
+            </a:r>
+          </a:p>
+          <a:p>
+            <a:r>
+              <a:rPr lang="de-DE" sz="1200" b="0" i="0" kern="1200" dirty="0">
+                <a:solidFill>
+                  <a:schemeClr val="tx1"/>
+                </a:solidFill>
+                <a:effectLst/>
+                <a:latin typeface="+mn-lt"/>
+                <a:ea typeface="+mn-ea"/>
+                <a:cs typeface="+mn-cs"/>
               </a:rPr>
-              <a:t>wieviele</a:t>
-            </a:r>
-            <a:r>
-              <a:rPr lang="de-DE" dirty="0">
-                <a:sym typeface="Wingdings" panose="05000000000000000000" pitchFamily="2" charset="2"/>
+              <a:t>TNR = True Negative Rate </a:t>
+            </a:r>
+          </a:p>
+          <a:p>
+            <a:r>
+              <a:rPr lang="de-DE" sz="1200" b="0" i="0" kern="1200" dirty="0">
+                <a:solidFill>
+                  <a:schemeClr val="tx1"/>
+                </a:solidFill>
+                <a:effectLst/>
+                <a:latin typeface="+mn-lt"/>
+                <a:ea typeface="+mn-ea"/>
+                <a:cs typeface="+mn-cs"/>
               </a:rPr>
-              <a:t> Label 0 haben einen höheren Score als Label 1? </a:t>
-            </a:r>
-          </a:p>
-          <a:p>
-            <a:r>
-              <a:rPr lang="de-DE" dirty="0">
-                <a:sym typeface="Wingdings" panose="05000000000000000000" pitchFamily="2" charset="2"/>
+              <a:t>BA = </a:t>
+            </a:r>
+            <a:r>
+              <a:rPr lang="de-DE" sz="1200" b="0" i="0" kern="1200" dirty="0" err="1">
+                <a:solidFill>
+                  <a:schemeClr val="tx1"/>
+                </a:solidFill>
+                <a:effectLst/>
+                <a:latin typeface="+mn-lt"/>
+                <a:ea typeface="+mn-ea"/>
+                <a:cs typeface="+mn-cs"/>
               </a:rPr>
-              <a:t>Wenn 0 bei x-Achse dann alle Label 0 kleineren Score als Label 1. (Kein Schwellenwert)</a:t>
-            </a:r>
-            <a:endParaRPr lang="de-DE" dirty="0"/>
+              <a:t>Balanced</a:t>
+            </a:r>
+            <a:r>
+              <a:rPr lang="de-DE" sz="1200" b="0" i="0" kern="1200" dirty="0">
+                <a:solidFill>
+                  <a:schemeClr val="tx1"/>
+                </a:solidFill>
+                <a:effectLst/>
+                <a:latin typeface="+mn-lt"/>
+                <a:ea typeface="+mn-ea"/>
+                <a:cs typeface="+mn-cs"/>
+              </a:rPr>
+              <a:t> </a:t>
+            </a:r>
+            <a:r>
+              <a:rPr lang="de-DE" sz="1200" b="0" i="0" kern="1200" dirty="0" err="1">
+                <a:solidFill>
+                  <a:schemeClr val="tx1"/>
+                </a:solidFill>
+                <a:effectLst/>
+                <a:latin typeface="+mn-lt"/>
+                <a:ea typeface="+mn-ea"/>
+                <a:cs typeface="+mn-cs"/>
+              </a:rPr>
+              <a:t>Accuracy</a:t>
+            </a:r>
+            <a:r>
+              <a:rPr lang="de-DE" sz="1200" b="0" i="0" kern="1200" dirty="0">
+                <a:solidFill>
+                  <a:schemeClr val="tx1"/>
+                </a:solidFill>
+                <a:effectLst/>
+                <a:latin typeface="+mn-lt"/>
+                <a:ea typeface="+mn-ea"/>
+                <a:cs typeface="+mn-cs"/>
+              </a:rPr>
+              <a:t> </a:t>
+            </a:r>
+          </a:p>
+          <a:p>
+            <a:r>
+              <a:rPr lang="de-DE" sz="1200" b="0" i="0" kern="1200" dirty="0">
+                <a:solidFill>
+                  <a:schemeClr val="tx1"/>
+                </a:solidFill>
+                <a:effectLst/>
+                <a:latin typeface="+mn-lt"/>
+                <a:ea typeface="+mn-ea"/>
+                <a:cs typeface="+mn-cs"/>
+              </a:rPr>
+              <a:t>F1-Score = Genauigkeit &amp; Trefferquote in einem Wert </a:t>
+            </a:r>
+          </a:p>
+          <a:p>
+            <a:r>
+              <a:rPr lang="de-DE" sz="1200" b="0" i="0" kern="1200" dirty="0">
+                <a:solidFill>
+                  <a:schemeClr val="tx1"/>
+                </a:solidFill>
+                <a:effectLst/>
+                <a:latin typeface="+mn-lt"/>
+                <a:ea typeface="+mn-ea"/>
+                <a:cs typeface="+mn-cs"/>
+              </a:rPr>
+              <a:t>ROC Hinweis: gut, aber Kein Schwellenwert ist mit drin aber weniger relevant</a:t>
+            </a:r>
+            <a:br>
+              <a:rPr lang="de-DE" sz="1200" b="0" i="0" kern="1200" dirty="0">
+                <a:solidFill>
+                  <a:schemeClr val="tx1"/>
+                </a:solidFill>
+                <a:effectLst/>
+                <a:latin typeface="+mn-lt"/>
+                <a:ea typeface="+mn-ea"/>
+                <a:cs typeface="+mn-cs"/>
+              </a:rPr>
+            </a:br>
+            <a:r>
+              <a:rPr lang="de-DE" sz="1200" b="0" i="0" kern="1200" dirty="0">
+                <a:solidFill>
+                  <a:schemeClr val="tx1"/>
+                </a:solidFill>
+                <a:effectLst/>
+                <a:latin typeface="+mn-lt"/>
+                <a:ea typeface="+mn-ea"/>
+                <a:cs typeface="+mn-cs"/>
+              </a:rPr>
+              <a:t>(Falls noch nicht erwähnt: Fold 2 und 3 sehr Ähnlich da 160 der 180 Trainingssignale genau die gleichen sind)</a:t>
+            </a:r>
           </a:p>
           <a:p>
             <a:endParaRPr lang="de-DE" dirty="0"/>
@@ -7757,20 +7974,6 @@
               <a:t>Vor allem Fold 4 mit den sehr verteilten Messungen durch Z01 im Testfall erkennt sehr viele FP</a:t>
             </a:r>
           </a:p>
-          <a:p>
-            <a:pPr>
-              <a:buFont typeface="Arial" panose="020B0604020202020204" pitchFamily="34" charset="0"/>
-              <a:buChar char="•"/>
-            </a:pPr>
-            <a:r>
-              <a:rPr lang="de-DE" b="1" dirty="0"/>
-              <a:t>Grenze:</a:t>
-            </a:r>
-            <a:r>
-              <a:rPr lang="de-DE" dirty="0"/>
-              <a:t> Die 98%-Trainingsschwelle generalisiert nicht immer auf eine neue gesunde Z-Gruppe</a:t>
-            </a:r>
-          </a:p>
         </p:txBody>
       </p:sp>
       <p:sp>
@@ -8071,7 +8274,7 @@
           <p:nvPr>
             <p:extLst>
               <p:ext uri="{D42A27DB-BD31-4B8C-83A1-F6EECF244321}">
-                <p14:modId xmlns:p14="http://schemas.microsoft.com/office/powerpoint/2010/main" val="1273015678"/>
+                <p14:modId xmlns:p14="http://schemas.microsoft.com/office/powerpoint/2010/main" val="2350955294"/>
               </p:ext>
             </p:extLst>
           </p:nvPr>
@@ -8256,7 +8459,11 @@
                       </a:r>
                     </a:p>
                   </a:txBody>
-                  <a:tcPr/>
+                  <a:tcPr>
+                    <a:solidFill>
+                      <a:srgbClr val="FFC000"/>
+                    </a:solidFill>
+                  </a:tcPr>
                 </a:tc>
                 <a:tc>
                   <a:txBody>
@@ -8269,7 +8476,11 @@
                       </a:r>
                     </a:p>
                   </a:txBody>
-                  <a:tcPr/>
+                  <a:tcPr>
+                    <a:solidFill>
+                      <a:srgbClr val="FFC000"/>
+                    </a:solidFill>
+                  </a:tcPr>
                 </a:tc>
                 <a:tc>
                   <a:txBody>
@@ -8282,7 +8493,11 @@
                       </a:r>
                     </a:p>
                   </a:txBody>
-                  <a:tcPr/>
+                  <a:tcPr>
+                    <a:solidFill>
+                      <a:srgbClr val="FFC000"/>
+                    </a:solidFill>
+                  </a:tcPr>
                 </a:tc>
                 <a:tc>
                   <a:txBody>
@@ -8295,7 +8510,11 @@
                       </a:r>
                     </a:p>
                   </a:txBody>
-                  <a:tcPr/>
+                  <a:tcPr>
+                    <a:solidFill>
+                      <a:srgbClr val="FFC000"/>
+                    </a:solidFill>
+                  </a:tcPr>
                 </a:tc>
                 <a:tc>
                   <a:txBody>
@@ -8308,7 +8527,11 @@
                       </a:r>
                     </a:p>
                   </a:txBody>
-                  <a:tcPr/>
+                  <a:tcPr>
+                    <a:solidFill>
+                      <a:srgbClr val="FFC000"/>
+                    </a:solidFill>
+                  </a:tcPr>
                 </a:tc>
                 <a:tc>
                   <a:txBody>
@@ -8321,7 +8544,11 @@
                       </a:r>
                     </a:p>
                   </a:txBody>
-                  <a:tcPr/>
+                  <a:tcPr>
+                    <a:solidFill>
+                      <a:srgbClr val="FFC000"/>
+                    </a:solidFill>
+                  </a:tcPr>
                 </a:tc>
                 <a:extLst>
                   <a:ext uri="{0D108BD9-81ED-4DB2-BD59-A6C34878D82A}">
@@ -8341,7 +8568,11 @@
                       </a:r>
                     </a:p>
                   </a:txBody>
-                  <a:tcPr/>
+                  <a:tcPr>
+                    <a:solidFill>
+                      <a:srgbClr val="93FF96"/>
+                    </a:solidFill>
+                  </a:tcPr>
                 </a:tc>
                 <a:tc>
                   <a:txBody>
@@ -8354,7 +8585,11 @@
                       </a:r>
                     </a:p>
                   </a:txBody>
-                  <a:tcPr/>
+                  <a:tcPr>
+                    <a:solidFill>
+                      <a:srgbClr val="93FF96"/>
+                    </a:solidFill>
+                  </a:tcPr>
                 </a:tc>
                 <a:tc>
                   <a:txBody>
@@ -8367,7 +8602,11 @@
                       </a:r>
                     </a:p>
                   </a:txBody>
-                  <a:tcPr/>
+                  <a:tcPr>
+                    <a:solidFill>
+                      <a:srgbClr val="93FF96"/>
+                    </a:solidFill>
+                  </a:tcPr>
                 </a:tc>
                 <a:tc>
                   <a:txBody>
@@ -8380,7 +8619,11 @@
                       </a:r>
                     </a:p>
                   </a:txBody>
-                  <a:tcPr/>
+                  <a:tcPr>
+                    <a:solidFill>
+                      <a:srgbClr val="93FF96"/>
+                    </a:solidFill>
+                  </a:tcPr>
                 </a:tc>
                 <a:tc>
                   <a:txBody>
@@ -8393,7 +8636,11 @@
                       </a:r>
                     </a:p>
                   </a:txBody>
-                  <a:tcPr/>
+                  <a:tcPr>
+                    <a:solidFill>
+                      <a:srgbClr val="93FF96"/>
+                    </a:solidFill>
+                  </a:tcPr>
                 </a:tc>
                 <a:tc>
                   <a:txBody>
@@ -8406,7 +8653,11 @@
                       </a:r>
                     </a:p>
                   </a:txBody>
-                  <a:tcPr/>
+                  <a:tcPr>
+                    <a:solidFill>
+                      <a:srgbClr val="93FF96"/>
+                    </a:solidFill>
+                  </a:tcPr>
                 </a:tc>
                 <a:extLst>
                   <a:ext uri="{0D108BD9-81ED-4DB2-BD59-A6C34878D82A}">
@@ -8426,7 +8677,11 @@
                       </a:r>
                     </a:p>
                   </a:txBody>
-                  <a:tcPr/>
+                  <a:tcPr>
+                    <a:solidFill>
+                      <a:srgbClr val="00B050"/>
+                    </a:solidFill>
+                  </a:tcPr>
                 </a:tc>
                 <a:tc>
                   <a:txBody>
@@ -8439,7 +8694,11 @@
                       </a:r>
                     </a:p>
                   </a:txBody>
-                  <a:tcPr/>
+                  <a:tcPr>
+                    <a:solidFill>
+                      <a:srgbClr val="00B050"/>
+                    </a:solidFill>
+                  </a:tcPr>
                 </a:tc>
                 <a:tc>
                   <a:txBody>
@@ -8452,7 +8711,11 @@
                       </a:r>
                     </a:p>
                   </a:txBody>
-                  <a:tcPr/>
+                  <a:tcPr>
+                    <a:solidFill>
+                      <a:srgbClr val="00B050"/>
+                    </a:solidFill>
+                  </a:tcPr>
                 </a:tc>
                 <a:tc>
                   <a:txBody>
@@ -8465,7 +8728,11 @@
                       </a:r>
                     </a:p>
                   </a:txBody>
-                  <a:tcPr/>
+                  <a:tcPr>
+                    <a:solidFill>
+                      <a:srgbClr val="00B050"/>
+                    </a:solidFill>
+                  </a:tcPr>
                 </a:tc>
                 <a:tc>
                   <a:txBody>
@@ -8478,7 +8745,11 @@
                       </a:r>
                     </a:p>
                   </a:txBody>
-                  <a:tcPr/>
+                  <a:tcPr>
+                    <a:solidFill>
+                      <a:srgbClr val="00B050"/>
+                    </a:solidFill>
+                  </a:tcPr>
                 </a:tc>
                 <a:tc>
                   <a:txBody>
@@ -8491,7 +8762,11 @@
                       </a:r>
                     </a:p>
                   </a:txBody>
-                  <a:tcPr/>
+                  <a:tcPr>
+                    <a:solidFill>
+                      <a:srgbClr val="00B050"/>
+                    </a:solidFill>
+                  </a:tcPr>
                 </a:tc>
                 <a:extLst>
                   <a:ext uri="{0D108BD9-81ED-4DB2-BD59-A6C34878D82A}">
@@ -8511,7 +8786,11 @@
                       </a:r>
                     </a:p>
                   </a:txBody>
-                  <a:tcPr/>
+                  <a:tcPr>
+                    <a:solidFill>
+                      <a:srgbClr val="FF0000"/>
+                    </a:solidFill>
+                  </a:tcPr>
                 </a:tc>
                 <a:tc>
                   <a:txBody>
@@ -8524,7 +8803,11 @@
                       </a:r>
                     </a:p>
                   </a:txBody>
-                  <a:tcPr/>
+                  <a:tcPr>
+                    <a:solidFill>
+                      <a:srgbClr val="FF0000"/>
+                    </a:solidFill>
+                  </a:tcPr>
                 </a:tc>
                 <a:tc>
                   <a:txBody>
@@ -8537,7 +8820,11 @@
                       </a:r>
                     </a:p>
                   </a:txBody>
-                  <a:tcPr/>
+                  <a:tcPr>
+                    <a:solidFill>
+                      <a:srgbClr val="FF0000"/>
+                    </a:solidFill>
+                  </a:tcPr>
                 </a:tc>
                 <a:tc>
                   <a:txBody>
@@ -8550,7 +8837,11 @@
                       </a:r>
                     </a:p>
                   </a:txBody>
-                  <a:tcPr/>
+                  <a:tcPr>
+                    <a:solidFill>
+                      <a:srgbClr val="FF0000"/>
+                    </a:solidFill>
+                  </a:tcPr>
                 </a:tc>
                 <a:tc>
                   <a:txBody>
@@ -8563,7 +8854,11 @@
                       </a:r>
                     </a:p>
                   </a:txBody>
-                  <a:tcPr/>
+                  <a:tcPr>
+                    <a:solidFill>
+                      <a:srgbClr val="FF0000"/>
+                    </a:solidFill>
+                  </a:tcPr>
                 </a:tc>
                 <a:tc>
                   <a:txBody>
@@ -8576,7 +8871,11 @@
                       </a:r>
                     </a:p>
                   </a:txBody>
-                  <a:tcPr/>
+                  <a:tcPr>
+                    <a:solidFill>
+                      <a:srgbClr val="FF0000"/>
+                    </a:solidFill>
+                  </a:tcPr>
                 </a:tc>
                 <a:extLst>
                   <a:ext uri="{0D108BD9-81ED-4DB2-BD59-A6C34878D82A}">
@@ -10146,23 +10445,7 @@
             </a:pPr>
             <a:r>
               <a:rPr lang="de-DE" dirty="0"/>
-              <a:t>dichter Autoencoder (`</a:t>
-            </a:r>
-            <a:r>
-              <a:rPr lang="de-DE" dirty="0" err="1"/>
-              <a:t>MLPRegressor</a:t>
-            </a:r>
-            <a:r>
-              <a:rPr lang="de-DE" dirty="0"/>
-              <a:t>`), </a:t>
-            </a:r>
-            <a:r>
-              <a:rPr lang="de-DE" dirty="0" err="1"/>
-              <a:t>ReLU</a:t>
-            </a:r>
-            <a:r>
-              <a:rPr lang="de-DE" dirty="0"/>
-              <a:t> und Adam</a:t>
+              <a:t>dichter Autoencoder</a:t>
             </a:r>
           </a:p>
           <a:p>
@@ -10171,8 +10454,12 @@
               <a:buChar char="•"/>
             </a:pPr>
             <a:r>
+              <a:rPr lang="de-DE" dirty="0" err="1"/>
+              <a:t>ReLU</a:t>
+            </a:r>
+            <a:r>
               <a:rPr lang="de-DE" dirty="0"/>
-              <a:t>Lernrate 0,001; L2-Regularisierung 0,0001</a:t>
+              <a:t>-Aktivierungsfunktion</a:t>
             </a:r>
           </a:p>
           <a:p>
@@ -10182,15 +10469,7 @@
             </a:pPr>
             <a:r>
               <a:rPr lang="de-DE" dirty="0"/>
-              <a:t>maximal 2.000 Epochen, Early </a:t>
-            </a:r>
-            <a:r>
-              <a:rPr lang="de-DE" dirty="0" err="1"/>
-              <a:t>Stopping</a:t>
-            </a:r>
-            <a:r>
-              <a:rPr lang="de-DE" dirty="0"/>
-              <a:t> mit 15 %</a:t>
+              <a:t>Adam Optimizer</a:t>
             </a:r>
           </a:p>
           <a:p>
@@ -10200,7 +10479,7 @@
             </a:pPr>
             <a:r>
               <a:rPr lang="de-DE" dirty="0"/>
-              <a:t>feste Architektur und Seed 42</a:t>
+              <a:t>Lernrate 0,001</a:t>
             </a:r>
           </a:p>
           <a:p>
@@ -10210,7 +10489,32 @@
             </a:pPr>
             <a:r>
               <a:rPr lang="de-DE" dirty="0"/>
-              <a:t>Training ausschließlich mit Label 1</a:t>
+              <a:t>maximal 2.000 Epochen, </a:t>
+            </a:r>
+            <a:br>
+              <a:rPr lang="de-DE" dirty="0"/>
+            </a:br>
+            <a:r>
+              <a:rPr lang="de-DE" dirty="0"/>
+              <a:t>Early </a:t>
+            </a:r>
+            <a:r>
+              <a:rPr lang="de-DE" dirty="0" err="1"/>
+              <a:t>Stopping</a:t>
+            </a:r>
+            <a:r>
+              <a:rPr lang="de-DE" dirty="0"/>
+              <a:t> mit 15 %</a:t>
+            </a:r>
+          </a:p>
+          <a:p>
+            <a:pPr>
+              <a:buFont typeface="Arial" panose="020B0604020202020204" pitchFamily="34" charset="0"/>
+              <a:buChar char="•"/>
+            </a:pPr>
+            <a:r>
+              <a:rPr lang="de-DE" dirty="0"/>
+              <a:t>Training ausschließlich mit Label 0</a:t>
             </a:r>
           </a:p>
         </p:txBody>
@@ -10456,7 +10760,7 @@
             </a:pPr>
             <a:r>
               <a:rPr lang="de-DE" dirty="0"/>
-              <a:t>oberhalb der Schwelle: anomal (Label 0)</a:t>
+              <a:t>oberhalb der Schwelle: anomal (Label 1)</a:t>
             </a:r>
           </a:p>
           <a:p>
@@ -10470,6 +10774,16 @@
             </a:r>
           </a:p>
           <a:p>
+            <a:pPr>
+              <a:buFont typeface="Arial" panose="020B0604020202020204" pitchFamily="34" charset="0"/>
+              <a:buChar char="•"/>
+            </a:pPr>
+            <a:r>
+              <a:rPr lang="de-DE" b="1" dirty="0"/>
+              <a:t>Metriken:</a:t>
+            </a:r>
+          </a:p>
+          <a:p>
             <a:pPr lvl="1">
               <a:buFont typeface="Arial" panose="020B0604020202020204" pitchFamily="34" charset="0"/>
               <a:buChar char="•"/>
@@ -10507,30 +10821,6 @@
             <a:r>
               <a:rPr lang="de-DE" dirty="0"/>
               <a:t> (BAR), F1 und ROC-AUC</a:t>
-            </a:r>
-          </a:p>
-          <a:p>
-            <a:pPr>
-              <a:buFont typeface="Arial" panose="020B0604020202020204" pitchFamily="34" charset="0"/>
-              <a:buChar char="•"/>
-            </a:pPr>
-            <a:r>
-              <a:rPr lang="de-DE" b="1" dirty="0"/>
-              <a:t>Primärer Vergleich:</a:t>
-            </a:r>
-            <a:r>
-              <a:rPr lang="de-DE" dirty="0"/>
-              <a:t> </a:t>
-            </a:r>
-          </a:p>
-          <a:p>
-            <a:pPr lvl="1">
-              <a:buFont typeface="Arial" panose="020B0604020202020204" pitchFamily="34" charset="0"/>
-              <a:buChar char="•"/>
-            </a:pPr>
-            <a:r>
-              <a:rPr lang="de-DE" dirty="0"/>
-              <a:t>Makromittel der BAR über alle acht Modelle, weil die ungefilterte Pipeline ungleiche Testgruppengrößen besitzt.</a:t>
             </a:r>
           </a:p>
         </p:txBody>
@@ -10762,7 +11052,7 @@
             <p:ph sz="quarter" idx="14"/>
             <p:extLst>
               <p:ext uri="{D42A27DB-BD31-4B8C-83A1-F6EECF244321}">
-                <p14:modId xmlns:p14="http://schemas.microsoft.com/office/powerpoint/2010/main" val="2577350532"/>
+                <p14:modId xmlns:p14="http://schemas.microsoft.com/office/powerpoint/2010/main" val="1025093787"/>
               </p:ext>
             </p:extLst>
           </p:nvPr>
@@ -10882,20 +11172,12 @@
                     <a:p>
                       <a:pPr algn="ctr"/>
                       <a:r>
-                        <a:rPr lang="de-DE" dirty="0" err="1">
-                          <a:solidFill>
-                            <a:schemeClr val="tx1"/>
-                          </a:solidFill>
-                        </a:rPr>
-                        <a:t>Spezivität</a:t>
-                      </a:r>
-                      <a:r>
                         <a:rPr lang="de-DE" dirty="0">
                           <a:solidFill>
                             <a:schemeClr val="tx1"/>
                           </a:solidFill>
                         </a:rPr>
-                        <a:t> / TNR</a:t>
+                        <a:t>Spezifität / TNR</a:t>
                       </a:r>
                     </a:p>
                   </a:txBody>

--- a/Task_4/Presentation_Task4.pptx
+++ b/Task_4/Presentation_Task4.pptx
@@ -274,7 +274,7 @@
           <a:p>
             <a:fld id="{75AB4CA9-CCE6-4DE5-84AD-E1F7B6CB5CBB}" type="datetimeFigureOut">
               <a:rPr lang="de-DE" smtClean="0"/>
-              <a:t>22.07.2026</a:t>
+              <a:t>23.07.2026</a:t>
             </a:fld>
             <a:endParaRPr lang="de-DE"/>
           </a:p>
@@ -451,7 +451,7 @@
           <a:p>
             <a:fld id="{52D5829F-2F94-0B44-A96D-AE852A87AC61}" type="datetimeFigureOut">
               <a:rPr lang="de-DE" smtClean="0"/>
-              <a:t>22.07.2026</a:t>
+              <a:t>23.07.2026</a:t>
             </a:fld>
             <a:endParaRPr lang="de-DE"/>
           </a:p>

--- a/Task_4/Presentation_Task4.pptx
+++ b/Task_4/Presentation_Task4.pptx
@@ -2015,7 +2015,7 @@
                 <a:ea typeface="+mn-ea"/>
                 <a:cs typeface="+mn-cs"/>
               </a:rPr>
-              <a:t>TPR = True positive Rate</a:t>
+              <a:t>TNR = True negative Rate</a:t>
             </a:r>
             <a:endParaRPr lang="de-DE" dirty="0"/>
           </a:p>
@@ -2683,29 +2683,6 @@
                 <a:cs typeface="+mn-cs"/>
               </a:rPr>
               <a:t>Die Feature-Extraktion wird immer vor der Mittelung ausgeführt. Dadurch mitteln wir Merkmalsvektoren und nicht Rohsignale. Die Mittelung verändert nur Z01 und Z04; die anderen Gruppen bleiben inhaltlich unverändert.</a:t>
-            </a:r>
-            <a:br>
-              <a:rPr lang="de-DE" sz="1200" b="0" kern="1200" dirty="0">
-                <a:solidFill>
-                  <a:schemeClr val="tx1"/>
-                </a:solidFill>
-                <a:effectLst/>
-                <a:latin typeface="+mn-lt"/>
-                <a:ea typeface="+mn-ea"/>
-                <a:cs typeface="+mn-cs"/>
-              </a:rPr>
-            </a:br>
-            <a:r>
-              <a:rPr lang="de-DE" sz="1200" b="0" kern="1200" dirty="0">
-                <a:solidFill>
-                  <a:schemeClr val="tx1"/>
-                </a:solidFill>
-                <a:effectLst/>
-                <a:latin typeface="+mn-lt"/>
-                <a:ea typeface="+mn-ea"/>
-                <a:cs typeface="+mn-cs"/>
-              </a:rPr>
-              <a:t>Label deshalb gedreht (zu Task 3), da wir True werden wenn unser Model ein anomales Zahnrad findet.</a:t>
             </a:r>
           </a:p>
           <a:p>
@@ -7905,7 +7882,7 @@
             </a:r>
             <a:r>
               <a:rPr lang="de-DE" dirty="0"/>
-              <a:t> beide Pipelines erreichen in jedem Fold eine TPR von </a:t>
+              <a:t> beide Pipelines erreichen in jedem Fold eine TNR von </a:t>
             </a:r>
             <a:r>
               <a:rPr lang="de-DE" b="1" dirty="0"/>
@@ -7934,21 +7911,16 @@
             </a:pPr>
             <a:r>
               <a:rPr lang="de-DE" b="1" dirty="0" err="1"/>
-              <a:t>mID-Mittlung</a:t>
+              <a:t>mID</a:t>
             </a:r>
             <a:r>
               <a:rPr lang="de-DE" b="1" dirty="0"/>
-              <a:t>: </a:t>
+              <a:t>-Mittelung: </a:t>
             </a:r>
             <a:r>
               <a:rPr lang="de-DE" dirty="0"/>
-              <a:t>Fold 1 kommt auf ähnliche Werte wie Fold 3 Einzelmessung hat aber weniger Daten für das Training durch die </a:t>
-            </a:r>
-            <a:r>
-              <a:rPr lang="de-DE" dirty="0" err="1"/>
-              <a:t>Mittlung</a:t>
-            </a:r>
-            <a:endParaRPr lang="de-DE" dirty="0"/>
+              <a:t>Fold 1 kommt auf ähnliche Werte wie Fold 3 Einzelmessung hat aber weniger Daten für das Training durch die Mittelung</a:t>
+            </a:r>
           </a:p>
           <a:p>
             <a:pPr>
@@ -7961,7 +7933,7 @@
             </a:r>
             <a:r>
               <a:rPr lang="de-DE" dirty="0"/>
-              <a:t>in der Einzelmessung erkennen wir, dass Fold 1 und Fold 4 durch viele Testfälle und wenige Trainings Signale viele FP gefunden werden </a:t>
+              <a:t>in der Einzelmessung erkennen wir, dass Fold 1 und Fold 4 durch viele Testfälle und wenige Trainings Signale viele FN gefunden werden </a:t>
             </a:r>
           </a:p>
           <a:p>
@@ -7971,7 +7943,7 @@
             </a:pPr>
             <a:r>
               <a:rPr lang="de-DE" dirty="0"/>
-              <a:t>Vor allem Fold 4 mit den sehr verteilten Messungen durch Z01 im Testfall erkennt sehr viele FP</a:t>
+              <a:t>Vor allem Fold 4 mit den sehr verteilten Messungen durch Z01 im Testfall erkennt sehr viele FN</a:t>
             </a:r>
           </a:p>
         </p:txBody>
@@ -8274,7 +8246,7 @@
           <p:nvPr>
             <p:extLst>
               <p:ext uri="{D42A27DB-BD31-4B8C-83A1-F6EECF244321}">
-                <p14:modId xmlns:p14="http://schemas.microsoft.com/office/powerpoint/2010/main" val="2350955294"/>
+                <p14:modId xmlns:p14="http://schemas.microsoft.com/office/powerpoint/2010/main" val="1757277997"/>
               </p:ext>
             </p:extLst>
           </p:nvPr>
@@ -8472,7 +8444,7 @@
                     <a:p>
                       <a:r>
                         <a:rPr lang="de-DE" dirty="0"/>
-                        <a:t>1.00</a:t>
+                        <a:t>0.875</a:t>
                       </a:r>
                     </a:p>
                   </a:txBody>
@@ -8489,7 +8461,7 @@
                     <a:p>
                       <a:r>
                         <a:rPr lang="de-DE" dirty="0"/>
-                        <a:t>0.875</a:t>
+                        <a:t>1.00</a:t>
                       </a:r>
                     </a:p>
                   </a:txBody>
@@ -8581,7 +8553,7 @@
                     <a:p>
                       <a:r>
                         <a:rPr lang="de-DE" dirty="0"/>
-                        <a:t>1.00</a:t>
+                        <a:t>0.875</a:t>
                       </a:r>
                     </a:p>
                   </a:txBody>
@@ -8598,7 +8570,7 @@
                     <a:p>
                       <a:r>
                         <a:rPr lang="de-DE" dirty="0"/>
-                        <a:t>0.875</a:t>
+                        <a:t>1.00</a:t>
                       </a:r>
                     </a:p>
                   </a:txBody>
@@ -8690,7 +8662,7 @@
                     <a:p>
                       <a:r>
                         <a:rPr lang="de-DE" dirty="0"/>
-                        <a:t>1.00</a:t>
+                        <a:t>0.950</a:t>
                       </a:r>
                     </a:p>
                   </a:txBody>
@@ -8707,7 +8679,7 @@
                     <a:p>
                       <a:r>
                         <a:rPr lang="de-DE" dirty="0"/>
-                        <a:t>0.950</a:t>
+                        <a:t>1.00</a:t>
                       </a:r>
                     </a:p>
                   </a:txBody>
@@ -8799,7 +8771,7 @@
                     <a:p>
                       <a:r>
                         <a:rPr lang="de-DE" dirty="0"/>
-                        <a:t>1.00</a:t>
+                        <a:t>0.510</a:t>
                       </a:r>
                     </a:p>
                   </a:txBody>
@@ -8816,7 +8788,7 @@
                     <a:p>
                       <a:r>
                         <a:rPr lang="de-DE" dirty="0"/>
-                        <a:t>0.510</a:t>
+                        <a:t>1.00</a:t>
                       </a:r>
                     </a:p>
                   </a:txBody>
@@ -9359,7 +9331,7 @@
             </a:r>
             <a:r>
               <a:rPr lang="de-DE" b="1" dirty="0"/>
-              <a:t>gesund (Label 0)</a:t>
+              <a:t>gesund (Label 1)</a:t>
             </a:r>
             <a:r>
               <a:rPr lang="de-DE" dirty="0"/>
@@ -9374,7 +9346,7 @@
             </a:r>
             <a:r>
               <a:rPr lang="de-DE" b="1" dirty="0"/>
-              <a:t>anomal (Label 1)</a:t>
+              <a:t>anomal (Label 0)</a:t>
             </a:r>
             <a:endParaRPr lang="de-DE" dirty="0"/>
           </a:p>
@@ -10514,7 +10486,7 @@
             </a:pPr>
             <a:r>
               <a:rPr lang="de-DE" dirty="0"/>
-              <a:t>Training ausschließlich mit Label 0</a:t>
+              <a:t>Training ausschließlich mit Label 1</a:t>
             </a:r>
           </a:p>
         </p:txBody>
@@ -10760,7 +10732,7 @@
             </a:pPr>
             <a:r>
               <a:rPr lang="de-DE" dirty="0"/>
-              <a:t>oberhalb der Schwelle: anomal (Label 1)</a:t>
+              <a:t>oberhalb der Schwelle: anomal (Label 0)</a:t>
             </a:r>
           </a:p>
           <a:p>
@@ -11052,7 +11024,7 @@
             <p:ph sz="quarter" idx="14"/>
             <p:extLst>
               <p:ext uri="{D42A27DB-BD31-4B8C-83A1-F6EECF244321}">
-                <p14:modId xmlns:p14="http://schemas.microsoft.com/office/powerpoint/2010/main" val="1025093787"/>
+                <p14:modId xmlns:p14="http://schemas.microsoft.com/office/powerpoint/2010/main" val="1226952282"/>
               </p:ext>
             </p:extLst>
           </p:nvPr>
@@ -11444,7 +11416,21 @@
                       <a:pPr algn="ctr"/>
                       <a:r>
                         <a:rPr lang="de-DE" dirty="0"/>
-                        <a:t>1.00</a:t>
+                        <a:t>0.867</a:t>
+                      </a:r>
+                    </a:p>
+                  </a:txBody>
+                  <a:tcPr/>
+                </a:tc>
+                <a:tc>
+                  <a:txBody>
+                    <a:bodyPr/>
+                    <a:lstStyle/>
+                    <a:p>
+                      <a:pPr algn="ctr"/>
+                      <a:r>
+                        <a:rPr lang="de-DE" dirty="0"/>
+                        <a:t>0.883</a:t>
                       </a:r>
                     </a:p>
                   </a:txBody>
@@ -11472,21 +11458,7 @@
                       <a:pPr algn="ctr"/>
                       <a:r>
                         <a:rPr lang="de-DE" dirty="0"/>
-                        <a:t>0.867</a:t>
-                      </a:r>
-                    </a:p>
-                  </a:txBody>
-                  <a:tcPr/>
-                </a:tc>
-                <a:tc>
-                  <a:txBody>
-                    <a:bodyPr/>
-                    <a:lstStyle/>
-                    <a:p>
-                      <a:pPr algn="ctr"/>
-                      <a:r>
-                        <a:rPr lang="de-DE" dirty="0"/>
-                        <a:t>0.883</a:t>
+                        <a:t>1.00</a:t>
                       </a:r>
                     </a:p>
                   </a:txBody>
@@ -11549,7 +11521,21 @@
                       <a:pPr algn="ctr"/>
                       <a:r>
                         <a:rPr lang="de-DE" dirty="0"/>
-                        <a:t>1.00</a:t>
+                        <a:t>0.900</a:t>
+                      </a:r>
+                    </a:p>
+                  </a:txBody>
+                  <a:tcPr/>
+                </a:tc>
+                <a:tc>
+                  <a:txBody>
+                    <a:bodyPr/>
+                    <a:lstStyle/>
+                    <a:p>
+                      <a:pPr algn="ctr"/>
+                      <a:r>
+                        <a:rPr lang="de-DE" dirty="0"/>
+                        <a:t>0.850</a:t>
                       </a:r>
                     </a:p>
                   </a:txBody>
@@ -11577,21 +11563,7 @@
                       <a:pPr algn="ctr"/>
                       <a:r>
                         <a:rPr lang="de-DE" dirty="0"/>
-                        <a:t>0.900</a:t>
-                      </a:r>
-                    </a:p>
-                  </a:txBody>
-                  <a:tcPr/>
-                </a:tc>
-                <a:tc>
-                  <a:txBody>
-                    <a:bodyPr/>
-                    <a:lstStyle/>
-                    <a:p>
-                      <a:pPr algn="ctr"/>
-                      <a:r>
-                        <a:rPr lang="de-DE" dirty="0"/>
-                        <a:t>0.850</a:t>
+                        <a:t>1.00</a:t>
                       </a:r>
                     </a:p>
                   </a:txBody>
@@ -11654,7 +11626,21 @@
                       <a:pPr algn="ctr"/>
                       <a:r>
                         <a:rPr lang="de-DE" dirty="0"/>
-                        <a:t>1.00</a:t>
+                        <a:t>0.950</a:t>
+                      </a:r>
+                    </a:p>
+                  </a:txBody>
+                  <a:tcPr/>
+                </a:tc>
+                <a:tc>
+                  <a:txBody>
+                    <a:bodyPr/>
+                    <a:lstStyle/>
+                    <a:p>
+                      <a:pPr algn="ctr"/>
+                      <a:r>
+                        <a:rPr lang="de-DE" dirty="0"/>
+                        <a:t>0.950</a:t>
                       </a:r>
                     </a:p>
                   </a:txBody>
@@ -11682,21 +11668,7 @@
                       <a:pPr algn="ctr"/>
                       <a:r>
                         <a:rPr lang="de-DE" dirty="0"/>
-                        <a:t>0.950</a:t>
-                      </a:r>
-                    </a:p>
-                  </a:txBody>
-                  <a:tcPr/>
-                </a:tc>
-                <a:tc>
-                  <a:txBody>
-                    <a:bodyPr/>
-                    <a:lstStyle/>
-                    <a:p>
-                      <a:pPr algn="ctr"/>
-                      <a:r>
-                        <a:rPr lang="de-DE" dirty="0"/>
-                        <a:t>0.950</a:t>
+                        <a:t>1.00</a:t>
                       </a:r>
                     </a:p>
                   </a:txBody>
@@ -11759,7 +11731,21 @@
                       <a:pPr algn="ctr"/>
                       <a:r>
                         <a:rPr lang="de-DE" dirty="0"/>
-                        <a:t>1.00</a:t>
+                        <a:t>0.290</a:t>
+                      </a:r>
+                    </a:p>
+                  </a:txBody>
+                  <a:tcPr/>
+                </a:tc>
+                <a:tc>
+                  <a:txBody>
+                    <a:bodyPr/>
+                    <a:lstStyle/>
+                    <a:p>
+                      <a:pPr algn="ctr"/>
+                      <a:r>
+                        <a:rPr lang="de-DE" dirty="0"/>
+                        <a:t>0.730</a:t>
                       </a:r>
                     </a:p>
                   </a:txBody>
@@ -11787,21 +11773,7 @@
                       <a:pPr algn="ctr"/>
                       <a:r>
                         <a:rPr lang="de-DE" dirty="0"/>
-                        <a:t>0.290</a:t>
-                      </a:r>
-                    </a:p>
-                  </a:txBody>
-                  <a:tcPr/>
-                </a:tc>
-                <a:tc>
-                  <a:txBody>
-                    <a:bodyPr/>
-                    <a:lstStyle/>
-                    <a:p>
-                      <a:pPr algn="ctr"/>
-                      <a:r>
-                        <a:rPr lang="de-DE" dirty="0"/>
-                        <a:t>0.730</a:t>
+                        <a:t>1.00</a:t>
                       </a:r>
                     </a:p>
                   </a:txBody>

--- a/Task_4/Presentation_Task4.pptx
+++ b/Task_4/Presentation_Task4.pptx
@@ -5,10 +5,10 @@
     <p:sldMasterId id="2147483744" r:id="rId1"/>
   </p:sldMasterIdLst>
   <p:notesMasterIdLst>
-    <p:notesMasterId r:id="rId21"/>
+    <p:notesMasterId r:id="rId23"/>
   </p:notesMasterIdLst>
   <p:handoutMasterIdLst>
-    <p:handoutMasterId r:id="rId22"/>
+    <p:handoutMasterId r:id="rId24"/>
   </p:handoutMasterIdLst>
   <p:sldIdLst>
     <p:sldId id="256" r:id="rId2"/>
@@ -26,10 +26,12 @@
     <p:sldId id="270" r:id="rId14"/>
     <p:sldId id="284" r:id="rId15"/>
     <p:sldId id="285" r:id="rId16"/>
-    <p:sldId id="286" r:id="rId17"/>
-    <p:sldId id="274" r:id="rId18"/>
-    <p:sldId id="275" r:id="rId19"/>
-    <p:sldId id="277" r:id="rId20"/>
+    <p:sldId id="287" r:id="rId17"/>
+    <p:sldId id="286" r:id="rId18"/>
+    <p:sldId id="288" r:id="rId19"/>
+    <p:sldId id="274" r:id="rId20"/>
+    <p:sldId id="275" r:id="rId21"/>
+    <p:sldId id="277" r:id="rId22"/>
   </p:sldIdLst>
   <p:sldSz cx="12192000" cy="6858000"/>
   <p:notesSz cx="9144000" cy="6858000"/>
@@ -1835,7 +1837,7 @@
           <a:p>
             <a:fld id="{0492B7F2-6741-7346-B13A-366117EE2BBB}" type="slidenum">
               <a:rPr lang="de-DE" smtClean="0"/>
-              <a:t>16</a:t>
+              <a:t>17</a:t>
             </a:fld>
             <a:endParaRPr lang="de-DE"/>
           </a:p>
@@ -2038,7 +2040,7 @@
           <a:p>
             <a:fld id="{0492B7F2-6741-7346-B13A-366117EE2BBB}" type="slidenum">
               <a:rPr lang="de-DE" smtClean="0"/>
-              <a:t>17</a:t>
+              <a:t>19</a:t>
             </a:fld>
             <a:endParaRPr lang="de-DE"/>
           </a:p>
@@ -2301,7 +2303,7 @@
           <a:p>
             <a:fld id="{0492B7F2-6741-7346-B13A-366117EE2BBB}" type="slidenum">
               <a:rPr lang="de-DE" smtClean="0"/>
-              <a:t>18</a:t>
+              <a:t>20</a:t>
             </a:fld>
             <a:endParaRPr lang="de-DE"/>
           </a:p>
@@ -2416,7 +2418,7 @@
           <a:p>
             <a:fld id="{0492B7F2-6741-7346-B13A-366117EE2BBB}" type="slidenum">
               <a:rPr lang="de-DE" smtClean="0"/>
-              <a:t>19</a:t>
+              <a:t>21</a:t>
             </a:fld>
             <a:endParaRPr lang="de-DE"/>
           </a:p>
@@ -7535,6 +7537,213 @@
   <p:cSld>
     <p:spTree>
       <p:nvGrpSpPr>
+        <p:cNvPr id="1" name=""/>
+        <p:cNvGrpSpPr/>
+        <p:nvPr/>
+      </p:nvGrpSpPr>
+      <p:grpSpPr>
+        <a:xfrm>
+          <a:off x="0" y="0"/>
+          <a:ext cx="0" cy="0"/>
+          <a:chOff x="0" y="0"/>
+          <a:chExt cx="0" cy="0"/>
+        </a:xfrm>
+      </p:grpSpPr>
+      <p:sp>
+        <p:nvSpPr>
+          <p:cNvPr id="2" name="Titel 1">
+            <a:extLst>
+              <a:ext uri="{FF2B5EF4-FFF2-40B4-BE49-F238E27FC236}">
+                <a16:creationId xmlns:a16="http://schemas.microsoft.com/office/drawing/2014/main" id="{9F687707-7ED5-B9A7-90A0-DFEB182366B2}"/>
+              </a:ext>
+            </a:extLst>
+          </p:cNvPr>
+          <p:cNvSpPr>
+            <a:spLocks noGrp="1"/>
+          </p:cNvSpPr>
+          <p:nvPr>
+            <p:ph type="title"/>
+          </p:nvPr>
+        </p:nvSpPr>
+        <p:spPr/>
+        <p:txBody>
+          <a:bodyPr/>
+          <a:lstStyle/>
+          <a:p>
+            <a:r>
+              <a:rPr lang="de-DE" dirty="0"/>
+              <a:t>Rekonstruktionsfehler</a:t>
+            </a:r>
+          </a:p>
+        </p:txBody>
+      </p:sp>
+      <p:sp>
+        <p:nvSpPr>
+          <p:cNvPr id="3" name="Foliennummernplatzhalter 2">
+            <a:extLst>
+              <a:ext uri="{FF2B5EF4-FFF2-40B4-BE49-F238E27FC236}">
+                <a16:creationId xmlns:a16="http://schemas.microsoft.com/office/drawing/2014/main" id="{8D64D647-DD4D-91D2-1627-5BC45E9CD9D4}"/>
+              </a:ext>
+            </a:extLst>
+          </p:cNvPr>
+          <p:cNvSpPr>
+            <a:spLocks noGrp="1"/>
+          </p:cNvSpPr>
+          <p:nvPr>
+            <p:ph type="sldNum" sz="quarter" idx="10"/>
+          </p:nvPr>
+        </p:nvSpPr>
+        <p:spPr/>
+        <p:txBody>
+          <a:bodyPr/>
+          <a:lstStyle/>
+          <a:p>
+            <a:fld id="{80B4FCE6-DC73-4135-BC56-1F242D45A84C}" type="slidenum">
+              <a:rPr lang="de-DE" smtClean="0"/>
+              <a:t>16</a:t>
+            </a:fld>
+            <a:endParaRPr lang="de-DE"/>
+          </a:p>
+        </p:txBody>
+      </p:sp>
+      <p:sp>
+        <p:nvSpPr>
+          <p:cNvPr id="4" name="Fußzeilenplatzhalter 3">
+            <a:extLst>
+              <a:ext uri="{FF2B5EF4-FFF2-40B4-BE49-F238E27FC236}">
+                <a16:creationId xmlns:a16="http://schemas.microsoft.com/office/drawing/2014/main" id="{26A69506-9B3E-7D71-5893-D0DC6E753E38}"/>
+              </a:ext>
+            </a:extLst>
+          </p:cNvPr>
+          <p:cNvSpPr>
+            <a:spLocks noGrp="1"/>
+          </p:cNvSpPr>
+          <p:nvPr>
+            <p:ph type="ftr" sz="quarter" idx="11"/>
+          </p:nvPr>
+        </p:nvSpPr>
+        <p:spPr/>
+        <p:txBody>
+          <a:bodyPr/>
+          <a:lstStyle/>
+          <a:p>
+            <a:r>
+              <a:rPr lang="de-DE"/>
+              <a:t>Materialdiagnostik: Task 4</a:t>
+            </a:r>
+          </a:p>
+        </p:txBody>
+      </p:sp>
+      <p:sp>
+        <p:nvSpPr>
+          <p:cNvPr id="5" name="Datumsplatzhalter 4">
+            <a:extLst>
+              <a:ext uri="{FF2B5EF4-FFF2-40B4-BE49-F238E27FC236}">
+                <a16:creationId xmlns:a16="http://schemas.microsoft.com/office/drawing/2014/main" id="{494DA9CB-9CB8-5597-4E72-4A4683E2D894}"/>
+              </a:ext>
+            </a:extLst>
+          </p:cNvPr>
+          <p:cNvSpPr>
+            <a:spLocks noGrp="1"/>
+          </p:cNvSpPr>
+          <p:nvPr>
+            <p:ph type="dt" sz="half" idx="12"/>
+          </p:nvPr>
+        </p:nvSpPr>
+        <p:spPr/>
+        <p:txBody>
+          <a:bodyPr/>
+          <a:lstStyle/>
+          <a:p>
+            <a:r>
+              <a:rPr lang="de-DE"/>
+              <a:t>23.07.2026</a:t>
+            </a:r>
+          </a:p>
+        </p:txBody>
+      </p:sp>
+      <p:pic>
+        <p:nvPicPr>
+          <p:cNvPr id="9" name="Inhaltsplatzhalter 8">
+            <a:extLst>
+              <a:ext uri="{FF2B5EF4-FFF2-40B4-BE49-F238E27FC236}">
+                <a16:creationId xmlns:a16="http://schemas.microsoft.com/office/drawing/2014/main" id="{1AC7FB36-DE6E-007A-4312-FA8EDFD31ADF}"/>
+              </a:ext>
+            </a:extLst>
+          </p:cNvPr>
+          <p:cNvPicPr>
+            <a:picLocks noGrp="1" noChangeAspect="1"/>
+          </p:cNvPicPr>
+          <p:nvPr>
+            <p:ph sz="quarter" idx="13"/>
+          </p:nvPr>
+        </p:nvPicPr>
+        <p:blipFill>
+          <a:blip r:embed="rId2"/>
+          <a:stretch>
+            <a:fillRect/>
+          </a:stretch>
+        </p:blipFill>
+        <p:spPr>
+          <a:xfrm>
+            <a:off x="341313" y="2092722"/>
+            <a:ext cx="5391150" cy="3369469"/>
+          </a:xfrm>
+          <a:prstGeom prst="rect">
+            <a:avLst/>
+          </a:prstGeom>
+        </p:spPr>
+      </p:pic>
+      <p:pic>
+        <p:nvPicPr>
+          <p:cNvPr id="11" name="Inhaltsplatzhalter 10">
+            <a:extLst>
+              <a:ext uri="{FF2B5EF4-FFF2-40B4-BE49-F238E27FC236}">
+                <a16:creationId xmlns:a16="http://schemas.microsoft.com/office/drawing/2014/main" id="{B0C8479F-FBF6-159F-47CB-34D27B45545C}"/>
+              </a:ext>
+            </a:extLst>
+          </p:cNvPr>
+          <p:cNvPicPr>
+            <a:picLocks noGrp="1" noChangeAspect="1"/>
+          </p:cNvPicPr>
+          <p:nvPr>
+            <p:ph sz="quarter" idx="14"/>
+          </p:nvPr>
+        </p:nvPicPr>
+        <p:blipFill>
+          <a:blip r:embed="rId3"/>
+          <a:stretch>
+            <a:fillRect/>
+          </a:stretch>
+        </p:blipFill>
+        <p:spPr>
+          <a:xfrm>
+            <a:off x="6459538" y="2092722"/>
+            <a:ext cx="5391150" cy="3369469"/>
+          </a:xfrm>
+          <a:prstGeom prst="rect">
+            <a:avLst/>
+          </a:prstGeom>
+        </p:spPr>
+      </p:pic>
+    </p:spTree>
+    <p:extLst>
+      <p:ext uri="{BB962C8B-B14F-4D97-AF65-F5344CB8AC3E}">
+        <p14:creationId xmlns:p14="http://schemas.microsoft.com/office/powerpoint/2010/main" val="3400250562"/>
+      </p:ext>
+    </p:extLst>
+  </p:cSld>
+  <p:clrMapOvr>
+    <a:masterClrMapping/>
+  </p:clrMapOvr>
+</p:sld>
+</file>
+
+<file path=ppt/slides/slide17.xml><?xml version="1.0" encoding="utf-8"?>
+<p:sld xmlns:a="http://schemas.openxmlformats.org/drawingml/2006/main" xmlns:r="http://schemas.openxmlformats.org/officeDocument/2006/relationships" xmlns:p="http://schemas.openxmlformats.org/presentationml/2006/main">
+  <p:cSld>
+    <p:spTree>
+      <p:nvGrpSpPr>
         <p:cNvPr id="1" name="">
           <a:extLst>
             <a:ext uri="{FF2B5EF4-FFF2-40B4-BE49-F238E27FC236}">
@@ -7604,7 +7813,7 @@
           <a:p>
             <a:fld id="{80B4FCE6-DC73-4135-BC56-1F242D45A84C}" type="slidenum">
               <a:rPr lang="de-DE" smtClean="0"/>
-              <a:t>16</a:t>
+              <a:t>17</a:t>
             </a:fld>
             <a:endParaRPr lang="de-DE"/>
           </a:p>
@@ -7742,7 +7951,218 @@
 </p:sld>
 </file>
 
-<file path=ppt/slides/slide17.xml><?xml version="1.0" encoding="utf-8"?>
+<file path=ppt/slides/slide18.xml><?xml version="1.0" encoding="utf-8"?>
+<p:sld xmlns:a="http://schemas.openxmlformats.org/drawingml/2006/main" xmlns:r="http://schemas.openxmlformats.org/officeDocument/2006/relationships" xmlns:p="http://schemas.openxmlformats.org/presentationml/2006/main">
+  <p:cSld>
+    <p:spTree>
+      <p:nvGrpSpPr>
+        <p:cNvPr id="1" name="">
+          <a:extLst>
+            <a:ext uri="{FF2B5EF4-FFF2-40B4-BE49-F238E27FC236}">
+              <a16:creationId xmlns:a16="http://schemas.microsoft.com/office/drawing/2014/main" id="{0CF029FF-3EE4-876E-44F7-6B9655DA95AD}"/>
+            </a:ext>
+          </a:extLst>
+        </p:cNvPr>
+        <p:cNvGrpSpPr/>
+        <p:nvPr/>
+      </p:nvGrpSpPr>
+      <p:grpSpPr>
+        <a:xfrm>
+          <a:off x="0" y="0"/>
+          <a:ext cx="0" cy="0"/>
+          <a:chOff x="0" y="0"/>
+          <a:chExt cx="0" cy="0"/>
+        </a:xfrm>
+      </p:grpSpPr>
+      <p:sp>
+        <p:nvSpPr>
+          <p:cNvPr id="2" name="Titel 1">
+            <a:extLst>
+              <a:ext uri="{FF2B5EF4-FFF2-40B4-BE49-F238E27FC236}">
+                <a16:creationId xmlns:a16="http://schemas.microsoft.com/office/drawing/2014/main" id="{D22FFDB3-4876-2EA4-F8D1-820319818718}"/>
+              </a:ext>
+            </a:extLst>
+          </p:cNvPr>
+          <p:cNvSpPr>
+            <a:spLocks noGrp="1"/>
+          </p:cNvSpPr>
+          <p:nvPr>
+            <p:ph type="title"/>
+          </p:nvPr>
+        </p:nvSpPr>
+        <p:spPr/>
+        <p:txBody>
+          <a:bodyPr/>
+          <a:lstStyle/>
+          <a:p>
+            <a:r>
+              <a:rPr lang="de-DE" dirty="0"/>
+              <a:t>Rekonstruktionsfehler</a:t>
+            </a:r>
+          </a:p>
+        </p:txBody>
+      </p:sp>
+      <p:sp>
+        <p:nvSpPr>
+          <p:cNvPr id="3" name="Foliennummernplatzhalter 2">
+            <a:extLst>
+              <a:ext uri="{FF2B5EF4-FFF2-40B4-BE49-F238E27FC236}">
+                <a16:creationId xmlns:a16="http://schemas.microsoft.com/office/drawing/2014/main" id="{3DEC6A11-F996-E0BE-C4B6-E4F0714B9FA8}"/>
+              </a:ext>
+            </a:extLst>
+          </p:cNvPr>
+          <p:cNvSpPr>
+            <a:spLocks noGrp="1"/>
+          </p:cNvSpPr>
+          <p:nvPr>
+            <p:ph type="sldNum" sz="quarter" idx="10"/>
+          </p:nvPr>
+        </p:nvSpPr>
+        <p:spPr/>
+        <p:txBody>
+          <a:bodyPr/>
+          <a:lstStyle/>
+          <a:p>
+            <a:fld id="{80B4FCE6-DC73-4135-BC56-1F242D45A84C}" type="slidenum">
+              <a:rPr lang="de-DE" smtClean="0"/>
+              <a:t>18</a:t>
+            </a:fld>
+            <a:endParaRPr lang="de-DE"/>
+          </a:p>
+        </p:txBody>
+      </p:sp>
+      <p:sp>
+        <p:nvSpPr>
+          <p:cNvPr id="4" name="Fußzeilenplatzhalter 3">
+            <a:extLst>
+              <a:ext uri="{FF2B5EF4-FFF2-40B4-BE49-F238E27FC236}">
+                <a16:creationId xmlns:a16="http://schemas.microsoft.com/office/drawing/2014/main" id="{5535EC75-87CC-5119-1B8A-99E8A5609E22}"/>
+              </a:ext>
+            </a:extLst>
+          </p:cNvPr>
+          <p:cNvSpPr>
+            <a:spLocks noGrp="1"/>
+          </p:cNvSpPr>
+          <p:nvPr>
+            <p:ph type="ftr" sz="quarter" idx="11"/>
+          </p:nvPr>
+        </p:nvSpPr>
+        <p:spPr/>
+        <p:txBody>
+          <a:bodyPr/>
+          <a:lstStyle/>
+          <a:p>
+            <a:r>
+              <a:rPr lang="de-DE"/>
+              <a:t>Materialdiagnostik: Task 4</a:t>
+            </a:r>
+          </a:p>
+        </p:txBody>
+      </p:sp>
+      <p:sp>
+        <p:nvSpPr>
+          <p:cNvPr id="5" name="Datumsplatzhalter 4">
+            <a:extLst>
+              <a:ext uri="{FF2B5EF4-FFF2-40B4-BE49-F238E27FC236}">
+                <a16:creationId xmlns:a16="http://schemas.microsoft.com/office/drawing/2014/main" id="{97D79AC4-5A08-B095-E382-F2DD2528EE86}"/>
+              </a:ext>
+            </a:extLst>
+          </p:cNvPr>
+          <p:cNvSpPr>
+            <a:spLocks noGrp="1"/>
+          </p:cNvSpPr>
+          <p:nvPr>
+            <p:ph type="dt" sz="half" idx="12"/>
+          </p:nvPr>
+        </p:nvSpPr>
+        <p:spPr/>
+        <p:txBody>
+          <a:bodyPr/>
+          <a:lstStyle/>
+          <a:p>
+            <a:r>
+              <a:rPr lang="de-DE"/>
+              <a:t>23.07.2026</a:t>
+            </a:r>
+          </a:p>
+        </p:txBody>
+      </p:sp>
+      <p:pic>
+        <p:nvPicPr>
+          <p:cNvPr id="9" name="Inhaltsplatzhalter 8">
+            <a:extLst>
+              <a:ext uri="{FF2B5EF4-FFF2-40B4-BE49-F238E27FC236}">
+                <a16:creationId xmlns:a16="http://schemas.microsoft.com/office/drawing/2014/main" id="{0D25EEC0-8944-6DBF-EE75-B0C8CFBD7CC3}"/>
+              </a:ext>
+            </a:extLst>
+          </p:cNvPr>
+          <p:cNvPicPr>
+            <a:picLocks noGrp="1" noChangeAspect="1"/>
+          </p:cNvPicPr>
+          <p:nvPr>
+            <p:ph sz="quarter" idx="13"/>
+          </p:nvPr>
+        </p:nvPicPr>
+        <p:blipFill>
+          <a:blip r:embed="rId2"/>
+          <a:srcRect/>
+          <a:stretch/>
+        </p:blipFill>
+        <p:spPr>
+          <a:xfrm>
+            <a:off x="341313" y="2092722"/>
+            <a:ext cx="5391150" cy="3369469"/>
+          </a:xfrm>
+          <a:prstGeom prst="rect">
+            <a:avLst/>
+          </a:prstGeom>
+        </p:spPr>
+      </p:pic>
+      <p:pic>
+        <p:nvPicPr>
+          <p:cNvPr id="11" name="Inhaltsplatzhalter 10">
+            <a:extLst>
+              <a:ext uri="{FF2B5EF4-FFF2-40B4-BE49-F238E27FC236}">
+                <a16:creationId xmlns:a16="http://schemas.microsoft.com/office/drawing/2014/main" id="{0D931ADF-F894-0F11-F0C3-362F564BC532}"/>
+              </a:ext>
+            </a:extLst>
+          </p:cNvPr>
+          <p:cNvPicPr>
+            <a:picLocks noGrp="1" noChangeAspect="1"/>
+          </p:cNvPicPr>
+          <p:nvPr>
+            <p:ph sz="quarter" idx="14"/>
+          </p:nvPr>
+        </p:nvPicPr>
+        <p:blipFill>
+          <a:blip r:embed="rId3"/>
+          <a:srcRect/>
+          <a:stretch/>
+        </p:blipFill>
+        <p:spPr>
+          <a:xfrm>
+            <a:off x="6459538" y="2092722"/>
+            <a:ext cx="5391150" cy="3369469"/>
+          </a:xfrm>
+          <a:prstGeom prst="rect">
+            <a:avLst/>
+          </a:prstGeom>
+        </p:spPr>
+      </p:pic>
+    </p:spTree>
+    <p:extLst>
+      <p:ext uri="{BB962C8B-B14F-4D97-AF65-F5344CB8AC3E}">
+        <p14:creationId xmlns:p14="http://schemas.microsoft.com/office/powerpoint/2010/main" val="1405776056"/>
+      </p:ext>
+    </p:extLst>
+  </p:cSld>
+  <p:clrMapOvr>
+    <a:masterClrMapping/>
+  </p:clrMapOvr>
+</p:sld>
+</file>
+
+<file path=ppt/slides/slide19.xml><?xml version="1.0" encoding="utf-8"?>
 <p:sld xmlns:a="http://schemas.openxmlformats.org/drawingml/2006/main" xmlns:r="http://schemas.openxmlformats.org/officeDocument/2006/relationships" xmlns:p="http://schemas.openxmlformats.org/presentationml/2006/main">
   <p:cSld>
     <p:spTree>
@@ -7788,7 +8208,7 @@
           <a:p>
             <a:fld id="{80B4FCE6-DC73-4135-BC56-1F242D45A84C}" type="slidenum">
               <a:rPr lang="de-DE" smtClean="0"/>
-              <a:t>17</a:t>
+              <a:t>19</a:t>
             </a:fld>
             <a:endParaRPr lang="de-DE"/>
           </a:p>
@@ -7990,7 +8410,239 @@
 </p:sld>
 </file>
 
-<file path=ppt/slides/slide18.xml><?xml version="1.0" encoding="utf-8"?>
+<file path=ppt/slides/slide2.xml><?xml version="1.0" encoding="utf-8"?>
+<p:sld xmlns:a="http://schemas.openxmlformats.org/drawingml/2006/main" xmlns:r="http://schemas.openxmlformats.org/officeDocument/2006/relationships" xmlns:p="http://schemas.openxmlformats.org/presentationml/2006/main">
+  <p:cSld>
+    <p:spTree>
+      <p:nvGrpSpPr>
+        <p:cNvPr id="1" name="">
+          <a:extLst>
+            <a:ext uri="{FF2B5EF4-FFF2-40B4-BE49-F238E27FC236}">
+              <a16:creationId xmlns:a16="http://schemas.microsoft.com/office/drawing/2014/main" id="{8B728E74-1723-4026-C41F-72C0E5F4B37F}"/>
+            </a:ext>
+          </a:extLst>
+        </p:cNvPr>
+        <p:cNvGrpSpPr/>
+        <p:nvPr/>
+      </p:nvGrpSpPr>
+      <p:grpSpPr>
+        <a:xfrm>
+          <a:off x="0" y="0"/>
+          <a:ext cx="0" cy="0"/>
+          <a:chOff x="0" y="0"/>
+          <a:chExt cx="0" cy="0"/>
+        </a:xfrm>
+      </p:grpSpPr>
+      <p:sp>
+        <p:nvSpPr>
+          <p:cNvPr id="3" name="Titel 2">
+            <a:extLst>
+              <a:ext uri="{FF2B5EF4-FFF2-40B4-BE49-F238E27FC236}">
+                <a16:creationId xmlns:a16="http://schemas.microsoft.com/office/drawing/2014/main" id="{16BDFD0D-1F3F-671D-BE21-271B3E00F8BC}"/>
+              </a:ext>
+            </a:extLst>
+          </p:cNvPr>
+          <p:cNvSpPr>
+            <a:spLocks noGrp="1"/>
+          </p:cNvSpPr>
+          <p:nvPr>
+            <p:ph type="title"/>
+          </p:nvPr>
+        </p:nvSpPr>
+        <p:spPr/>
+        <p:txBody>
+          <a:bodyPr/>
+          <a:lstStyle/>
+          <a:p>
+            <a:r>
+              <a:rPr lang="de-DE" sz="3200" dirty="0"/>
+              <a:t>Gliederung</a:t>
+            </a:r>
+            <a:endParaRPr lang="de-DE" dirty="0"/>
+          </a:p>
+        </p:txBody>
+      </p:sp>
+      <p:sp>
+        <p:nvSpPr>
+          <p:cNvPr id="2" name="Foliennummernplatzhalter 1">
+            <a:extLst>
+              <a:ext uri="{FF2B5EF4-FFF2-40B4-BE49-F238E27FC236}">
+                <a16:creationId xmlns:a16="http://schemas.microsoft.com/office/drawing/2014/main" id="{4A95B1DA-C9BF-39EB-E4C5-A5750A2C5C28}"/>
+              </a:ext>
+            </a:extLst>
+          </p:cNvPr>
+          <p:cNvSpPr>
+            <a:spLocks noGrp="1"/>
+          </p:cNvSpPr>
+          <p:nvPr>
+            <p:ph type="sldNum" sz="quarter" idx="10"/>
+          </p:nvPr>
+        </p:nvSpPr>
+        <p:spPr/>
+        <p:txBody>
+          <a:bodyPr/>
+          <a:lstStyle/>
+          <a:p>
+            <a:fld id="{80B4FCE6-DC73-4135-BC56-1F242D45A84C}" type="slidenum">
+              <a:rPr lang="de-DE" smtClean="0"/>
+              <a:t>2</a:t>
+            </a:fld>
+            <a:endParaRPr lang="de-DE"/>
+          </a:p>
+        </p:txBody>
+      </p:sp>
+      <p:sp>
+        <p:nvSpPr>
+          <p:cNvPr id="7" name="Fußzeilenplatzhalter 6">
+            <a:extLst>
+              <a:ext uri="{FF2B5EF4-FFF2-40B4-BE49-F238E27FC236}">
+                <a16:creationId xmlns:a16="http://schemas.microsoft.com/office/drawing/2014/main" id="{9D942951-2681-5B98-DB4E-AACA25F87A2D}"/>
+              </a:ext>
+            </a:extLst>
+          </p:cNvPr>
+          <p:cNvSpPr>
+            <a:spLocks noGrp="1"/>
+          </p:cNvSpPr>
+          <p:nvPr>
+            <p:ph type="ftr" sz="quarter" idx="11"/>
+          </p:nvPr>
+        </p:nvSpPr>
+        <p:spPr/>
+        <p:txBody>
+          <a:bodyPr/>
+          <a:lstStyle/>
+          <a:p>
+            <a:r>
+              <a:rPr lang="de-DE"/>
+              <a:t>Materialdiagnostik: Task 4</a:t>
+            </a:r>
+          </a:p>
+        </p:txBody>
+      </p:sp>
+      <p:sp>
+        <p:nvSpPr>
+          <p:cNvPr id="6" name="Datumsplatzhalter 5">
+            <a:extLst>
+              <a:ext uri="{FF2B5EF4-FFF2-40B4-BE49-F238E27FC236}">
+                <a16:creationId xmlns:a16="http://schemas.microsoft.com/office/drawing/2014/main" id="{2ADE982B-BFE5-5848-F763-33D2FC31C6DC}"/>
+              </a:ext>
+            </a:extLst>
+          </p:cNvPr>
+          <p:cNvSpPr>
+            <a:spLocks noGrp="1"/>
+          </p:cNvSpPr>
+          <p:nvPr>
+            <p:ph type="dt" sz="half" idx="12"/>
+          </p:nvPr>
+        </p:nvSpPr>
+        <p:spPr/>
+        <p:txBody>
+          <a:bodyPr/>
+          <a:lstStyle/>
+          <a:p>
+            <a:r>
+              <a:rPr lang="de-DE"/>
+              <a:t>23.07.2026</a:t>
+            </a:r>
+          </a:p>
+        </p:txBody>
+      </p:sp>
+      <p:sp>
+        <p:nvSpPr>
+          <p:cNvPr id="4" name="Textplatzhalter 3">
+            <a:extLst>
+              <a:ext uri="{FF2B5EF4-FFF2-40B4-BE49-F238E27FC236}">
+                <a16:creationId xmlns:a16="http://schemas.microsoft.com/office/drawing/2014/main" id="{1356FFF4-95A7-CF81-6FBE-506C8F181C81}"/>
+              </a:ext>
+            </a:extLst>
+          </p:cNvPr>
+          <p:cNvSpPr>
+            <a:spLocks noGrp="1"/>
+          </p:cNvSpPr>
+          <p:nvPr>
+            <p:ph type="body" sz="quarter" idx="13"/>
+          </p:nvPr>
+        </p:nvSpPr>
+        <p:spPr/>
+        <p:txBody>
+          <a:bodyPr/>
+          <a:lstStyle/>
+          <a:p>
+            <a:pPr>
+              <a:buFont typeface="Arial" panose="020B0604020202020204" pitchFamily="34" charset="0"/>
+              <a:buChar char="•"/>
+            </a:pPr>
+            <a:endParaRPr lang="de-DE" dirty="0"/>
+          </a:p>
+          <a:p>
+            <a:pPr>
+              <a:buFont typeface="Arial" panose="020B0604020202020204" pitchFamily="34" charset="0"/>
+              <a:buChar char="•"/>
+            </a:pPr>
+            <a:r>
+              <a:rPr lang="de-DE" dirty="0"/>
+              <a:t>Daten und zwei Vorverarbeitungen</a:t>
+            </a:r>
+          </a:p>
+          <a:p>
+            <a:pPr>
+              <a:buFont typeface="Arial" panose="020B0604020202020204" pitchFamily="34" charset="0"/>
+              <a:buChar char="•"/>
+            </a:pPr>
+            <a:r>
+              <a:rPr lang="de-DE" dirty="0"/>
+              <a:t>Kreuzvalidierung und Autoencoder</a:t>
+            </a:r>
+          </a:p>
+          <a:p>
+            <a:pPr>
+              <a:buFont typeface="Arial" panose="020B0604020202020204" pitchFamily="34" charset="0"/>
+              <a:buChar char="•"/>
+            </a:pPr>
+            <a:r>
+              <a:rPr lang="de-DE" dirty="0"/>
+              <a:t>Entscheidung und Metriken</a:t>
+            </a:r>
+          </a:p>
+          <a:p>
+            <a:pPr>
+              <a:buFont typeface="Arial" panose="020B0604020202020204" pitchFamily="34" charset="0"/>
+              <a:buChar char="•"/>
+            </a:pPr>
+            <a:r>
+              <a:rPr lang="de-DE" dirty="0"/>
+              <a:t>Ergebnisse und Pipelinevergleich</a:t>
+            </a:r>
+          </a:p>
+          <a:p>
+            <a:pPr>
+              <a:buFont typeface="Arial" panose="020B0604020202020204" pitchFamily="34" charset="0"/>
+              <a:buChar char="•"/>
+            </a:pPr>
+            <a:r>
+              <a:rPr lang="de-DE" dirty="0"/>
+              <a:t>Diskussion und Fazit</a:t>
+            </a:r>
+          </a:p>
+          <a:p>
+            <a:endParaRPr lang="de-DE" dirty="0"/>
+          </a:p>
+        </p:txBody>
+      </p:sp>
+    </p:spTree>
+    <p:extLst>
+      <p:ext uri="{BB962C8B-B14F-4D97-AF65-F5344CB8AC3E}">
+        <p14:creationId xmlns:p14="http://schemas.microsoft.com/office/powerpoint/2010/main" val="1606180384"/>
+      </p:ext>
+    </p:extLst>
+  </p:cSld>
+  <p:clrMapOvr>
+    <a:masterClrMapping/>
+  </p:clrMapOvr>
+</p:sld>
+</file>
+
+<file path=ppt/slides/slide20.xml><?xml version="1.0" encoding="utf-8"?>
 <p:sld xmlns:a="http://schemas.openxmlformats.org/drawingml/2006/main" xmlns:r="http://schemas.openxmlformats.org/officeDocument/2006/relationships" xmlns:p="http://schemas.openxmlformats.org/presentationml/2006/main">
   <p:cSld>
     <p:spTree>
@@ -8225,7 +8877,7 @@
           <a:p>
             <a:fld id="{80B4FCE6-DC73-4135-BC56-1F242D45A84C}" type="slidenum">
               <a:rPr lang="de-DE" smtClean="0"/>
-              <a:t>18</a:t>
+              <a:t>20</a:t>
             </a:fld>
             <a:endParaRPr lang="de-DE"/>
           </a:p>
@@ -8872,7 +9524,7 @@
 </p:sld>
 </file>
 
-<file path=ppt/slides/slide19.xml><?xml version="1.0" encoding="utf-8"?>
+<file path=ppt/slides/slide21.xml><?xml version="1.0" encoding="utf-8"?>
 <p:sld xmlns:a="http://schemas.openxmlformats.org/drawingml/2006/main" xmlns:r="http://schemas.openxmlformats.org/officeDocument/2006/relationships" xmlns:p="http://schemas.openxmlformats.org/presentationml/2006/main">
   <p:cSld>
     <p:spTree>
@@ -8921,238 +9573,6 @@
     <p:extLst>
       <p:ext uri="{BB962C8B-B14F-4D97-AF65-F5344CB8AC3E}">
         <p14:creationId xmlns:p14="http://schemas.microsoft.com/office/powerpoint/2010/main" val="467022224"/>
-      </p:ext>
-    </p:extLst>
-  </p:cSld>
-  <p:clrMapOvr>
-    <a:masterClrMapping/>
-  </p:clrMapOvr>
-</p:sld>
-</file>
-
-<file path=ppt/slides/slide2.xml><?xml version="1.0" encoding="utf-8"?>
-<p:sld xmlns:a="http://schemas.openxmlformats.org/drawingml/2006/main" xmlns:r="http://schemas.openxmlformats.org/officeDocument/2006/relationships" xmlns:p="http://schemas.openxmlformats.org/presentationml/2006/main">
-  <p:cSld>
-    <p:spTree>
-      <p:nvGrpSpPr>
-        <p:cNvPr id="1" name="">
-          <a:extLst>
-            <a:ext uri="{FF2B5EF4-FFF2-40B4-BE49-F238E27FC236}">
-              <a16:creationId xmlns:a16="http://schemas.microsoft.com/office/drawing/2014/main" id="{8B728E74-1723-4026-C41F-72C0E5F4B37F}"/>
-            </a:ext>
-          </a:extLst>
-        </p:cNvPr>
-        <p:cNvGrpSpPr/>
-        <p:nvPr/>
-      </p:nvGrpSpPr>
-      <p:grpSpPr>
-        <a:xfrm>
-          <a:off x="0" y="0"/>
-          <a:ext cx="0" cy="0"/>
-          <a:chOff x="0" y="0"/>
-          <a:chExt cx="0" cy="0"/>
-        </a:xfrm>
-      </p:grpSpPr>
-      <p:sp>
-        <p:nvSpPr>
-          <p:cNvPr id="3" name="Titel 2">
-            <a:extLst>
-              <a:ext uri="{FF2B5EF4-FFF2-40B4-BE49-F238E27FC236}">
-                <a16:creationId xmlns:a16="http://schemas.microsoft.com/office/drawing/2014/main" id="{16BDFD0D-1F3F-671D-BE21-271B3E00F8BC}"/>
-              </a:ext>
-            </a:extLst>
-          </p:cNvPr>
-          <p:cNvSpPr>
-            <a:spLocks noGrp="1"/>
-          </p:cNvSpPr>
-          <p:nvPr>
-            <p:ph type="title"/>
-          </p:nvPr>
-        </p:nvSpPr>
-        <p:spPr/>
-        <p:txBody>
-          <a:bodyPr/>
-          <a:lstStyle/>
-          <a:p>
-            <a:r>
-              <a:rPr lang="de-DE" sz="3200" dirty="0"/>
-              <a:t>Gliederung</a:t>
-            </a:r>
-            <a:endParaRPr lang="de-DE" dirty="0"/>
-          </a:p>
-        </p:txBody>
-      </p:sp>
-      <p:sp>
-        <p:nvSpPr>
-          <p:cNvPr id="2" name="Foliennummernplatzhalter 1">
-            <a:extLst>
-              <a:ext uri="{FF2B5EF4-FFF2-40B4-BE49-F238E27FC236}">
-                <a16:creationId xmlns:a16="http://schemas.microsoft.com/office/drawing/2014/main" id="{4A95B1DA-C9BF-39EB-E4C5-A5750A2C5C28}"/>
-              </a:ext>
-            </a:extLst>
-          </p:cNvPr>
-          <p:cNvSpPr>
-            <a:spLocks noGrp="1"/>
-          </p:cNvSpPr>
-          <p:nvPr>
-            <p:ph type="sldNum" sz="quarter" idx="10"/>
-          </p:nvPr>
-        </p:nvSpPr>
-        <p:spPr/>
-        <p:txBody>
-          <a:bodyPr/>
-          <a:lstStyle/>
-          <a:p>
-            <a:fld id="{80B4FCE6-DC73-4135-BC56-1F242D45A84C}" type="slidenum">
-              <a:rPr lang="de-DE" smtClean="0"/>
-              <a:t>2</a:t>
-            </a:fld>
-            <a:endParaRPr lang="de-DE"/>
-          </a:p>
-        </p:txBody>
-      </p:sp>
-      <p:sp>
-        <p:nvSpPr>
-          <p:cNvPr id="7" name="Fußzeilenplatzhalter 6">
-            <a:extLst>
-              <a:ext uri="{FF2B5EF4-FFF2-40B4-BE49-F238E27FC236}">
-                <a16:creationId xmlns:a16="http://schemas.microsoft.com/office/drawing/2014/main" id="{9D942951-2681-5B98-DB4E-AACA25F87A2D}"/>
-              </a:ext>
-            </a:extLst>
-          </p:cNvPr>
-          <p:cNvSpPr>
-            <a:spLocks noGrp="1"/>
-          </p:cNvSpPr>
-          <p:nvPr>
-            <p:ph type="ftr" sz="quarter" idx="11"/>
-          </p:nvPr>
-        </p:nvSpPr>
-        <p:spPr/>
-        <p:txBody>
-          <a:bodyPr/>
-          <a:lstStyle/>
-          <a:p>
-            <a:r>
-              <a:rPr lang="de-DE"/>
-              <a:t>Materialdiagnostik: Task 4</a:t>
-            </a:r>
-          </a:p>
-        </p:txBody>
-      </p:sp>
-      <p:sp>
-        <p:nvSpPr>
-          <p:cNvPr id="6" name="Datumsplatzhalter 5">
-            <a:extLst>
-              <a:ext uri="{FF2B5EF4-FFF2-40B4-BE49-F238E27FC236}">
-                <a16:creationId xmlns:a16="http://schemas.microsoft.com/office/drawing/2014/main" id="{2ADE982B-BFE5-5848-F763-33D2FC31C6DC}"/>
-              </a:ext>
-            </a:extLst>
-          </p:cNvPr>
-          <p:cNvSpPr>
-            <a:spLocks noGrp="1"/>
-          </p:cNvSpPr>
-          <p:nvPr>
-            <p:ph type="dt" sz="half" idx="12"/>
-          </p:nvPr>
-        </p:nvSpPr>
-        <p:spPr/>
-        <p:txBody>
-          <a:bodyPr/>
-          <a:lstStyle/>
-          <a:p>
-            <a:r>
-              <a:rPr lang="de-DE"/>
-              <a:t>23.07.2026</a:t>
-            </a:r>
-          </a:p>
-        </p:txBody>
-      </p:sp>
-      <p:sp>
-        <p:nvSpPr>
-          <p:cNvPr id="4" name="Textplatzhalter 3">
-            <a:extLst>
-              <a:ext uri="{FF2B5EF4-FFF2-40B4-BE49-F238E27FC236}">
-                <a16:creationId xmlns:a16="http://schemas.microsoft.com/office/drawing/2014/main" id="{1356FFF4-95A7-CF81-6FBE-506C8F181C81}"/>
-              </a:ext>
-            </a:extLst>
-          </p:cNvPr>
-          <p:cNvSpPr>
-            <a:spLocks noGrp="1"/>
-          </p:cNvSpPr>
-          <p:nvPr>
-            <p:ph type="body" sz="quarter" idx="13"/>
-          </p:nvPr>
-        </p:nvSpPr>
-        <p:spPr/>
-        <p:txBody>
-          <a:bodyPr/>
-          <a:lstStyle/>
-          <a:p>
-            <a:pPr>
-              <a:buFont typeface="Arial" panose="020B0604020202020204" pitchFamily="34" charset="0"/>
-              <a:buChar char="•"/>
-            </a:pPr>
-            <a:endParaRPr lang="de-DE" dirty="0"/>
-          </a:p>
-          <a:p>
-            <a:pPr>
-              <a:buFont typeface="Arial" panose="020B0604020202020204" pitchFamily="34" charset="0"/>
-              <a:buChar char="•"/>
-            </a:pPr>
-            <a:r>
-              <a:rPr lang="de-DE" dirty="0"/>
-              <a:t>Daten und zwei Vorverarbeitungen</a:t>
-            </a:r>
-          </a:p>
-          <a:p>
-            <a:pPr>
-              <a:buFont typeface="Arial" panose="020B0604020202020204" pitchFamily="34" charset="0"/>
-              <a:buChar char="•"/>
-            </a:pPr>
-            <a:r>
-              <a:rPr lang="de-DE" dirty="0"/>
-              <a:t>Kreuzvalidierung und Autoencoder</a:t>
-            </a:r>
-          </a:p>
-          <a:p>
-            <a:pPr>
-              <a:buFont typeface="Arial" panose="020B0604020202020204" pitchFamily="34" charset="0"/>
-              <a:buChar char="•"/>
-            </a:pPr>
-            <a:r>
-              <a:rPr lang="de-DE" dirty="0"/>
-              <a:t>Entscheidung und Metriken</a:t>
-            </a:r>
-          </a:p>
-          <a:p>
-            <a:pPr>
-              <a:buFont typeface="Arial" panose="020B0604020202020204" pitchFamily="34" charset="0"/>
-              <a:buChar char="•"/>
-            </a:pPr>
-            <a:r>
-              <a:rPr lang="de-DE" dirty="0"/>
-              <a:t>Ergebnisse und Pipelinevergleich</a:t>
-            </a:r>
-          </a:p>
-          <a:p>
-            <a:pPr>
-              <a:buFont typeface="Arial" panose="020B0604020202020204" pitchFamily="34" charset="0"/>
-              <a:buChar char="•"/>
-            </a:pPr>
-            <a:r>
-              <a:rPr lang="de-DE" dirty="0"/>
-              <a:t>Diskussion und Fazit</a:t>
-            </a:r>
-          </a:p>
-          <a:p>
-            <a:endParaRPr lang="de-DE" dirty="0"/>
-          </a:p>
-        </p:txBody>
-      </p:sp>
-    </p:spTree>
-    <p:extLst>
-      <p:ext uri="{BB962C8B-B14F-4D97-AF65-F5344CB8AC3E}">
-        <p14:creationId xmlns:p14="http://schemas.microsoft.com/office/powerpoint/2010/main" val="1606180384"/>
       </p:ext>
     </p:extLst>
   </p:cSld>

--- a/Task_4/Presentation_Task4.pptx
+++ b/Task_4/Presentation_Task4.pptx
@@ -11182,7 +11182,7 @@
             </a:pPr>
             <a:r>
               <a:rPr lang="de-DE" dirty="0"/>
-              <a:t>Sensitivität für Z05 und Spezifität für gesunde Testgruppen</a:t>
+              <a:t>Spezifität für Z05 und Sensitivität für gesunde Testgruppen</a:t>
             </a:r>
           </a:p>
           <a:p>
